--- a/deliverables/SRAM_AI_Adoption_Playbook.pptx
+++ b/deliverables/SRAM_AI_Adoption_Playbook.pptx
@@ -8403,49 +8403,13 @@
       </p:sp>
       <p:sp>
         <p:nvSpPr>
-          <p:cNvPr id="5" name="TextBox 4"/>
-          <p:cNvSpPr txBox="1"/>
-          <p:nvPr/>
-        </p:nvSpPr>
-        <p:spPr>
-          <a:xfrm>
-            <a:off x="731520" y="1234440"/>
-            <a:ext cx="10515600" cy="365760"/>
-          </a:xfrm>
-          <a:prstGeom prst="rect">
-            <a:avLst/>
-          </a:prstGeom>
-          <a:noFill/>
-        </p:spPr>
-        <p:txBody>
-          <a:bodyPr wrap="square">
-            <a:spAutoFit/>
-          </a:bodyPr>
-          <a:lstStyle/>
-          <a:p>
-            <a:pPr algn="l">
-              <a:defRPr sz="1300" b="0" i="0">
-                <a:solidFill>
-                  <a:srgbClr val="3A3A3C"/>
-                </a:solidFill>
-                <a:latin typeface="Calibri"/>
-              </a:defRPr>
-            </a:pPr>
-            <a:r>
-              <a:t>Private, Chicago-founded. Second-largest bicycle component manufacturer globally. Dominant in mountain bike. Seven brands, three channels.</a:t>
-            </a:r>
-          </a:p>
-        </p:txBody>
-      </p:sp>
-      <p:sp>
-        <p:nvSpPr>
-          <p:cNvPr id="6" name="Rounded Rectangle 5"/>
+          <p:cNvPr id="5" name="Rounded Rectangle 4"/>
           <p:cNvSpPr/>
           <p:nvPr/>
         </p:nvSpPr>
         <p:spPr>
           <a:xfrm>
-            <a:off x="731520" y="1828800"/>
+            <a:off x="731520" y="1463040"/>
             <a:ext cx="2560320" cy="1143000"/>
           </a:xfrm>
           <a:prstGeom prst="roundRect">
@@ -8486,13 +8450,85 @@
       </p:sp>
       <p:sp>
         <p:nvSpPr>
+          <p:cNvPr id="6" name="TextBox 5"/>
+          <p:cNvSpPr txBox="1"/>
+          <p:nvPr/>
+        </p:nvSpPr>
+        <p:spPr>
+          <a:xfrm>
+            <a:off x="960120" y="1600200"/>
+            <a:ext cx="2103120" cy="228600"/>
+          </a:xfrm>
+          <a:prstGeom prst="rect">
+            <a:avLst/>
+          </a:prstGeom>
+          <a:noFill/>
+        </p:spPr>
+        <p:txBody>
+          <a:bodyPr wrap="square">
+            <a:spAutoFit/>
+          </a:bodyPr>
+          <a:lstStyle/>
+          <a:p>
+            <a:pPr algn="l">
+              <a:defRPr sz="1000" b="0" i="0">
+                <a:solidFill>
+                  <a:srgbClr val="767676"/>
+                </a:solidFill>
+                <a:latin typeface="Calibri"/>
+              </a:defRPr>
+            </a:pPr>
+            <a:r>
+              <a:t>REVENUE</a:t>
+            </a:r>
+          </a:p>
+        </p:txBody>
+      </p:sp>
+      <p:sp>
+        <p:nvSpPr>
           <p:cNvPr id="7" name="TextBox 6"/>
           <p:cNvSpPr txBox="1"/>
           <p:nvPr/>
         </p:nvSpPr>
         <p:spPr>
           <a:xfrm>
-            <a:off x="960120" y="1965960"/>
+            <a:off x="960120" y="1828800"/>
+            <a:ext cx="2103120" cy="411480"/>
+          </a:xfrm>
+          <a:prstGeom prst="rect">
+            <a:avLst/>
+          </a:prstGeom>
+          <a:noFill/>
+        </p:spPr>
+        <p:txBody>
+          <a:bodyPr wrap="square">
+            <a:spAutoFit/>
+          </a:bodyPr>
+          <a:lstStyle/>
+          <a:p>
+            <a:pPr algn="l">
+              <a:defRPr sz="2600" b="1" i="0">
+                <a:solidFill>
+                  <a:srgbClr val="1C1C1E"/>
+                </a:solidFill>
+                <a:latin typeface="Calibri"/>
+              </a:defRPr>
+            </a:pPr>
+            <a:r>
+              <a:t>$1B+</a:t>
+            </a:r>
+          </a:p>
+        </p:txBody>
+      </p:sp>
+      <p:sp>
+        <p:nvSpPr>
+          <p:cNvPr id="8" name="TextBox 7"/>
+          <p:cNvSpPr txBox="1"/>
+          <p:nvPr/>
+        </p:nvSpPr>
+        <p:spPr>
+          <a:xfrm>
+            <a:off x="960120" y="2286000"/>
             <a:ext cx="2103120" cy="228600"/>
           </a:xfrm>
           <a:prstGeom prst="rect">
@@ -8507,7 +8543,7 @@
           <a:lstStyle/>
           <a:p>
             <a:pPr algn="l">
-              <a:defRPr sz="1000" b="0" i="0">
+              <a:defRPr sz="900" b="0" i="0">
                 <a:solidFill>
                   <a:srgbClr val="767676"/>
                 </a:solidFill>
@@ -8515,92 +8551,20 @@
               </a:defRPr>
             </a:pPr>
             <a:r>
-              <a:t>REVENUE</a:t>
-            </a:r>
-          </a:p>
-        </p:txBody>
-      </p:sp>
-      <p:sp>
-        <p:nvSpPr>
-          <p:cNvPr id="8" name="TextBox 7"/>
-          <p:cNvSpPr txBox="1"/>
-          <p:nvPr/>
-        </p:nvSpPr>
-        <p:spPr>
-          <a:xfrm>
-            <a:off x="960120" y="2194560"/>
-            <a:ext cx="2103120" cy="411480"/>
-          </a:xfrm>
-          <a:prstGeom prst="rect">
-            <a:avLst/>
-          </a:prstGeom>
-          <a:noFill/>
-        </p:spPr>
-        <p:txBody>
-          <a:bodyPr wrap="square">
-            <a:spAutoFit/>
-          </a:bodyPr>
-          <a:lstStyle/>
-          <a:p>
-            <a:pPr algn="l">
-              <a:defRPr sz="2600" b="1" i="0">
-                <a:solidFill>
-                  <a:srgbClr val="1C1C1E"/>
-                </a:solidFill>
-                <a:latin typeface="Calibri"/>
-              </a:defRPr>
-            </a:pPr>
-            <a:r>
-              <a:t>$1B+</a:t>
-            </a:r>
-          </a:p>
-        </p:txBody>
-      </p:sp>
-      <p:sp>
-        <p:nvSpPr>
-          <p:cNvPr id="9" name="TextBox 8"/>
-          <p:cNvSpPr txBox="1"/>
-          <p:nvPr/>
-        </p:nvSpPr>
-        <p:spPr>
-          <a:xfrm>
-            <a:off x="960120" y="2651760"/>
-            <a:ext cx="2103120" cy="228600"/>
-          </a:xfrm>
-          <a:prstGeom prst="rect">
-            <a:avLst/>
-          </a:prstGeom>
-          <a:noFill/>
-        </p:spPr>
-        <p:txBody>
-          <a:bodyPr wrap="square">
-            <a:spAutoFit/>
-          </a:bodyPr>
-          <a:lstStyle/>
-          <a:p>
-            <a:pPr algn="l">
-              <a:defRPr sz="900" b="0" i="0">
-                <a:solidFill>
-                  <a:srgbClr val="767676"/>
-                </a:solidFill>
-                <a:latin typeface="Calibri"/>
-              </a:defRPr>
-            </a:pPr>
-            <a:r>
-              <a:t>Private, not disclosed</a:t>
-            </a:r>
-          </a:p>
-        </p:txBody>
-      </p:sp>
-      <p:sp>
-        <p:nvSpPr>
-          <p:cNvPr id="10" name="Rounded Rectangle 9"/>
+              <a:t>Private, Chicago-founded</a:t>
+            </a:r>
+          </a:p>
+        </p:txBody>
+      </p:sp>
+      <p:sp>
+        <p:nvSpPr>
+          <p:cNvPr id="9" name="Rounded Rectangle 8"/>
           <p:cNvSpPr/>
           <p:nvPr/>
         </p:nvSpPr>
         <p:spPr>
           <a:xfrm>
-            <a:off x="3520439" y="1828800"/>
+            <a:off x="3520439" y="1463040"/>
             <a:ext cx="2560320" cy="1143000"/>
           </a:xfrm>
           <a:prstGeom prst="roundRect">
@@ -8641,13 +8605,85 @@
       </p:sp>
       <p:sp>
         <p:nvSpPr>
+          <p:cNvPr id="10" name="TextBox 9"/>
+          <p:cNvSpPr txBox="1"/>
+          <p:nvPr/>
+        </p:nvSpPr>
+        <p:spPr>
+          <a:xfrm>
+            <a:off x="3749039" y="1600200"/>
+            <a:ext cx="2103120" cy="228600"/>
+          </a:xfrm>
+          <a:prstGeom prst="rect">
+            <a:avLst/>
+          </a:prstGeom>
+          <a:noFill/>
+        </p:spPr>
+        <p:txBody>
+          <a:bodyPr wrap="square">
+            <a:spAutoFit/>
+          </a:bodyPr>
+          <a:lstStyle/>
+          <a:p>
+            <a:pPr algn="l">
+              <a:defRPr sz="1000" b="0" i="0">
+                <a:solidFill>
+                  <a:srgbClr val="767676"/>
+                </a:solidFill>
+                <a:latin typeface="Calibri"/>
+              </a:defRPr>
+            </a:pPr>
+            <a:r>
+              <a:t>BRANDS</a:t>
+            </a:r>
+          </a:p>
+        </p:txBody>
+      </p:sp>
+      <p:sp>
+        <p:nvSpPr>
           <p:cNvPr id="11" name="TextBox 10"/>
           <p:cNvSpPr txBox="1"/>
           <p:nvPr/>
         </p:nvSpPr>
         <p:spPr>
           <a:xfrm>
-            <a:off x="3749039" y="1965960"/>
+            <a:off x="3749039" y="1828800"/>
+            <a:ext cx="2103120" cy="411480"/>
+          </a:xfrm>
+          <a:prstGeom prst="rect">
+            <a:avLst/>
+          </a:prstGeom>
+          <a:noFill/>
+        </p:spPr>
+        <p:txBody>
+          <a:bodyPr wrap="square">
+            <a:spAutoFit/>
+          </a:bodyPr>
+          <a:lstStyle/>
+          <a:p>
+            <a:pPr algn="l">
+              <a:defRPr sz="2600" b="1" i="0">
+                <a:solidFill>
+                  <a:srgbClr val="1C1C1E"/>
+                </a:solidFill>
+                <a:latin typeface="Calibri"/>
+              </a:defRPr>
+            </a:pPr>
+            <a:r>
+              <a:t>7</a:t>
+            </a:r>
+          </a:p>
+        </p:txBody>
+      </p:sp>
+      <p:sp>
+        <p:nvSpPr>
+          <p:cNvPr id="12" name="TextBox 11"/>
+          <p:cNvSpPr txBox="1"/>
+          <p:nvPr/>
+        </p:nvSpPr>
+        <p:spPr>
+          <a:xfrm>
+            <a:off x="3749039" y="2286000"/>
             <a:ext cx="2103120" cy="228600"/>
           </a:xfrm>
           <a:prstGeom prst="rect">
@@ -8662,7 +8698,7 @@
           <a:lstStyle/>
           <a:p>
             <a:pPr algn="l">
-              <a:defRPr sz="1000" b="0" i="0">
+              <a:defRPr sz="900" b="0" i="0">
                 <a:solidFill>
                   <a:srgbClr val="767676"/>
                 </a:solidFill>
@@ -8670,78 +8706,6 @@
               </a:defRPr>
             </a:pPr>
             <a:r>
-              <a:t>BRANDS</a:t>
-            </a:r>
-          </a:p>
-        </p:txBody>
-      </p:sp>
-      <p:sp>
-        <p:nvSpPr>
-          <p:cNvPr id="12" name="TextBox 11"/>
-          <p:cNvSpPr txBox="1"/>
-          <p:nvPr/>
-        </p:nvSpPr>
-        <p:spPr>
-          <a:xfrm>
-            <a:off x="3749039" y="2194560"/>
-            <a:ext cx="2103120" cy="411480"/>
-          </a:xfrm>
-          <a:prstGeom prst="rect">
-            <a:avLst/>
-          </a:prstGeom>
-          <a:noFill/>
-        </p:spPr>
-        <p:txBody>
-          <a:bodyPr wrap="square">
-            <a:spAutoFit/>
-          </a:bodyPr>
-          <a:lstStyle/>
-          <a:p>
-            <a:pPr algn="l">
-              <a:defRPr sz="2600" b="1" i="0">
-                <a:solidFill>
-                  <a:srgbClr val="1C1C1E"/>
-                </a:solidFill>
-                <a:latin typeface="Calibri"/>
-              </a:defRPr>
-            </a:pPr>
-            <a:r>
-              <a:t>7</a:t>
-            </a:r>
-          </a:p>
-        </p:txBody>
-      </p:sp>
-      <p:sp>
-        <p:nvSpPr>
-          <p:cNvPr id="13" name="TextBox 12"/>
-          <p:cNvSpPr txBox="1"/>
-          <p:nvPr/>
-        </p:nvSpPr>
-        <p:spPr>
-          <a:xfrm>
-            <a:off x="3749039" y="2651760"/>
-            <a:ext cx="2103120" cy="228600"/>
-          </a:xfrm>
-          <a:prstGeom prst="rect">
-            <a:avLst/>
-          </a:prstGeom>
-          <a:noFill/>
-        </p:spPr>
-        <p:txBody>
-          <a:bodyPr wrap="square">
-            <a:spAutoFit/>
-          </a:bodyPr>
-          <a:lstStyle/>
-          <a:p>
-            <a:pPr algn="l">
-              <a:defRPr sz="900" b="0" i="0">
-                <a:solidFill>
-                  <a:srgbClr val="767676"/>
-                </a:solidFill>
-                <a:latin typeface="Calibri"/>
-              </a:defRPr>
-            </a:pPr>
-            <a:r>
               <a:t>Integrated portfolio</a:t>
             </a:r>
           </a:p>
@@ -8749,13 +8713,13 @@
       </p:sp>
       <p:sp>
         <p:nvSpPr>
-          <p:cNvPr id="14" name="Rounded Rectangle 13"/>
+          <p:cNvPr id="13" name="Rounded Rectangle 12"/>
           <p:cNvSpPr/>
           <p:nvPr/>
         </p:nvSpPr>
         <p:spPr>
           <a:xfrm>
-            <a:off x="6309359" y="1828800"/>
+            <a:off x="6309359" y="1463040"/>
             <a:ext cx="2560320" cy="1143000"/>
           </a:xfrm>
           <a:prstGeom prst="roundRect">
@@ -8796,13 +8760,85 @@
       </p:sp>
       <p:sp>
         <p:nvSpPr>
+          <p:cNvPr id="14" name="TextBox 13"/>
+          <p:cNvSpPr txBox="1"/>
+          <p:nvPr/>
+        </p:nvSpPr>
+        <p:spPr>
+          <a:xfrm>
+            <a:off x="6537959" y="1600200"/>
+            <a:ext cx="2103120" cy="228600"/>
+          </a:xfrm>
+          <a:prstGeom prst="rect">
+            <a:avLst/>
+          </a:prstGeom>
+          <a:noFill/>
+        </p:spPr>
+        <p:txBody>
+          <a:bodyPr wrap="square">
+            <a:spAutoFit/>
+          </a:bodyPr>
+          <a:lstStyle/>
+          <a:p>
+            <a:pPr algn="l">
+              <a:defRPr sz="1000" b="0" i="0">
+                <a:solidFill>
+                  <a:srgbClr val="767676"/>
+                </a:solidFill>
+                <a:latin typeface="Calibri"/>
+              </a:defRPr>
+            </a:pPr>
+            <a:r>
+              <a:t>MTB SHARE</a:t>
+            </a:r>
+          </a:p>
+        </p:txBody>
+      </p:sp>
+      <p:sp>
+        <p:nvSpPr>
           <p:cNvPr id="15" name="TextBox 14"/>
           <p:cNvSpPr txBox="1"/>
           <p:nvPr/>
         </p:nvSpPr>
         <p:spPr>
           <a:xfrm>
-            <a:off x="6537959" y="1965960"/>
+            <a:off x="6537959" y="1828800"/>
+            <a:ext cx="2103120" cy="411480"/>
+          </a:xfrm>
+          <a:prstGeom prst="rect">
+            <a:avLst/>
+          </a:prstGeom>
+          <a:noFill/>
+        </p:spPr>
+        <p:txBody>
+          <a:bodyPr wrap="square">
+            <a:spAutoFit/>
+          </a:bodyPr>
+          <a:lstStyle/>
+          <a:p>
+            <a:pPr algn="l">
+              <a:defRPr sz="2600" b="1" i="0">
+                <a:solidFill>
+                  <a:srgbClr val="1C1C1E"/>
+                </a:solidFill>
+                <a:latin typeface="Calibri"/>
+              </a:defRPr>
+            </a:pPr>
+            <a:r>
+              <a:t>#1</a:t>
+            </a:r>
+          </a:p>
+        </p:txBody>
+      </p:sp>
+      <p:sp>
+        <p:nvSpPr>
+          <p:cNvPr id="16" name="TextBox 15"/>
+          <p:cNvSpPr txBox="1"/>
+          <p:nvPr/>
+        </p:nvSpPr>
+        <p:spPr>
+          <a:xfrm>
+            <a:off x="6537959" y="2286000"/>
             <a:ext cx="2103120" cy="228600"/>
           </a:xfrm>
           <a:prstGeom prst="rect">
@@ -8817,7 +8853,7 @@
           <a:lstStyle/>
           <a:p>
             <a:pPr algn="l">
-              <a:defRPr sz="1000" b="0" i="0">
+              <a:defRPr sz="900" b="0" i="0">
                 <a:solidFill>
                   <a:srgbClr val="767676"/>
                 </a:solidFill>
@@ -8825,92 +8861,20 @@
               </a:defRPr>
             </a:pPr>
             <a:r>
-              <a:t>MTB SHARE</a:t>
-            </a:r>
-          </a:p>
-        </p:txBody>
-      </p:sp>
-      <p:sp>
-        <p:nvSpPr>
-          <p:cNvPr id="16" name="TextBox 15"/>
-          <p:cNvSpPr txBox="1"/>
-          <p:nvPr/>
-        </p:nvSpPr>
-        <p:spPr>
-          <a:xfrm>
-            <a:off x="6537959" y="2194560"/>
-            <a:ext cx="2103120" cy="411480"/>
-          </a:xfrm>
-          <a:prstGeom prst="rect">
-            <a:avLst/>
-          </a:prstGeom>
-          <a:noFill/>
-        </p:spPr>
-        <p:txBody>
-          <a:bodyPr wrap="square">
-            <a:spAutoFit/>
-          </a:bodyPr>
-          <a:lstStyle/>
-          <a:p>
-            <a:pPr algn="l">
-              <a:defRPr sz="2600" b="1" i="0">
-                <a:solidFill>
-                  <a:srgbClr val="1C1C1E"/>
-                </a:solidFill>
-                <a:latin typeface="Calibri"/>
-              </a:defRPr>
-            </a:pPr>
-            <a:r>
-              <a:t>#1</a:t>
-            </a:r>
-          </a:p>
-        </p:txBody>
-      </p:sp>
-      <p:sp>
-        <p:nvSpPr>
-          <p:cNvPr id="17" name="TextBox 16"/>
-          <p:cNvSpPr txBox="1"/>
-          <p:nvPr/>
-        </p:nvSpPr>
-        <p:spPr>
-          <a:xfrm>
-            <a:off x="6537959" y="2651760"/>
-            <a:ext cx="2103120" cy="228600"/>
-          </a:xfrm>
-          <a:prstGeom prst="rect">
-            <a:avLst/>
-          </a:prstGeom>
-          <a:noFill/>
-        </p:spPr>
-        <p:txBody>
-          <a:bodyPr wrap="square">
-            <a:spAutoFit/>
-          </a:bodyPr>
-          <a:lstStyle/>
-          <a:p>
-            <a:pPr algn="l">
-              <a:defRPr sz="900" b="0" i="0">
-                <a:solidFill>
-                  <a:srgbClr val="767676"/>
-                </a:solidFill>
-                <a:latin typeface="Calibri"/>
-              </a:defRPr>
-            </a:pPr>
-            <a:r>
-              <a:t>Market leader</a:t>
-            </a:r>
-          </a:p>
-        </p:txBody>
-      </p:sp>
-      <p:sp>
-        <p:nvSpPr>
-          <p:cNvPr id="18" name="Rounded Rectangle 17"/>
+              <a:t>Market leader globally</a:t>
+            </a:r>
+          </a:p>
+        </p:txBody>
+      </p:sp>
+      <p:sp>
+        <p:nvSpPr>
+          <p:cNvPr id="17" name="Rounded Rectangle 16"/>
           <p:cNvSpPr/>
           <p:nvPr/>
         </p:nvSpPr>
         <p:spPr>
           <a:xfrm>
-            <a:off x="9098280" y="1828800"/>
+            <a:off x="9098280" y="1463040"/>
             <a:ext cx="2560320" cy="1143000"/>
           </a:xfrm>
           <a:prstGeom prst="roundRect">
@@ -8951,13 +8915,85 @@
       </p:sp>
       <p:sp>
         <p:nvSpPr>
+          <p:cNvPr id="18" name="TextBox 17"/>
+          <p:cNvSpPr txBox="1"/>
+          <p:nvPr/>
+        </p:nvSpPr>
+        <p:spPr>
+          <a:xfrm>
+            <a:off x="9326880" y="1600200"/>
+            <a:ext cx="2103120" cy="228600"/>
+          </a:xfrm>
+          <a:prstGeom prst="rect">
+            <a:avLst/>
+          </a:prstGeom>
+          <a:noFill/>
+        </p:spPr>
+        <p:txBody>
+          <a:bodyPr wrap="square">
+            <a:spAutoFit/>
+          </a:bodyPr>
+          <a:lstStyle/>
+          <a:p>
+            <a:pPr algn="l">
+              <a:defRPr sz="1000" b="0" i="0">
+                <a:solidFill>
+                  <a:srgbClr val="767676"/>
+                </a:solidFill>
+                <a:latin typeface="Calibri"/>
+              </a:defRPr>
+            </a:pPr>
+            <a:r>
+              <a:t>TRUSTPILOT</a:t>
+            </a:r>
+          </a:p>
+        </p:txBody>
+      </p:sp>
+      <p:sp>
+        <p:nvSpPr>
           <p:cNvPr id="19" name="TextBox 18"/>
           <p:cNvSpPr txBox="1"/>
           <p:nvPr/>
         </p:nvSpPr>
         <p:spPr>
           <a:xfrm>
-            <a:off x="9326880" y="1965960"/>
+            <a:off x="9326880" y="1828800"/>
+            <a:ext cx="2103120" cy="411480"/>
+          </a:xfrm>
+          <a:prstGeom prst="rect">
+            <a:avLst/>
+          </a:prstGeom>
+          <a:noFill/>
+        </p:spPr>
+        <p:txBody>
+          <a:bodyPr wrap="square">
+            <a:spAutoFit/>
+          </a:bodyPr>
+          <a:lstStyle/>
+          <a:p>
+            <a:pPr algn="l">
+              <a:defRPr sz="2600" b="1" i="0">
+                <a:solidFill>
+                  <a:srgbClr val="C43B4F"/>
+                </a:solidFill>
+                <a:latin typeface="Calibri"/>
+              </a:defRPr>
+            </a:pPr>
+            <a:r>
+              <a:t>1.6 / 5.0</a:t>
+            </a:r>
+          </a:p>
+        </p:txBody>
+      </p:sp>
+      <p:sp>
+        <p:nvSpPr>
+          <p:cNvPr id="20" name="TextBox 19"/>
+          <p:cNvSpPr txBox="1"/>
+          <p:nvPr/>
+        </p:nvSpPr>
+        <p:spPr>
+          <a:xfrm>
+            <a:off x="9326880" y="2286000"/>
             <a:ext cx="2103120" cy="228600"/>
           </a:xfrm>
           <a:prstGeom prst="rect">
@@ -8972,7 +9008,7 @@
           <a:lstStyle/>
           <a:p>
             <a:pPr algn="l">
-              <a:defRPr sz="1000" b="0" i="0">
+              <a:defRPr sz="900" b="0" i="0">
                 <a:solidFill>
                   <a:srgbClr val="767676"/>
                 </a:solidFill>
@@ -8980,78 +9016,6 @@
               </a:defRPr>
             </a:pPr>
             <a:r>
-              <a:t>TRUSTPILOT</a:t>
-            </a:r>
-          </a:p>
-        </p:txBody>
-      </p:sp>
-      <p:sp>
-        <p:nvSpPr>
-          <p:cNvPr id="20" name="TextBox 19"/>
-          <p:cNvSpPr txBox="1"/>
-          <p:nvPr/>
-        </p:nvSpPr>
-        <p:spPr>
-          <a:xfrm>
-            <a:off x="9326880" y="2194560"/>
-            <a:ext cx="2103120" cy="411480"/>
-          </a:xfrm>
-          <a:prstGeom prst="rect">
-            <a:avLst/>
-          </a:prstGeom>
-          <a:noFill/>
-        </p:spPr>
-        <p:txBody>
-          <a:bodyPr wrap="square">
-            <a:spAutoFit/>
-          </a:bodyPr>
-          <a:lstStyle/>
-          <a:p>
-            <a:pPr algn="l">
-              <a:defRPr sz="2600" b="1" i="0">
-                <a:solidFill>
-                  <a:srgbClr val="C43B4F"/>
-                </a:solidFill>
-                <a:latin typeface="Calibri"/>
-              </a:defRPr>
-            </a:pPr>
-            <a:r>
-              <a:t>1.6 / 5.0</a:t>
-            </a:r>
-          </a:p>
-        </p:txBody>
-      </p:sp>
-      <p:sp>
-        <p:nvSpPr>
-          <p:cNvPr id="21" name="TextBox 20"/>
-          <p:cNvSpPr txBox="1"/>
-          <p:nvPr/>
-        </p:nvSpPr>
-        <p:spPr>
-          <a:xfrm>
-            <a:off x="9326880" y="2651760"/>
-            <a:ext cx="2103120" cy="228600"/>
-          </a:xfrm>
-          <a:prstGeom prst="rect">
-            <a:avLst/>
-          </a:prstGeom>
-          <a:noFill/>
-        </p:spPr>
-        <p:txBody>
-          <a:bodyPr wrap="square">
-            <a:spAutoFit/>
-          </a:bodyPr>
-          <a:lstStyle/>
-          <a:p>
-            <a:pPr algn="l">
-              <a:defRPr sz="900" b="0" i="0">
-                <a:solidFill>
-                  <a:srgbClr val="767676"/>
-                </a:solidFill>
-                <a:latin typeface="Calibri"/>
-              </a:defRPr>
-            </a:pPr>
-            <a:r>
               <a:t>Support-driven churn risk</a:t>
             </a:r>
           </a:p>
@@ -9059,50 +9023,14 @@
       </p:sp>
       <p:sp>
         <p:nvSpPr>
-          <p:cNvPr id="22" name="TextBox 21"/>
-          <p:cNvSpPr txBox="1"/>
-          <p:nvPr/>
-        </p:nvSpPr>
-        <p:spPr>
-          <a:xfrm>
-            <a:off x="731520" y="3246120"/>
-            <a:ext cx="10515600" cy="274320"/>
-          </a:xfrm>
-          <a:prstGeom prst="rect">
-            <a:avLst/>
-          </a:prstGeom>
-          <a:noFill/>
-        </p:spPr>
-        <p:txBody>
-          <a:bodyPr wrap="square">
-            <a:spAutoFit/>
-          </a:bodyPr>
-          <a:lstStyle/>
-          <a:p>
-            <a:pPr algn="l">
-              <a:defRPr sz="1600" b="1" i="0">
-                <a:solidFill>
-                  <a:srgbClr val="1C1C1E"/>
-                </a:solidFill>
-                <a:latin typeface="Calibri"/>
-              </a:defRPr>
-            </a:pPr>
-            <a:r>
-              <a:t>The Connected Ecosystem (no competitor matches this breadth)</a:t>
-            </a:r>
-          </a:p>
-        </p:txBody>
-      </p:sp>
-      <p:sp>
-        <p:nvSpPr>
-          <p:cNvPr id="23" name="Rounded Rectangle 22"/>
+          <p:cNvPr id="21" name="Rounded Rectangle 20"/>
           <p:cNvSpPr/>
           <p:nvPr/>
         </p:nvSpPr>
         <p:spPr>
           <a:xfrm>
-            <a:off x="731520" y="3657600"/>
-            <a:ext cx="1691640" cy="1051560"/>
+            <a:off x="731520" y="3017520"/>
+            <a:ext cx="1691640" cy="777240"/>
           </a:xfrm>
           <a:prstGeom prst="roundRect">
             <a:avLst>
@@ -9142,13 +9070,13 @@
       </p:sp>
       <p:sp>
         <p:nvSpPr>
-          <p:cNvPr id="24" name="TextBox 23"/>
-          <p:cNvSpPr txBox="1"/>
-          <p:nvPr/>
-        </p:nvSpPr>
-        <p:spPr>
-          <a:xfrm>
-            <a:off x="868680" y="3730752"/>
+          <p:cNvPr id="22" name="TextBox 21"/>
+          <p:cNvSpPr txBox="1"/>
+          <p:nvPr/>
+        </p:nvSpPr>
+        <p:spPr>
+          <a:xfrm>
+            <a:off x="868680" y="3090672"/>
             <a:ext cx="1417320" cy="228600"/>
           </a:xfrm>
           <a:prstGeom prst="rect">
@@ -9163,7 +9091,7 @@
           <a:lstStyle/>
           <a:p>
             <a:pPr algn="l">
-              <a:defRPr sz="1100" b="1" i="0">
+              <a:defRPr sz="1200" b="1" i="0">
                 <a:solidFill>
                   <a:srgbClr val="1C1C1E"/>
                 </a:solidFill>
@@ -9178,14 +9106,14 @@
       </p:sp>
       <p:sp>
         <p:nvSpPr>
-          <p:cNvPr id="25" name="TextBox 24"/>
-          <p:cNvSpPr txBox="1"/>
-          <p:nvPr/>
-        </p:nvSpPr>
-        <p:spPr>
-          <a:xfrm>
-            <a:off x="868680" y="4023360"/>
-            <a:ext cx="1417320" cy="548640"/>
+          <p:cNvPr id="23" name="TextBox 22"/>
+          <p:cNvSpPr txBox="1"/>
+          <p:nvPr/>
+        </p:nvSpPr>
+        <p:spPr>
+          <a:xfrm>
+            <a:off x="868680" y="3383280"/>
+            <a:ext cx="1417320" cy="320040"/>
           </a:xfrm>
           <a:prstGeom prst="rect">
             <a:avLst/>
@@ -9207,24 +9135,20 @@
               </a:defRPr>
             </a:pPr>
             <a:r>
-              <a:t>Drivetrains</a:t>
-            </a:r>
-            <a:br/>
-            <a:r>
-              <a:t>+ Braking</a:t>
-            </a:r>
-          </a:p>
-        </p:txBody>
-      </p:sp>
-      <p:sp>
-        <p:nvSpPr>
-          <p:cNvPr id="26" name="Isosceles Triangle 25"/>
+              <a:t>Drivetrains + Braking</a:t>
+            </a:r>
+          </a:p>
+        </p:txBody>
+      </p:sp>
+      <p:sp>
+        <p:nvSpPr>
+          <p:cNvPr id="24" name="Isosceles Triangle 23"/>
           <p:cNvSpPr/>
           <p:nvPr/>
         </p:nvSpPr>
         <p:spPr>
           <a:xfrm rot="5400000">
-            <a:off x="2441448" y="4069080"/>
+            <a:off x="2441448" y="3291840"/>
             <a:ext cx="274320" cy="274320"/>
           </a:xfrm>
           <a:prstGeom prst="triangle">
@@ -9261,14 +9185,14 @@
       </p:sp>
       <p:sp>
         <p:nvSpPr>
-          <p:cNvPr id="27" name="Rounded Rectangle 26"/>
+          <p:cNvPr id="25" name="Rounded Rectangle 24"/>
           <p:cNvSpPr/>
           <p:nvPr/>
         </p:nvSpPr>
         <p:spPr>
           <a:xfrm>
-            <a:off x="2606039" y="3657600"/>
-            <a:ext cx="1691640" cy="1051560"/>
+            <a:off x="2606039" y="3017520"/>
+            <a:ext cx="1691640" cy="777240"/>
           </a:xfrm>
           <a:prstGeom prst="roundRect">
             <a:avLst>
@@ -9308,13 +9232,13 @@
       </p:sp>
       <p:sp>
         <p:nvSpPr>
-          <p:cNvPr id="28" name="TextBox 27"/>
-          <p:cNvSpPr txBox="1"/>
-          <p:nvPr/>
-        </p:nvSpPr>
-        <p:spPr>
-          <a:xfrm>
-            <a:off x="2743199" y="3730752"/>
+          <p:cNvPr id="26" name="TextBox 25"/>
+          <p:cNvSpPr txBox="1"/>
+          <p:nvPr/>
+        </p:nvSpPr>
+        <p:spPr>
+          <a:xfrm>
+            <a:off x="2743199" y="3090672"/>
             <a:ext cx="1417320" cy="228600"/>
           </a:xfrm>
           <a:prstGeom prst="rect">
@@ -9329,7 +9253,7 @@
           <a:lstStyle/>
           <a:p>
             <a:pPr algn="l">
-              <a:defRPr sz="1100" b="1" i="0">
+              <a:defRPr sz="1200" b="1" i="0">
                 <a:solidFill>
                   <a:srgbClr val="1C1C1E"/>
                 </a:solidFill>
@@ -9344,14 +9268,14 @@
       </p:sp>
       <p:sp>
         <p:nvSpPr>
-          <p:cNvPr id="29" name="TextBox 28"/>
-          <p:cNvSpPr txBox="1"/>
-          <p:nvPr/>
-        </p:nvSpPr>
-        <p:spPr>
-          <a:xfrm>
-            <a:off x="2743199" y="4023360"/>
-            <a:ext cx="1417320" cy="548640"/>
+          <p:cNvPr id="27" name="TextBox 26"/>
+          <p:cNvSpPr txBox="1"/>
+          <p:nvPr/>
+        </p:nvSpPr>
+        <p:spPr>
+          <a:xfrm>
+            <a:off x="2743199" y="3383280"/>
+            <a:ext cx="1417320" cy="320040"/>
           </a:xfrm>
           <a:prstGeom prst="rect">
             <a:avLst/>
@@ -9380,13 +9304,13 @@
       </p:sp>
       <p:sp>
         <p:nvSpPr>
-          <p:cNvPr id="30" name="Isosceles Triangle 29"/>
+          <p:cNvPr id="28" name="Isosceles Triangle 27"/>
           <p:cNvSpPr/>
           <p:nvPr/>
         </p:nvSpPr>
         <p:spPr>
           <a:xfrm rot="5400000">
-            <a:off x="4315967" y="4069080"/>
+            <a:off x="4315967" y="3291840"/>
             <a:ext cx="274320" cy="274320"/>
           </a:xfrm>
           <a:prstGeom prst="triangle">
@@ -9423,14 +9347,14 @@
       </p:sp>
       <p:sp>
         <p:nvSpPr>
-          <p:cNvPr id="31" name="Rounded Rectangle 30"/>
+          <p:cNvPr id="29" name="Rounded Rectangle 28"/>
           <p:cNvSpPr/>
           <p:nvPr/>
         </p:nvSpPr>
         <p:spPr>
           <a:xfrm>
-            <a:off x="4480559" y="3657600"/>
-            <a:ext cx="1691640" cy="1051560"/>
+            <a:off x="4480559" y="3017520"/>
+            <a:ext cx="1691640" cy="777240"/>
           </a:xfrm>
           <a:prstGeom prst="roundRect">
             <a:avLst>
@@ -9470,13 +9394,13 @@
       </p:sp>
       <p:sp>
         <p:nvSpPr>
-          <p:cNvPr id="32" name="TextBox 31"/>
-          <p:cNvSpPr txBox="1"/>
-          <p:nvPr/>
-        </p:nvSpPr>
-        <p:spPr>
-          <a:xfrm>
-            <a:off x="4617719" y="3730752"/>
+          <p:cNvPr id="30" name="TextBox 29"/>
+          <p:cNvSpPr txBox="1"/>
+          <p:nvPr/>
+        </p:nvSpPr>
+        <p:spPr>
+          <a:xfrm>
+            <a:off x="4617719" y="3090672"/>
             <a:ext cx="1417320" cy="228600"/>
           </a:xfrm>
           <a:prstGeom prst="rect">
@@ -9491,7 +9415,7 @@
           <a:lstStyle/>
           <a:p>
             <a:pPr algn="l">
-              <a:defRPr sz="1100" b="1" i="0">
+              <a:defRPr sz="1200" b="1" i="0">
                 <a:solidFill>
                   <a:srgbClr val="1C1C1E"/>
                 </a:solidFill>
@@ -9506,14 +9430,14 @@
       </p:sp>
       <p:sp>
         <p:nvSpPr>
-          <p:cNvPr id="33" name="TextBox 32"/>
-          <p:cNvSpPr txBox="1"/>
-          <p:nvPr/>
-        </p:nvSpPr>
-        <p:spPr>
-          <a:xfrm>
-            <a:off x="4617719" y="4023360"/>
-            <a:ext cx="1417320" cy="548640"/>
+          <p:cNvPr id="31" name="TextBox 30"/>
+          <p:cNvSpPr txBox="1"/>
+          <p:nvPr/>
+        </p:nvSpPr>
+        <p:spPr>
+          <a:xfrm>
+            <a:off x="4617719" y="3383280"/>
+            <a:ext cx="1417320" cy="320040"/>
           </a:xfrm>
           <a:prstGeom prst="rect">
             <a:avLst/>
@@ -9535,24 +9459,20 @@
               </a:defRPr>
             </a:pPr>
             <a:r>
-              <a:t>Wheels +</a:t>
-            </a:r>
-            <a:br/>
-            <a:r>
-              <a:t>Cockpit</a:t>
-            </a:r>
-          </a:p>
-        </p:txBody>
-      </p:sp>
-      <p:sp>
-        <p:nvSpPr>
-          <p:cNvPr id="34" name="Isosceles Triangle 33"/>
+              <a:t>Wheels + Cockpit</a:t>
+            </a:r>
+          </a:p>
+        </p:txBody>
+      </p:sp>
+      <p:sp>
+        <p:nvSpPr>
+          <p:cNvPr id="32" name="Isosceles Triangle 31"/>
           <p:cNvSpPr/>
           <p:nvPr/>
         </p:nvSpPr>
         <p:spPr>
           <a:xfrm rot="5400000">
-            <a:off x="6190487" y="4069080"/>
+            <a:off x="6190487" y="3291840"/>
             <a:ext cx="274320" cy="274320"/>
           </a:xfrm>
           <a:prstGeom prst="triangle">
@@ -9589,14 +9509,14 @@
       </p:sp>
       <p:sp>
         <p:nvSpPr>
-          <p:cNvPr id="35" name="Rounded Rectangle 34"/>
+          <p:cNvPr id="33" name="Rounded Rectangle 32"/>
           <p:cNvSpPr/>
           <p:nvPr/>
         </p:nvSpPr>
         <p:spPr>
           <a:xfrm>
-            <a:off x="6355079" y="3657600"/>
-            <a:ext cx="1691640" cy="1051560"/>
+            <a:off x="6355079" y="3017520"/>
+            <a:ext cx="1691640" cy="777240"/>
           </a:xfrm>
           <a:prstGeom prst="roundRect">
             <a:avLst>
@@ -9636,13 +9556,13 @@
       </p:sp>
       <p:sp>
         <p:nvSpPr>
-          <p:cNvPr id="36" name="TextBox 35"/>
-          <p:cNvSpPr txBox="1"/>
-          <p:nvPr/>
-        </p:nvSpPr>
-        <p:spPr>
-          <a:xfrm>
-            <a:off x="6492239" y="3730752"/>
+          <p:cNvPr id="34" name="TextBox 33"/>
+          <p:cNvSpPr txBox="1"/>
+          <p:nvPr/>
+        </p:nvSpPr>
+        <p:spPr>
+          <a:xfrm>
+            <a:off x="6492239" y="3090672"/>
             <a:ext cx="1417320" cy="228600"/>
           </a:xfrm>
           <a:prstGeom prst="rect">
@@ -9657,7 +9577,7 @@
           <a:lstStyle/>
           <a:p>
             <a:pPr algn="l">
-              <a:defRPr sz="1100" b="1" i="0">
+              <a:defRPr sz="1200" b="1" i="0">
                 <a:solidFill>
                   <a:srgbClr val="1C1C1E"/>
                 </a:solidFill>
@@ -9672,14 +9592,14 @@
       </p:sp>
       <p:sp>
         <p:nvSpPr>
-          <p:cNvPr id="37" name="TextBox 36"/>
-          <p:cNvSpPr txBox="1"/>
-          <p:nvPr/>
-        </p:nvSpPr>
-        <p:spPr>
-          <a:xfrm>
-            <a:off x="6492239" y="4023360"/>
-            <a:ext cx="1417320" cy="548640"/>
+          <p:cNvPr id="35" name="TextBox 34"/>
+          <p:cNvSpPr txBox="1"/>
+          <p:nvPr/>
+        </p:nvSpPr>
+        <p:spPr>
+          <a:xfrm>
+            <a:off x="6492239" y="3383280"/>
+            <a:ext cx="1417320" cy="320040"/>
           </a:xfrm>
           <a:prstGeom prst="rect">
             <a:avLst/>
@@ -9701,24 +9621,20 @@
               </a:defRPr>
             </a:pPr>
             <a:r>
-              <a:t>Power</a:t>
-            </a:r>
-            <a:br/>
-            <a:r>
-              <a:t>Meters</a:t>
-            </a:r>
-          </a:p>
-        </p:txBody>
-      </p:sp>
-      <p:sp>
-        <p:nvSpPr>
-          <p:cNvPr id="38" name="Isosceles Triangle 37"/>
+              <a:t>Power Meters</a:t>
+            </a:r>
+          </a:p>
+        </p:txBody>
+      </p:sp>
+      <p:sp>
+        <p:nvSpPr>
+          <p:cNvPr id="36" name="Isosceles Triangle 35"/>
           <p:cNvSpPr/>
           <p:nvPr/>
         </p:nvSpPr>
         <p:spPr>
           <a:xfrm rot="5400000">
-            <a:off x="8065007" y="4069080"/>
+            <a:off x="8065007" y="3291840"/>
             <a:ext cx="274320" cy="274320"/>
           </a:xfrm>
           <a:prstGeom prst="triangle">
@@ -9755,14 +9671,14 @@
       </p:sp>
       <p:sp>
         <p:nvSpPr>
-          <p:cNvPr id="39" name="Rounded Rectangle 38"/>
+          <p:cNvPr id="37" name="Rounded Rectangle 36"/>
           <p:cNvSpPr/>
           <p:nvPr/>
         </p:nvSpPr>
         <p:spPr>
           <a:xfrm>
-            <a:off x="8229600" y="3657600"/>
-            <a:ext cx="1691640" cy="1051560"/>
+            <a:off x="8229600" y="3017520"/>
+            <a:ext cx="1691640" cy="777240"/>
           </a:xfrm>
           <a:prstGeom prst="roundRect">
             <a:avLst>
@@ -9802,13 +9718,13 @@
       </p:sp>
       <p:sp>
         <p:nvSpPr>
-          <p:cNvPr id="40" name="TextBox 39"/>
-          <p:cNvSpPr txBox="1"/>
-          <p:nvPr/>
-        </p:nvSpPr>
-        <p:spPr>
-          <a:xfrm>
-            <a:off x="8366760" y="3730752"/>
+          <p:cNvPr id="38" name="TextBox 37"/>
+          <p:cNvSpPr txBox="1"/>
+          <p:nvPr/>
+        </p:nvSpPr>
+        <p:spPr>
+          <a:xfrm>
+            <a:off x="8366760" y="3090672"/>
             <a:ext cx="1417320" cy="228600"/>
           </a:xfrm>
           <a:prstGeom prst="rect">
@@ -9823,7 +9739,7 @@
           <a:lstStyle/>
           <a:p>
             <a:pPr algn="l">
-              <a:defRPr sz="1100" b="1" i="0">
+              <a:defRPr sz="1200" b="1" i="0">
                 <a:solidFill>
                   <a:srgbClr val="1C1C1E"/>
                 </a:solidFill>
@@ -9838,14 +9754,14 @@
       </p:sp>
       <p:sp>
         <p:nvSpPr>
-          <p:cNvPr id="41" name="TextBox 40"/>
-          <p:cNvSpPr txBox="1"/>
-          <p:nvPr/>
-        </p:nvSpPr>
-        <p:spPr>
-          <a:xfrm>
-            <a:off x="8366760" y="4023360"/>
-            <a:ext cx="1417320" cy="548640"/>
+          <p:cNvPr id="39" name="TextBox 38"/>
+          <p:cNvSpPr txBox="1"/>
+          <p:nvPr/>
+        </p:nvSpPr>
+        <p:spPr>
+          <a:xfrm>
+            <a:off x="8366760" y="3383280"/>
+            <a:ext cx="1417320" cy="320040"/>
           </a:xfrm>
           <a:prstGeom prst="rect">
             <a:avLst/>
@@ -9867,24 +9783,20 @@
               </a:defRPr>
             </a:pPr>
             <a:r>
-              <a:t>Cycling</a:t>
-            </a:r>
-            <a:br/>
-            <a:r>
-              <a:t>Computer</a:t>
-            </a:r>
-          </a:p>
-        </p:txBody>
-      </p:sp>
-      <p:sp>
-        <p:nvSpPr>
-          <p:cNvPr id="42" name="Isosceles Triangle 41"/>
+              <a:t>Cycling Computer</a:t>
+            </a:r>
+          </a:p>
+        </p:txBody>
+      </p:sp>
+      <p:sp>
+        <p:nvSpPr>
+          <p:cNvPr id="40" name="Isosceles Triangle 39"/>
           <p:cNvSpPr/>
           <p:nvPr/>
         </p:nvSpPr>
         <p:spPr>
           <a:xfrm rot="5400000">
-            <a:off x="9939528" y="4069080"/>
+            <a:off x="9939528" y="3291840"/>
             <a:ext cx="274320" cy="274320"/>
           </a:xfrm>
           <a:prstGeom prst="triangle">
@@ -9921,14 +9833,14 @@
       </p:sp>
       <p:sp>
         <p:nvSpPr>
-          <p:cNvPr id="43" name="Rounded Rectangle 42"/>
+          <p:cNvPr id="41" name="Rounded Rectangle 40"/>
           <p:cNvSpPr/>
           <p:nvPr/>
         </p:nvSpPr>
         <p:spPr>
           <a:xfrm>
-            <a:off x="10104120" y="3657600"/>
-            <a:ext cx="1691640" cy="1051560"/>
+            <a:off x="10104120" y="3017520"/>
+            <a:ext cx="1691640" cy="777240"/>
           </a:xfrm>
           <a:prstGeom prst="roundRect">
             <a:avLst>
@@ -9968,13 +9880,13 @@
       </p:sp>
       <p:sp>
         <p:nvSpPr>
-          <p:cNvPr id="44" name="TextBox 43"/>
-          <p:cNvSpPr txBox="1"/>
-          <p:nvPr/>
-        </p:nvSpPr>
-        <p:spPr>
-          <a:xfrm>
-            <a:off x="10241280" y="3730752"/>
+          <p:cNvPr id="42" name="TextBox 41"/>
+          <p:cNvSpPr txBox="1"/>
+          <p:nvPr/>
+        </p:nvSpPr>
+        <p:spPr>
+          <a:xfrm>
+            <a:off x="10241280" y="3090672"/>
             <a:ext cx="1417320" cy="228600"/>
           </a:xfrm>
           <a:prstGeom prst="rect">
@@ -9989,7 +9901,7 @@
           <a:lstStyle/>
           <a:p>
             <a:pPr algn="l">
-              <a:defRPr sz="1100" b="1" i="0">
+              <a:defRPr sz="1200" b="1" i="0">
                 <a:solidFill>
                   <a:srgbClr val="1C1C1E"/>
                 </a:solidFill>
@@ -10004,14 +9916,14 @@
       </p:sp>
       <p:sp>
         <p:nvSpPr>
-          <p:cNvPr id="45" name="TextBox 44"/>
-          <p:cNvSpPr txBox="1"/>
-          <p:nvPr/>
-        </p:nvSpPr>
-        <p:spPr>
-          <a:xfrm>
-            <a:off x="10241280" y="4023360"/>
-            <a:ext cx="1417320" cy="548640"/>
+          <p:cNvPr id="43" name="TextBox 42"/>
+          <p:cNvSpPr txBox="1"/>
+          <p:nvPr/>
+        </p:nvSpPr>
+        <p:spPr>
+          <a:xfrm>
+            <a:off x="10241280" y="3383280"/>
+            <a:ext cx="1417320" cy="320040"/>
           </a:xfrm>
           <a:prstGeom prst="rect">
             <a:avLst/>
@@ -10040,13 +9952,13 @@
       </p:sp>
       <p:sp>
         <p:nvSpPr>
-          <p:cNvPr id="46" name="Rounded Rectangle 45"/>
+          <p:cNvPr id="44" name="Rounded Rectangle 43"/>
           <p:cNvSpPr/>
           <p:nvPr/>
         </p:nvSpPr>
         <p:spPr>
           <a:xfrm>
-            <a:off x="731520" y="4892040"/>
+            <a:off x="731520" y="4114800"/>
             <a:ext cx="11064240" cy="320040"/>
           </a:xfrm>
           <a:prstGeom prst="roundRect">
@@ -10087,13 +9999,13 @@
       </p:sp>
       <p:sp>
         <p:nvSpPr>
-          <p:cNvPr id="47" name="TextBox 46"/>
-          <p:cNvSpPr txBox="1"/>
-          <p:nvPr/>
-        </p:nvSpPr>
-        <p:spPr>
-          <a:xfrm>
-            <a:off x="1097280" y="4910328"/>
+          <p:cNvPr id="45" name="TextBox 44"/>
+          <p:cNvSpPr txBox="1"/>
+          <p:nvPr/>
+        </p:nvSpPr>
+        <p:spPr>
+          <a:xfrm>
+            <a:off x="1097280" y="4133087"/>
             <a:ext cx="10332720" cy="274320"/>
           </a:xfrm>
           <a:prstGeom prst="rect">
@@ -10116,20 +10028,20 @@
               </a:defRPr>
             </a:pPr>
             <a:r>
-              <a:t>AXS Wireless Ecosystem  |  All connected, all generating data, all controlled through one platform</a:t>
-            </a:r>
-          </a:p>
-        </p:txBody>
-      </p:sp>
-      <p:sp>
-        <p:nvSpPr>
-          <p:cNvPr id="48" name="Rounded Rectangle 47"/>
+              <a:t>AXS Wireless Ecosystem  |  All connected, all generating data</a:t>
+            </a:r>
+          </a:p>
+        </p:txBody>
+      </p:sp>
+      <p:sp>
+        <p:nvSpPr>
+          <p:cNvPr id="46" name="Rounded Rectangle 45"/>
           <p:cNvSpPr/>
           <p:nvPr/>
         </p:nvSpPr>
         <p:spPr>
           <a:xfrm>
-            <a:off x="731520" y="5394960"/>
+            <a:off x="731520" y="4846320"/>
             <a:ext cx="11064240" cy="777240"/>
           </a:xfrm>
           <a:prstGeom prst="roundRect">
@@ -10170,13 +10082,13 @@
       </p:sp>
       <p:sp>
         <p:nvSpPr>
-          <p:cNvPr id="49" name="Rectangle 48"/>
+          <p:cNvPr id="47" name="Rectangle 46"/>
           <p:cNvSpPr/>
           <p:nvPr/>
         </p:nvSpPr>
         <p:spPr>
           <a:xfrm>
-            <a:off x="731520" y="5394960"/>
+            <a:off x="731520" y="4846320"/>
             <a:ext cx="50800" cy="777240"/>
           </a:xfrm>
           <a:prstGeom prst="rect">
@@ -10213,79 +10125,79 @@
       </p:sp>
       <p:sp>
         <p:nvSpPr>
+          <p:cNvPr id="48" name="TextBox 47"/>
+          <p:cNvSpPr txBox="1"/>
+          <p:nvPr/>
+        </p:nvSpPr>
+        <p:spPr>
+          <a:xfrm>
+            <a:off x="1051560" y="4937760"/>
+            <a:ext cx="10515600" cy="411480"/>
+          </a:xfrm>
+          <a:prstGeom prst="rect">
+            <a:avLst/>
+          </a:prstGeom>
+          <a:noFill/>
+        </p:spPr>
+        <p:txBody>
+          <a:bodyPr wrap="square">
+            <a:spAutoFit/>
+          </a:bodyPr>
+          <a:lstStyle/>
+          <a:p>
+            <a:pPr algn="l">
+              <a:defRPr sz="1200" b="0" i="1">
+                <a:solidFill>
+                  <a:srgbClr val="3A3A3C"/>
+                </a:solidFill>
+                <a:latin typeface="Calibri"/>
+              </a:defRPr>
+            </a:pPr>
+            <a:r>
+              <a:t>“A Shimano rider uses the app to check compatibility. A Hammerhead rider uses it to train, navigate, and communicate with their component stack. That is a fundamentally different data relationship.”</a:t>
+            </a:r>
+          </a:p>
+        </p:txBody>
+      </p:sp>
+      <p:sp>
+        <p:nvSpPr>
+          <p:cNvPr id="49" name="TextBox 48"/>
+          <p:cNvSpPr txBox="1"/>
+          <p:nvPr/>
+        </p:nvSpPr>
+        <p:spPr>
+          <a:xfrm>
+            <a:off x="1051560" y="5349240"/>
+            <a:ext cx="10515600" cy="228600"/>
+          </a:xfrm>
+          <a:prstGeom prst="rect">
+            <a:avLst/>
+          </a:prstGeom>
+          <a:noFill/>
+        </p:spPr>
+        <p:txBody>
+          <a:bodyPr wrap="square">
+            <a:spAutoFit/>
+          </a:bodyPr>
+          <a:lstStyle/>
+          <a:p>
+            <a:pPr algn="l">
+              <a:defRPr sz="1000" b="1" i="0">
+                <a:solidFill>
+                  <a:srgbClr val="767676"/>
+                </a:solidFill>
+                <a:latin typeface="Calibri"/>
+              </a:defRPr>
+            </a:pPr>
+            <a:r>
+              <a:t>Jordan Hartsell, VP Digital Products, SRAM</a:t>
+            </a:r>
+          </a:p>
+        </p:txBody>
+      </p:sp>
+      <p:sp>
+        <p:nvSpPr>
           <p:cNvPr id="50" name="TextBox 49"/>
-          <p:cNvSpPr txBox="1"/>
-          <p:nvPr/>
-        </p:nvSpPr>
-        <p:spPr>
-          <a:xfrm>
-            <a:off x="1051560" y="5486400"/>
-            <a:ext cx="10515600" cy="411480"/>
-          </a:xfrm>
-          <a:prstGeom prst="rect">
-            <a:avLst/>
-          </a:prstGeom>
-          <a:noFill/>
-        </p:spPr>
-        <p:txBody>
-          <a:bodyPr wrap="square">
-            <a:spAutoFit/>
-          </a:bodyPr>
-          <a:lstStyle/>
-          <a:p>
-            <a:pPr algn="l">
-              <a:defRPr sz="1200" b="0" i="1">
-                <a:solidFill>
-                  <a:srgbClr val="3A3A3C"/>
-                </a:solidFill>
-                <a:latin typeface="Calibri"/>
-              </a:defRPr>
-            </a:pPr>
-            <a:r>
-              <a:t>“A Shimano rider uses the app to check compatibility. A Hammerhead rider uses it to train, navigate, and communicate with their component stack. That is a fundamentally different data relationship.”</a:t>
-            </a:r>
-          </a:p>
-        </p:txBody>
-      </p:sp>
-      <p:sp>
-        <p:nvSpPr>
-          <p:cNvPr id="51" name="TextBox 50"/>
-          <p:cNvSpPr txBox="1"/>
-          <p:nvPr/>
-        </p:nvSpPr>
-        <p:spPr>
-          <a:xfrm>
-            <a:off x="1051560" y="5897880"/>
-            <a:ext cx="10515600" cy="228600"/>
-          </a:xfrm>
-          <a:prstGeom prst="rect">
-            <a:avLst/>
-          </a:prstGeom>
-          <a:noFill/>
-        </p:spPr>
-        <p:txBody>
-          <a:bodyPr wrap="square">
-            <a:spAutoFit/>
-          </a:bodyPr>
-          <a:lstStyle/>
-          <a:p>
-            <a:pPr algn="l">
-              <a:defRPr sz="1000" b="1" i="0">
-                <a:solidFill>
-                  <a:srgbClr val="767676"/>
-                </a:solidFill>
-                <a:latin typeface="Calibri"/>
-              </a:defRPr>
-            </a:pPr>
-            <a:r>
-              <a:t>Jordan Hartsell, VP Digital Products, SRAM</a:t>
-            </a:r>
-          </a:p>
-        </p:txBody>
-      </p:sp>
-      <p:sp>
-        <p:nvSpPr>
-          <p:cNvPr id="52" name="TextBox 51"/>
           <p:cNvSpPr txBox="1"/>
           <p:nvPr/>
         </p:nvSpPr>
@@ -10321,7 +10233,7 @@
       </p:sp>
       <p:sp>
         <p:nvSpPr>
-          <p:cNvPr id="53" name="TextBox 52"/>
+          <p:cNvPr id="51" name="TextBox 50"/>
           <p:cNvSpPr txBox="1"/>
           <p:nvPr/>
         </p:nvSpPr>
@@ -12636,358 +12548,6 @@
         </p:nvSpPr>
         <p:spPr>
           <a:xfrm>
-            <a:off x="2194560" y="2852928"/>
-            <a:ext cx="9144000" cy="201168"/>
-          </a:xfrm>
-          <a:prstGeom prst="rect">
-            <a:avLst/>
-          </a:prstGeom>
-          <a:noFill/>
-        </p:spPr>
-        <p:txBody>
-          <a:bodyPr wrap="square">
-            <a:spAutoFit/>
-          </a:bodyPr>
-          <a:lstStyle/>
-          <a:p>
-            <a:pPr algn="l">
-              <a:defRPr sz="900" b="0" i="0">
-                <a:solidFill>
-                  <a:srgbClr val="2D5F8A"/>
-                </a:solidFill>
-                <a:latin typeface="Calibri"/>
-              </a:defRPr>
-            </a:pPr>
-            <a:r>
-              <a:t>Support tasks are measurable, well-defined, and understood. AI quality is easy to verify when domain knowledge is high.</a:t>
-            </a:r>
-          </a:p>
-        </p:txBody>
-      </p:sp>
-      <p:sp>
-        <p:nvSpPr>
-          <p:cNvPr id="60" name="Oval 59"/>
-          <p:cNvSpPr/>
-          <p:nvPr/>
-        </p:nvSpPr>
-        <p:spPr>
-          <a:xfrm>
-            <a:off x="731520" y="6400800"/>
-            <a:ext cx="109728" cy="109728"/>
-          </a:xfrm>
-          <a:prstGeom prst="ellipse">
-            <a:avLst/>
-          </a:prstGeom>
-          <a:solidFill>
-            <a:srgbClr val="2D5F8A"/>
-          </a:solidFill>
-          <a:ln>
-            <a:noFill/>
-          </a:ln>
-        </p:spPr>
-        <p:style>
-          <a:lnRef idx="1">
-            <a:schemeClr val="accent1"/>
-          </a:lnRef>
-          <a:fillRef idx="3">
-            <a:schemeClr val="accent1"/>
-          </a:fillRef>
-          <a:effectRef idx="2">
-            <a:schemeClr val="accent1"/>
-          </a:effectRef>
-          <a:fontRef idx="minor">
-            <a:schemeClr val="lt1"/>
-          </a:fontRef>
-        </p:style>
-        <p:txBody>
-          <a:bodyPr rtlCol="0" anchor="ctr"/>
-          <a:lstStyle/>
-          <a:p>
-            <a:pPr algn="ctr"/>
-          </a:p>
-        </p:txBody>
-      </p:sp>
-      <p:sp>
-        <p:nvSpPr>
-          <p:cNvPr id="61" name="TextBox 60"/>
-          <p:cNvSpPr txBox="1"/>
-          <p:nvPr/>
-        </p:nvSpPr>
-        <p:spPr>
-          <a:xfrm>
-            <a:off x="877824" y="6355080"/>
-            <a:ext cx="1097280" cy="201168"/>
-          </a:xfrm>
-          <a:prstGeom prst="rect">
-            <a:avLst/>
-          </a:prstGeom>
-          <a:noFill/>
-        </p:spPr>
-        <p:txBody>
-          <a:bodyPr wrap="square">
-            <a:spAutoFit/>
-          </a:bodyPr>
-          <a:lstStyle/>
-          <a:p>
-            <a:pPr algn="l">
-              <a:defRPr sz="800" b="0" i="0">
-                <a:solidFill>
-                  <a:srgbClr val="767676"/>
-                </a:solidFill>
-                <a:latin typeface="Calibri"/>
-              </a:defRPr>
-            </a:pPr>
-            <a:r>
-              <a:t>SUPPORT</a:t>
-            </a:r>
-          </a:p>
-        </p:txBody>
-      </p:sp>
-      <p:sp>
-        <p:nvSpPr>
-          <p:cNvPr id="62" name="Oval 61"/>
-          <p:cNvSpPr/>
-          <p:nvPr/>
-        </p:nvSpPr>
-        <p:spPr>
-          <a:xfrm>
-            <a:off x="2194560" y="6400800"/>
-            <a:ext cx="109728" cy="109728"/>
-          </a:xfrm>
-          <a:prstGeom prst="ellipse">
-            <a:avLst/>
-          </a:prstGeom>
-          <a:solidFill>
-            <a:srgbClr val="5B8C5A"/>
-          </a:solidFill>
-          <a:ln>
-            <a:noFill/>
-          </a:ln>
-        </p:spPr>
-        <p:style>
-          <a:lnRef idx="1">
-            <a:schemeClr val="accent1"/>
-          </a:lnRef>
-          <a:fillRef idx="3">
-            <a:schemeClr val="accent1"/>
-          </a:fillRef>
-          <a:effectRef idx="2">
-            <a:schemeClr val="accent1"/>
-          </a:effectRef>
-          <a:fontRef idx="minor">
-            <a:schemeClr val="lt1"/>
-          </a:fontRef>
-        </p:style>
-        <p:txBody>
-          <a:bodyPr rtlCol="0" anchor="ctr"/>
-          <a:lstStyle/>
-          <a:p>
-            <a:pPr algn="ctr"/>
-          </a:p>
-        </p:txBody>
-      </p:sp>
-      <p:sp>
-        <p:nvSpPr>
-          <p:cNvPr id="63" name="TextBox 62"/>
-          <p:cNvSpPr txBox="1"/>
-          <p:nvPr/>
-        </p:nvSpPr>
-        <p:spPr>
-          <a:xfrm>
-            <a:off x="2340864" y="6355080"/>
-            <a:ext cx="1097280" cy="201168"/>
-          </a:xfrm>
-          <a:prstGeom prst="rect">
-            <a:avLst/>
-          </a:prstGeom>
-          <a:noFill/>
-        </p:spPr>
-        <p:txBody>
-          <a:bodyPr wrap="square">
-            <a:spAutoFit/>
-          </a:bodyPr>
-          <a:lstStyle/>
-          <a:p>
-            <a:pPr algn="l">
-              <a:defRPr sz="800" b="0" i="0">
-                <a:solidFill>
-                  <a:srgbClr val="767676"/>
-                </a:solidFill>
-                <a:latin typeface="Calibri"/>
-              </a:defRPr>
-            </a:pPr>
-            <a:r>
-              <a:t>SUPPLY CHAIN</a:t>
-            </a:r>
-          </a:p>
-        </p:txBody>
-      </p:sp>
-      <p:sp>
-        <p:nvSpPr>
-          <p:cNvPr id="64" name="Oval 63"/>
-          <p:cNvSpPr/>
-          <p:nvPr/>
-        </p:nvSpPr>
-        <p:spPr>
-          <a:xfrm>
-            <a:off x="3657600" y="6400800"/>
-            <a:ext cx="109728" cy="109728"/>
-          </a:xfrm>
-          <a:prstGeom prst="ellipse">
-            <a:avLst/>
-          </a:prstGeom>
-          <a:solidFill>
-            <a:srgbClr val="8B6D2E"/>
-          </a:solidFill>
-          <a:ln>
-            <a:noFill/>
-          </a:ln>
-        </p:spPr>
-        <p:style>
-          <a:lnRef idx="1">
-            <a:schemeClr val="accent1"/>
-          </a:lnRef>
-          <a:fillRef idx="3">
-            <a:schemeClr val="accent1"/>
-          </a:fillRef>
-          <a:effectRef idx="2">
-            <a:schemeClr val="accent1"/>
-          </a:effectRef>
-          <a:fontRef idx="minor">
-            <a:schemeClr val="lt1"/>
-          </a:fontRef>
-        </p:style>
-        <p:txBody>
-          <a:bodyPr rtlCol="0" anchor="ctr"/>
-          <a:lstStyle/>
-          <a:p>
-            <a:pPr algn="ctr"/>
-          </a:p>
-        </p:txBody>
-      </p:sp>
-      <p:sp>
-        <p:nvSpPr>
-          <p:cNvPr id="65" name="TextBox 64"/>
-          <p:cNvSpPr txBox="1"/>
-          <p:nvPr/>
-        </p:nvSpPr>
-        <p:spPr>
-          <a:xfrm>
-            <a:off x="3803904" y="6355080"/>
-            <a:ext cx="1097280" cy="201168"/>
-          </a:xfrm>
-          <a:prstGeom prst="rect">
-            <a:avLst/>
-          </a:prstGeom>
-          <a:noFill/>
-        </p:spPr>
-        <p:txBody>
-          <a:bodyPr wrap="square">
-            <a:spAutoFit/>
-          </a:bodyPr>
-          <a:lstStyle/>
-          <a:p>
-            <a:pPr algn="l">
-              <a:defRPr sz="800" b="0" i="0">
-                <a:solidFill>
-                  <a:srgbClr val="767676"/>
-                </a:solidFill>
-                <a:latin typeface="Calibri"/>
-              </a:defRPr>
-            </a:pPr>
-            <a:r>
-              <a:t>SALES</a:t>
-            </a:r>
-          </a:p>
-        </p:txBody>
-      </p:sp>
-      <p:sp>
-        <p:nvSpPr>
-          <p:cNvPr id="66" name="Oval 65"/>
-          <p:cNvSpPr/>
-          <p:nvPr/>
-        </p:nvSpPr>
-        <p:spPr>
-          <a:xfrm>
-            <a:off x="5120640" y="6400800"/>
-            <a:ext cx="109728" cy="109728"/>
-          </a:xfrm>
-          <a:prstGeom prst="ellipse">
-            <a:avLst/>
-          </a:prstGeom>
-          <a:solidFill>
-            <a:srgbClr val="7A5C8A"/>
-          </a:solidFill>
-          <a:ln>
-            <a:noFill/>
-          </a:ln>
-        </p:spPr>
-        <p:style>
-          <a:lnRef idx="1">
-            <a:schemeClr val="accent1"/>
-          </a:lnRef>
-          <a:fillRef idx="3">
-            <a:schemeClr val="accent1"/>
-          </a:fillRef>
-          <a:effectRef idx="2">
-            <a:schemeClr val="accent1"/>
-          </a:effectRef>
-          <a:fontRef idx="minor">
-            <a:schemeClr val="lt1"/>
-          </a:fontRef>
-        </p:style>
-        <p:txBody>
-          <a:bodyPr rtlCol="0" anchor="ctr"/>
-          <a:lstStyle/>
-          <a:p>
-            <a:pPr algn="ctr"/>
-          </a:p>
-        </p:txBody>
-      </p:sp>
-      <p:sp>
-        <p:nvSpPr>
-          <p:cNvPr id="67" name="TextBox 66"/>
-          <p:cNvSpPr txBox="1"/>
-          <p:nvPr/>
-        </p:nvSpPr>
-        <p:spPr>
-          <a:xfrm>
-            <a:off x="5266944" y="6355080"/>
-            <a:ext cx="1097280" cy="201168"/>
-          </a:xfrm>
-          <a:prstGeom prst="rect">
-            <a:avLst/>
-          </a:prstGeom>
-          <a:noFill/>
-        </p:spPr>
-        <p:txBody>
-          <a:bodyPr wrap="square">
-            <a:spAutoFit/>
-          </a:bodyPr>
-          <a:lstStyle/>
-          <a:p>
-            <a:pPr algn="l">
-              <a:defRPr sz="800" b="0" i="0">
-                <a:solidFill>
-                  <a:srgbClr val="767676"/>
-                </a:solidFill>
-                <a:latin typeface="Calibri"/>
-              </a:defRPr>
-            </a:pPr>
-            <a:r>
-              <a:t>ENGINEERING</a:t>
-            </a:r>
-          </a:p>
-        </p:txBody>
-      </p:sp>
-      <p:sp>
-        <p:nvSpPr>
-          <p:cNvPr id="68" name="TextBox 67"/>
-          <p:cNvSpPr txBox="1"/>
-          <p:nvPr/>
-        </p:nvSpPr>
-        <p:spPr>
-          <a:xfrm>
             <a:off x="731520" y="6446520"/>
             <a:ext cx="4572000" cy="274320"/>
           </a:xfrm>
@@ -13018,7 +12578,7 @@
       </p:sp>
       <p:sp>
         <p:nvSpPr>
-          <p:cNvPr id="69" name="TextBox 68"/>
+          <p:cNvPr id="60" name="TextBox 59"/>
           <p:cNvSpPr txBox="1"/>
           <p:nvPr/>
         </p:nvSpPr>
@@ -13237,8 +12797,8 @@
         </p:nvSpPr>
         <p:spPr>
           <a:xfrm>
-            <a:off x="731520" y="1783080"/>
-            <a:ext cx="3291840" cy="1234440"/>
+            <a:off x="731520" y="2011680"/>
+            <a:ext cx="3291840" cy="1371600"/>
           </a:xfrm>
           <a:prstGeom prst="roundRect">
             <a:avLst>
@@ -13284,7 +12844,7 @@
         </p:nvSpPr>
         <p:spPr>
           <a:xfrm>
-            <a:off x="960120" y="1920240"/>
+            <a:off x="960120" y="2148840"/>
             <a:ext cx="2834640" cy="228600"/>
           </a:xfrm>
           <a:prstGeom prst="rect">
@@ -13320,7 +12880,7 @@
         </p:nvSpPr>
         <p:spPr>
           <a:xfrm>
-            <a:off x="960120" y="2148840"/>
+            <a:off x="960120" y="2377440"/>
             <a:ext cx="2834640" cy="411480"/>
           </a:xfrm>
           <a:prstGeom prst="rect">
@@ -13356,7 +12916,7 @@
         </p:nvSpPr>
         <p:spPr>
           <a:xfrm>
-            <a:off x="960120" y="2606040"/>
+            <a:off x="960120" y="2834640"/>
             <a:ext cx="2834640" cy="228600"/>
           </a:xfrm>
           <a:prstGeom prst="rect">
@@ -13392,8 +12952,8 @@
         </p:nvSpPr>
         <p:spPr>
           <a:xfrm>
-            <a:off x="4297680" y="1783080"/>
-            <a:ext cx="3291840" cy="1234440"/>
+            <a:off x="4480560" y="2011680"/>
+            <a:ext cx="3291840" cy="1371600"/>
           </a:xfrm>
           <a:prstGeom prst="roundRect">
             <a:avLst>
@@ -13439,7 +12999,7 @@
         </p:nvSpPr>
         <p:spPr>
           <a:xfrm>
-            <a:off x="4526280" y="1920240"/>
+            <a:off x="4709160" y="2148840"/>
             <a:ext cx="2834640" cy="228600"/>
           </a:xfrm>
           <a:prstGeom prst="rect">
@@ -13462,7 +13022,7 @@
               </a:defRPr>
             </a:pPr>
             <a:r>
-              <a:t>AUTOMATABLE QUESTIONS</a:t>
+              <a:t>AUTOMATABLE</a:t>
             </a:r>
           </a:p>
         </p:txBody>
@@ -13475,7 +13035,7 @@
         </p:nvSpPr>
         <p:spPr>
           <a:xfrm>
-            <a:off x="4526280" y="2148840"/>
+            <a:off x="4709160" y="2377440"/>
             <a:ext cx="2834640" cy="411480"/>
           </a:xfrm>
           <a:prstGeom prst="rect">
@@ -13511,7 +13071,7 @@
         </p:nvSpPr>
         <p:spPr>
           <a:xfrm>
-            <a:off x="4526280" y="2606040"/>
+            <a:off x="4709160" y="2834640"/>
             <a:ext cx="2834640" cy="228600"/>
           </a:xfrm>
           <a:prstGeom prst="rect">
@@ -13534,7 +13094,7 @@
               </a:defRPr>
             </a:pPr>
             <a:r>
-              <a:t>Follow repeatable, documented patterns</a:t>
+              <a:t>Questions follow documented patterns</a:t>
             </a:r>
           </a:p>
         </p:txBody>
@@ -13547,8 +13107,8 @@
         </p:nvSpPr>
         <p:spPr>
           <a:xfrm>
-            <a:off x="7863840" y="1783080"/>
-            <a:ext cx="3657600" cy="1234440"/>
+            <a:off x="8229600" y="2011680"/>
+            <a:ext cx="3291840" cy="1371600"/>
           </a:xfrm>
           <a:prstGeom prst="roundRect">
             <a:avLst>
@@ -13594,8 +13154,8 @@
         </p:nvSpPr>
         <p:spPr>
           <a:xfrm>
-            <a:off x="8092440" y="1920240"/>
-            <a:ext cx="3200400" cy="228600"/>
+            <a:off x="8458200" y="2148840"/>
+            <a:ext cx="2834640" cy="228600"/>
           </a:xfrm>
           <a:prstGeom prst="rect">
             <a:avLst/>
@@ -13630,8 +13190,8 @@
         </p:nvSpPr>
         <p:spPr>
           <a:xfrm>
-            <a:off x="8092440" y="2148840"/>
-            <a:ext cx="3200400" cy="411480"/>
+            <a:off x="8458200" y="2377440"/>
+            <a:ext cx="2834640" cy="411480"/>
           </a:xfrm>
           <a:prstGeom prst="rect">
             <a:avLst/>
@@ -13666,8 +13226,8 @@
         </p:nvSpPr>
         <p:spPr>
           <a:xfrm>
-            <a:off x="8092440" y="2606040"/>
-            <a:ext cx="3200400" cy="228600"/>
+            <a:off x="8458200" y="2834640"/>
+            <a:ext cx="2834640" cy="228600"/>
           </a:xfrm>
           <a:prstGeom prst="rect">
             <a:avLst/>
@@ -13689,7 +13249,7 @@
               </a:defRPr>
             </a:pPr>
             <a:r>
-              <a:t>Reddit, app stores, Trustpilot 2024-2025</a:t>
+              <a:t>Reddit, app stores, Trustpilot</a:t>
             </a:r>
           </a:p>
         </p:txBody>
@@ -13702,8 +13262,8 @@
         </p:nvSpPr>
         <p:spPr>
           <a:xfrm>
-            <a:off x="731520" y="3337560"/>
-            <a:ext cx="5029200" cy="2240280"/>
+            <a:off x="731520" y="4389120"/>
+            <a:ext cx="10789920" cy="777240"/>
           </a:xfrm>
           <a:prstGeom prst="roundRect">
             <a:avLst>
@@ -13743,354 +13303,14 @@
       </p:sp>
       <p:sp>
         <p:nvSpPr>
-          <p:cNvPr id="19" name="TextBox 18"/>
-          <p:cNvSpPr txBox="1"/>
-          <p:nvPr/>
-        </p:nvSpPr>
-        <p:spPr>
-          <a:xfrm>
-            <a:off x="1005840" y="3474720"/>
-            <a:ext cx="4114800" cy="274320"/>
-          </a:xfrm>
-          <a:prstGeom prst="rect">
-            <a:avLst/>
-          </a:prstGeom>
-          <a:noFill/>
-        </p:spPr>
-        <p:txBody>
-          <a:bodyPr wrap="square">
-            <a:spAutoFit/>
-          </a:bodyPr>
-          <a:lstStyle/>
-          <a:p>
-            <a:pPr algn="l">
-              <a:defRPr sz="1400" b="1" i="0">
-                <a:solidFill>
-                  <a:srgbClr val="1C1C1E"/>
-                </a:solidFill>
-                <a:latin typeface="Calibri"/>
-              </a:defRPr>
-            </a:pPr>
-            <a:r>
-              <a:t>Customer Pain Signals</a:t>
-            </a:r>
-          </a:p>
-        </p:txBody>
-      </p:sp>
-      <p:sp>
-        <p:nvSpPr>
-          <p:cNvPr id="20" name="TextBox 19"/>
-          <p:cNvSpPr txBox="1"/>
-          <p:nvPr/>
-        </p:nvSpPr>
-        <p:spPr>
-          <a:xfrm>
-            <a:off x="1005840" y="3794760"/>
-            <a:ext cx="4389120" cy="1645920"/>
-          </a:xfrm>
-          <a:prstGeom prst="rect">
-            <a:avLst/>
-          </a:prstGeom>
-          <a:noFill/>
-        </p:spPr>
-        <p:txBody>
-          <a:bodyPr wrap="square">
-            <a:spAutoFit/>
-          </a:bodyPr>
-          <a:lstStyle/>
-          <a:p>
-            <a:pPr>
-              <a:spcAft>
-                <a:spcPts val="1100"/>
-              </a:spcAft>
-              <a:defRPr sz="1100" b="0">
-                <a:solidFill>
-                  <a:srgbClr val="3A3A3C"/>
-                </a:solidFill>
-                <a:latin typeface="Calibri"/>
-              </a:defRPr>
-            </a:pPr>
-            <a:r>
-              <a:t>•  Trustpilot reviews cite warranty frustration and delays</a:t>
-            </a:r>
-          </a:p>
-          <a:p>
-            <a:pPr>
-              <a:spcAft>
-                <a:spcPts val="1100"/>
-              </a:spcAft>
-              <a:defRPr sz="1100" b="0">
-                <a:solidFill>
-                  <a:srgbClr val="3A3A3C"/>
-                </a:solidFill>
-                <a:latin typeface="Calibri"/>
-              </a:defRPr>
-            </a:pPr>
-            <a:r>
-              <a:t>•  Reddit 2024-25 threads on pairing failures and shifting</a:t>
-            </a:r>
-          </a:p>
-          <a:p>
-            <a:pPr>
-              <a:spcAft>
-                <a:spcPts val="1100"/>
-              </a:spcAft>
-              <a:defRPr sz="1100" b="0">
-                <a:solidFill>
-                  <a:srgbClr val="3A3A3C"/>
-                </a:solidFill>
-                <a:latin typeface="Calibri"/>
-              </a:defRPr>
-            </a:pPr>
-            <a:r>
-              <a:t>•  App store reviews flag AXS and Hammerhead bugs</a:t>
-            </a:r>
-          </a:p>
-          <a:p>
-            <a:pPr>
-              <a:spcAft>
-                <a:spcPts val="1100"/>
-              </a:spcAft>
-              <a:defRPr sz="1100" b="0">
-                <a:solidFill>
-                  <a:srgbClr val="3A3A3C"/>
-                </a:solidFill>
-                <a:latin typeface="Calibri"/>
-              </a:defRPr>
-            </a:pPr>
-            <a:r>
-              <a:t>•  Riders explicitly stating intent to switch to Shimano</a:t>
-            </a:r>
-          </a:p>
-        </p:txBody>
-      </p:sp>
-      <p:sp>
-        <p:nvSpPr>
-          <p:cNvPr id="21" name="Rounded Rectangle 20"/>
+          <p:cNvPr id="19" name="Rectangle 18"/>
           <p:cNvSpPr/>
           <p:nvPr/>
         </p:nvSpPr>
         <p:spPr>
           <a:xfrm>
-            <a:off x="6035040" y="3337560"/>
-            <a:ext cx="5486400" cy="2240280"/>
-          </a:xfrm>
-          <a:prstGeom prst="roundRect">
-            <a:avLst>
-              <a:gd name="adj" fmla="val 4000"/>
-            </a:avLst>
-          </a:prstGeom>
-          <a:solidFill>
-            <a:srgbClr val="FFFFFF"/>
-          </a:solidFill>
-          <a:ln w="12700">
-            <a:solidFill>
-              <a:srgbClr val="E0E0DE"/>
-            </a:solidFill>
-          </a:ln>
-        </p:spPr>
-        <p:style>
-          <a:lnRef idx="1">
-            <a:schemeClr val="accent1"/>
-          </a:lnRef>
-          <a:fillRef idx="3">
-            <a:schemeClr val="accent1"/>
-          </a:fillRef>
-          <a:effectRef idx="2">
-            <a:schemeClr val="accent1"/>
-          </a:effectRef>
-          <a:fontRef idx="minor">
-            <a:schemeClr val="lt1"/>
-          </a:fontRef>
-        </p:style>
-        <p:txBody>
-          <a:bodyPr rtlCol="0" anchor="ctr"/>
-          <a:lstStyle/>
-          <a:p>
-            <a:pPr algn="ctr"/>
-          </a:p>
-        </p:txBody>
-      </p:sp>
-      <p:sp>
-        <p:nvSpPr>
-          <p:cNvPr id="22" name="TextBox 21"/>
-          <p:cNvSpPr txBox="1"/>
-          <p:nvPr/>
-        </p:nvSpPr>
-        <p:spPr>
-          <a:xfrm>
-            <a:off x="6309360" y="3474720"/>
-            <a:ext cx="4572000" cy="274320"/>
-          </a:xfrm>
-          <a:prstGeom prst="rect">
-            <a:avLst/>
-          </a:prstGeom>
-          <a:noFill/>
-        </p:spPr>
-        <p:txBody>
-          <a:bodyPr wrap="square">
-            <a:spAutoFit/>
-          </a:bodyPr>
-          <a:lstStyle/>
-          <a:p>
-            <a:pPr algn="l">
-              <a:defRPr sz="1400" b="1" i="0">
-                <a:solidFill>
-                  <a:srgbClr val="1C1C1E"/>
-                </a:solidFill>
-                <a:latin typeface="Calibri"/>
-              </a:defRPr>
-            </a:pPr>
-            <a:r>
-              <a:t>Why SRAM Can Fix This with AI</a:t>
-            </a:r>
-          </a:p>
-        </p:txBody>
-      </p:sp>
-      <p:sp>
-        <p:nvSpPr>
-          <p:cNvPr id="23" name="TextBox 22"/>
-          <p:cNvSpPr txBox="1"/>
-          <p:nvPr/>
-        </p:nvSpPr>
-        <p:spPr>
-          <a:xfrm>
-            <a:off x="6309360" y="3794760"/>
-            <a:ext cx="4937760" cy="1645920"/>
-          </a:xfrm>
-          <a:prstGeom prst="rect">
-            <a:avLst/>
-          </a:prstGeom>
-          <a:noFill/>
-        </p:spPr>
-        <p:txBody>
-          <a:bodyPr wrap="square">
-            <a:spAutoFit/>
-          </a:bodyPr>
-          <a:lstStyle/>
-          <a:p>
-            <a:pPr>
-              <a:spcAft>
-                <a:spcPts val="1100"/>
-              </a:spcAft>
-              <a:defRPr sz="1100" b="0">
-                <a:solidFill>
-                  <a:srgbClr val="3A3A3C"/>
-                </a:solidFill>
-                <a:latin typeface="Calibri"/>
-              </a:defRPr>
-            </a:pPr>
-            <a:r>
-              <a:t>•  Structured knowledge base with manuals and guides</a:t>
-            </a:r>
-          </a:p>
-          <a:p>
-            <a:pPr>
-              <a:spcAft>
-                <a:spcPts val="1100"/>
-              </a:spcAft>
-              <a:defRPr sz="1100" b="0">
-                <a:solidFill>
-                  <a:srgbClr val="3A3A3C"/>
-                </a:solidFill>
-                <a:latin typeface="Calibri"/>
-              </a:defRPr>
-            </a:pPr>
-            <a:r>
-              <a:t>•  AXS telemetry data on firmware, error codes, device state</a:t>
-            </a:r>
-          </a:p>
-          <a:p>
-            <a:pPr>
-              <a:spcAft>
-                <a:spcPts val="1100"/>
-              </a:spcAft>
-              <a:defRPr sz="1100" b="0">
-                <a:solidFill>
-                  <a:srgbClr val="3A3A3C"/>
-                </a:solidFill>
-                <a:latin typeface="Calibri"/>
-              </a:defRPr>
-            </a:pPr>
-            <a:r>
-              <a:t>•  Hammerhead ride and device diagnostic data</a:t>
-            </a:r>
-          </a:p>
-          <a:p>
-            <a:pPr>
-              <a:spcAft>
-                <a:spcPts val="1100"/>
-              </a:spcAft>
-              <a:defRPr sz="1100" b="0">
-                <a:solidFill>
-                  <a:srgbClr val="3A3A3C"/>
-                </a:solidFill>
-                <a:latin typeface="Calibri"/>
-              </a:defRPr>
-            </a:pPr>
-            <a:r>
-              <a:t>•  60-70% data-ready for AXS/Hammerhead support (per VP)</a:t>
-            </a:r>
-          </a:p>
-        </p:txBody>
-      </p:sp>
-      <p:sp>
-        <p:nvSpPr>
-          <p:cNvPr id="24" name="Rounded Rectangle 23"/>
-          <p:cNvSpPr/>
-          <p:nvPr/>
-        </p:nvSpPr>
-        <p:spPr>
-          <a:xfrm>
-            <a:off x="731520" y="5760720"/>
-            <a:ext cx="10789920" cy="640080"/>
-          </a:xfrm>
-          <a:prstGeom prst="roundRect">
-            <a:avLst>
-              <a:gd name="adj" fmla="val 4000"/>
-            </a:avLst>
-          </a:prstGeom>
-          <a:solidFill>
-            <a:srgbClr val="FFFFFF"/>
-          </a:solidFill>
-          <a:ln w="12700">
-            <a:solidFill>
-              <a:srgbClr val="E0E0DE"/>
-            </a:solidFill>
-          </a:ln>
-        </p:spPr>
-        <p:style>
-          <a:lnRef idx="1">
-            <a:schemeClr val="accent1"/>
-          </a:lnRef>
-          <a:fillRef idx="3">
-            <a:schemeClr val="accent1"/>
-          </a:fillRef>
-          <a:effectRef idx="2">
-            <a:schemeClr val="accent1"/>
-          </a:effectRef>
-          <a:fontRef idx="minor">
-            <a:schemeClr val="lt1"/>
-          </a:fontRef>
-        </p:style>
-        <p:txBody>
-          <a:bodyPr rtlCol="0" anchor="ctr"/>
-          <a:lstStyle/>
-          <a:p>
-            <a:pPr algn="ctr"/>
-          </a:p>
-        </p:txBody>
-      </p:sp>
-      <p:sp>
-        <p:nvSpPr>
-          <p:cNvPr id="25" name="Rectangle 24"/>
-          <p:cNvSpPr/>
-          <p:nvPr/>
-        </p:nvSpPr>
-        <p:spPr>
-          <a:xfrm>
-            <a:off x="731520" y="5760720"/>
-            <a:ext cx="50800" cy="640080"/>
+            <a:off x="731520" y="4389120"/>
+            <a:ext cx="50800" cy="777240"/>
           </a:xfrm>
           <a:prstGeom prst="rect">
             <a:avLst/>
@@ -14126,14 +13346,14 @@
       </p:sp>
       <p:sp>
         <p:nvSpPr>
-          <p:cNvPr id="26" name="TextBox 25"/>
-          <p:cNvSpPr txBox="1"/>
-          <p:nvPr/>
-        </p:nvSpPr>
-        <p:spPr>
-          <a:xfrm>
-            <a:off x="1051560" y="5852160"/>
-            <a:ext cx="10241280" cy="274320"/>
+          <p:cNvPr id="20" name="TextBox 19"/>
+          <p:cNvSpPr txBox="1"/>
+          <p:nvPr/>
+        </p:nvSpPr>
+        <p:spPr>
+          <a:xfrm>
+            <a:off x="1051560" y="4480560"/>
+            <a:ext cx="10241280" cy="411480"/>
           </a:xfrm>
           <a:prstGeom prst="rect">
             <a:avLst/>
@@ -14162,13 +13382,13 @@
       </p:sp>
       <p:sp>
         <p:nvSpPr>
-          <p:cNvPr id="27" name="TextBox 26"/>
-          <p:cNvSpPr txBox="1"/>
-          <p:nvPr/>
-        </p:nvSpPr>
-        <p:spPr>
-          <a:xfrm>
-            <a:off x="1051560" y="6126480"/>
+          <p:cNvPr id="21" name="TextBox 20"/>
+          <p:cNvSpPr txBox="1"/>
+          <p:nvPr/>
+        </p:nvSpPr>
+        <p:spPr>
+          <a:xfrm>
+            <a:off x="1051560" y="4892040"/>
             <a:ext cx="10241280" cy="228600"/>
           </a:xfrm>
           <a:prstGeom prst="rect">
@@ -14198,7 +13418,7 @@
       </p:sp>
       <p:sp>
         <p:nvSpPr>
-          <p:cNvPr id="28" name="TextBox 27"/>
+          <p:cNvPr id="22" name="TextBox 21"/>
           <p:cNvSpPr txBox="1"/>
           <p:nvPr/>
         </p:nvSpPr>
@@ -14234,7 +13454,7 @@
       </p:sp>
       <p:sp>
         <p:nvSpPr>
-          <p:cNvPr id="29" name="TextBox 28"/>
+          <p:cNvPr id="23" name="TextBox 22"/>
           <p:cNvSpPr txBox="1"/>
           <p:nvPr/>
         </p:nvSpPr>
@@ -14417,8 +13637,8 @@
         </p:nvSpPr>
         <p:spPr>
           <a:xfrm>
-            <a:off x="731520" y="1371600"/>
-            <a:ext cx="1965960" cy="1828800"/>
+            <a:off x="731520" y="1645920"/>
+            <a:ext cx="1965960" cy="2011680"/>
           </a:xfrm>
           <a:prstGeom prst="roundRect">
             <a:avLst>
@@ -14464,8 +13684,8 @@
         </p:nvSpPr>
         <p:spPr>
           <a:xfrm>
-            <a:off x="868680" y="1508760"/>
-            <a:ext cx="320040" cy="320040"/>
+            <a:off x="868680" y="1783080"/>
+            <a:ext cx="365760" cy="365760"/>
           </a:xfrm>
           <a:prstGeom prst="ellipse">
             <a:avLst/>
@@ -14496,7 +13716,7 @@
           <a:lstStyle/>
           <a:p>
             <a:pPr algn="ctr">
-              <a:defRPr sz="1400" b="1">
+              <a:defRPr sz="1600" b="1">
                 <a:solidFill>
                   <a:srgbClr val="F5F5F3"/>
                 </a:solidFill>
@@ -14516,22 +13736,22 @@
         </p:nvSpPr>
         <p:spPr>
           <a:xfrm>
-            <a:off x="868680" y="1920240"/>
-            <a:ext cx="1691640" cy="228600"/>
-          </a:xfrm>
-          <a:prstGeom prst="rect">
-            <a:avLst/>
-          </a:prstGeom>
-          <a:noFill/>
-        </p:spPr>
-        <p:txBody>
-          <a:bodyPr wrap="square">
-            <a:spAutoFit/>
-          </a:bodyPr>
-          <a:lstStyle/>
-          <a:p>
-            <a:pPr algn="l">
-              <a:defRPr sz="1000" b="1" i="0">
+            <a:off x="868680" y="2286000"/>
+            <a:ext cx="1691640" cy="274320"/>
+          </a:xfrm>
+          <a:prstGeom prst="rect">
+            <a:avLst/>
+          </a:prstGeom>
+          <a:noFill/>
+        </p:spPr>
+        <p:txBody>
+          <a:bodyPr wrap="square">
+            <a:spAutoFit/>
+          </a:bodyPr>
+          <a:lstStyle/>
+          <a:p>
+            <a:pPr algn="l">
+              <a:defRPr sz="1100" b="1" i="0">
                 <a:solidFill>
                   <a:srgbClr val="1C1C1E"/>
                 </a:solidFill>
@@ -14552,7 +13772,7 @@
         </p:nvSpPr>
         <p:spPr>
           <a:xfrm>
-            <a:off x="868680" y="2194560"/>
+            <a:off x="868680" y="2606040"/>
             <a:ext cx="1691640" cy="822960"/>
           </a:xfrm>
           <a:prstGeom prst="rect">
@@ -14567,7 +13787,7 @@
           <a:lstStyle/>
           <a:p>
             <a:pPr algn="l">
-              <a:defRPr sz="1100" b="0" i="0">
+              <a:defRPr sz="1200" b="0" i="0">
                 <a:solidFill>
                   <a:srgbClr val="3A3A3C"/>
                 </a:solidFill>
@@ -14592,7 +13812,7 @@
         </p:nvSpPr>
         <p:spPr>
           <a:xfrm rot="5400000">
-            <a:off x="2715768" y="2148840"/>
+            <a:off x="2715768" y="2468880"/>
             <a:ext cx="274320" cy="274320"/>
           </a:xfrm>
           <a:prstGeom prst="triangle">
@@ -14635,8 +13855,8 @@
         </p:nvSpPr>
         <p:spPr>
           <a:xfrm>
-            <a:off x="2971800" y="1371600"/>
-            <a:ext cx="1965960" cy="1828800"/>
+            <a:off x="2971800" y="1645920"/>
+            <a:ext cx="1965960" cy="2011680"/>
           </a:xfrm>
           <a:prstGeom prst="roundRect">
             <a:avLst>
@@ -14682,8 +13902,8 @@
         </p:nvSpPr>
         <p:spPr>
           <a:xfrm>
-            <a:off x="3108960" y="1508760"/>
-            <a:ext cx="320040" cy="320040"/>
+            <a:off x="3108960" y="1783080"/>
+            <a:ext cx="365760" cy="365760"/>
           </a:xfrm>
           <a:prstGeom prst="ellipse">
             <a:avLst/>
@@ -14714,7 +13934,7 @@
           <a:lstStyle/>
           <a:p>
             <a:pPr algn="ctr">
-              <a:defRPr sz="1400" b="1">
+              <a:defRPr sz="1600" b="1">
                 <a:solidFill>
                   <a:srgbClr val="F5F5F3"/>
                 </a:solidFill>
@@ -14734,22 +13954,22 @@
         </p:nvSpPr>
         <p:spPr>
           <a:xfrm>
-            <a:off x="3108960" y="1920240"/>
-            <a:ext cx="1691640" cy="228600"/>
-          </a:xfrm>
-          <a:prstGeom prst="rect">
-            <a:avLst/>
-          </a:prstGeom>
-          <a:noFill/>
-        </p:spPr>
-        <p:txBody>
-          <a:bodyPr wrap="square">
-            <a:spAutoFit/>
-          </a:bodyPr>
-          <a:lstStyle/>
-          <a:p>
-            <a:pPr algn="l">
-              <a:defRPr sz="1000" b="1" i="0">
+            <a:off x="3108960" y="2286000"/>
+            <a:ext cx="1691640" cy="274320"/>
+          </a:xfrm>
+          <a:prstGeom prst="rect">
+            <a:avLst/>
+          </a:prstGeom>
+          <a:noFill/>
+        </p:spPr>
+        <p:txBody>
+          <a:bodyPr wrap="square">
+            <a:spAutoFit/>
+          </a:bodyPr>
+          <a:lstStyle/>
+          <a:p>
+            <a:pPr algn="l">
+              <a:defRPr sz="1100" b="1" i="0">
                 <a:solidFill>
                   <a:srgbClr val="1C1C1E"/>
                 </a:solidFill>
@@ -14770,7 +13990,7 @@
         </p:nvSpPr>
         <p:spPr>
           <a:xfrm>
-            <a:off x="3108960" y="2194560"/>
+            <a:off x="3108960" y="2606040"/>
             <a:ext cx="1691640" cy="822960"/>
           </a:xfrm>
           <a:prstGeom prst="rect">
@@ -14785,7 +14005,7 @@
           <a:lstStyle/>
           <a:p>
             <a:pPr algn="l">
-              <a:defRPr sz="1100" b="0" i="0">
+              <a:defRPr sz="1200" b="0" i="0">
                 <a:solidFill>
                   <a:srgbClr val="3A3A3C"/>
                 </a:solidFill>
@@ -14810,7 +14030,7 @@
         </p:nvSpPr>
         <p:spPr>
           <a:xfrm rot="5400000">
-            <a:off x="4956048" y="2148840"/>
+            <a:off x="4956048" y="2468880"/>
             <a:ext cx="274320" cy="274320"/>
           </a:xfrm>
           <a:prstGeom prst="triangle">
@@ -14853,8 +14073,8 @@
         </p:nvSpPr>
         <p:spPr>
           <a:xfrm>
-            <a:off x="5212080" y="1371600"/>
-            <a:ext cx="1965960" cy="1828800"/>
+            <a:off x="5212080" y="1645920"/>
+            <a:ext cx="1965960" cy="2011680"/>
           </a:xfrm>
           <a:prstGeom prst="roundRect">
             <a:avLst>
@@ -14900,8 +14120,8 @@
         </p:nvSpPr>
         <p:spPr>
           <a:xfrm>
-            <a:off x="5349240" y="1508760"/>
-            <a:ext cx="320040" cy="320040"/>
+            <a:off x="5349240" y="1783080"/>
+            <a:ext cx="365760" cy="365760"/>
           </a:xfrm>
           <a:prstGeom prst="ellipse">
             <a:avLst/>
@@ -14932,7 +14152,7 @@
           <a:lstStyle/>
           <a:p>
             <a:pPr algn="ctr">
-              <a:defRPr sz="1400" b="1">
+              <a:defRPr sz="1600" b="1">
                 <a:solidFill>
                   <a:srgbClr val="F5F5F3"/>
                 </a:solidFill>
@@ -14952,22 +14172,22 @@
         </p:nvSpPr>
         <p:spPr>
           <a:xfrm>
-            <a:off x="5349240" y="1920240"/>
-            <a:ext cx="1691640" cy="228600"/>
-          </a:xfrm>
-          <a:prstGeom prst="rect">
-            <a:avLst/>
-          </a:prstGeom>
-          <a:noFill/>
-        </p:spPr>
-        <p:txBody>
-          <a:bodyPr wrap="square">
-            <a:spAutoFit/>
-          </a:bodyPr>
-          <a:lstStyle/>
-          <a:p>
-            <a:pPr algn="l">
-              <a:defRPr sz="1000" b="1" i="0">
+            <a:off x="5349240" y="2286000"/>
+            <a:ext cx="1691640" cy="274320"/>
+          </a:xfrm>
+          <a:prstGeom prst="rect">
+            <a:avLst/>
+          </a:prstGeom>
+          <a:noFill/>
+        </p:spPr>
+        <p:txBody>
+          <a:bodyPr wrap="square">
+            <a:spAutoFit/>
+          </a:bodyPr>
+          <a:lstStyle/>
+          <a:p>
+            <a:pPr algn="l">
+              <a:defRPr sz="1100" b="1" i="0">
                 <a:solidFill>
                   <a:srgbClr val="1C1C1E"/>
                 </a:solidFill>
@@ -14988,7 +14208,7 @@
         </p:nvSpPr>
         <p:spPr>
           <a:xfrm>
-            <a:off x="5349240" y="2194560"/>
+            <a:off x="5349240" y="2606040"/>
             <a:ext cx="1691640" cy="822960"/>
           </a:xfrm>
           <a:prstGeom prst="rect">
@@ -15003,7 +14223,7 @@
           <a:lstStyle/>
           <a:p>
             <a:pPr algn="l">
-              <a:defRPr sz="1100" b="0" i="0">
+              <a:defRPr sz="1200" b="0" i="0">
                 <a:solidFill>
                   <a:srgbClr val="3A3A3C"/>
                 </a:solidFill>
@@ -15028,7 +14248,7 @@
         </p:nvSpPr>
         <p:spPr>
           <a:xfrm rot="5400000">
-            <a:off x="7196328" y="2148840"/>
+            <a:off x="7196328" y="2468880"/>
             <a:ext cx="274320" cy="274320"/>
           </a:xfrm>
           <a:prstGeom prst="triangle">
@@ -15071,8 +14291,8 @@
         </p:nvSpPr>
         <p:spPr>
           <a:xfrm>
-            <a:off x="7452360" y="1371600"/>
-            <a:ext cx="1965960" cy="1828800"/>
+            <a:off x="7452360" y="1645920"/>
+            <a:ext cx="1965960" cy="2011680"/>
           </a:xfrm>
           <a:prstGeom prst="roundRect">
             <a:avLst>
@@ -15118,8 +14338,8 @@
         </p:nvSpPr>
         <p:spPr>
           <a:xfrm>
-            <a:off x="7589520" y="1508760"/>
-            <a:ext cx="320040" cy="320040"/>
+            <a:off x="7589520" y="1783080"/>
+            <a:ext cx="365760" cy="365760"/>
           </a:xfrm>
           <a:prstGeom prst="ellipse">
             <a:avLst/>
@@ -15150,7 +14370,7 @@
           <a:lstStyle/>
           <a:p>
             <a:pPr algn="ctr">
-              <a:defRPr sz="1400" b="1">
+              <a:defRPr sz="1600" b="1">
                 <a:solidFill>
                   <a:srgbClr val="F5F5F3"/>
                 </a:solidFill>
@@ -15170,22 +14390,22 @@
         </p:nvSpPr>
         <p:spPr>
           <a:xfrm>
-            <a:off x="7589520" y="1920240"/>
-            <a:ext cx="1691640" cy="228600"/>
-          </a:xfrm>
-          <a:prstGeom prst="rect">
-            <a:avLst/>
-          </a:prstGeom>
-          <a:noFill/>
-        </p:spPr>
-        <p:txBody>
-          <a:bodyPr wrap="square">
-            <a:spAutoFit/>
-          </a:bodyPr>
-          <a:lstStyle/>
-          <a:p>
-            <a:pPr algn="l">
-              <a:defRPr sz="1000" b="1" i="0">
+            <a:off x="7589520" y="2286000"/>
+            <a:ext cx="1691640" cy="274320"/>
+          </a:xfrm>
+          <a:prstGeom prst="rect">
+            <a:avLst/>
+          </a:prstGeom>
+          <a:noFill/>
+        </p:spPr>
+        <p:txBody>
+          <a:bodyPr wrap="square">
+            <a:spAutoFit/>
+          </a:bodyPr>
+          <a:lstStyle/>
+          <a:p>
+            <a:pPr algn="l">
+              <a:defRPr sz="1100" b="1" i="0">
                 <a:solidFill>
                   <a:srgbClr val="1C1C1E"/>
                 </a:solidFill>
@@ -15206,7 +14426,7 @@
         </p:nvSpPr>
         <p:spPr>
           <a:xfrm>
-            <a:off x="7589520" y="2194560"/>
+            <a:off x="7589520" y="2606040"/>
             <a:ext cx="1691640" cy="822960"/>
           </a:xfrm>
           <a:prstGeom prst="rect">
@@ -15221,7 +14441,7 @@
           <a:lstStyle/>
           <a:p>
             <a:pPr algn="l">
-              <a:defRPr sz="1100" b="0" i="0">
+              <a:defRPr sz="1200" b="0" i="0">
                 <a:solidFill>
                   <a:srgbClr val="3A3A3C"/>
                 </a:solidFill>
@@ -15246,7 +14466,7 @@
         </p:nvSpPr>
         <p:spPr>
           <a:xfrm rot="5400000">
-            <a:off x="9436608" y="2148840"/>
+            <a:off x="9436608" y="2468880"/>
             <a:ext cx="274320" cy="274320"/>
           </a:xfrm>
           <a:prstGeom prst="triangle">
@@ -15289,8 +14509,8 @@
         </p:nvSpPr>
         <p:spPr>
           <a:xfrm>
-            <a:off x="9692640" y="1371600"/>
-            <a:ext cx="1965960" cy="1828800"/>
+            <a:off x="9692640" y="1645920"/>
+            <a:ext cx="1965960" cy="2011680"/>
           </a:xfrm>
           <a:prstGeom prst="roundRect">
             <a:avLst>
@@ -15336,8 +14556,8 @@
         </p:nvSpPr>
         <p:spPr>
           <a:xfrm>
-            <a:off x="9829800" y="1508760"/>
-            <a:ext cx="320040" cy="320040"/>
+            <a:off x="9829800" y="1783080"/>
+            <a:ext cx="365760" cy="365760"/>
           </a:xfrm>
           <a:prstGeom prst="ellipse">
             <a:avLst/>
@@ -15368,7 +14588,7 @@
           <a:lstStyle/>
           <a:p>
             <a:pPr algn="ctr">
-              <a:defRPr sz="1400" b="1">
+              <a:defRPr sz="1600" b="1">
                 <a:solidFill>
                   <a:srgbClr val="F5F5F3"/>
                 </a:solidFill>
@@ -15388,22 +14608,22 @@
         </p:nvSpPr>
         <p:spPr>
           <a:xfrm>
-            <a:off x="9829800" y="1920240"/>
-            <a:ext cx="1691640" cy="228600"/>
-          </a:xfrm>
-          <a:prstGeom prst="rect">
-            <a:avLst/>
-          </a:prstGeom>
-          <a:noFill/>
-        </p:spPr>
-        <p:txBody>
-          <a:bodyPr wrap="square">
-            <a:spAutoFit/>
-          </a:bodyPr>
-          <a:lstStyle/>
-          <a:p>
-            <a:pPr algn="l">
-              <a:defRPr sz="1000" b="1" i="0">
+            <a:off x="9829800" y="2286000"/>
+            <a:ext cx="1691640" cy="274320"/>
+          </a:xfrm>
+          <a:prstGeom prst="rect">
+            <a:avLst/>
+          </a:prstGeom>
+          <a:noFill/>
+        </p:spPr>
+        <p:txBody>
+          <a:bodyPr wrap="square">
+            <a:spAutoFit/>
+          </a:bodyPr>
+          <a:lstStyle/>
+          <a:p>
+            <a:pPr algn="l">
+              <a:defRPr sz="1100" b="1" i="0">
                 <a:solidFill>
                   <a:srgbClr val="1C1C1E"/>
                 </a:solidFill>
@@ -15424,7 +14644,7 @@
         </p:nvSpPr>
         <p:spPr>
           <a:xfrm>
-            <a:off x="9829800" y="2194560"/>
+            <a:off x="9829800" y="2606040"/>
             <a:ext cx="1691640" cy="822960"/>
           </a:xfrm>
           <a:prstGeom prst="rect">
@@ -15439,7 +14659,7 @@
           <a:lstStyle/>
           <a:p>
             <a:pPr algn="l">
-              <a:defRPr sz="1100" b="0" i="0">
+              <a:defRPr sz="1200" b="0" i="0">
                 <a:solidFill>
                   <a:srgbClr val="3A3A3C"/>
                 </a:solidFill>
@@ -15458,14 +14678,50 @@
       </p:sp>
       <p:sp>
         <p:nvSpPr>
-          <p:cNvPr id="29" name="Rounded Rectangle 28"/>
+          <p:cNvPr id="29" name="TextBox 28"/>
+          <p:cNvSpPr txBox="1"/>
+          <p:nvPr/>
+        </p:nvSpPr>
+        <p:spPr>
+          <a:xfrm>
+            <a:off x="731520" y="4206240"/>
+            <a:ext cx="10515600" cy="320040"/>
+          </a:xfrm>
+          <a:prstGeom prst="rect">
+            <a:avLst/>
+          </a:prstGeom>
+          <a:noFill/>
+        </p:spPr>
+        <p:txBody>
+          <a:bodyPr wrap="square">
+            <a:spAutoFit/>
+          </a:bodyPr>
+          <a:lstStyle/>
+          <a:p>
+            <a:pPr algn="ctr">
+              <a:defRPr sz="1300" b="0" i="0">
+                <a:solidFill>
+                  <a:srgbClr val="3A3A3C"/>
+                </a:solidFill>
+                <a:latin typeface="Calibri"/>
+              </a:defRPr>
+            </a:pPr>
+            <a:r>
+              <a:t>AXS + Hammerhead support only  |  Human approval on every response  |  Weekly quality review with rollback trigger</a:t>
+            </a:r>
+          </a:p>
+        </p:txBody>
+      </p:sp>
+      <p:sp>
+        <p:nvSpPr>
+          <p:cNvPr id="30" name="Rounded Rectangle 29"/>
           <p:cNvSpPr/>
           <p:nvPr/>
         </p:nvSpPr>
         <p:spPr>
           <a:xfrm>
-            <a:off x="731520" y="3520440"/>
-            <a:ext cx="5303520" cy="2331720"/>
+            <a:off x="731520" y="5029200"/>
+            <a:ext cx="10789920" cy="502920"/>
           </a:xfrm>
           <a:prstGeom prst="roundRect">
             <a:avLst>
@@ -15505,353 +14761,13 @@
       </p:sp>
       <p:sp>
         <p:nvSpPr>
-          <p:cNvPr id="30" name="TextBox 29"/>
-          <p:cNvSpPr txBox="1"/>
-          <p:nvPr/>
-        </p:nvSpPr>
-        <p:spPr>
-          <a:xfrm>
-            <a:off x="1005840" y="3657600"/>
-            <a:ext cx="4572000" cy="274320"/>
-          </a:xfrm>
-          <a:prstGeom prst="rect">
-            <a:avLst/>
-          </a:prstGeom>
-          <a:noFill/>
-        </p:spPr>
-        <p:txBody>
-          <a:bodyPr wrap="square">
-            <a:spAutoFit/>
-          </a:bodyPr>
-          <a:lstStyle/>
-          <a:p>
-            <a:pPr algn="l">
-              <a:defRPr sz="1400" b="1" i="0">
-                <a:solidFill>
-                  <a:srgbClr val="1C1C1E"/>
-                </a:solidFill>
-                <a:latin typeface="Calibri"/>
-              </a:defRPr>
-            </a:pPr>
-            <a:r>
-              <a:t>Pilot Scope</a:t>
-            </a:r>
-          </a:p>
-        </p:txBody>
-      </p:sp>
-      <p:sp>
-        <p:nvSpPr>
-          <p:cNvPr id="31" name="TextBox 30"/>
-          <p:cNvSpPr txBox="1"/>
-          <p:nvPr/>
-        </p:nvSpPr>
-        <p:spPr>
-          <a:xfrm>
-            <a:off x="1005840" y="3977639"/>
-            <a:ext cx="4754880" cy="1645920"/>
-          </a:xfrm>
-          <a:prstGeom prst="rect">
-            <a:avLst/>
-          </a:prstGeom>
-          <a:noFill/>
-        </p:spPr>
-        <p:txBody>
-          <a:bodyPr wrap="square">
-            <a:spAutoFit/>
-          </a:bodyPr>
-          <a:lstStyle/>
-          <a:p>
-            <a:pPr>
-              <a:spcAft>
-                <a:spcPts val="1100"/>
-              </a:spcAft>
-              <a:defRPr sz="1100" b="0">
-                <a:solidFill>
-                  <a:srgbClr val="3A3A3C"/>
-                </a:solidFill>
-                <a:latin typeface="Calibri"/>
-              </a:defRPr>
-            </a:pPr>
-            <a:r>
-              <a:t>•  AXS drivetrain + Hammerhead device support only</a:t>
-            </a:r>
-          </a:p>
-          <a:p>
-            <a:pPr>
-              <a:spcAft>
-                <a:spcPts val="1100"/>
-              </a:spcAft>
-              <a:defRPr sz="1100" b="0">
-                <a:solidFill>
-                  <a:srgbClr val="3A3A3C"/>
-                </a:solidFill>
-                <a:latin typeface="Calibri"/>
-              </a:defRPr>
-            </a:pPr>
-            <a:r>
-              <a:t>•  Dealer inbox and high-volume web forms</a:t>
-            </a:r>
-          </a:p>
-          <a:p>
-            <a:pPr>
-              <a:spcAft>
-                <a:spcPts val="1100"/>
-              </a:spcAft>
-              <a:defRPr sz="1100" b="0">
-                <a:solidFill>
-                  <a:srgbClr val="3A3A3C"/>
-                </a:solidFill>
-                <a:latin typeface="Calibri"/>
-              </a:defRPr>
-            </a:pPr>
-            <a:r>
-              <a:t>•  Compatibility and firmware issues first</a:t>
-            </a:r>
-          </a:p>
-          <a:p>
-            <a:pPr>
-              <a:spcAft>
-                <a:spcPts val="1100"/>
-              </a:spcAft>
-              <a:defRPr sz="1100" b="0">
-                <a:solidFill>
-                  <a:srgbClr val="3A3A3C"/>
-                </a:solidFill>
-                <a:latin typeface="Calibri"/>
-              </a:defRPr>
-            </a:pPr>
-            <a:r>
-              <a:t>•  Human approval on all customer-facing responses</a:t>
-            </a:r>
-          </a:p>
-        </p:txBody>
-      </p:sp>
-      <p:sp>
-        <p:nvSpPr>
-          <p:cNvPr id="32" name="Rounded Rectangle 31"/>
+          <p:cNvPr id="31" name="Rectangle 30"/>
           <p:cNvSpPr/>
           <p:nvPr/>
         </p:nvSpPr>
         <p:spPr>
           <a:xfrm>
-            <a:off x="6263640" y="3520440"/>
-            <a:ext cx="5303520" cy="2331720"/>
-          </a:xfrm>
-          <a:prstGeom prst="roundRect">
-            <a:avLst>
-              <a:gd name="adj" fmla="val 4000"/>
-            </a:avLst>
-          </a:prstGeom>
-          <a:solidFill>
-            <a:srgbClr val="FFFFFF"/>
-          </a:solidFill>
-          <a:ln w="12700">
-            <a:solidFill>
-              <a:srgbClr val="E0E0DE"/>
-            </a:solidFill>
-          </a:ln>
-        </p:spPr>
-        <p:style>
-          <a:lnRef idx="1">
-            <a:schemeClr val="accent1"/>
-          </a:lnRef>
-          <a:fillRef idx="3">
-            <a:schemeClr val="accent1"/>
-          </a:fillRef>
-          <a:effectRef idx="2">
-            <a:schemeClr val="accent1"/>
-          </a:effectRef>
-          <a:fontRef idx="minor">
-            <a:schemeClr val="lt1"/>
-          </a:fontRef>
-        </p:style>
-        <p:txBody>
-          <a:bodyPr rtlCol="0" anchor="ctr"/>
-          <a:lstStyle/>
-          <a:p>
-            <a:pPr algn="ctr"/>
-          </a:p>
-        </p:txBody>
-      </p:sp>
-      <p:sp>
-        <p:nvSpPr>
-          <p:cNvPr id="33" name="TextBox 32"/>
-          <p:cNvSpPr txBox="1"/>
-          <p:nvPr/>
-        </p:nvSpPr>
-        <p:spPr>
-          <a:xfrm>
-            <a:off x="6537960" y="3657600"/>
-            <a:ext cx="4572000" cy="274320"/>
-          </a:xfrm>
-          <a:prstGeom prst="rect">
-            <a:avLst/>
-          </a:prstGeom>
-          <a:noFill/>
-        </p:spPr>
-        <p:txBody>
-          <a:bodyPr wrap="square">
-            <a:spAutoFit/>
-          </a:bodyPr>
-          <a:lstStyle/>
-          <a:p>
-            <a:pPr algn="l">
-              <a:defRPr sz="1400" b="1" i="0">
-                <a:solidFill>
-                  <a:srgbClr val="1C1C1E"/>
-                </a:solidFill>
-                <a:latin typeface="Calibri"/>
-              </a:defRPr>
-            </a:pPr>
-            <a:r>
-              <a:t>Risk Controls</a:t>
-            </a:r>
-          </a:p>
-        </p:txBody>
-      </p:sp>
-      <p:sp>
-        <p:nvSpPr>
-          <p:cNvPr id="34" name="TextBox 33"/>
-          <p:cNvSpPr txBox="1"/>
-          <p:nvPr/>
-        </p:nvSpPr>
-        <p:spPr>
-          <a:xfrm>
-            <a:off x="6537960" y="3977639"/>
-            <a:ext cx="4754880" cy="1645920"/>
-          </a:xfrm>
-          <a:prstGeom prst="rect">
-            <a:avLst/>
-          </a:prstGeom>
-          <a:noFill/>
-        </p:spPr>
-        <p:txBody>
-          <a:bodyPr wrap="square">
-            <a:spAutoFit/>
-          </a:bodyPr>
-          <a:lstStyle/>
-          <a:p>
-            <a:pPr>
-              <a:spcAft>
-                <a:spcPts val="1100"/>
-              </a:spcAft>
-              <a:defRPr sz="1100" b="0">
-                <a:solidFill>
-                  <a:srgbClr val="3A3A3C"/>
-                </a:solidFill>
-                <a:latin typeface="Calibri"/>
-              </a:defRPr>
-            </a:pPr>
-            <a:r>
-              <a:t>•  Human approval for warranty and safety decisions</a:t>
-            </a:r>
-          </a:p>
-          <a:p>
-            <a:pPr>
-              <a:spcAft>
-                <a:spcPts val="1100"/>
-              </a:spcAft>
-              <a:defRPr sz="1100" b="0">
-                <a:solidFill>
-                  <a:srgbClr val="3A3A3C"/>
-                </a:solidFill>
-                <a:latin typeface="Calibri"/>
-              </a:defRPr>
-            </a:pPr>
-            <a:r>
-              <a:t>•  Answers sourced from approved docs only</a:t>
-            </a:r>
-          </a:p>
-          <a:p>
-            <a:pPr>
-              <a:spcAft>
-                <a:spcPts val="1100"/>
-              </a:spcAft>
-              <a:defRPr sz="1100" b="0">
-                <a:solidFill>
-                  <a:srgbClr val="3A3A3C"/>
-                </a:solidFill>
-                <a:latin typeface="Calibri"/>
-              </a:defRPr>
-            </a:pPr>
-            <a:r>
-              <a:t>•  Weekly quality review with rollback trigger</a:t>
-            </a:r>
-          </a:p>
-          <a:p>
-            <a:pPr>
-              <a:spcAft>
-                <a:spcPts val="1100"/>
-              </a:spcAft>
-              <a:defRPr sz="1100" b="0">
-                <a:solidFill>
-                  <a:srgbClr val="3A3A3C"/>
-                </a:solidFill>
-                <a:latin typeface="Calibri"/>
-              </a:defRPr>
-            </a:pPr>
-            <a:r>
-              <a:t>•  No automated warranty adjudication in Phase 1</a:t>
-            </a:r>
-          </a:p>
-        </p:txBody>
-      </p:sp>
-      <p:sp>
-        <p:nvSpPr>
-          <p:cNvPr id="35" name="Rounded Rectangle 34"/>
-          <p:cNvSpPr/>
-          <p:nvPr/>
-        </p:nvSpPr>
-        <p:spPr>
-          <a:xfrm>
-            <a:off x="731520" y="6035040"/>
-            <a:ext cx="10789920" cy="502920"/>
-          </a:xfrm>
-          <a:prstGeom prst="roundRect">
-            <a:avLst>
-              <a:gd name="adj" fmla="val 4000"/>
-            </a:avLst>
-          </a:prstGeom>
-          <a:solidFill>
-            <a:srgbClr val="FFFFFF"/>
-          </a:solidFill>
-          <a:ln w="12700">
-            <a:solidFill>
-              <a:srgbClr val="E0E0DE"/>
-            </a:solidFill>
-          </a:ln>
-        </p:spPr>
-        <p:style>
-          <a:lnRef idx="1">
-            <a:schemeClr val="accent1"/>
-          </a:lnRef>
-          <a:fillRef idx="3">
-            <a:schemeClr val="accent1"/>
-          </a:fillRef>
-          <a:effectRef idx="2">
-            <a:schemeClr val="accent1"/>
-          </a:effectRef>
-          <a:fontRef idx="minor">
-            <a:schemeClr val="lt1"/>
-          </a:fontRef>
-        </p:style>
-        <p:txBody>
-          <a:bodyPr rtlCol="0" anchor="ctr"/>
-          <a:lstStyle/>
-          <a:p>
-            <a:pPr algn="ctr"/>
-          </a:p>
-        </p:txBody>
-      </p:sp>
-      <p:sp>
-        <p:nvSpPr>
-          <p:cNvPr id="36" name="Rectangle 35"/>
-          <p:cNvSpPr/>
-          <p:nvPr/>
-        </p:nvSpPr>
-        <p:spPr>
-          <a:xfrm>
-            <a:off x="731520" y="6035040"/>
+            <a:off x="731520" y="5029200"/>
             <a:ext cx="50800" cy="502920"/>
           </a:xfrm>
           <a:prstGeom prst="rect">
@@ -15888,13 +14804,13 @@
       </p:sp>
       <p:sp>
         <p:nvSpPr>
-          <p:cNvPr id="37" name="TextBox 36"/>
-          <p:cNvSpPr txBox="1"/>
-          <p:nvPr/>
-        </p:nvSpPr>
-        <p:spPr>
-          <a:xfrm>
-            <a:off x="1051560" y="6126480"/>
+          <p:cNvPr id="32" name="TextBox 31"/>
+          <p:cNvSpPr txBox="1"/>
+          <p:nvPr/>
+        </p:nvSpPr>
+        <p:spPr>
+          <a:xfrm>
+            <a:off x="1051560" y="5120640"/>
             <a:ext cx="10241280" cy="137160"/>
           </a:xfrm>
           <a:prstGeom prst="rect">
@@ -15924,13 +14840,13 @@
       </p:sp>
       <p:sp>
         <p:nvSpPr>
-          <p:cNvPr id="38" name="TextBox 37"/>
-          <p:cNvSpPr txBox="1"/>
-          <p:nvPr/>
-        </p:nvSpPr>
-        <p:spPr>
-          <a:xfrm>
-            <a:off x="1051560" y="6263640"/>
+          <p:cNvPr id="33" name="TextBox 32"/>
+          <p:cNvSpPr txBox="1"/>
+          <p:nvPr/>
+        </p:nvSpPr>
+        <p:spPr>
+          <a:xfrm>
+            <a:off x="1051560" y="5257800"/>
             <a:ext cx="10241280" cy="228600"/>
           </a:xfrm>
           <a:prstGeom prst="rect">
@@ -15960,7 +14876,7 @@
       </p:sp>
       <p:sp>
         <p:nvSpPr>
-          <p:cNvPr id="39" name="TextBox 38"/>
+          <p:cNvPr id="34" name="TextBox 33"/>
           <p:cNvSpPr txBox="1"/>
           <p:nvPr/>
         </p:nvSpPr>
@@ -15996,7 +14912,7 @@
       </p:sp>
       <p:sp>
         <p:nvSpPr>
-          <p:cNvPr id="40" name="TextBox 39"/>
+          <p:cNvPr id="35" name="TextBox 34"/>
           <p:cNvSpPr txBox="1"/>
           <p:nvPr/>
         </p:nvSpPr>
@@ -16215,8 +15131,8 @@
         </p:nvSpPr>
         <p:spPr>
           <a:xfrm>
-            <a:off x="731520" y="1737360"/>
-            <a:ext cx="10698480" cy="868680"/>
+            <a:off x="731520" y="1783080"/>
+            <a:ext cx="10698480" cy="685800"/>
           </a:xfrm>
           <a:prstGeom prst="roundRect">
             <a:avLst>
@@ -16260,8 +15176,8 @@
         </p:nvSpPr>
         <p:spPr>
           <a:xfrm>
-            <a:off x="868680" y="1856232"/>
-            <a:ext cx="457200" cy="320040"/>
+            <a:off x="1005840" y="1938528"/>
+            <a:ext cx="502920" cy="365760"/>
           </a:xfrm>
           <a:prstGeom prst="roundRect">
             <a:avLst>
@@ -16294,7 +15210,7 @@
           <a:lstStyle/>
           <a:p>
             <a:pPr algn="ctr">
-              <a:defRPr sz="1200" b="1">
+              <a:defRPr sz="1400" b="1">
                 <a:solidFill>
                   <a:srgbClr val="FFFFFF"/>
                 </a:solidFill>
@@ -16314,22 +15230,22 @@
         </p:nvSpPr>
         <p:spPr>
           <a:xfrm>
-            <a:off x="1463040" y="1828800"/>
-            <a:ext cx="5943600" cy="320040"/>
-          </a:xfrm>
-          <a:prstGeom prst="rect">
-            <a:avLst/>
-          </a:prstGeom>
-          <a:noFill/>
-        </p:spPr>
-        <p:txBody>
-          <a:bodyPr wrap="square">
-            <a:spAutoFit/>
-          </a:bodyPr>
-          <a:lstStyle/>
-          <a:p>
-            <a:pPr algn="l">
-              <a:defRPr sz="1400" b="1" i="0">
+            <a:off x="1737360" y="1901952"/>
+            <a:ext cx="5029200" cy="365760"/>
+          </a:xfrm>
+          <a:prstGeom prst="rect">
+            <a:avLst/>
+          </a:prstGeom>
+          <a:noFill/>
+        </p:spPr>
+        <p:txBody>
+          <a:bodyPr wrap="square">
+            <a:spAutoFit/>
+          </a:bodyPr>
+          <a:lstStyle/>
+          <a:p>
+            <a:pPr algn="l">
+              <a:defRPr sz="1600" b="1" i="0">
                 <a:solidFill>
                   <a:srgbClr val="1C1C1E"/>
                 </a:solidFill>
@@ -16337,7 +15253,7 @@
               </a:defRPr>
             </a:pPr>
             <a:r>
-              <a:t>Cut first-response time by 40%</a:t>
+              <a:t>Cut first-response time</a:t>
             </a:r>
           </a:p>
         </p:txBody>
@@ -16350,22 +15266,22 @@
         </p:nvSpPr>
         <p:spPr>
           <a:xfrm>
-            <a:off x="7772400" y="1828800"/>
-            <a:ext cx="1371600" cy="320040"/>
-          </a:xfrm>
-          <a:prstGeom prst="rect">
-            <a:avLst/>
-          </a:prstGeom>
-          <a:noFill/>
-        </p:spPr>
-        <p:txBody>
-          <a:bodyPr wrap="square">
-            <a:spAutoFit/>
-          </a:bodyPr>
-          <a:lstStyle/>
-          <a:p>
-            <a:pPr algn="l">
-              <a:defRPr sz="1600" b="1" i="0">
+            <a:off x="6858000" y="1874520"/>
+            <a:ext cx="1828800" cy="411480"/>
+          </a:xfrm>
+          <a:prstGeom prst="rect">
+            <a:avLst/>
+          </a:prstGeom>
+          <a:noFill/>
+        </p:spPr>
+        <p:txBody>
+          <a:bodyPr wrap="square">
+            <a:spAutoFit/>
+          </a:bodyPr>
+          <a:lstStyle/>
+          <a:p>
+            <a:pPr algn="l">
+              <a:defRPr sz="2200" b="1" i="0">
                 <a:solidFill>
                   <a:srgbClr val="E51937"/>
                 </a:solidFill>
@@ -16386,22 +15302,22 @@
         </p:nvSpPr>
         <p:spPr>
           <a:xfrm>
-            <a:off x="9144000" y="1856232"/>
-            <a:ext cx="2011680" cy="274320"/>
-          </a:xfrm>
-          <a:prstGeom prst="rect">
-            <a:avLst/>
-          </a:prstGeom>
-          <a:noFill/>
-        </p:spPr>
-        <p:txBody>
-          <a:bodyPr wrap="square">
-            <a:spAutoFit/>
-          </a:bodyPr>
-          <a:lstStyle/>
-          <a:p>
-            <a:pPr algn="l">
-              <a:defRPr sz="1000" b="0" i="0">
+            <a:off x="8686800" y="1965960"/>
+            <a:ext cx="2743200" cy="320040"/>
+          </a:xfrm>
+          <a:prstGeom prst="rect">
+            <a:avLst/>
+          </a:prstGeom>
+          <a:noFill/>
+        </p:spPr>
+        <p:txBody>
+          <a:bodyPr wrap="square">
+            <a:spAutoFit/>
+          </a:bodyPr>
+          <a:lstStyle/>
+          <a:p>
+            <a:pPr algn="l">
+              <a:defRPr sz="1100" b="0" i="0">
                 <a:solidFill>
                   <a:srgbClr val="767676"/>
                 </a:solidFill>
@@ -16409,57 +15325,21 @@
               </a:defRPr>
             </a:pPr>
             <a:r>
-              <a:t>vs. current SLA</a:t>
-            </a:r>
-          </a:p>
-        </p:txBody>
-      </p:sp>
-      <p:sp>
-        <p:nvSpPr>
-          <p:cNvPr id="11" name="TextBox 10"/>
-          <p:cNvSpPr txBox="1"/>
-          <p:nvPr/>
-        </p:nvSpPr>
-        <p:spPr>
-          <a:xfrm>
-            <a:off x="1463040" y="2167128"/>
-            <a:ext cx="9601200" cy="411480"/>
-          </a:xfrm>
-          <a:prstGeom prst="rect">
-            <a:avLst/>
-          </a:prstGeom>
-          <a:noFill/>
-        </p:spPr>
-        <p:txBody>
-          <a:bodyPr wrap="square">
-            <a:spAutoFit/>
-          </a:bodyPr>
-          <a:lstStyle/>
-          <a:p>
-            <a:pPr algn="l">
-              <a:defRPr sz="1100" b="0" i="0">
-                <a:solidFill>
-                  <a:srgbClr val="3A3A3C"/>
-                </a:solidFill>
-                <a:latin typeface="Calibri"/>
-              </a:defRPr>
-            </a:pPr>
-            <a:r>
-              <a:t>Reduce average time-to-first-response on AXS and Hammerhead dealer support tickets by 40% within 90 days, measured weekly against the pre-pilot SLA baseline in Zendesk.</a:t>
-            </a:r>
-          </a:p>
-        </p:txBody>
-      </p:sp>
-      <p:sp>
-        <p:nvSpPr>
-          <p:cNvPr id="12" name="Rounded Rectangle 11"/>
+              <a:t>Measured weekly vs. SLA baseline</a:t>
+            </a:r>
+          </a:p>
+        </p:txBody>
+      </p:sp>
+      <p:sp>
+        <p:nvSpPr>
+          <p:cNvPr id="11" name="Rounded Rectangle 10"/>
           <p:cNvSpPr/>
           <p:nvPr/>
         </p:nvSpPr>
         <p:spPr>
           <a:xfrm>
-            <a:off x="868680" y="2770632"/>
-            <a:ext cx="457200" cy="320040"/>
+            <a:off x="1005840" y="2715768"/>
+            <a:ext cx="502920" cy="365760"/>
           </a:xfrm>
           <a:prstGeom prst="roundRect">
             <a:avLst>
@@ -16492,7 +15372,7 @@
           <a:lstStyle/>
           <a:p>
             <a:pPr algn="ctr">
-              <a:defRPr sz="1200" b="1">
+              <a:defRPr sz="1400" b="1">
                 <a:solidFill>
                   <a:srgbClr val="FFFFFF"/>
                 </a:solidFill>
@@ -16506,36 +15386,72 @@
       </p:sp>
       <p:sp>
         <p:nvSpPr>
+          <p:cNvPr id="12" name="TextBox 11"/>
+          <p:cNvSpPr txBox="1"/>
+          <p:nvPr/>
+        </p:nvSpPr>
+        <p:spPr>
+          <a:xfrm>
+            <a:off x="1737360" y="2679192"/>
+            <a:ext cx="5029200" cy="365760"/>
+          </a:xfrm>
+          <a:prstGeom prst="rect">
+            <a:avLst/>
+          </a:prstGeom>
+          <a:noFill/>
+        </p:spPr>
+        <p:txBody>
+          <a:bodyPr wrap="square">
+            <a:spAutoFit/>
+          </a:bodyPr>
+          <a:lstStyle/>
+          <a:p>
+            <a:pPr algn="l">
+              <a:defRPr sz="1600" b="1" i="0">
+                <a:solidFill>
+                  <a:srgbClr val="1C1C1E"/>
+                </a:solidFill>
+                <a:latin typeface="Calibri"/>
+              </a:defRPr>
+            </a:pPr>
+            <a:r>
+              <a:t>Resolve more tickets without escalation</a:t>
+            </a:r>
+          </a:p>
+        </p:txBody>
+      </p:sp>
+      <p:sp>
+        <p:nvSpPr>
           <p:cNvPr id="13" name="TextBox 12"/>
           <p:cNvSpPr txBox="1"/>
           <p:nvPr/>
         </p:nvSpPr>
         <p:spPr>
           <a:xfrm>
-            <a:off x="1463040" y="2743200"/>
-            <a:ext cx="5943600" cy="320040"/>
-          </a:xfrm>
-          <a:prstGeom prst="rect">
-            <a:avLst/>
-          </a:prstGeom>
-          <a:noFill/>
-        </p:spPr>
-        <p:txBody>
-          <a:bodyPr wrap="square">
-            <a:spAutoFit/>
-          </a:bodyPr>
-          <a:lstStyle/>
-          <a:p>
-            <a:pPr algn="l">
-              <a:defRPr sz="1400" b="1" i="0">
-                <a:solidFill>
-                  <a:srgbClr val="1C1C1E"/>
-                </a:solidFill>
-                <a:latin typeface="Calibri"/>
-              </a:defRPr>
-            </a:pPr>
-            <a:r>
-              <a:t>Resolve 15% more tickets without escalation</a:t>
+            <a:off x="6858000" y="2651760"/>
+            <a:ext cx="1828800" cy="411480"/>
+          </a:xfrm>
+          <a:prstGeom prst="rect">
+            <a:avLst/>
+          </a:prstGeom>
+          <a:noFill/>
+        </p:spPr>
+        <p:txBody>
+          <a:bodyPr wrap="square">
+            <a:spAutoFit/>
+          </a:bodyPr>
+          <a:lstStyle/>
+          <a:p>
+            <a:pPr algn="l">
+              <a:defRPr sz="2200" b="1" i="0">
+                <a:solidFill>
+                  <a:srgbClr val="E51937"/>
+                </a:solidFill>
+                <a:latin typeface="Calibri"/>
+              </a:defRPr>
+            </a:pPr>
+            <a:r>
+              <a:t>+15 pts</a:t>
             </a:r>
           </a:p>
         </p:txBody>
@@ -16548,58 +15464,22 @@
         </p:nvSpPr>
         <p:spPr>
           <a:xfrm>
-            <a:off x="7772400" y="2743200"/>
-            <a:ext cx="1371600" cy="320040"/>
-          </a:xfrm>
-          <a:prstGeom prst="rect">
-            <a:avLst/>
-          </a:prstGeom>
-          <a:noFill/>
-        </p:spPr>
-        <p:txBody>
-          <a:bodyPr wrap="square">
-            <a:spAutoFit/>
-          </a:bodyPr>
-          <a:lstStyle/>
-          <a:p>
-            <a:pPr algn="l">
-              <a:defRPr sz="1600" b="1" i="0">
-                <a:solidFill>
-                  <a:srgbClr val="E51937"/>
-                </a:solidFill>
-                <a:latin typeface="Calibri"/>
-              </a:defRPr>
-            </a:pPr>
-            <a:r>
-              <a:t>+15 pts</a:t>
-            </a:r>
-          </a:p>
-        </p:txBody>
-      </p:sp>
-      <p:sp>
-        <p:nvSpPr>
-          <p:cNvPr id="15" name="TextBox 14"/>
-          <p:cNvSpPr txBox="1"/>
-          <p:nvPr/>
-        </p:nvSpPr>
-        <p:spPr>
-          <a:xfrm>
-            <a:off x="9144000" y="2770632"/>
-            <a:ext cx="2011680" cy="274320"/>
-          </a:xfrm>
-          <a:prstGeom prst="rect">
-            <a:avLst/>
-          </a:prstGeom>
-          <a:noFill/>
-        </p:spPr>
-        <p:txBody>
-          <a:bodyPr wrap="square">
-            <a:spAutoFit/>
-          </a:bodyPr>
-          <a:lstStyle/>
-          <a:p>
-            <a:pPr algn="l">
-              <a:defRPr sz="1000" b="0" i="0">
+            <a:off x="8686800" y="2743200"/>
+            <a:ext cx="2743200" cy="320040"/>
+          </a:xfrm>
+          <a:prstGeom prst="rect">
+            <a:avLst/>
+          </a:prstGeom>
+          <a:noFill/>
+        </p:spPr>
+        <p:txBody>
+          <a:bodyPr wrap="square">
+            <a:spAutoFit/>
+          </a:bodyPr>
+          <a:lstStyle/>
+          <a:p>
+            <a:pPr algn="l">
+              <a:defRPr sz="1100" b="0" i="0">
                 <a:solidFill>
                   <a:srgbClr val="767676"/>
                 </a:solidFill>
@@ -16607,57 +15487,21 @@
               </a:defRPr>
             </a:pPr>
             <a:r>
-              <a:t>vs. current rate</a:t>
-            </a:r>
-          </a:p>
-        </p:txBody>
-      </p:sp>
-      <p:sp>
-        <p:nvSpPr>
-          <p:cNvPr id="16" name="TextBox 15"/>
-          <p:cNvSpPr txBox="1"/>
-          <p:nvPr/>
-        </p:nvSpPr>
-        <p:spPr>
-          <a:xfrm>
-            <a:off x="1463040" y="3081528"/>
-            <a:ext cx="9601200" cy="411480"/>
-          </a:xfrm>
-          <a:prstGeom prst="rect">
-            <a:avLst/>
-          </a:prstGeom>
-          <a:noFill/>
-        </p:spPr>
-        <p:txBody>
-          <a:bodyPr wrap="square">
-            <a:spAutoFit/>
-          </a:bodyPr>
-          <a:lstStyle/>
-          <a:p>
-            <a:pPr algn="l">
-              <a:defRPr sz="1100" b="0" i="0">
-                <a:solidFill>
-                  <a:srgbClr val="3A3A3C"/>
-                </a:solidFill>
-                <a:latin typeface="Calibri"/>
-              </a:defRPr>
-            </a:pPr>
-            <a:r>
-              <a:t>Increase the share of tickets resolved without escalation by 15 percentage points within 90 days, measured weekly against the current escalation rate.</a:t>
-            </a:r>
-          </a:p>
-        </p:txBody>
-      </p:sp>
-      <p:sp>
-        <p:nvSpPr>
-          <p:cNvPr id="17" name="Rounded Rectangle 16"/>
+              <a:t>Measured weekly vs. current rate</a:t>
+            </a:r>
+          </a:p>
+        </p:txBody>
+      </p:sp>
+      <p:sp>
+        <p:nvSpPr>
+          <p:cNvPr id="15" name="Rounded Rectangle 14"/>
           <p:cNvSpPr/>
           <p:nvPr/>
         </p:nvSpPr>
         <p:spPr>
           <a:xfrm>
-            <a:off x="731520" y="3566160"/>
-            <a:ext cx="10698480" cy="868680"/>
+            <a:off x="731520" y="3337560"/>
+            <a:ext cx="10698480" cy="685800"/>
           </a:xfrm>
           <a:prstGeom prst="roundRect">
             <a:avLst>
@@ -16695,14 +15539,14 @@
       </p:sp>
       <p:sp>
         <p:nvSpPr>
-          <p:cNvPr id="18" name="Rounded Rectangle 17"/>
+          <p:cNvPr id="16" name="Rounded Rectangle 15"/>
           <p:cNvSpPr/>
           <p:nvPr/>
         </p:nvSpPr>
         <p:spPr>
           <a:xfrm>
-            <a:off x="868680" y="3685032"/>
-            <a:ext cx="457200" cy="320040"/>
+            <a:off x="1005840" y="3493008"/>
+            <a:ext cx="502920" cy="365760"/>
           </a:xfrm>
           <a:prstGeom prst="roundRect">
             <a:avLst>
@@ -16735,7 +15579,7 @@
           <a:lstStyle/>
           <a:p>
             <a:pPr algn="ctr">
-              <a:defRPr sz="1200" b="1">
+              <a:defRPr sz="1400" b="1">
                 <a:solidFill>
                   <a:srgbClr val="FFFFFF"/>
                 </a:solidFill>
@@ -16749,100 +15593,100 @@
       </p:sp>
       <p:sp>
         <p:nvSpPr>
+          <p:cNvPr id="17" name="TextBox 16"/>
+          <p:cNvSpPr txBox="1"/>
+          <p:nvPr/>
+        </p:nvSpPr>
+        <p:spPr>
+          <a:xfrm>
+            <a:off x="1737360" y="3456432"/>
+            <a:ext cx="5029200" cy="365760"/>
+          </a:xfrm>
+          <a:prstGeom prst="rect">
+            <a:avLst/>
+          </a:prstGeom>
+          <a:noFill/>
+        </p:spPr>
+        <p:txBody>
+          <a:bodyPr wrap="square">
+            <a:spAutoFit/>
+          </a:bodyPr>
+          <a:lstStyle/>
+          <a:p>
+            <a:pPr algn="l">
+              <a:defRPr sz="1600" b="1" i="0">
+                <a:solidFill>
+                  <a:srgbClr val="1C1C1E"/>
+                </a:solidFill>
+                <a:latin typeface="Calibri"/>
+              </a:defRPr>
+            </a:pPr>
+            <a:r>
+              <a:t>AI draft acceptance rate</a:t>
+            </a:r>
+          </a:p>
+        </p:txBody>
+      </p:sp>
+      <p:sp>
+        <p:nvSpPr>
+          <p:cNvPr id="18" name="TextBox 17"/>
+          <p:cNvSpPr txBox="1"/>
+          <p:nvPr/>
+        </p:nvSpPr>
+        <p:spPr>
+          <a:xfrm>
+            <a:off x="6858000" y="3429000"/>
+            <a:ext cx="1828800" cy="411480"/>
+          </a:xfrm>
+          <a:prstGeom prst="rect">
+            <a:avLst/>
+          </a:prstGeom>
+          <a:noFill/>
+        </p:spPr>
+        <p:txBody>
+          <a:bodyPr wrap="square">
+            <a:spAutoFit/>
+          </a:bodyPr>
+          <a:lstStyle/>
+          <a:p>
+            <a:pPr algn="l">
+              <a:defRPr sz="2200" b="1" i="0">
+                <a:solidFill>
+                  <a:srgbClr val="E51937"/>
+                </a:solidFill>
+                <a:latin typeface="Calibri"/>
+              </a:defRPr>
+            </a:pPr>
+            <a:r>
+              <a:t>&gt;70%</a:t>
+            </a:r>
+          </a:p>
+        </p:txBody>
+      </p:sp>
+      <p:sp>
+        <p:nvSpPr>
           <p:cNvPr id="19" name="TextBox 18"/>
           <p:cNvSpPr txBox="1"/>
           <p:nvPr/>
         </p:nvSpPr>
         <p:spPr>
           <a:xfrm>
-            <a:off x="1463040" y="3657600"/>
-            <a:ext cx="5943600" cy="320040"/>
-          </a:xfrm>
-          <a:prstGeom prst="rect">
-            <a:avLst/>
-          </a:prstGeom>
-          <a:noFill/>
-        </p:spPr>
-        <p:txBody>
-          <a:bodyPr wrap="square">
-            <a:spAutoFit/>
-          </a:bodyPr>
-          <a:lstStyle/>
-          <a:p>
-            <a:pPr algn="l">
-              <a:defRPr sz="1400" b="1" i="0">
-                <a:solidFill>
-                  <a:srgbClr val="1C1C1E"/>
-                </a:solidFill>
-                <a:latin typeface="Calibri"/>
-              </a:defRPr>
-            </a:pPr>
-            <a:r>
-              <a:t>Reach 70%+ AI draft acceptance</a:t>
-            </a:r>
-          </a:p>
-        </p:txBody>
-      </p:sp>
-      <p:sp>
-        <p:nvSpPr>
-          <p:cNvPr id="20" name="TextBox 19"/>
-          <p:cNvSpPr txBox="1"/>
-          <p:nvPr/>
-        </p:nvSpPr>
-        <p:spPr>
-          <a:xfrm>
-            <a:off x="7772400" y="3657600"/>
-            <a:ext cx="1371600" cy="320040"/>
-          </a:xfrm>
-          <a:prstGeom prst="rect">
-            <a:avLst/>
-          </a:prstGeom>
-          <a:noFill/>
-        </p:spPr>
-        <p:txBody>
-          <a:bodyPr wrap="square">
-            <a:spAutoFit/>
-          </a:bodyPr>
-          <a:lstStyle/>
-          <a:p>
-            <a:pPr algn="l">
-              <a:defRPr sz="1600" b="1" i="0">
-                <a:solidFill>
-                  <a:srgbClr val="E51937"/>
-                </a:solidFill>
-                <a:latin typeface="Calibri"/>
-              </a:defRPr>
-            </a:pPr>
-            <a:r>
-              <a:t>&gt;70%</a:t>
-            </a:r>
-          </a:p>
-        </p:txBody>
-      </p:sp>
-      <p:sp>
-        <p:nvSpPr>
-          <p:cNvPr id="21" name="TextBox 20"/>
-          <p:cNvSpPr txBox="1"/>
-          <p:nvPr/>
-        </p:nvSpPr>
-        <p:spPr>
-          <a:xfrm>
-            <a:off x="9144000" y="3685032"/>
-            <a:ext cx="2011680" cy="274320"/>
-          </a:xfrm>
-          <a:prstGeom prst="rect">
-            <a:avLst/>
-          </a:prstGeom>
-          <a:noFill/>
-        </p:spPr>
-        <p:txBody>
-          <a:bodyPr wrap="square">
-            <a:spAutoFit/>
-          </a:bodyPr>
-          <a:lstStyle/>
-          <a:p>
-            <a:pPr algn="l">
-              <a:defRPr sz="1000" b="0" i="0">
+            <a:off x="8686800" y="3520440"/>
+            <a:ext cx="2743200" cy="320040"/>
+          </a:xfrm>
+          <a:prstGeom prst="rect">
+            <a:avLst/>
+          </a:prstGeom>
+          <a:noFill/>
+        </p:spPr>
+        <p:txBody>
+          <a:bodyPr wrap="square">
+            <a:spAutoFit/>
+          </a:bodyPr>
+          <a:lstStyle/>
+          <a:p>
+            <a:pPr algn="l">
+              <a:defRPr sz="1100" b="0" i="0">
                 <a:solidFill>
                   <a:srgbClr val="767676"/>
                 </a:solidFill>
@@ -16850,57 +15694,21 @@
               </a:defRPr>
             </a:pPr>
             <a:r>
-              <a:t>agent acceptance</a:t>
-            </a:r>
-          </a:p>
-        </p:txBody>
-      </p:sp>
-      <p:sp>
-        <p:nvSpPr>
-          <p:cNvPr id="22" name="TextBox 21"/>
-          <p:cNvSpPr txBox="1"/>
-          <p:nvPr/>
-        </p:nvSpPr>
-        <p:spPr>
-          <a:xfrm>
-            <a:off x="1463040" y="3995928"/>
-            <a:ext cx="9601200" cy="411480"/>
-          </a:xfrm>
-          <a:prstGeom prst="rect">
-            <a:avLst/>
-          </a:prstGeom>
-          <a:noFill/>
-        </p:spPr>
-        <p:txBody>
-          <a:bodyPr wrap="square">
-            <a:spAutoFit/>
-          </a:bodyPr>
-          <a:lstStyle/>
-          <a:p>
-            <a:pPr algn="l">
-              <a:defRPr sz="1100" b="0" i="0">
-                <a:solidFill>
-                  <a:srgbClr val="3A3A3C"/>
-                </a:solidFill>
-                <a:latin typeface="Calibri"/>
-              </a:defRPr>
-            </a:pPr>
-            <a:r>
-              <a:t>Achieve a 70% or higher rate of support agents approving the AI-drafted response (with minor or no edits) by day 90. Below 50% at day 45 triggers a scope review.</a:t>
-            </a:r>
-          </a:p>
-        </p:txBody>
-      </p:sp>
-      <p:sp>
-        <p:nvSpPr>
-          <p:cNvPr id="23" name="Rounded Rectangle 22"/>
+              <a:t>Below 50% at day 45 triggers scope review</a:t>
+            </a:r>
+          </a:p>
+        </p:txBody>
+      </p:sp>
+      <p:sp>
+        <p:nvSpPr>
+          <p:cNvPr id="20" name="Rounded Rectangle 19"/>
           <p:cNvSpPr/>
           <p:nvPr/>
         </p:nvSpPr>
         <p:spPr>
           <a:xfrm>
-            <a:off x="868680" y="4599432"/>
-            <a:ext cx="457200" cy="320040"/>
+            <a:off x="1005840" y="4270248"/>
+            <a:ext cx="502920" cy="365760"/>
           </a:xfrm>
           <a:prstGeom prst="roundRect">
             <a:avLst>
@@ -16933,7 +15741,7 @@
           <a:lstStyle/>
           <a:p>
             <a:pPr algn="ctr">
-              <a:defRPr sz="1200" b="1">
+              <a:defRPr sz="1400" b="1">
                 <a:solidFill>
                   <a:srgbClr val="FFFFFF"/>
                 </a:solidFill>
@@ -16947,28 +15755,28 @@
       </p:sp>
       <p:sp>
         <p:nvSpPr>
-          <p:cNvPr id="24" name="TextBox 23"/>
-          <p:cNvSpPr txBox="1"/>
-          <p:nvPr/>
-        </p:nvSpPr>
-        <p:spPr>
-          <a:xfrm>
-            <a:off x="1463040" y="4572000"/>
-            <a:ext cx="5943600" cy="320040"/>
-          </a:xfrm>
-          <a:prstGeom prst="rect">
-            <a:avLst/>
-          </a:prstGeom>
-          <a:noFill/>
-        </p:spPr>
-        <p:txBody>
-          <a:bodyPr wrap="square">
-            <a:spAutoFit/>
-          </a:bodyPr>
-          <a:lstStyle/>
-          <a:p>
-            <a:pPr algn="l">
-              <a:defRPr sz="1400" b="1" i="0">
+          <p:cNvPr id="21" name="TextBox 20"/>
+          <p:cNvSpPr txBox="1"/>
+          <p:nvPr/>
+        </p:nvSpPr>
+        <p:spPr>
+          <a:xfrm>
+            <a:off x="1737360" y="4233672"/>
+            <a:ext cx="5029200" cy="365760"/>
+          </a:xfrm>
+          <a:prstGeom prst="rect">
+            <a:avLst/>
+          </a:prstGeom>
+          <a:noFill/>
+        </p:spPr>
+        <p:txBody>
+          <a:bodyPr wrap="square">
+            <a:spAutoFit/>
+          </a:bodyPr>
+          <a:lstStyle/>
+          <a:p>
+            <a:pPr algn="l">
+              <a:defRPr sz="1600" b="1" i="0">
                 <a:solidFill>
                   <a:srgbClr val="1C1C1E"/>
                 </a:solidFill>
@@ -16976,35 +15784,35 @@
               </a:defRPr>
             </a:pPr>
             <a:r>
-              <a:t>Increase agent throughput by 25%</a:t>
-            </a:r>
-          </a:p>
-        </p:txBody>
-      </p:sp>
-      <p:sp>
-        <p:nvSpPr>
-          <p:cNvPr id="25" name="TextBox 24"/>
-          <p:cNvSpPr txBox="1"/>
-          <p:nvPr/>
-        </p:nvSpPr>
-        <p:spPr>
-          <a:xfrm>
-            <a:off x="7772400" y="4572000"/>
-            <a:ext cx="1371600" cy="320040"/>
-          </a:xfrm>
-          <a:prstGeom prst="rect">
-            <a:avLst/>
-          </a:prstGeom>
-          <a:noFill/>
-        </p:spPr>
-        <p:txBody>
-          <a:bodyPr wrap="square">
-            <a:spAutoFit/>
-          </a:bodyPr>
-          <a:lstStyle/>
-          <a:p>
-            <a:pPr algn="l">
-              <a:defRPr sz="1600" b="1" i="0">
+              <a:t>Increase agent throughput</a:t>
+            </a:r>
+          </a:p>
+        </p:txBody>
+      </p:sp>
+      <p:sp>
+        <p:nvSpPr>
+          <p:cNvPr id="22" name="TextBox 21"/>
+          <p:cNvSpPr txBox="1"/>
+          <p:nvPr/>
+        </p:nvSpPr>
+        <p:spPr>
+          <a:xfrm>
+            <a:off x="6858000" y="4206240"/>
+            <a:ext cx="1828800" cy="411480"/>
+          </a:xfrm>
+          <a:prstGeom prst="rect">
+            <a:avLst/>
+          </a:prstGeom>
+          <a:noFill/>
+        </p:spPr>
+        <p:txBody>
+          <a:bodyPr wrap="square">
+            <a:spAutoFit/>
+          </a:bodyPr>
+          <a:lstStyle/>
+          <a:p>
+            <a:pPr algn="l">
+              <a:defRPr sz="2200" b="1" i="0">
                 <a:solidFill>
                   <a:srgbClr val="E51937"/>
                 </a:solidFill>
@@ -17019,28 +15827,28 @@
       </p:sp>
       <p:sp>
         <p:nvSpPr>
-          <p:cNvPr id="26" name="TextBox 25"/>
-          <p:cNvSpPr txBox="1"/>
-          <p:nvPr/>
-        </p:nvSpPr>
-        <p:spPr>
-          <a:xfrm>
-            <a:off x="9144000" y="4599432"/>
-            <a:ext cx="2011680" cy="274320"/>
-          </a:xfrm>
-          <a:prstGeom prst="rect">
-            <a:avLst/>
-          </a:prstGeom>
-          <a:noFill/>
-        </p:spPr>
-        <p:txBody>
-          <a:bodyPr wrap="square">
-            <a:spAutoFit/>
-          </a:bodyPr>
-          <a:lstStyle/>
-          <a:p>
-            <a:pPr algn="l">
-              <a:defRPr sz="1000" b="0" i="0">
+          <p:cNvPr id="23" name="TextBox 22"/>
+          <p:cNvSpPr txBox="1"/>
+          <p:nvPr/>
+        </p:nvSpPr>
+        <p:spPr>
+          <a:xfrm>
+            <a:off x="8686800" y="4297680"/>
+            <a:ext cx="2743200" cy="320040"/>
+          </a:xfrm>
+          <a:prstGeom prst="rect">
+            <a:avLst/>
+          </a:prstGeom>
+          <a:noFill/>
+        </p:spPr>
+        <p:txBody>
+          <a:bodyPr wrap="square">
+            <a:spAutoFit/>
+          </a:bodyPr>
+          <a:lstStyle/>
+          <a:p>
+            <a:pPr algn="l">
+              <a:defRPr sz="1100" b="0" i="0">
                 <a:solidFill>
                   <a:srgbClr val="767676"/>
                 </a:solidFill>
@@ -17048,57 +15856,21 @@
               </a:defRPr>
             </a:pPr>
             <a:r>
-              <a:t>tickets/agent/day</a:t>
-            </a:r>
-          </a:p>
-        </p:txBody>
-      </p:sp>
-      <p:sp>
-        <p:nvSpPr>
-          <p:cNvPr id="27" name="TextBox 26"/>
-          <p:cNvSpPr txBox="1"/>
-          <p:nvPr/>
-        </p:nvSpPr>
-        <p:spPr>
-          <a:xfrm>
-            <a:off x="1463040" y="4910328"/>
-            <a:ext cx="9601200" cy="411480"/>
-          </a:xfrm>
-          <a:prstGeom prst="rect">
-            <a:avLst/>
-          </a:prstGeom>
-          <a:noFill/>
-        </p:spPr>
-        <p:txBody>
-          <a:bodyPr wrap="square">
-            <a:spAutoFit/>
-          </a:bodyPr>
-          <a:lstStyle/>
-          <a:p>
-            <a:pPr algn="l">
-              <a:defRPr sz="1100" b="0" i="0">
-                <a:solidFill>
-                  <a:srgbClr val="3A3A3C"/>
-                </a:solidFill>
-                <a:latin typeface="Calibri"/>
-              </a:defRPr>
-            </a:pPr>
-            <a:r>
-              <a:t>Raise tickets handled per agent per day by 25% within 90 days. Confirms AI assistance translates into real productivity.</a:t>
-            </a:r>
-          </a:p>
-        </p:txBody>
-      </p:sp>
-      <p:sp>
-        <p:nvSpPr>
-          <p:cNvPr id="28" name="Rounded Rectangle 27"/>
+              <a:t>Tickets handled per agent per day</a:t>
+            </a:r>
+          </a:p>
+        </p:txBody>
+      </p:sp>
+      <p:sp>
+        <p:nvSpPr>
+          <p:cNvPr id="24" name="Rounded Rectangle 23"/>
           <p:cNvSpPr/>
           <p:nvPr/>
         </p:nvSpPr>
         <p:spPr>
           <a:xfrm>
-            <a:off x="731520" y="5394960"/>
-            <a:ext cx="10698480" cy="868680"/>
+            <a:off x="731520" y="4892040"/>
+            <a:ext cx="10698480" cy="685800"/>
           </a:xfrm>
           <a:prstGeom prst="roundRect">
             <a:avLst>
@@ -17136,14 +15908,14 @@
       </p:sp>
       <p:sp>
         <p:nvSpPr>
-          <p:cNvPr id="29" name="Rounded Rectangle 28"/>
+          <p:cNvPr id="25" name="Rounded Rectangle 24"/>
           <p:cNvSpPr/>
           <p:nvPr/>
         </p:nvSpPr>
         <p:spPr>
           <a:xfrm>
-            <a:off x="868680" y="5513832"/>
-            <a:ext cx="457200" cy="320040"/>
+            <a:off x="1005840" y="5047488"/>
+            <a:ext cx="502920" cy="365760"/>
           </a:xfrm>
           <a:prstGeom prst="roundRect">
             <a:avLst>
@@ -17176,7 +15948,7 @@
           <a:lstStyle/>
           <a:p>
             <a:pPr algn="ctr">
-              <a:defRPr sz="1200" b="1">
+              <a:defRPr sz="1400" b="1">
                 <a:solidFill>
                   <a:srgbClr val="FFFFFF"/>
                 </a:solidFill>
@@ -17190,310 +15962,151 @@
       </p:sp>
       <p:sp>
         <p:nvSpPr>
+          <p:cNvPr id="26" name="TextBox 25"/>
+          <p:cNvSpPr txBox="1"/>
+          <p:nvPr/>
+        </p:nvSpPr>
+        <p:spPr>
+          <a:xfrm>
+            <a:off x="1737360" y="5010912"/>
+            <a:ext cx="5029200" cy="365760"/>
+          </a:xfrm>
+          <a:prstGeom prst="rect">
+            <a:avLst/>
+          </a:prstGeom>
+          <a:noFill/>
+        </p:spPr>
+        <p:txBody>
+          <a:bodyPr wrap="square">
+            <a:spAutoFit/>
+          </a:bodyPr>
+          <a:lstStyle/>
+          <a:p>
+            <a:pPr algn="l">
+              <a:defRPr sz="1600" b="1" i="0">
+                <a:solidFill>
+                  <a:srgbClr val="1C1C1E"/>
+                </a:solidFill>
+                <a:latin typeface="Calibri"/>
+              </a:defRPr>
+            </a:pPr>
+            <a:r>
+              <a:t>Hold customer satisfaction flat</a:t>
+            </a:r>
+          </a:p>
+        </p:txBody>
+      </p:sp>
+      <p:sp>
+        <p:nvSpPr>
+          <p:cNvPr id="27" name="TextBox 26"/>
+          <p:cNvSpPr txBox="1"/>
+          <p:nvPr/>
+        </p:nvSpPr>
+        <p:spPr>
+          <a:xfrm>
+            <a:off x="6858000" y="4983480"/>
+            <a:ext cx="1828800" cy="411480"/>
+          </a:xfrm>
+          <a:prstGeom prst="rect">
+            <a:avLst/>
+          </a:prstGeom>
+          <a:noFill/>
+        </p:spPr>
+        <p:txBody>
+          <a:bodyPr wrap="square">
+            <a:spAutoFit/>
+          </a:bodyPr>
+          <a:lstStyle/>
+          <a:p>
+            <a:pPr algn="l">
+              <a:defRPr sz="2200" b="1" i="0">
+                <a:solidFill>
+                  <a:srgbClr val="E51937"/>
+                </a:solidFill>
+                <a:latin typeface="Calibri"/>
+              </a:defRPr>
+            </a:pPr>
+            <a:r>
+              <a:t>No decline</a:t>
+            </a:r>
+          </a:p>
+        </p:txBody>
+      </p:sp>
+      <p:sp>
+        <p:nvSpPr>
+          <p:cNvPr id="28" name="TextBox 27"/>
+          <p:cNvSpPr txBox="1"/>
+          <p:nvPr/>
+        </p:nvSpPr>
+        <p:spPr>
+          <a:xfrm>
+            <a:off x="8686800" y="5074920"/>
+            <a:ext cx="2743200" cy="320040"/>
+          </a:xfrm>
+          <a:prstGeom prst="rect">
+            <a:avLst/>
+          </a:prstGeom>
+          <a:noFill/>
+        </p:spPr>
+        <p:txBody>
+          <a:bodyPr wrap="square">
+            <a:spAutoFit/>
+          </a:bodyPr>
+          <a:lstStyle/>
+          <a:p>
+            <a:pPr algn="l">
+              <a:defRPr sz="1100" b="0" i="0">
+                <a:solidFill>
+                  <a:srgbClr val="767676"/>
+                </a:solidFill>
+                <a:latin typeface="Calibri"/>
+              </a:defRPr>
+            </a:pPr>
+            <a:r>
+              <a:t>Any sustained drop triggers rollback</a:t>
+            </a:r>
+          </a:p>
+        </p:txBody>
+      </p:sp>
+      <p:sp>
+        <p:nvSpPr>
+          <p:cNvPr id="29" name="TextBox 28"/>
+          <p:cNvSpPr txBox="1"/>
+          <p:nvPr/>
+        </p:nvSpPr>
+        <p:spPr>
+          <a:xfrm>
+            <a:off x="731520" y="5852160"/>
+            <a:ext cx="10698480" cy="274320"/>
+          </a:xfrm>
+          <a:prstGeom prst="rect">
+            <a:avLst/>
+          </a:prstGeom>
+          <a:noFill/>
+        </p:spPr>
+        <p:txBody>
+          <a:bodyPr wrap="square">
+            <a:spAutoFit/>
+          </a:bodyPr>
+          <a:lstStyle/>
+          <a:p>
+            <a:pPr algn="ctr">
+              <a:defRPr sz="1200" b="0" i="0">
+                <a:solidFill>
+                  <a:srgbClr val="767676"/>
+                </a:solidFill>
+                <a:latin typeface="Calibri"/>
+              </a:defRPr>
+            </a:pPr>
+            <a:r>
+              <a:t>Kill criteria: 2 weeks quality drop, any safety error reaching a dealer, or dealer opt-out above 15%</a:t>
+            </a:r>
+          </a:p>
+        </p:txBody>
+      </p:sp>
+      <p:sp>
+        <p:nvSpPr>
           <p:cNvPr id="30" name="TextBox 29"/>
-          <p:cNvSpPr txBox="1"/>
-          <p:nvPr/>
-        </p:nvSpPr>
-        <p:spPr>
-          <a:xfrm>
-            <a:off x="1463040" y="5486400"/>
-            <a:ext cx="5943600" cy="320040"/>
-          </a:xfrm>
-          <a:prstGeom prst="rect">
-            <a:avLst/>
-          </a:prstGeom>
-          <a:noFill/>
-        </p:spPr>
-        <p:txBody>
-          <a:bodyPr wrap="square">
-            <a:spAutoFit/>
-          </a:bodyPr>
-          <a:lstStyle/>
-          <a:p>
-            <a:pPr algn="l">
-              <a:defRPr sz="1400" b="1" i="0">
-                <a:solidFill>
-                  <a:srgbClr val="1C1C1E"/>
-                </a:solidFill>
-                <a:latin typeface="Calibri"/>
-              </a:defRPr>
-            </a:pPr>
-            <a:r>
-              <a:t>Hold customer satisfaction flat</a:t>
-            </a:r>
-          </a:p>
-        </p:txBody>
-      </p:sp>
-      <p:sp>
-        <p:nvSpPr>
-          <p:cNvPr id="31" name="TextBox 30"/>
-          <p:cNvSpPr txBox="1"/>
-          <p:nvPr/>
-        </p:nvSpPr>
-        <p:spPr>
-          <a:xfrm>
-            <a:off x="7772400" y="5486400"/>
-            <a:ext cx="1371600" cy="320040"/>
-          </a:xfrm>
-          <a:prstGeom prst="rect">
-            <a:avLst/>
-          </a:prstGeom>
-          <a:noFill/>
-        </p:spPr>
-        <p:txBody>
-          <a:bodyPr wrap="square">
-            <a:spAutoFit/>
-          </a:bodyPr>
-          <a:lstStyle/>
-          <a:p>
-            <a:pPr algn="l">
-              <a:defRPr sz="1600" b="1" i="0">
-                <a:solidFill>
-                  <a:srgbClr val="E51937"/>
-                </a:solidFill>
-                <a:latin typeface="Calibri"/>
-              </a:defRPr>
-            </a:pPr>
-            <a:r>
-              <a:t>No decline</a:t>
-            </a:r>
-          </a:p>
-        </p:txBody>
-      </p:sp>
-      <p:sp>
-        <p:nvSpPr>
-          <p:cNvPr id="32" name="TextBox 31"/>
-          <p:cNvSpPr txBox="1"/>
-          <p:nvPr/>
-        </p:nvSpPr>
-        <p:spPr>
-          <a:xfrm>
-            <a:off x="9144000" y="5513832"/>
-            <a:ext cx="2011680" cy="274320"/>
-          </a:xfrm>
-          <a:prstGeom prst="rect">
-            <a:avLst/>
-          </a:prstGeom>
-          <a:noFill/>
-        </p:spPr>
-        <p:txBody>
-          <a:bodyPr wrap="square">
-            <a:spAutoFit/>
-          </a:bodyPr>
-          <a:lstStyle/>
-          <a:p>
-            <a:pPr algn="l">
-              <a:defRPr sz="1000" b="0" i="0">
-                <a:solidFill>
-                  <a:srgbClr val="767676"/>
-                </a:solidFill>
-                <a:latin typeface="Calibri"/>
-              </a:defRPr>
-            </a:pPr>
-            <a:r>
-              <a:t>CSAT holds flat</a:t>
-            </a:r>
-          </a:p>
-        </p:txBody>
-      </p:sp>
-      <p:sp>
-        <p:nvSpPr>
-          <p:cNvPr id="33" name="TextBox 32"/>
-          <p:cNvSpPr txBox="1"/>
-          <p:nvPr/>
-        </p:nvSpPr>
-        <p:spPr>
-          <a:xfrm>
-            <a:off x="1463040" y="5824728"/>
-            <a:ext cx="9601200" cy="411480"/>
-          </a:xfrm>
-          <a:prstGeom prst="rect">
-            <a:avLst/>
-          </a:prstGeom>
-          <a:noFill/>
-        </p:spPr>
-        <p:txBody>
-          <a:bodyPr wrap="square">
-            <a:spAutoFit/>
-          </a:bodyPr>
-          <a:lstStyle/>
-          <a:p>
-            <a:pPr algn="l">
-              <a:defRPr sz="1100" b="0" i="0">
-                <a:solidFill>
-                  <a:srgbClr val="3A3A3C"/>
-                </a:solidFill>
-                <a:latin typeface="Calibri"/>
-              </a:defRPr>
-            </a:pPr>
-            <a:r>
-              <a:t>Maintain or improve CSAT scores on AI-assisted tickets. Any sustained decline triggers rollback. Trustpilot (1.6/5.0) should stabilize by day 90.</a:t>
-            </a:r>
-          </a:p>
-        </p:txBody>
-      </p:sp>
-      <p:sp>
-        <p:nvSpPr>
-          <p:cNvPr id="34" name="Rounded Rectangle 33"/>
-          <p:cNvSpPr/>
-          <p:nvPr/>
-        </p:nvSpPr>
-        <p:spPr>
-          <a:xfrm>
-            <a:off x="731520" y="6355080"/>
-            <a:ext cx="10789920" cy="320040"/>
-          </a:xfrm>
-          <a:prstGeom prst="roundRect">
-            <a:avLst>
-              <a:gd name="adj" fmla="val 4000"/>
-            </a:avLst>
-          </a:prstGeom>
-          <a:solidFill>
-            <a:srgbClr val="FFFFFF"/>
-          </a:solidFill>
-          <a:ln w="12700">
-            <a:solidFill>
-              <a:srgbClr val="E0E0DE"/>
-            </a:solidFill>
-          </a:ln>
-        </p:spPr>
-        <p:style>
-          <a:lnRef idx="1">
-            <a:schemeClr val="accent1"/>
-          </a:lnRef>
-          <a:fillRef idx="3">
-            <a:schemeClr val="accent1"/>
-          </a:fillRef>
-          <a:effectRef idx="2">
-            <a:schemeClr val="accent1"/>
-          </a:effectRef>
-          <a:fontRef idx="minor">
-            <a:schemeClr val="lt1"/>
-          </a:fontRef>
-        </p:style>
-        <p:txBody>
-          <a:bodyPr rtlCol="0" anchor="ctr"/>
-          <a:lstStyle/>
-          <a:p>
-            <a:pPr algn="ctr"/>
-          </a:p>
-        </p:txBody>
-      </p:sp>
-      <p:sp>
-        <p:nvSpPr>
-          <p:cNvPr id="35" name="Rectangle 34"/>
-          <p:cNvSpPr/>
-          <p:nvPr/>
-        </p:nvSpPr>
-        <p:spPr>
-          <a:xfrm>
-            <a:off x="731520" y="6355080"/>
-            <a:ext cx="50800" cy="320040"/>
-          </a:xfrm>
-          <a:prstGeom prst="rect">
-            <a:avLst/>
-          </a:prstGeom>
-          <a:solidFill>
-            <a:srgbClr val="767676"/>
-          </a:solidFill>
-          <a:ln>
-            <a:noFill/>
-          </a:ln>
-        </p:spPr>
-        <p:style>
-          <a:lnRef idx="1">
-            <a:schemeClr val="accent1"/>
-          </a:lnRef>
-          <a:fillRef idx="3">
-            <a:schemeClr val="accent1"/>
-          </a:fillRef>
-          <a:effectRef idx="2">
-            <a:schemeClr val="accent1"/>
-          </a:effectRef>
-          <a:fontRef idx="minor">
-            <a:schemeClr val="lt1"/>
-          </a:fontRef>
-        </p:style>
-        <p:txBody>
-          <a:bodyPr rtlCol="0" anchor="ctr"/>
-          <a:lstStyle/>
-          <a:p>
-            <a:pPr algn="ctr"/>
-          </a:p>
-        </p:txBody>
-      </p:sp>
-      <p:sp>
-        <p:nvSpPr>
-          <p:cNvPr id="36" name="TextBox 35"/>
-          <p:cNvSpPr txBox="1"/>
-          <p:nvPr/>
-        </p:nvSpPr>
-        <p:spPr>
-          <a:xfrm>
-            <a:off x="1051560" y="6446520"/>
-            <a:ext cx="10241280" cy="-45720"/>
-          </a:xfrm>
-          <a:prstGeom prst="rect">
-            <a:avLst/>
-          </a:prstGeom>
-          <a:noFill/>
-        </p:spPr>
-        <p:txBody>
-          <a:bodyPr wrap="square">
-            <a:spAutoFit/>
-          </a:bodyPr>
-          <a:lstStyle/>
-          <a:p>
-            <a:pPr algn="l">
-              <a:defRPr sz="1200" b="0" i="1">
-                <a:solidFill>
-                  <a:srgbClr val="3A3A3C"/>
-                </a:solidFill>
-                <a:latin typeface="Calibri"/>
-              </a:defRPr>
-            </a:pPr>
-            <a:r>
-              <a:t>“Kill criteria: 2 weeks of quality degradation, any safety error reaching a dealer without review, or dealer opt-out above 15%.”</a:t>
-            </a:r>
-          </a:p>
-        </p:txBody>
-      </p:sp>
-      <p:sp>
-        <p:nvSpPr>
-          <p:cNvPr id="37" name="TextBox 36"/>
-          <p:cNvSpPr txBox="1"/>
-          <p:nvPr/>
-        </p:nvSpPr>
-        <p:spPr>
-          <a:xfrm>
-            <a:off x="1051560" y="6400800"/>
-            <a:ext cx="10241280" cy="228600"/>
-          </a:xfrm>
-          <a:prstGeom prst="rect">
-            <a:avLst/>
-          </a:prstGeom>
-          <a:noFill/>
-        </p:spPr>
-        <p:txBody>
-          <a:bodyPr wrap="square">
-            <a:spAutoFit/>
-          </a:bodyPr>
-          <a:lstStyle/>
-          <a:p>
-            <a:pPr algn="l">
-              <a:defRPr sz="1000" b="1" i="0">
-                <a:solidFill>
-                  <a:srgbClr val="767676"/>
-                </a:solidFill>
-                <a:latin typeface="Calibri"/>
-              </a:defRPr>
-            </a:pPr>
-          </a:p>
-        </p:txBody>
-      </p:sp>
-      <p:sp>
-        <p:nvSpPr>
-          <p:cNvPr id="38" name="TextBox 37"/>
           <p:cNvSpPr txBox="1"/>
           <p:nvPr/>
         </p:nvSpPr>
@@ -17529,7 +16142,7 @@
       </p:sp>
       <p:sp>
         <p:nvSpPr>
-          <p:cNvPr id="39" name="TextBox 38"/>
+          <p:cNvPr id="31" name="TextBox 30"/>
           <p:cNvSpPr txBox="1"/>
           <p:nvPr/>
         </p:nvSpPr>
@@ -19571,7 +18184,7 @@
         </p:nvSpPr>
         <p:spPr>
           <a:xfrm>
-            <a:off x="731520" y="5486400"/>
+            <a:off x="731520" y="5577840"/>
             <a:ext cx="10058400" cy="228600"/>
           </a:xfrm>
           <a:prstGeom prst="rect">
@@ -19585,7 +18198,7 @@
           </a:bodyPr>
           <a:lstStyle/>
           <a:p>
-            <a:pPr algn="l">
+            <a:pPr algn="ctr">
               <a:defRPr sz="900" b="0" i="0">
                 <a:solidFill>
                   <a:srgbClr val="767676"/>
@@ -19594,7 +18207,7 @@
               </a:defRPr>
             </a:pPr>
             <a:r>
-              <a:t>G1-G5 = SMART Goals  |  Day-45 checkpoint triggers scope review if draft acceptance &lt; 50%  |  Day-90 is the formal go/no-go decision</a:t>
+              <a:t>Day-45 checkpoint: scope review if draft acceptance &lt; 50%  |  Day-90: go / no-go decision</a:t>
             </a:r>
           </a:p>
         </p:txBody>
@@ -19602,285 +18215,6 @@
       <p:sp>
         <p:nvSpPr>
           <p:cNvPr id="53" name="TextBox 52"/>
-          <p:cNvSpPr txBox="1"/>
-          <p:nvPr/>
-        </p:nvSpPr>
-        <p:spPr>
-          <a:xfrm>
-            <a:off x="731520" y="5897880"/>
-            <a:ext cx="2286000" cy="228600"/>
-          </a:xfrm>
-          <a:prstGeom prst="rect">
-            <a:avLst/>
-          </a:prstGeom>
-          <a:noFill/>
-        </p:spPr>
-        <p:txBody>
-          <a:bodyPr wrap="square">
-            <a:spAutoFit/>
-          </a:bodyPr>
-          <a:lstStyle/>
-          <a:p>
-            <a:pPr algn="l">
-              <a:defRPr sz="1000" b="1" i="0">
-                <a:solidFill>
-                  <a:srgbClr val="1C1C1E"/>
-                </a:solidFill>
-                <a:latin typeface="Calibri"/>
-              </a:defRPr>
-            </a:pPr>
-            <a:r>
-              <a:t>Full Year-1 Phasing</a:t>
-            </a:r>
-          </a:p>
-        </p:txBody>
-      </p:sp>
-      <p:sp>
-        <p:nvSpPr>
-          <p:cNvPr id="54" name="Rounded Rectangle 53"/>
-          <p:cNvSpPr/>
-          <p:nvPr/>
-        </p:nvSpPr>
-        <p:spPr>
-          <a:xfrm>
-            <a:off x="3200400" y="5897880"/>
-            <a:ext cx="2057400" cy="228600"/>
-          </a:xfrm>
-          <a:prstGeom prst="roundRect">
-            <a:avLst>
-              <a:gd name="adj" fmla="val 15000"/>
-            </a:avLst>
-          </a:prstGeom>
-          <a:solidFill>
-            <a:srgbClr val="2D5F8A"/>
-          </a:solidFill>
-          <a:ln>
-            <a:noFill/>
-          </a:ln>
-        </p:spPr>
-        <p:style>
-          <a:lnRef idx="1">
-            <a:schemeClr val="accent1"/>
-          </a:lnRef>
-          <a:fillRef idx="3">
-            <a:schemeClr val="accent1"/>
-          </a:fillRef>
-          <a:effectRef idx="2">
-            <a:schemeClr val="accent1"/>
-          </a:effectRef>
-          <a:fontRef idx="minor">
-            <a:schemeClr val="lt1"/>
-          </a:fontRef>
-        </p:style>
-        <p:txBody>
-          <a:bodyPr rtlCol="0" anchor="ctr"/>
-          <a:lstStyle/>
-          <a:p>
-            <a:pPr algn="ctr"/>
-          </a:p>
-        </p:txBody>
-      </p:sp>
-      <p:sp>
-        <p:nvSpPr>
-          <p:cNvPr id="55" name="TextBox 54"/>
-          <p:cNvSpPr txBox="1"/>
-          <p:nvPr/>
-        </p:nvSpPr>
-        <p:spPr>
-          <a:xfrm>
-            <a:off x="3291840" y="5897880"/>
-            <a:ext cx="1920240" cy="228600"/>
-          </a:xfrm>
-          <a:prstGeom prst="rect">
-            <a:avLst/>
-          </a:prstGeom>
-          <a:noFill/>
-        </p:spPr>
-        <p:txBody>
-          <a:bodyPr wrap="square">
-            <a:spAutoFit/>
-          </a:bodyPr>
-          <a:lstStyle/>
-          <a:p>
-            <a:pPr algn="l">
-              <a:defRPr sz="700" b="0" i="0">
-                <a:solidFill>
-                  <a:srgbClr val="FFFFFF"/>
-                </a:solidFill>
-                <a:latin typeface="Calibri"/>
-              </a:defRPr>
-            </a:pPr>
-            <a:r>
-              <a:t>Phase 1: Support Pilot</a:t>
-            </a:r>
-          </a:p>
-        </p:txBody>
-      </p:sp>
-      <p:sp>
-        <p:nvSpPr>
-          <p:cNvPr id="56" name="Rounded Rectangle 55"/>
-          <p:cNvSpPr/>
-          <p:nvPr/>
-        </p:nvSpPr>
-        <p:spPr>
-          <a:xfrm>
-            <a:off x="5257800" y="5897880"/>
-            <a:ext cx="2057400" cy="228600"/>
-          </a:xfrm>
-          <a:prstGeom prst="roundRect">
-            <a:avLst>
-              <a:gd name="adj" fmla="val 15000"/>
-            </a:avLst>
-          </a:prstGeom>
-          <a:solidFill>
-            <a:srgbClr val="D4E4F0"/>
-          </a:solidFill>
-          <a:ln>
-            <a:noFill/>
-          </a:ln>
-        </p:spPr>
-        <p:style>
-          <a:lnRef idx="1">
-            <a:schemeClr val="accent1"/>
-          </a:lnRef>
-          <a:fillRef idx="3">
-            <a:schemeClr val="accent1"/>
-          </a:fillRef>
-          <a:effectRef idx="2">
-            <a:schemeClr val="accent1"/>
-          </a:effectRef>
-          <a:fontRef idx="minor">
-            <a:schemeClr val="lt1"/>
-          </a:fontRef>
-        </p:style>
-        <p:txBody>
-          <a:bodyPr rtlCol="0" anchor="ctr"/>
-          <a:lstStyle/>
-          <a:p>
-            <a:pPr algn="ctr"/>
-          </a:p>
-        </p:txBody>
-      </p:sp>
-      <p:sp>
-        <p:nvSpPr>
-          <p:cNvPr id="57" name="TextBox 56"/>
-          <p:cNvSpPr txBox="1"/>
-          <p:nvPr/>
-        </p:nvSpPr>
-        <p:spPr>
-          <a:xfrm>
-            <a:off x="5349240" y="5897880"/>
-            <a:ext cx="1920240" cy="228600"/>
-          </a:xfrm>
-          <a:prstGeom prst="rect">
-            <a:avLst/>
-          </a:prstGeom>
-          <a:noFill/>
-        </p:spPr>
-        <p:txBody>
-          <a:bodyPr wrap="square">
-            <a:spAutoFit/>
-          </a:bodyPr>
-          <a:lstStyle/>
-          <a:p>
-            <a:pPr algn="l">
-              <a:defRPr sz="700" b="0" i="0">
-                <a:solidFill>
-                  <a:srgbClr val="1C1C1E"/>
-                </a:solidFill>
-                <a:latin typeface="Calibri"/>
-              </a:defRPr>
-            </a:pPr>
-            <a:r>
-              <a:t>Phase 2: Data Foundation</a:t>
-            </a:r>
-          </a:p>
-        </p:txBody>
-      </p:sp>
-      <p:sp>
-        <p:nvSpPr>
-          <p:cNvPr id="58" name="Rounded Rectangle 57"/>
-          <p:cNvSpPr/>
-          <p:nvPr/>
-        </p:nvSpPr>
-        <p:spPr>
-          <a:xfrm>
-            <a:off x="7315200" y="5897880"/>
-            <a:ext cx="4114800" cy="228600"/>
-          </a:xfrm>
-          <a:prstGeom prst="roundRect">
-            <a:avLst>
-              <a:gd name="adj" fmla="val 15000"/>
-            </a:avLst>
-          </a:prstGeom>
-          <a:solidFill>
-            <a:srgbClr val="D4E4F0"/>
-          </a:solidFill>
-          <a:ln>
-            <a:noFill/>
-          </a:ln>
-        </p:spPr>
-        <p:style>
-          <a:lnRef idx="1">
-            <a:schemeClr val="accent1"/>
-          </a:lnRef>
-          <a:fillRef idx="3">
-            <a:schemeClr val="accent1"/>
-          </a:fillRef>
-          <a:effectRef idx="2">
-            <a:schemeClr val="accent1"/>
-          </a:effectRef>
-          <a:fontRef idx="minor">
-            <a:schemeClr val="lt1"/>
-          </a:fontRef>
-        </p:style>
-        <p:txBody>
-          <a:bodyPr rtlCol="0" anchor="ctr"/>
-          <a:lstStyle/>
-          <a:p>
-            <a:pPr algn="ctr"/>
-          </a:p>
-        </p:txBody>
-      </p:sp>
-      <p:sp>
-        <p:nvSpPr>
-          <p:cNvPr id="59" name="TextBox 58"/>
-          <p:cNvSpPr txBox="1"/>
-          <p:nvPr/>
-        </p:nvSpPr>
-        <p:spPr>
-          <a:xfrm>
-            <a:off x="7406640" y="5897880"/>
-            <a:ext cx="3977640" cy="228600"/>
-          </a:xfrm>
-          <a:prstGeom prst="rect">
-            <a:avLst/>
-          </a:prstGeom>
-          <a:noFill/>
-        </p:spPr>
-        <p:txBody>
-          <a:bodyPr wrap="square">
-            <a:spAutoFit/>
-          </a:bodyPr>
-          <a:lstStyle/>
-          <a:p>
-            <a:pPr algn="l">
-              <a:defRPr sz="700" b="0" i="0">
-                <a:solidFill>
-                  <a:srgbClr val="1C1C1E"/>
-                </a:solidFill>
-                <a:latin typeface="Calibri"/>
-              </a:defRPr>
-            </a:pPr>
-            <a:r>
-              <a:t>Phase 3: Revenue</a:t>
-            </a:r>
-          </a:p>
-        </p:txBody>
-      </p:sp>
-      <p:sp>
-        <p:nvSpPr>
-          <p:cNvPr id="60" name="TextBox 59"/>
           <p:cNvSpPr txBox="1"/>
           <p:nvPr/>
         </p:nvSpPr>
@@ -19916,7 +18250,7 @@
       </p:sp>
       <p:sp>
         <p:nvSpPr>
-          <p:cNvPr id="61" name="TextBox 60"/>
+          <p:cNvPr id="54" name="TextBox 53"/>
           <p:cNvSpPr txBox="1"/>
           <p:nvPr/>
         </p:nvSpPr>
@@ -20099,7 +18433,7 @@
         </p:nvSpPr>
         <p:spPr>
           <a:xfrm>
-            <a:off x="731520" y="1325880"/>
+            <a:off x="731520" y="1463040"/>
             <a:ext cx="5029200" cy="274320"/>
           </a:xfrm>
           <a:prstGeom prst="rect">
@@ -20114,6 +18448,413 @@
           <a:lstStyle/>
           <a:p>
             <a:pPr algn="l">
+              <a:defRPr sz="1800" b="1" i="0">
+                <a:solidFill>
+                  <a:srgbClr val="1C1C1E"/>
+                </a:solidFill>
+                <a:latin typeface="Calibri"/>
+              </a:defRPr>
+            </a:pPr>
+            <a:r>
+              <a:t>Scenario Range</a:t>
+            </a:r>
+          </a:p>
+        </p:txBody>
+      </p:sp>
+      <p:sp>
+        <p:nvSpPr>
+          <p:cNvPr id="6" name="TextBox 5"/>
+          <p:cNvSpPr txBox="1"/>
+          <p:nvPr/>
+        </p:nvSpPr>
+        <p:spPr>
+          <a:xfrm>
+            <a:off x="914400" y="2103120"/>
+            <a:ext cx="1828800" cy="457200"/>
+          </a:xfrm>
+          <a:prstGeom prst="rect">
+            <a:avLst/>
+          </a:prstGeom>
+          <a:noFill/>
+        </p:spPr>
+        <p:txBody>
+          <a:bodyPr wrap="square">
+            <a:spAutoFit/>
+          </a:bodyPr>
+          <a:lstStyle/>
+          <a:p>
+            <a:pPr algn="l">
+              <a:defRPr sz="1400" b="0" i="0">
+                <a:solidFill>
+                  <a:srgbClr val="767676"/>
+                </a:solidFill>
+                <a:latin typeface="Calibri"/>
+              </a:defRPr>
+            </a:pPr>
+            <a:r>
+              <a:t>Conservative</a:t>
+            </a:r>
+          </a:p>
+        </p:txBody>
+      </p:sp>
+      <p:sp>
+        <p:nvSpPr>
+          <p:cNvPr id="7" name="TextBox 6"/>
+          <p:cNvSpPr txBox="1"/>
+          <p:nvPr/>
+        </p:nvSpPr>
+        <p:spPr>
+          <a:xfrm>
+            <a:off x="2743200" y="2103120"/>
+            <a:ext cx="1645920" cy="457200"/>
+          </a:xfrm>
+          <a:prstGeom prst="rect">
+            <a:avLst/>
+          </a:prstGeom>
+          <a:noFill/>
+        </p:spPr>
+        <p:txBody>
+          <a:bodyPr wrap="square">
+            <a:spAutoFit/>
+          </a:bodyPr>
+          <a:lstStyle/>
+          <a:p>
+            <a:pPr algn="l">
+              <a:defRPr sz="2400" b="1" i="0">
+                <a:solidFill>
+                  <a:srgbClr val="1C1C1E"/>
+                </a:solidFill>
+                <a:latin typeface="Calibri"/>
+              </a:defRPr>
+            </a:pPr>
+            <a:r>
+              <a:t>$4.5M</a:t>
+            </a:r>
+          </a:p>
+        </p:txBody>
+      </p:sp>
+      <p:sp>
+        <p:nvSpPr>
+          <p:cNvPr id="8" name="TextBox 7"/>
+          <p:cNvSpPr txBox="1"/>
+          <p:nvPr/>
+        </p:nvSpPr>
+        <p:spPr>
+          <a:xfrm>
+            <a:off x="4389120" y="2148840"/>
+            <a:ext cx="1097280" cy="365760"/>
+          </a:xfrm>
+          <a:prstGeom prst="rect">
+            <a:avLst/>
+          </a:prstGeom>
+          <a:noFill/>
+        </p:spPr>
+        <p:txBody>
+          <a:bodyPr wrap="square">
+            <a:spAutoFit/>
+          </a:bodyPr>
+          <a:lstStyle/>
+          <a:p>
+            <a:pPr algn="l">
+              <a:defRPr sz="1300" b="0" i="0">
+                <a:solidFill>
+                  <a:srgbClr val="767676"/>
+                </a:solidFill>
+                <a:latin typeface="Calibri"/>
+              </a:defRPr>
+            </a:pPr>
+            <a:r>
+              <a:t>2.8x ROI</a:t>
+            </a:r>
+          </a:p>
+        </p:txBody>
+      </p:sp>
+      <p:sp>
+        <p:nvSpPr>
+          <p:cNvPr id="9" name="Rounded Rectangle 8"/>
+          <p:cNvSpPr/>
+          <p:nvPr/>
+        </p:nvSpPr>
+        <p:spPr>
+          <a:xfrm>
+            <a:off x="731520" y="2834640"/>
+            <a:ext cx="5029200" cy="731520"/>
+          </a:xfrm>
+          <a:prstGeom prst="roundRect">
+            <a:avLst>
+              <a:gd name="adj" fmla="val 2000"/>
+            </a:avLst>
+          </a:prstGeom>
+          <a:solidFill>
+            <a:srgbClr val="FDF0F2"/>
+          </a:solidFill>
+          <a:ln w="12700">
+            <a:solidFill>
+              <a:srgbClr val="E51937"/>
+            </a:solidFill>
+          </a:ln>
+        </p:spPr>
+        <p:style>
+          <a:lnRef idx="1">
+            <a:schemeClr val="accent1"/>
+          </a:lnRef>
+          <a:fillRef idx="3">
+            <a:schemeClr val="accent1"/>
+          </a:fillRef>
+          <a:effectRef idx="2">
+            <a:schemeClr val="accent1"/>
+          </a:effectRef>
+          <a:fontRef idx="minor">
+            <a:schemeClr val="lt1"/>
+          </a:fontRef>
+        </p:style>
+        <p:txBody>
+          <a:bodyPr rtlCol="0" anchor="ctr"/>
+          <a:lstStyle/>
+          <a:p>
+            <a:pPr algn="ctr"/>
+          </a:p>
+        </p:txBody>
+      </p:sp>
+      <p:sp>
+        <p:nvSpPr>
+          <p:cNvPr id="10" name="TextBox 9"/>
+          <p:cNvSpPr txBox="1"/>
+          <p:nvPr/>
+        </p:nvSpPr>
+        <p:spPr>
+          <a:xfrm>
+            <a:off x="914400" y="2926080"/>
+            <a:ext cx="1828800" cy="457200"/>
+          </a:xfrm>
+          <a:prstGeom prst="rect">
+            <a:avLst/>
+          </a:prstGeom>
+          <a:noFill/>
+        </p:spPr>
+        <p:txBody>
+          <a:bodyPr wrap="square">
+            <a:spAutoFit/>
+          </a:bodyPr>
+          <a:lstStyle/>
+          <a:p>
+            <a:pPr algn="l">
+              <a:defRPr sz="1400" b="0" i="0">
+                <a:solidFill>
+                  <a:srgbClr val="767676"/>
+                </a:solidFill>
+                <a:latin typeface="Calibri"/>
+              </a:defRPr>
+            </a:pPr>
+            <a:r>
+              <a:t>Expected</a:t>
+            </a:r>
+          </a:p>
+        </p:txBody>
+      </p:sp>
+      <p:sp>
+        <p:nvSpPr>
+          <p:cNvPr id="11" name="TextBox 10"/>
+          <p:cNvSpPr txBox="1"/>
+          <p:nvPr/>
+        </p:nvSpPr>
+        <p:spPr>
+          <a:xfrm>
+            <a:off x="2743200" y="2926080"/>
+            <a:ext cx="1645920" cy="457200"/>
+          </a:xfrm>
+          <a:prstGeom prst="rect">
+            <a:avLst/>
+          </a:prstGeom>
+          <a:noFill/>
+        </p:spPr>
+        <p:txBody>
+          <a:bodyPr wrap="square">
+            <a:spAutoFit/>
+          </a:bodyPr>
+          <a:lstStyle/>
+          <a:p>
+            <a:pPr algn="l">
+              <a:defRPr sz="2400" b="1" i="0">
+                <a:solidFill>
+                  <a:srgbClr val="1C1C1E"/>
+                </a:solidFill>
+                <a:latin typeface="Calibri"/>
+              </a:defRPr>
+            </a:pPr>
+            <a:r>
+              <a:t>$10.2M</a:t>
+            </a:r>
+          </a:p>
+        </p:txBody>
+      </p:sp>
+      <p:sp>
+        <p:nvSpPr>
+          <p:cNvPr id="12" name="TextBox 11"/>
+          <p:cNvSpPr txBox="1"/>
+          <p:nvPr/>
+        </p:nvSpPr>
+        <p:spPr>
+          <a:xfrm>
+            <a:off x="4389120" y="2971800"/>
+            <a:ext cx="1097280" cy="365760"/>
+          </a:xfrm>
+          <a:prstGeom prst="rect">
+            <a:avLst/>
+          </a:prstGeom>
+          <a:noFill/>
+        </p:spPr>
+        <p:txBody>
+          <a:bodyPr wrap="square">
+            <a:spAutoFit/>
+          </a:bodyPr>
+          <a:lstStyle/>
+          <a:p>
+            <a:pPr algn="l">
+              <a:defRPr sz="1300" b="0" i="0">
+                <a:solidFill>
+                  <a:srgbClr val="767676"/>
+                </a:solidFill>
+                <a:latin typeface="Calibri"/>
+              </a:defRPr>
+            </a:pPr>
+            <a:r>
+              <a:t>3.8x ROI</a:t>
+            </a:r>
+          </a:p>
+        </p:txBody>
+      </p:sp>
+      <p:sp>
+        <p:nvSpPr>
+          <p:cNvPr id="13" name="TextBox 12"/>
+          <p:cNvSpPr txBox="1"/>
+          <p:nvPr/>
+        </p:nvSpPr>
+        <p:spPr>
+          <a:xfrm>
+            <a:off x="914400" y="3749040"/>
+            <a:ext cx="1828800" cy="457200"/>
+          </a:xfrm>
+          <a:prstGeom prst="rect">
+            <a:avLst/>
+          </a:prstGeom>
+          <a:noFill/>
+        </p:spPr>
+        <p:txBody>
+          <a:bodyPr wrap="square">
+            <a:spAutoFit/>
+          </a:bodyPr>
+          <a:lstStyle/>
+          <a:p>
+            <a:pPr algn="l">
+              <a:defRPr sz="1400" b="0" i="0">
+                <a:solidFill>
+                  <a:srgbClr val="767676"/>
+                </a:solidFill>
+                <a:latin typeface="Calibri"/>
+              </a:defRPr>
+            </a:pPr>
+            <a:r>
+              <a:t>Upside</a:t>
+            </a:r>
+          </a:p>
+        </p:txBody>
+      </p:sp>
+      <p:sp>
+        <p:nvSpPr>
+          <p:cNvPr id="14" name="TextBox 13"/>
+          <p:cNvSpPr txBox="1"/>
+          <p:nvPr/>
+        </p:nvSpPr>
+        <p:spPr>
+          <a:xfrm>
+            <a:off x="2743200" y="3749040"/>
+            <a:ext cx="1645920" cy="457200"/>
+          </a:xfrm>
+          <a:prstGeom prst="rect">
+            <a:avLst/>
+          </a:prstGeom>
+          <a:noFill/>
+        </p:spPr>
+        <p:txBody>
+          <a:bodyPr wrap="square">
+            <a:spAutoFit/>
+          </a:bodyPr>
+          <a:lstStyle/>
+          <a:p>
+            <a:pPr algn="l">
+              <a:defRPr sz="2400" b="1" i="0">
+                <a:solidFill>
+                  <a:srgbClr val="1C1C1E"/>
+                </a:solidFill>
+                <a:latin typeface="Calibri"/>
+              </a:defRPr>
+            </a:pPr>
+            <a:r>
+              <a:t>$22.5M</a:t>
+            </a:r>
+          </a:p>
+        </p:txBody>
+      </p:sp>
+      <p:sp>
+        <p:nvSpPr>
+          <p:cNvPr id="15" name="TextBox 14"/>
+          <p:cNvSpPr txBox="1"/>
+          <p:nvPr/>
+        </p:nvSpPr>
+        <p:spPr>
+          <a:xfrm>
+            <a:off x="4389120" y="3794760"/>
+            <a:ext cx="1097280" cy="365760"/>
+          </a:xfrm>
+          <a:prstGeom prst="rect">
+            <a:avLst/>
+          </a:prstGeom>
+          <a:noFill/>
+        </p:spPr>
+        <p:txBody>
+          <a:bodyPr wrap="square">
+            <a:spAutoFit/>
+          </a:bodyPr>
+          <a:lstStyle/>
+          <a:p>
+            <a:pPr algn="l">
+              <a:defRPr sz="1300" b="0" i="0">
+                <a:solidFill>
+                  <a:srgbClr val="767676"/>
+                </a:solidFill>
+                <a:latin typeface="Calibri"/>
+              </a:defRPr>
+            </a:pPr>
+            <a:r>
+              <a:t>6.4x ROI</a:t>
+            </a:r>
+          </a:p>
+        </p:txBody>
+      </p:sp>
+      <p:sp>
+        <p:nvSpPr>
+          <p:cNvPr id="16" name="TextBox 15"/>
+          <p:cNvSpPr txBox="1"/>
+          <p:nvPr/>
+        </p:nvSpPr>
+        <p:spPr>
+          <a:xfrm>
+            <a:off x="6400800" y="1325880"/>
+            <a:ext cx="5029200" cy="274320"/>
+          </a:xfrm>
+          <a:prstGeom prst="rect">
+            <a:avLst/>
+          </a:prstGeom>
+          <a:noFill/>
+        </p:spPr>
+        <p:txBody>
+          <a:bodyPr wrap="square">
+            <a:spAutoFit/>
+          </a:bodyPr>
+          <a:lstStyle/>
+          <a:p>
+            <a:pPr algn="l">
               <a:defRPr sz="1600" b="1" i="0">
                 <a:solidFill>
                   <a:srgbClr val="1C1C1E"/>
@@ -20122,21 +18863,21 @@
               </a:defRPr>
             </a:pPr>
             <a:r>
-              <a:t>Support Pilot Savings</a:t>
-            </a:r>
-          </a:p>
-        </p:txBody>
-      </p:sp>
-      <p:sp>
-        <p:nvSpPr>
-          <p:cNvPr id="6" name="Rounded Rectangle 5"/>
+              <a:t>Year-1 Financial Impact (All Phases)</a:t>
+            </a:r>
+          </a:p>
+        </p:txBody>
+      </p:sp>
+      <p:sp>
+        <p:nvSpPr>
+          <p:cNvPr id="17" name="Rounded Rectangle 16"/>
           <p:cNvSpPr/>
           <p:nvPr/>
         </p:nvSpPr>
         <p:spPr>
           <a:xfrm>
-            <a:off x="731520" y="1737360"/>
-            <a:ext cx="5029200" cy="1463040"/>
+            <a:off x="6400800" y="1737360"/>
+            <a:ext cx="2560320" cy="1097280"/>
           </a:xfrm>
           <a:prstGeom prst="roundRect">
             <a:avLst>
@@ -20176,80 +18917,64 @@
       </p:sp>
       <p:sp>
         <p:nvSpPr>
-          <p:cNvPr id="7" name="TextBox 6"/>
-          <p:cNvSpPr txBox="1"/>
-          <p:nvPr/>
-        </p:nvSpPr>
-        <p:spPr>
-          <a:xfrm>
-            <a:off x="1005840" y="1828800"/>
-            <a:ext cx="4572000" cy="1097280"/>
-          </a:xfrm>
-          <a:prstGeom prst="rect">
-            <a:avLst/>
-          </a:prstGeom>
-          <a:noFill/>
-        </p:spPr>
-        <p:txBody>
-          <a:bodyPr wrap="square">
-            <a:spAutoFit/>
-          </a:bodyPr>
-          <a:lstStyle/>
-          <a:p>
-            <a:pPr algn="l">
-              <a:defRPr sz="1200" b="0" i="0">
-                <a:solidFill>
-                  <a:srgbClr val="3A3A3C"/>
-                </a:solidFill>
-                <a:latin typeface="Calibri"/>
-              </a:defRPr>
-            </a:pPr>
-            <a:r>
-              <a:t>120 support staff x $90K avg. cost</a:t>
-            </a:r>
-            <a:br/>
-            <a:r>
-              <a:t>x 60% AI-addressable work</a:t>
-            </a:r>
-            <a:br/>
-            <a:r>
-              <a:t>x 35% productivity gain</a:t>
-            </a:r>
-            <a:br/>
-            <a:r>
-              <a:t>x 70% adoption</a:t>
-            </a:r>
-            <a:br/>
-            <a:r>
-              <a:t>= $1.6M Year-1 support savings</a:t>
-            </a:r>
-          </a:p>
-        </p:txBody>
-      </p:sp>
-      <p:sp>
-        <p:nvSpPr>
-          <p:cNvPr id="8" name="TextBox 7"/>
-          <p:cNvSpPr txBox="1"/>
-          <p:nvPr/>
-        </p:nvSpPr>
-        <p:spPr>
-          <a:xfrm>
-            <a:off x="731520" y="3429000"/>
-            <a:ext cx="5029200" cy="274320"/>
-          </a:xfrm>
-          <a:prstGeom prst="rect">
-            <a:avLst/>
-          </a:prstGeom>
-          <a:noFill/>
-        </p:spPr>
-        <p:txBody>
-          <a:bodyPr wrap="square">
-            <a:spAutoFit/>
-          </a:bodyPr>
-          <a:lstStyle/>
-          <a:p>
-            <a:pPr algn="l">
-              <a:defRPr sz="1600" b="1" i="0">
+          <p:cNvPr id="18" name="TextBox 17"/>
+          <p:cNvSpPr txBox="1"/>
+          <p:nvPr/>
+        </p:nvSpPr>
+        <p:spPr>
+          <a:xfrm>
+            <a:off x="6629400" y="1874520"/>
+            <a:ext cx="2103120" cy="228600"/>
+          </a:xfrm>
+          <a:prstGeom prst="rect">
+            <a:avLst/>
+          </a:prstGeom>
+          <a:noFill/>
+        </p:spPr>
+        <p:txBody>
+          <a:bodyPr wrap="square">
+            <a:spAutoFit/>
+          </a:bodyPr>
+          <a:lstStyle/>
+          <a:p>
+            <a:pPr algn="l">
+              <a:defRPr sz="1000" b="0" i="0">
+                <a:solidFill>
+                  <a:srgbClr val="767676"/>
+                </a:solidFill>
+                <a:latin typeface="Calibri"/>
+              </a:defRPr>
+            </a:pPr>
+            <a:r>
+              <a:t>NET YEAR-1 VALUE</a:t>
+            </a:r>
+          </a:p>
+        </p:txBody>
+      </p:sp>
+      <p:sp>
+        <p:nvSpPr>
+          <p:cNvPr id="19" name="TextBox 18"/>
+          <p:cNvSpPr txBox="1"/>
+          <p:nvPr/>
+        </p:nvSpPr>
+        <p:spPr>
+          <a:xfrm>
+            <a:off x="6629400" y="2103120"/>
+            <a:ext cx="2103120" cy="411480"/>
+          </a:xfrm>
+          <a:prstGeom prst="rect">
+            <a:avLst/>
+          </a:prstGeom>
+          <a:noFill/>
+        </p:spPr>
+        <p:txBody>
+          <a:bodyPr wrap="square">
+            <a:spAutoFit/>
+          </a:bodyPr>
+          <a:lstStyle/>
+          <a:p>
+            <a:pPr algn="l">
+              <a:defRPr sz="2600" b="1" i="0">
                 <a:solidFill>
                   <a:srgbClr val="1C1C1E"/>
                 </a:solidFill>
@@ -20257,80 +18982,35 @@
               </a:defRPr>
             </a:pPr>
             <a:r>
-              <a:t>Scenario Range (All Phases)</a:t>
-            </a:r>
-          </a:p>
-        </p:txBody>
-      </p:sp>
-      <p:sp>
-        <p:nvSpPr>
-          <p:cNvPr id="9" name="Rounded Rectangle 8"/>
-          <p:cNvSpPr/>
-          <p:nvPr/>
-        </p:nvSpPr>
-        <p:spPr>
-          <a:xfrm>
-            <a:off x="731520" y="3794760"/>
-            <a:ext cx="5029200" cy="457200"/>
-          </a:xfrm>
-          <a:prstGeom prst="roundRect">
-            <a:avLst>
-              <a:gd name="adj" fmla="val 2000"/>
-            </a:avLst>
-          </a:prstGeom>
-          <a:solidFill>
-            <a:srgbClr val="F0F0EE"/>
-          </a:solidFill>
-          <a:ln>
-            <a:noFill/>
-          </a:ln>
-        </p:spPr>
-        <p:style>
-          <a:lnRef idx="1">
-            <a:schemeClr val="accent1"/>
-          </a:lnRef>
-          <a:fillRef idx="3">
-            <a:schemeClr val="accent1"/>
-          </a:fillRef>
-          <a:effectRef idx="2">
-            <a:schemeClr val="accent1"/>
-          </a:effectRef>
-          <a:fontRef idx="minor">
-            <a:schemeClr val="lt1"/>
-          </a:fontRef>
-        </p:style>
-        <p:txBody>
-          <a:bodyPr rtlCol="0" anchor="ctr"/>
-          <a:lstStyle/>
-          <a:p>
-            <a:pPr algn="ctr"/>
-          </a:p>
-        </p:txBody>
-      </p:sp>
-      <p:sp>
-        <p:nvSpPr>
-          <p:cNvPr id="10" name="TextBox 9"/>
-          <p:cNvSpPr txBox="1"/>
-          <p:nvPr/>
-        </p:nvSpPr>
-        <p:spPr>
-          <a:xfrm>
-            <a:off x="914400" y="3840480"/>
-            <a:ext cx="1645920" cy="365760"/>
-          </a:xfrm>
-          <a:prstGeom prst="rect">
-            <a:avLst/>
-          </a:prstGeom>
-          <a:noFill/>
-        </p:spPr>
-        <p:txBody>
-          <a:bodyPr wrap="square">
-            <a:spAutoFit/>
-          </a:bodyPr>
-          <a:lstStyle/>
-          <a:p>
-            <a:pPr algn="l">
-              <a:defRPr sz="1300" b="0" i="0">
+              <a:t>$10.2M</a:t>
+            </a:r>
+          </a:p>
+        </p:txBody>
+      </p:sp>
+      <p:sp>
+        <p:nvSpPr>
+          <p:cNvPr id="20" name="TextBox 19"/>
+          <p:cNvSpPr txBox="1"/>
+          <p:nvPr/>
+        </p:nvSpPr>
+        <p:spPr>
+          <a:xfrm>
+            <a:off x="6629400" y="2560320"/>
+            <a:ext cx="2103120" cy="228600"/>
+          </a:xfrm>
+          <a:prstGeom prst="rect">
+            <a:avLst/>
+          </a:prstGeom>
+          <a:noFill/>
+        </p:spPr>
+        <p:txBody>
+          <a:bodyPr wrap="square">
+            <a:spAutoFit/>
+          </a:bodyPr>
+          <a:lstStyle/>
+          <a:p>
+            <a:pPr algn="l">
+              <a:defRPr sz="900" b="0" i="0">
                 <a:solidFill>
                   <a:srgbClr val="767676"/>
                 </a:solidFill>
@@ -20338,376 +19018,7 @@
               </a:defRPr>
             </a:pPr>
             <a:r>
-              <a:t>Conservative</a:t>
-            </a:r>
-          </a:p>
-        </p:txBody>
-      </p:sp>
-      <p:sp>
-        <p:nvSpPr>
-          <p:cNvPr id="11" name="TextBox 10"/>
-          <p:cNvSpPr txBox="1"/>
-          <p:nvPr/>
-        </p:nvSpPr>
-        <p:spPr>
-          <a:xfrm>
-            <a:off x="2560320" y="3840480"/>
-            <a:ext cx="1645920" cy="365760"/>
-          </a:xfrm>
-          <a:prstGeom prst="rect">
-            <a:avLst/>
-          </a:prstGeom>
-          <a:noFill/>
-        </p:spPr>
-        <p:txBody>
-          <a:bodyPr wrap="square">
-            <a:spAutoFit/>
-          </a:bodyPr>
-          <a:lstStyle/>
-          <a:p>
-            <a:pPr algn="l">
-              <a:defRPr sz="1500" b="1" i="0">
-                <a:solidFill>
-                  <a:srgbClr val="1C1C1E"/>
-                </a:solidFill>
-                <a:latin typeface="Calibri"/>
-              </a:defRPr>
-            </a:pPr>
-            <a:r>
-              <a:t>$4.5M net</a:t>
-            </a:r>
-          </a:p>
-        </p:txBody>
-      </p:sp>
-      <p:sp>
-        <p:nvSpPr>
-          <p:cNvPr id="12" name="TextBox 11"/>
-          <p:cNvSpPr txBox="1"/>
-          <p:nvPr/>
-        </p:nvSpPr>
-        <p:spPr>
-          <a:xfrm>
-            <a:off x="4206240" y="3840480"/>
-            <a:ext cx="1371600" cy="365760"/>
-          </a:xfrm>
-          <a:prstGeom prst="rect">
-            <a:avLst/>
-          </a:prstGeom>
-          <a:noFill/>
-        </p:spPr>
-        <p:txBody>
-          <a:bodyPr wrap="square">
-            <a:spAutoFit/>
-          </a:bodyPr>
-          <a:lstStyle/>
-          <a:p>
-            <a:pPr algn="l">
-              <a:defRPr sz="1200" b="0" i="0">
-                <a:solidFill>
-                  <a:srgbClr val="767676"/>
-                </a:solidFill>
-                <a:latin typeface="Calibri"/>
-              </a:defRPr>
-            </a:pPr>
-            <a:r>
-              <a:t>2.8x ROI</a:t>
-            </a:r>
-          </a:p>
-        </p:txBody>
-      </p:sp>
-      <p:sp>
-        <p:nvSpPr>
-          <p:cNvPr id="13" name="TextBox 12"/>
-          <p:cNvSpPr txBox="1"/>
-          <p:nvPr/>
-        </p:nvSpPr>
-        <p:spPr>
-          <a:xfrm>
-            <a:off x="914400" y="4343400"/>
-            <a:ext cx="1645920" cy="365760"/>
-          </a:xfrm>
-          <a:prstGeom prst="rect">
-            <a:avLst/>
-          </a:prstGeom>
-          <a:noFill/>
-        </p:spPr>
-        <p:txBody>
-          <a:bodyPr wrap="square">
-            <a:spAutoFit/>
-          </a:bodyPr>
-          <a:lstStyle/>
-          <a:p>
-            <a:pPr algn="l">
-              <a:defRPr sz="1300" b="0" i="0">
-                <a:solidFill>
-                  <a:srgbClr val="767676"/>
-                </a:solidFill>
-                <a:latin typeface="Calibri"/>
-              </a:defRPr>
-            </a:pPr>
-            <a:r>
-              <a:t>Expected</a:t>
-            </a:r>
-          </a:p>
-        </p:txBody>
-      </p:sp>
-      <p:sp>
-        <p:nvSpPr>
-          <p:cNvPr id="14" name="TextBox 13"/>
-          <p:cNvSpPr txBox="1"/>
-          <p:nvPr/>
-        </p:nvSpPr>
-        <p:spPr>
-          <a:xfrm>
-            <a:off x="2560320" y="4343400"/>
-            <a:ext cx="1645920" cy="365760"/>
-          </a:xfrm>
-          <a:prstGeom prst="rect">
-            <a:avLst/>
-          </a:prstGeom>
-          <a:noFill/>
-        </p:spPr>
-        <p:txBody>
-          <a:bodyPr wrap="square">
-            <a:spAutoFit/>
-          </a:bodyPr>
-          <a:lstStyle/>
-          <a:p>
-            <a:pPr algn="l">
-              <a:defRPr sz="1500" b="1" i="0">
-                <a:solidFill>
-                  <a:srgbClr val="1C1C1E"/>
-                </a:solidFill>
-                <a:latin typeface="Calibri"/>
-              </a:defRPr>
-            </a:pPr>
-            <a:r>
-              <a:t>$10.2M net</a:t>
-            </a:r>
-          </a:p>
-        </p:txBody>
-      </p:sp>
-      <p:sp>
-        <p:nvSpPr>
-          <p:cNvPr id="15" name="TextBox 14"/>
-          <p:cNvSpPr txBox="1"/>
-          <p:nvPr/>
-        </p:nvSpPr>
-        <p:spPr>
-          <a:xfrm>
-            <a:off x="4206240" y="4343400"/>
-            <a:ext cx="1371600" cy="365760"/>
-          </a:xfrm>
-          <a:prstGeom prst="rect">
-            <a:avLst/>
-          </a:prstGeom>
-          <a:noFill/>
-        </p:spPr>
-        <p:txBody>
-          <a:bodyPr wrap="square">
-            <a:spAutoFit/>
-          </a:bodyPr>
-          <a:lstStyle/>
-          <a:p>
-            <a:pPr algn="l">
-              <a:defRPr sz="1200" b="0" i="0">
-                <a:solidFill>
-                  <a:srgbClr val="767676"/>
-                </a:solidFill>
-                <a:latin typeface="Calibri"/>
-              </a:defRPr>
-            </a:pPr>
-            <a:r>
-              <a:t>3.8x ROI</a:t>
-            </a:r>
-          </a:p>
-        </p:txBody>
-      </p:sp>
-      <p:sp>
-        <p:nvSpPr>
-          <p:cNvPr id="16" name="Rounded Rectangle 15"/>
-          <p:cNvSpPr/>
-          <p:nvPr/>
-        </p:nvSpPr>
-        <p:spPr>
-          <a:xfrm>
-            <a:off x="731520" y="4800600"/>
-            <a:ext cx="5029200" cy="457200"/>
-          </a:xfrm>
-          <a:prstGeom prst="roundRect">
-            <a:avLst>
-              <a:gd name="adj" fmla="val 2000"/>
-            </a:avLst>
-          </a:prstGeom>
-          <a:solidFill>
-            <a:srgbClr val="F0F0EE"/>
-          </a:solidFill>
-          <a:ln>
-            <a:noFill/>
-          </a:ln>
-        </p:spPr>
-        <p:style>
-          <a:lnRef idx="1">
-            <a:schemeClr val="accent1"/>
-          </a:lnRef>
-          <a:fillRef idx="3">
-            <a:schemeClr val="accent1"/>
-          </a:fillRef>
-          <a:effectRef idx="2">
-            <a:schemeClr val="accent1"/>
-          </a:effectRef>
-          <a:fontRef idx="minor">
-            <a:schemeClr val="lt1"/>
-          </a:fontRef>
-        </p:style>
-        <p:txBody>
-          <a:bodyPr rtlCol="0" anchor="ctr"/>
-          <a:lstStyle/>
-          <a:p>
-            <a:pPr algn="ctr"/>
-          </a:p>
-        </p:txBody>
-      </p:sp>
-      <p:sp>
-        <p:nvSpPr>
-          <p:cNvPr id="17" name="TextBox 16"/>
-          <p:cNvSpPr txBox="1"/>
-          <p:nvPr/>
-        </p:nvSpPr>
-        <p:spPr>
-          <a:xfrm>
-            <a:off x="914400" y="4846320"/>
-            <a:ext cx="1645920" cy="365760"/>
-          </a:xfrm>
-          <a:prstGeom prst="rect">
-            <a:avLst/>
-          </a:prstGeom>
-          <a:noFill/>
-        </p:spPr>
-        <p:txBody>
-          <a:bodyPr wrap="square">
-            <a:spAutoFit/>
-          </a:bodyPr>
-          <a:lstStyle/>
-          <a:p>
-            <a:pPr algn="l">
-              <a:defRPr sz="1300" b="0" i="0">
-                <a:solidFill>
-                  <a:srgbClr val="767676"/>
-                </a:solidFill>
-                <a:latin typeface="Calibri"/>
-              </a:defRPr>
-            </a:pPr>
-            <a:r>
-              <a:t>Upside</a:t>
-            </a:r>
-          </a:p>
-        </p:txBody>
-      </p:sp>
-      <p:sp>
-        <p:nvSpPr>
-          <p:cNvPr id="18" name="TextBox 17"/>
-          <p:cNvSpPr txBox="1"/>
-          <p:nvPr/>
-        </p:nvSpPr>
-        <p:spPr>
-          <a:xfrm>
-            <a:off x="2560320" y="4846320"/>
-            <a:ext cx="1645920" cy="365760"/>
-          </a:xfrm>
-          <a:prstGeom prst="rect">
-            <a:avLst/>
-          </a:prstGeom>
-          <a:noFill/>
-        </p:spPr>
-        <p:txBody>
-          <a:bodyPr wrap="square">
-            <a:spAutoFit/>
-          </a:bodyPr>
-          <a:lstStyle/>
-          <a:p>
-            <a:pPr algn="l">
-              <a:defRPr sz="1500" b="1" i="0">
-                <a:solidFill>
-                  <a:srgbClr val="1C1C1E"/>
-                </a:solidFill>
-                <a:latin typeface="Calibri"/>
-              </a:defRPr>
-            </a:pPr>
-            <a:r>
-              <a:t>$22.5M net</a:t>
-            </a:r>
-          </a:p>
-        </p:txBody>
-      </p:sp>
-      <p:sp>
-        <p:nvSpPr>
-          <p:cNvPr id="19" name="TextBox 18"/>
-          <p:cNvSpPr txBox="1"/>
-          <p:nvPr/>
-        </p:nvSpPr>
-        <p:spPr>
-          <a:xfrm>
-            <a:off x="4206240" y="4846320"/>
-            <a:ext cx="1371600" cy="365760"/>
-          </a:xfrm>
-          <a:prstGeom prst="rect">
-            <a:avLst/>
-          </a:prstGeom>
-          <a:noFill/>
-        </p:spPr>
-        <p:txBody>
-          <a:bodyPr wrap="square">
-            <a:spAutoFit/>
-          </a:bodyPr>
-          <a:lstStyle/>
-          <a:p>
-            <a:pPr algn="l">
-              <a:defRPr sz="1200" b="0" i="0">
-                <a:solidFill>
-                  <a:srgbClr val="767676"/>
-                </a:solidFill>
-                <a:latin typeface="Calibri"/>
-              </a:defRPr>
-            </a:pPr>
-            <a:r>
-              <a:t>6.4x ROI</a:t>
-            </a:r>
-          </a:p>
-        </p:txBody>
-      </p:sp>
-      <p:sp>
-        <p:nvSpPr>
-          <p:cNvPr id="20" name="TextBox 19"/>
-          <p:cNvSpPr txBox="1"/>
-          <p:nvPr/>
-        </p:nvSpPr>
-        <p:spPr>
-          <a:xfrm>
-            <a:off x="6400800" y="1325880"/>
-            <a:ext cx="5029200" cy="274320"/>
-          </a:xfrm>
-          <a:prstGeom prst="rect">
-            <a:avLst/>
-          </a:prstGeom>
-          <a:noFill/>
-        </p:spPr>
-        <p:txBody>
-          <a:bodyPr wrap="square">
-            <a:spAutoFit/>
-          </a:bodyPr>
-          <a:lstStyle/>
-          <a:p>
-            <a:pPr algn="l">
-              <a:defRPr sz="1600" b="1" i="0">
-                <a:solidFill>
-                  <a:srgbClr val="1C1C1E"/>
-                </a:solidFill>
-                <a:latin typeface="Calibri"/>
-              </a:defRPr>
-            </a:pPr>
-            <a:r>
-              <a:t>Year-1 Financial Impact (All Phases)</a:t>
+              <a:t>Expected case</a:t>
             </a:r>
           </a:p>
         </p:txBody>
@@ -20720,7 +19031,7 @@
         </p:nvSpPr>
         <p:spPr>
           <a:xfrm>
-            <a:off x="6400800" y="1737360"/>
+            <a:off x="9144000" y="1737360"/>
             <a:ext cx="2560320" cy="1097280"/>
           </a:xfrm>
           <a:prstGeom prst="roundRect">
@@ -20767,7 +19078,7 @@
         </p:nvSpPr>
         <p:spPr>
           <a:xfrm>
-            <a:off x="6629400" y="1874520"/>
+            <a:off x="9372600" y="1874520"/>
             <a:ext cx="2103120" cy="228600"/>
           </a:xfrm>
           <a:prstGeom prst="rect">
@@ -20790,7 +19101,7 @@
               </a:defRPr>
             </a:pPr>
             <a:r>
-              <a:t>NET YEAR-1 VALUE</a:t>
+              <a:t>RETURN ON SPEND</a:t>
             </a:r>
           </a:p>
         </p:txBody>
@@ -20803,7 +19114,7 @@
         </p:nvSpPr>
         <p:spPr>
           <a:xfrm>
-            <a:off x="6629400" y="2103120"/>
+            <a:off x="9372600" y="2103120"/>
             <a:ext cx="2103120" cy="411480"/>
           </a:xfrm>
           <a:prstGeom prst="rect">
@@ -20826,7 +19137,7 @@
               </a:defRPr>
             </a:pPr>
             <a:r>
-              <a:t>$10.2M</a:t>
+              <a:t>3.8x</a:t>
             </a:r>
           </a:p>
         </p:txBody>
@@ -20839,7 +19150,7 @@
         </p:nvSpPr>
         <p:spPr>
           <a:xfrm>
-            <a:off x="6629400" y="2560320"/>
+            <a:off x="9372600" y="2560320"/>
             <a:ext cx="2103120" cy="228600"/>
           </a:xfrm>
           <a:prstGeom prst="rect">
@@ -20862,25 +19173,189 @@
               </a:defRPr>
             </a:pPr>
             <a:r>
-              <a:t>Expected case</a:t>
-            </a:r>
-          </a:p>
-        </p:txBody>
-      </p:sp>
-      <p:sp>
-        <p:nvSpPr>
-          <p:cNvPr id="25" name="Rounded Rectangle 24"/>
+              <a:t>On $2.7M total spend</a:t>
+            </a:r>
+          </a:p>
+        </p:txBody>
+      </p:sp>
+      <p:sp>
+        <p:nvSpPr>
+          <p:cNvPr id="25" name="TextBox 24"/>
+          <p:cNvSpPr txBox="1"/>
+          <p:nvPr/>
+        </p:nvSpPr>
+        <p:spPr>
+          <a:xfrm>
+            <a:off x="6400800" y="3017520"/>
+            <a:ext cx="5029200" cy="2377440"/>
+          </a:xfrm>
+          <a:prstGeom prst="rect">
+            <a:avLst/>
+          </a:prstGeom>
+          <a:noFill/>
+        </p:spPr>
+        <p:txBody>
+          <a:bodyPr wrap="square">
+            <a:spAutoFit/>
+          </a:bodyPr>
+          <a:lstStyle/>
+          <a:p>
+            <a:pPr>
+              <a:spcAft>
+                <a:spcPts val="519"/>
+              </a:spcAft>
+              <a:defRPr sz="1300" b="1">
+                <a:solidFill>
+                  <a:srgbClr val="1C1C1E"/>
+                </a:solidFill>
+                <a:latin typeface="Calibri"/>
+              </a:defRPr>
+            </a:pPr>
+            <a:r>
+              <a:t>Cost Reductions</a:t>
+            </a:r>
+          </a:p>
+          <a:p>
+            <a:pPr>
+              <a:spcAft>
+                <a:spcPts val="439"/>
+              </a:spcAft>
+              <a:defRPr sz="1100" b="0">
+                <a:solidFill>
+                  <a:srgbClr val="3A3A3C"/>
+                </a:solidFill>
+                <a:latin typeface="Calibri"/>
+              </a:defRPr>
+            </a:pPr>
+            <a:r>
+              <a:t>Support automation savings: $1.6M</a:t>
+            </a:r>
+          </a:p>
+          <a:p>
+            <a:pPr>
+              <a:spcAft>
+                <a:spcPts val="439"/>
+              </a:spcAft>
+              <a:defRPr sz="1100" b="0">
+                <a:solidFill>
+                  <a:srgbClr val="3A3A3C"/>
+                </a:solidFill>
+                <a:latin typeface="Calibri"/>
+              </a:defRPr>
+            </a:pPr>
+            <a:r>
+              <a:t>Demand forecasting savings: $1.6M</a:t>
+            </a:r>
+          </a:p>
+          <a:p>
+            <a:pPr>
+              <a:spcAft>
+                <a:spcPts val="439"/>
+              </a:spcAft>
+              <a:defRPr sz="1100" b="0">
+                <a:solidFill>
+                  <a:srgbClr val="3A3A3C"/>
+                </a:solidFill>
+                <a:latin typeface="Calibri"/>
+              </a:defRPr>
+            </a:pPr>
+            <a:r>
+              <a:t>Documentation and translation: $0.24M</a:t>
+            </a:r>
+          </a:p>
+          <a:p>
+            <a:pPr>
+              <a:spcAft>
+                <a:spcPts val="199"/>
+              </a:spcAft>
+              <a:defRPr sz="500" b="0">
+                <a:solidFill>
+                  <a:srgbClr val="767676"/>
+                </a:solidFill>
+                <a:latin typeface="Calibri"/>
+              </a:defRPr>
+            </a:pPr>
+          </a:p>
+          <a:p>
+            <a:pPr>
+              <a:spcAft>
+                <a:spcPts val="519"/>
+              </a:spcAft>
+              <a:defRPr sz="1300" b="1">
+                <a:solidFill>
+                  <a:srgbClr val="1C1C1E"/>
+                </a:solidFill>
+                <a:latin typeface="Calibri"/>
+              </a:defRPr>
+            </a:pPr>
+            <a:r>
+              <a:t>Revenue Growth</a:t>
+            </a:r>
+          </a:p>
+          <a:p>
+            <a:pPr>
+              <a:spcAft>
+                <a:spcPts val="439"/>
+              </a:spcAft>
+              <a:defRPr sz="1100" b="0">
+                <a:solidFill>
+                  <a:srgbClr val="3A3A3C"/>
+                </a:solidFill>
+                <a:latin typeface="Calibri"/>
+              </a:defRPr>
+            </a:pPr>
+            <a:r>
+              <a:t>Customer retention: $3.0M</a:t>
+            </a:r>
+          </a:p>
+          <a:p>
+            <a:pPr>
+              <a:spcAft>
+                <a:spcPts val="439"/>
+              </a:spcAft>
+              <a:defRPr sz="1100" b="0">
+                <a:solidFill>
+                  <a:srgbClr val="3A3A3C"/>
+                </a:solidFill>
+                <a:latin typeface="Calibri"/>
+              </a:defRPr>
+            </a:pPr>
+            <a:r>
+              <a:t>Package size increase: $4.0M</a:t>
+            </a:r>
+          </a:p>
+          <a:p>
+            <a:pPr>
+              <a:spcAft>
+                <a:spcPts val="439"/>
+              </a:spcAft>
+              <a:defRPr sz="1100" b="0">
+                <a:solidFill>
+                  <a:srgbClr val="3A3A3C"/>
+                </a:solidFill>
+                <a:latin typeface="Calibri"/>
+              </a:defRPr>
+            </a:pPr>
+            <a:r>
+              <a:t>Proposal win rate: $2.5M</a:t>
+            </a:r>
+          </a:p>
+        </p:txBody>
+      </p:sp>
+      <p:sp>
+        <p:nvSpPr>
+          <p:cNvPr id="26" name="Rounded Rectangle 25"/>
           <p:cNvSpPr/>
           <p:nvPr/>
         </p:nvSpPr>
         <p:spPr>
           <a:xfrm>
-            <a:off x="9144000" y="1737360"/>
-            <a:ext cx="2560320" cy="1097280"/>
+            <a:off x="6400800" y="5303520"/>
+            <a:ext cx="5303520" cy="777240"/>
           </a:xfrm>
           <a:prstGeom prst="roundRect">
             <a:avLst>
-              <a:gd name="adj" fmla="val 4000"/>
+              <a:gd name="adj" fmla="val 2000"/>
             </a:avLst>
           </a:prstGeom>
           <a:solidFill>
@@ -20916,326 +19391,7 @@
       </p:sp>
       <p:sp>
         <p:nvSpPr>
-          <p:cNvPr id="26" name="TextBox 25"/>
-          <p:cNvSpPr txBox="1"/>
-          <p:nvPr/>
-        </p:nvSpPr>
-        <p:spPr>
-          <a:xfrm>
-            <a:off x="9372600" y="1874520"/>
-            <a:ext cx="2103120" cy="228600"/>
-          </a:xfrm>
-          <a:prstGeom prst="rect">
-            <a:avLst/>
-          </a:prstGeom>
-          <a:noFill/>
-        </p:spPr>
-        <p:txBody>
-          <a:bodyPr wrap="square">
-            <a:spAutoFit/>
-          </a:bodyPr>
-          <a:lstStyle/>
-          <a:p>
-            <a:pPr algn="l">
-              <a:defRPr sz="1000" b="0" i="0">
-                <a:solidFill>
-                  <a:srgbClr val="767676"/>
-                </a:solidFill>
-                <a:latin typeface="Calibri"/>
-              </a:defRPr>
-            </a:pPr>
-            <a:r>
-              <a:t>RETURN ON SPEND</a:t>
-            </a:r>
-          </a:p>
-        </p:txBody>
-      </p:sp>
-      <p:sp>
-        <p:nvSpPr>
           <p:cNvPr id="27" name="TextBox 26"/>
-          <p:cNvSpPr txBox="1"/>
-          <p:nvPr/>
-        </p:nvSpPr>
-        <p:spPr>
-          <a:xfrm>
-            <a:off x="9372600" y="2103120"/>
-            <a:ext cx="2103120" cy="411480"/>
-          </a:xfrm>
-          <a:prstGeom prst="rect">
-            <a:avLst/>
-          </a:prstGeom>
-          <a:noFill/>
-        </p:spPr>
-        <p:txBody>
-          <a:bodyPr wrap="square">
-            <a:spAutoFit/>
-          </a:bodyPr>
-          <a:lstStyle/>
-          <a:p>
-            <a:pPr algn="l">
-              <a:defRPr sz="2600" b="1" i="0">
-                <a:solidFill>
-                  <a:srgbClr val="1C1C1E"/>
-                </a:solidFill>
-                <a:latin typeface="Calibri"/>
-              </a:defRPr>
-            </a:pPr>
-            <a:r>
-              <a:t>3.8x</a:t>
-            </a:r>
-          </a:p>
-        </p:txBody>
-      </p:sp>
-      <p:sp>
-        <p:nvSpPr>
-          <p:cNvPr id="28" name="TextBox 27"/>
-          <p:cNvSpPr txBox="1"/>
-          <p:nvPr/>
-        </p:nvSpPr>
-        <p:spPr>
-          <a:xfrm>
-            <a:off x="9372600" y="2560320"/>
-            <a:ext cx="2103120" cy="228600"/>
-          </a:xfrm>
-          <a:prstGeom prst="rect">
-            <a:avLst/>
-          </a:prstGeom>
-          <a:noFill/>
-        </p:spPr>
-        <p:txBody>
-          <a:bodyPr wrap="square">
-            <a:spAutoFit/>
-          </a:bodyPr>
-          <a:lstStyle/>
-          <a:p>
-            <a:pPr algn="l">
-              <a:defRPr sz="900" b="0" i="0">
-                <a:solidFill>
-                  <a:srgbClr val="767676"/>
-                </a:solidFill>
-                <a:latin typeface="Calibri"/>
-              </a:defRPr>
-            </a:pPr>
-            <a:r>
-              <a:t>On $2.7M total spend</a:t>
-            </a:r>
-          </a:p>
-        </p:txBody>
-      </p:sp>
-      <p:sp>
-        <p:nvSpPr>
-          <p:cNvPr id="29" name="TextBox 28"/>
-          <p:cNvSpPr txBox="1"/>
-          <p:nvPr/>
-        </p:nvSpPr>
-        <p:spPr>
-          <a:xfrm>
-            <a:off x="6400800" y="3017520"/>
-            <a:ext cx="5029200" cy="2377440"/>
-          </a:xfrm>
-          <a:prstGeom prst="rect">
-            <a:avLst/>
-          </a:prstGeom>
-          <a:noFill/>
-        </p:spPr>
-        <p:txBody>
-          <a:bodyPr wrap="square">
-            <a:spAutoFit/>
-          </a:bodyPr>
-          <a:lstStyle/>
-          <a:p>
-            <a:pPr>
-              <a:spcAft>
-                <a:spcPts val="519"/>
-              </a:spcAft>
-              <a:defRPr sz="1300" b="1">
-                <a:solidFill>
-                  <a:srgbClr val="1C1C1E"/>
-                </a:solidFill>
-                <a:latin typeface="Calibri"/>
-              </a:defRPr>
-            </a:pPr>
-            <a:r>
-              <a:t>Cost Reductions</a:t>
-            </a:r>
-          </a:p>
-          <a:p>
-            <a:pPr>
-              <a:spcAft>
-                <a:spcPts val="439"/>
-              </a:spcAft>
-              <a:defRPr sz="1100" b="0">
-                <a:solidFill>
-                  <a:srgbClr val="3A3A3C"/>
-                </a:solidFill>
-                <a:latin typeface="Calibri"/>
-              </a:defRPr>
-            </a:pPr>
-            <a:r>
-              <a:t>Support automation savings: $1.6M</a:t>
-            </a:r>
-          </a:p>
-          <a:p>
-            <a:pPr>
-              <a:spcAft>
-                <a:spcPts val="439"/>
-              </a:spcAft>
-              <a:defRPr sz="1100" b="0">
-                <a:solidFill>
-                  <a:srgbClr val="3A3A3C"/>
-                </a:solidFill>
-                <a:latin typeface="Calibri"/>
-              </a:defRPr>
-            </a:pPr>
-            <a:r>
-              <a:t>Demand forecasting savings: $1.6M</a:t>
-            </a:r>
-          </a:p>
-          <a:p>
-            <a:pPr>
-              <a:spcAft>
-                <a:spcPts val="439"/>
-              </a:spcAft>
-              <a:defRPr sz="1100" b="0">
-                <a:solidFill>
-                  <a:srgbClr val="3A3A3C"/>
-                </a:solidFill>
-                <a:latin typeface="Calibri"/>
-              </a:defRPr>
-            </a:pPr>
-            <a:r>
-              <a:t>Documentation and translation: $0.24M</a:t>
-            </a:r>
-          </a:p>
-          <a:p>
-            <a:pPr>
-              <a:spcAft>
-                <a:spcPts val="199"/>
-              </a:spcAft>
-              <a:defRPr sz="500" b="0">
-                <a:solidFill>
-                  <a:srgbClr val="767676"/>
-                </a:solidFill>
-                <a:latin typeface="Calibri"/>
-              </a:defRPr>
-            </a:pPr>
-          </a:p>
-          <a:p>
-            <a:pPr>
-              <a:spcAft>
-                <a:spcPts val="519"/>
-              </a:spcAft>
-              <a:defRPr sz="1300" b="1">
-                <a:solidFill>
-                  <a:srgbClr val="1C1C1E"/>
-                </a:solidFill>
-                <a:latin typeface="Calibri"/>
-              </a:defRPr>
-            </a:pPr>
-            <a:r>
-              <a:t>Revenue Growth</a:t>
-            </a:r>
-          </a:p>
-          <a:p>
-            <a:pPr>
-              <a:spcAft>
-                <a:spcPts val="439"/>
-              </a:spcAft>
-              <a:defRPr sz="1100" b="0">
-                <a:solidFill>
-                  <a:srgbClr val="3A3A3C"/>
-                </a:solidFill>
-                <a:latin typeface="Calibri"/>
-              </a:defRPr>
-            </a:pPr>
-            <a:r>
-              <a:t>Customer retention: $3.0M</a:t>
-            </a:r>
-          </a:p>
-          <a:p>
-            <a:pPr>
-              <a:spcAft>
-                <a:spcPts val="439"/>
-              </a:spcAft>
-              <a:defRPr sz="1100" b="0">
-                <a:solidFill>
-                  <a:srgbClr val="3A3A3C"/>
-                </a:solidFill>
-                <a:latin typeface="Calibri"/>
-              </a:defRPr>
-            </a:pPr>
-            <a:r>
-              <a:t>Package size increase: $4.0M</a:t>
-            </a:r>
-          </a:p>
-          <a:p>
-            <a:pPr>
-              <a:spcAft>
-                <a:spcPts val="439"/>
-              </a:spcAft>
-              <a:defRPr sz="1100" b="0">
-                <a:solidFill>
-                  <a:srgbClr val="3A3A3C"/>
-                </a:solidFill>
-                <a:latin typeface="Calibri"/>
-              </a:defRPr>
-            </a:pPr>
-            <a:r>
-              <a:t>Proposal win rate: $2.5M</a:t>
-            </a:r>
-          </a:p>
-        </p:txBody>
-      </p:sp>
-      <p:sp>
-        <p:nvSpPr>
-          <p:cNvPr id="30" name="Rounded Rectangle 29"/>
-          <p:cNvSpPr/>
-          <p:nvPr/>
-        </p:nvSpPr>
-        <p:spPr>
-          <a:xfrm>
-            <a:off x="6400800" y="5303520"/>
-            <a:ext cx="5303520" cy="777240"/>
-          </a:xfrm>
-          <a:prstGeom prst="roundRect">
-            <a:avLst>
-              <a:gd name="adj" fmla="val 2000"/>
-            </a:avLst>
-          </a:prstGeom>
-          <a:solidFill>
-            <a:srgbClr val="FFFFFF"/>
-          </a:solidFill>
-          <a:ln w="12700">
-            <a:solidFill>
-              <a:srgbClr val="E0E0DE"/>
-            </a:solidFill>
-          </a:ln>
-        </p:spPr>
-        <p:style>
-          <a:lnRef idx="1">
-            <a:schemeClr val="accent1"/>
-          </a:lnRef>
-          <a:fillRef idx="3">
-            <a:schemeClr val="accent1"/>
-          </a:fillRef>
-          <a:effectRef idx="2">
-            <a:schemeClr val="accent1"/>
-          </a:effectRef>
-          <a:fontRef idx="minor">
-            <a:schemeClr val="lt1"/>
-          </a:fontRef>
-        </p:style>
-        <p:txBody>
-          <a:bodyPr rtlCol="0" anchor="ctr"/>
-          <a:lstStyle/>
-          <a:p>
-            <a:pPr algn="ctr"/>
-          </a:p>
-        </p:txBody>
-      </p:sp>
-      <p:sp>
-        <p:nvSpPr>
-          <p:cNvPr id="31" name="TextBox 30"/>
           <p:cNvSpPr txBox="1"/>
           <p:nvPr/>
         </p:nvSpPr>
@@ -21306,7 +19462,7 @@
       </p:sp>
       <p:sp>
         <p:nvSpPr>
-          <p:cNvPr id="32" name="TextBox 31"/>
+          <p:cNvPr id="28" name="TextBox 27"/>
           <p:cNvSpPr txBox="1"/>
           <p:nvPr/>
         </p:nvSpPr>
@@ -21342,7 +19498,7 @@
       </p:sp>
       <p:sp>
         <p:nvSpPr>
-          <p:cNvPr id="33" name="TextBox 32"/>
+          <p:cNvPr id="29" name="TextBox 28"/>
           <p:cNvSpPr txBox="1"/>
           <p:nvPr/>
         </p:nvSpPr>
@@ -21561,8 +19717,8 @@
         </p:nvSpPr>
         <p:spPr>
           <a:xfrm>
-            <a:off x="731520" y="1783080"/>
-            <a:ext cx="2606040" cy="1417320"/>
+            <a:off x="731520" y="1828800"/>
+            <a:ext cx="10698480" cy="1371600"/>
           </a:xfrm>
           <a:prstGeom prst="roundRect">
             <a:avLst>
@@ -21602,132 +19758,20 @@
       </p:sp>
       <p:sp>
         <p:nvSpPr>
-          <p:cNvPr id="7" name="TextBox 6"/>
-          <p:cNvSpPr txBox="1"/>
-          <p:nvPr/>
-        </p:nvSpPr>
-        <p:spPr>
-          <a:xfrm>
-            <a:off x="914400" y="1874519"/>
-            <a:ext cx="2240280" cy="182880"/>
-          </a:xfrm>
-          <a:prstGeom prst="rect">
-            <a:avLst/>
-          </a:prstGeom>
-          <a:noFill/>
-        </p:spPr>
-        <p:txBody>
-          <a:bodyPr wrap="square">
-            <a:spAutoFit/>
-          </a:bodyPr>
-          <a:lstStyle/>
-          <a:p>
-            <a:pPr algn="l">
-              <a:defRPr sz="900" b="1" i="0">
-                <a:solidFill>
-                  <a:srgbClr val="E51937"/>
-                </a:solidFill>
-                <a:latin typeface="Calibri"/>
-              </a:defRPr>
-            </a:pPr>
-            <a:r>
-              <a:t>PHASE 1  |  0-90 days</a:t>
-            </a:r>
-          </a:p>
-        </p:txBody>
-      </p:sp>
-      <p:sp>
-        <p:nvSpPr>
-          <p:cNvPr id="8" name="TextBox 7"/>
-          <p:cNvSpPr txBox="1"/>
-          <p:nvPr/>
-        </p:nvSpPr>
-        <p:spPr>
-          <a:xfrm>
-            <a:off x="914400" y="2103120"/>
-            <a:ext cx="2240280" cy="274320"/>
-          </a:xfrm>
-          <a:prstGeom prst="rect">
-            <a:avLst/>
-          </a:prstGeom>
-          <a:noFill/>
-        </p:spPr>
-        <p:txBody>
-          <a:bodyPr wrap="square">
-            <a:spAutoFit/>
-          </a:bodyPr>
-          <a:lstStyle/>
-          <a:p>
-            <a:pPr algn="l">
-              <a:defRPr sz="1400" b="1" i="0">
-                <a:solidFill>
-                  <a:srgbClr val="1C1C1E"/>
-                </a:solidFill>
-                <a:latin typeface="Calibri"/>
-              </a:defRPr>
-            </a:pPr>
-            <a:r>
-              <a:t>Support Pilot</a:t>
-            </a:r>
-          </a:p>
-        </p:txBody>
-      </p:sp>
-      <p:sp>
-        <p:nvSpPr>
-          <p:cNvPr id="9" name="TextBox 8"/>
-          <p:cNvSpPr txBox="1"/>
-          <p:nvPr/>
-        </p:nvSpPr>
-        <p:spPr>
-          <a:xfrm>
-            <a:off x="914400" y="2423160"/>
-            <a:ext cx="2240280" cy="594360"/>
-          </a:xfrm>
-          <a:prstGeom prst="rect">
-            <a:avLst/>
-          </a:prstGeom>
-          <a:noFill/>
-        </p:spPr>
-        <p:txBody>
-          <a:bodyPr wrap="square">
-            <a:spAutoFit/>
-          </a:bodyPr>
-          <a:lstStyle/>
-          <a:p>
-            <a:pPr algn="l">
-              <a:defRPr sz="1100" b="0" i="0">
-                <a:solidFill>
-                  <a:srgbClr val="3A3A3C"/>
-                </a:solidFill>
-                <a:latin typeface="Calibri"/>
-              </a:defRPr>
-            </a:pPr>
-            <a:r>
-              <a:t>AI-assisted support</a:t>
-            </a:r>
-            <a:br/>
-            <a:r>
-              <a:t>for AXS + Hammerhead</a:t>
-            </a:r>
-          </a:p>
-        </p:txBody>
-      </p:sp>
-      <p:sp>
-        <p:nvSpPr>
-          <p:cNvPr id="10" name="Isosceles Triangle 9"/>
+          <p:cNvPr id="7" name="Rectangle 6"/>
           <p:cNvSpPr/>
           <p:nvPr/>
         </p:nvSpPr>
         <p:spPr>
-          <a:xfrm rot="5400000">
-            <a:off x="3355848" y="2331720"/>
-            <a:ext cx="274320" cy="274320"/>
-          </a:xfrm>
-          <a:prstGeom prst="triangle">
+          <a:xfrm>
+            <a:off x="731520" y="1828800"/>
+            <a:ext cx="50800" cy="1371600"/>
+          </a:xfrm>
+          <a:prstGeom prst="rect">
             <a:avLst/>
           </a:prstGeom>
           <a:solidFill>
-            <a:srgbClr val="767676"/>
+            <a:srgbClr val="E51937"/>
           </a:solidFill>
           <a:ln>
             <a:noFill/>
@@ -21757,14 +19801,122 @@
       </p:sp>
       <p:sp>
         <p:nvSpPr>
+          <p:cNvPr id="8" name="TextBox 7"/>
+          <p:cNvSpPr txBox="1"/>
+          <p:nvPr/>
+        </p:nvSpPr>
+        <p:spPr>
+          <a:xfrm>
+            <a:off x="1097280" y="1938528"/>
+            <a:ext cx="3657600" cy="182880"/>
+          </a:xfrm>
+          <a:prstGeom prst="rect">
+            <a:avLst/>
+          </a:prstGeom>
+          <a:noFill/>
+        </p:spPr>
+        <p:txBody>
+          <a:bodyPr wrap="square">
+            <a:spAutoFit/>
+          </a:bodyPr>
+          <a:lstStyle/>
+          <a:p>
+            <a:pPr algn="l">
+              <a:defRPr sz="1000" b="1" i="0">
+                <a:solidFill>
+                  <a:srgbClr val="E51937"/>
+                </a:solidFill>
+                <a:latin typeface="Calibri"/>
+              </a:defRPr>
+            </a:pPr>
+            <a:r>
+              <a:t>THE UNLOCK</a:t>
+            </a:r>
+          </a:p>
+        </p:txBody>
+      </p:sp>
+      <p:sp>
+        <p:nvSpPr>
+          <p:cNvPr id="9" name="TextBox 8"/>
+          <p:cNvSpPr txBox="1"/>
+          <p:nvPr/>
+        </p:nvSpPr>
+        <p:spPr>
+          <a:xfrm>
+            <a:off x="1097280" y="2194560"/>
+            <a:ext cx="4572000" cy="365760"/>
+          </a:xfrm>
+          <a:prstGeom prst="rect">
+            <a:avLst/>
+          </a:prstGeom>
+          <a:noFill/>
+        </p:spPr>
+        <p:txBody>
+          <a:bodyPr wrap="square">
+            <a:spAutoFit/>
+          </a:bodyPr>
+          <a:lstStyle/>
+          <a:p>
+            <a:pPr algn="l">
+              <a:defRPr sz="2000" b="1" i="0">
+                <a:solidFill>
+                  <a:srgbClr val="1C1C1E"/>
+                </a:solidFill>
+                <a:latin typeface="Calibri"/>
+              </a:defRPr>
+            </a:pPr>
+            <a:r>
+              <a:t>AXS Intelligence Platform</a:t>
+            </a:r>
+          </a:p>
+        </p:txBody>
+      </p:sp>
+      <p:sp>
+        <p:nvSpPr>
+          <p:cNvPr id="10" name="TextBox 9"/>
+          <p:cNvSpPr txBox="1"/>
+          <p:nvPr/>
+        </p:nvSpPr>
+        <p:spPr>
+          <a:xfrm>
+            <a:off x="1097280" y="2651760"/>
+            <a:ext cx="9601200" cy="457200"/>
+          </a:xfrm>
+          <a:prstGeom prst="rect">
+            <a:avLst/>
+          </a:prstGeom>
+          <a:noFill/>
+        </p:spPr>
+        <p:txBody>
+          <a:bodyPr wrap="square">
+            <a:spAutoFit/>
+          </a:bodyPr>
+          <a:lstStyle/>
+          <a:p>
+            <a:pPr algn="l">
+              <a:defRPr sz="1300" b="0" i="0">
+                <a:solidFill>
+                  <a:srgbClr val="3A3A3C"/>
+                </a:solidFill>
+                <a:latin typeface="Calibri"/>
+              </a:defRPr>
+            </a:pPr>
+            <a:r>
+              <a:t>Unified rider dashboard: power, gearing, suspension, heart rate in one view. No competitor has the product breadth to build this.</a:t>
+            </a:r>
+          </a:p>
+        </p:txBody>
+      </p:sp>
+      <p:sp>
+        <p:nvSpPr>
           <p:cNvPr id="11" name="Rounded Rectangle 10"/>
           <p:cNvSpPr/>
           <p:nvPr/>
         </p:nvSpPr>
         <p:spPr>
           <a:xfrm>
-            <a:off x="3566160" y="1783080"/>
-            <a:ext cx="2606040" cy="1417320"/>
+            <a:off x="731520" y="3657600"/>
+            <a:ext cx="3429000" cy="1188720"/>
           </a:xfrm>
           <a:prstGeom prst="roundRect">
             <a:avLst>
@@ -21810,30 +19962,30 @@
         </p:nvSpPr>
         <p:spPr>
           <a:xfrm>
-            <a:off x="3749040" y="1874519"/>
-            <a:ext cx="2240280" cy="182880"/>
-          </a:xfrm>
-          <a:prstGeom prst="rect">
-            <a:avLst/>
-          </a:prstGeom>
-          <a:noFill/>
-        </p:spPr>
-        <p:txBody>
-          <a:bodyPr wrap="square">
-            <a:spAutoFit/>
-          </a:bodyPr>
-          <a:lstStyle/>
-          <a:p>
-            <a:pPr algn="l">
-              <a:defRPr sz="900" b="1" i="0">
-                <a:solidFill>
-                  <a:srgbClr val="767676"/>
-                </a:solidFill>
-                <a:latin typeface="Calibri"/>
-              </a:defRPr>
-            </a:pPr>
-            <a:r>
-              <a:t>PHASE 2  |  90-180 days</a:t>
+            <a:off x="960120" y="3794760"/>
+            <a:ext cx="2971800" cy="274320"/>
+          </a:xfrm>
+          <a:prstGeom prst="rect">
+            <a:avLst/>
+          </a:prstGeom>
+          <a:noFill/>
+        </p:spPr>
+        <p:txBody>
+          <a:bodyPr wrap="square">
+            <a:spAutoFit/>
+          </a:bodyPr>
+          <a:lstStyle/>
+          <a:p>
+            <a:pPr algn="l">
+              <a:defRPr sz="1300" b="1" i="0">
+                <a:solidFill>
+                  <a:srgbClr val="1C1C1E"/>
+                </a:solidFill>
+                <a:latin typeface="Calibri"/>
+              </a:defRPr>
+            </a:pPr>
+            <a:r>
+              <a:t>Predictive Maintenance</a:t>
             </a:r>
           </a:p>
         </p:txBody>
@@ -21846,44 +19998,8 @@
         </p:nvSpPr>
         <p:spPr>
           <a:xfrm>
-            <a:off x="3749040" y="2103120"/>
-            <a:ext cx="2240280" cy="274320"/>
-          </a:xfrm>
-          <a:prstGeom prst="rect">
-            <a:avLst/>
-          </a:prstGeom>
-          <a:noFill/>
-        </p:spPr>
-        <p:txBody>
-          <a:bodyPr wrap="square">
-            <a:spAutoFit/>
-          </a:bodyPr>
-          <a:lstStyle/>
-          <a:p>
-            <a:pPr algn="l">
-              <a:defRPr sz="1400" b="1" i="0">
-                <a:solidFill>
-                  <a:srgbClr val="1C1C1E"/>
-                </a:solidFill>
-                <a:latin typeface="Calibri"/>
-              </a:defRPr>
-            </a:pPr>
-            <a:r>
-              <a:t>Data Foundation</a:t>
-            </a:r>
-          </a:p>
-        </p:txBody>
-      </p:sp>
-      <p:sp>
-        <p:nvSpPr>
-          <p:cNvPr id="14" name="TextBox 13"/>
-          <p:cNvSpPr txBox="1"/>
-          <p:nvPr/>
-        </p:nvSpPr>
-        <p:spPr>
-          <a:xfrm>
-            <a:off x="3749040" y="2423160"/>
-            <a:ext cx="2240280" cy="594360"/>
+            <a:off x="960120" y="4114800"/>
+            <a:ext cx="2971800" cy="594360"/>
           </a:xfrm>
           <a:prstGeom prst="rect">
             <a:avLst/>
@@ -21905,68 +20021,21 @@
               </a:defRPr>
             </a:pPr>
             <a:r>
-              <a:t>Unified data layer</a:t>
-            </a:r>
-            <a:br/>
-            <a:r>
-              <a:t>+ demand forecasting</a:t>
-            </a:r>
-          </a:p>
-        </p:txBody>
-      </p:sp>
-      <p:sp>
-        <p:nvSpPr>
-          <p:cNvPr id="15" name="Isosceles Triangle 14"/>
+              <a:t>Connected components predict chain and brake pad replacement before failure. Installed base becomes recurring revenue.</a:t>
+            </a:r>
+          </a:p>
+        </p:txBody>
+      </p:sp>
+      <p:sp>
+        <p:nvSpPr>
+          <p:cNvPr id="14" name="Rounded Rectangle 13"/>
           <p:cNvSpPr/>
           <p:nvPr/>
         </p:nvSpPr>
         <p:spPr>
-          <a:xfrm rot="5400000">
-            <a:off x="6190488" y="2331720"/>
-            <a:ext cx="274320" cy="274320"/>
-          </a:xfrm>
-          <a:prstGeom prst="triangle">
-            <a:avLst/>
-          </a:prstGeom>
-          <a:solidFill>
-            <a:srgbClr val="767676"/>
-          </a:solidFill>
-          <a:ln>
-            <a:noFill/>
-          </a:ln>
-        </p:spPr>
-        <p:style>
-          <a:lnRef idx="1">
-            <a:schemeClr val="accent1"/>
-          </a:lnRef>
-          <a:fillRef idx="3">
-            <a:schemeClr val="accent1"/>
-          </a:fillRef>
-          <a:effectRef idx="2">
-            <a:schemeClr val="accent1"/>
-          </a:effectRef>
-          <a:fontRef idx="minor">
-            <a:schemeClr val="lt1"/>
-          </a:fontRef>
-        </p:style>
-        <p:txBody>
-          <a:bodyPr rtlCol="0" anchor="ctr"/>
-          <a:lstStyle/>
-          <a:p>
-            <a:pPr algn="ctr"/>
-          </a:p>
-        </p:txBody>
-      </p:sp>
-      <p:sp>
-        <p:nvSpPr>
-          <p:cNvPr id="16" name="Rounded Rectangle 15"/>
-          <p:cNvSpPr/>
-          <p:nvPr/>
-        </p:nvSpPr>
-        <p:spPr>
-          <a:xfrm>
-            <a:off x="6400800" y="1783080"/>
-            <a:ext cx="2606040" cy="1417320"/>
+          <a:xfrm>
+            <a:off x="4389120" y="3657600"/>
+            <a:ext cx="3429000" cy="1188720"/>
           </a:xfrm>
           <a:prstGeom prst="roundRect">
             <a:avLst>
@@ -22006,64 +20075,28 @@
       </p:sp>
       <p:sp>
         <p:nvSpPr>
-          <p:cNvPr id="17" name="TextBox 16"/>
-          <p:cNvSpPr txBox="1"/>
-          <p:nvPr/>
-        </p:nvSpPr>
-        <p:spPr>
-          <a:xfrm>
-            <a:off x="6583680" y="1874519"/>
-            <a:ext cx="2240280" cy="182880"/>
-          </a:xfrm>
-          <a:prstGeom prst="rect">
-            <a:avLst/>
-          </a:prstGeom>
-          <a:noFill/>
-        </p:spPr>
-        <p:txBody>
-          <a:bodyPr wrap="square">
-            <a:spAutoFit/>
-          </a:bodyPr>
-          <a:lstStyle/>
-          <a:p>
-            <a:pPr algn="l">
-              <a:defRPr sz="900" b="1" i="0">
-                <a:solidFill>
-                  <a:srgbClr val="767676"/>
-                </a:solidFill>
-                <a:latin typeface="Calibri"/>
-              </a:defRPr>
-            </a:pPr>
-            <a:r>
-              <a:t>PHASE 3  |  180-365 days</a:t>
-            </a:r>
-          </a:p>
-        </p:txBody>
-      </p:sp>
-      <p:sp>
-        <p:nvSpPr>
-          <p:cNvPr id="18" name="TextBox 17"/>
-          <p:cNvSpPr txBox="1"/>
-          <p:nvPr/>
-        </p:nvSpPr>
-        <p:spPr>
-          <a:xfrm>
-            <a:off x="6583680" y="2103120"/>
-            <a:ext cx="2240280" cy="274320"/>
-          </a:xfrm>
-          <a:prstGeom prst="rect">
-            <a:avLst/>
-          </a:prstGeom>
-          <a:noFill/>
-        </p:spPr>
-        <p:txBody>
-          <a:bodyPr wrap="square">
-            <a:spAutoFit/>
-          </a:bodyPr>
-          <a:lstStyle/>
-          <a:p>
-            <a:pPr algn="l">
-              <a:defRPr sz="1400" b="1" i="0">
+          <p:cNvPr id="15" name="TextBox 14"/>
+          <p:cNvSpPr txBox="1"/>
+          <p:nvPr/>
+        </p:nvSpPr>
+        <p:spPr>
+          <a:xfrm>
+            <a:off x="4617720" y="3794760"/>
+            <a:ext cx="2971800" cy="274320"/>
+          </a:xfrm>
+          <a:prstGeom prst="rect">
+            <a:avLst/>
+          </a:prstGeom>
+          <a:noFill/>
+        </p:spPr>
+        <p:txBody>
+          <a:bodyPr wrap="square">
+            <a:spAutoFit/>
+          </a:bodyPr>
+          <a:lstStyle/>
+          <a:p>
+            <a:pPr algn="l">
+              <a:defRPr sz="1300" b="1" i="0">
                 <a:solidFill>
                   <a:srgbClr val="1C1C1E"/>
                 </a:solidFill>
@@ -22071,21 +20104,21 @@
               </a:defRPr>
             </a:pPr>
             <a:r>
-              <a:t>Revenue Acceleration</a:t>
-            </a:r>
-          </a:p>
-        </p:txBody>
-      </p:sp>
-      <p:sp>
-        <p:nvSpPr>
-          <p:cNvPr id="19" name="TextBox 18"/>
-          <p:cNvSpPr txBox="1"/>
-          <p:nvPr/>
-        </p:nvSpPr>
-        <p:spPr>
-          <a:xfrm>
-            <a:off x="6583680" y="2423160"/>
-            <a:ext cx="2240280" cy="594360"/>
+              <a:t>AI-Tuned Performance</a:t>
+            </a:r>
+          </a:p>
+        </p:txBody>
+      </p:sp>
+      <p:sp>
+        <p:nvSpPr>
+          <p:cNvPr id="16" name="TextBox 15"/>
+          <p:cNvSpPr txBox="1"/>
+          <p:nvPr/>
+        </p:nvSpPr>
+        <p:spPr>
+          <a:xfrm>
+            <a:off x="4617720" y="4114800"/>
+            <a:ext cx="2971800" cy="594360"/>
           </a:xfrm>
           <a:prstGeom prst="rect">
             <a:avLst/>
@@ -22107,68 +20140,21 @@
               </a:defRPr>
             </a:pPr>
             <a:r>
-              <a:t>OEM automation +</a:t>
-            </a:r>
-            <a:br/>
-            <a:r>
-              <a:t>part recommendations</a:t>
-            </a:r>
-          </a:p>
-        </p:txBody>
-      </p:sp>
-      <p:sp>
-        <p:nvSpPr>
-          <p:cNvPr id="20" name="Isosceles Triangle 19"/>
+              <a:t>Suspension auto-adjusts to terrain. Shifting optimizes for rider power. Products improve continuously after purchase.</a:t>
+            </a:r>
+          </a:p>
+        </p:txBody>
+      </p:sp>
+      <p:sp>
+        <p:nvSpPr>
+          <p:cNvPr id="17" name="Rounded Rectangle 16"/>
           <p:cNvSpPr/>
           <p:nvPr/>
         </p:nvSpPr>
         <p:spPr>
-          <a:xfrm rot="5400000">
-            <a:off x="9025128" y="2331720"/>
-            <a:ext cx="274320" cy="274320"/>
-          </a:xfrm>
-          <a:prstGeom prst="triangle">
-            <a:avLst/>
-          </a:prstGeom>
-          <a:solidFill>
-            <a:srgbClr val="767676"/>
-          </a:solidFill>
-          <a:ln>
-            <a:noFill/>
-          </a:ln>
-        </p:spPr>
-        <p:style>
-          <a:lnRef idx="1">
-            <a:schemeClr val="accent1"/>
-          </a:lnRef>
-          <a:fillRef idx="3">
-            <a:schemeClr val="accent1"/>
-          </a:fillRef>
-          <a:effectRef idx="2">
-            <a:schemeClr val="accent1"/>
-          </a:effectRef>
-          <a:fontRef idx="minor">
-            <a:schemeClr val="lt1"/>
-          </a:fontRef>
-        </p:style>
-        <p:txBody>
-          <a:bodyPr rtlCol="0" anchor="ctr"/>
-          <a:lstStyle/>
-          <a:p>
-            <a:pPr algn="ctr"/>
-          </a:p>
-        </p:txBody>
-      </p:sp>
-      <p:sp>
-        <p:nvSpPr>
-          <p:cNvPr id="21" name="Rounded Rectangle 20"/>
-          <p:cNvSpPr/>
-          <p:nvPr/>
-        </p:nvSpPr>
-        <p:spPr>
-          <a:xfrm>
-            <a:off x="9235440" y="1783080"/>
-            <a:ext cx="2606040" cy="1417320"/>
+          <a:xfrm>
+            <a:off x="8046720" y="3657600"/>
+            <a:ext cx="3429000" cy="1188720"/>
           </a:xfrm>
           <a:prstGeom prst="roundRect">
             <a:avLst>
@@ -22208,64 +20194,28 @@
       </p:sp>
       <p:sp>
         <p:nvSpPr>
-          <p:cNvPr id="22" name="TextBox 21"/>
-          <p:cNvSpPr txBox="1"/>
-          <p:nvPr/>
-        </p:nvSpPr>
-        <p:spPr>
-          <a:xfrm>
-            <a:off x="9418320" y="1874519"/>
-            <a:ext cx="2240280" cy="182880"/>
-          </a:xfrm>
-          <a:prstGeom prst="rect">
-            <a:avLst/>
-          </a:prstGeom>
-          <a:noFill/>
-        </p:spPr>
-        <p:txBody>
-          <a:bodyPr wrap="square">
-            <a:spAutoFit/>
-          </a:bodyPr>
-          <a:lstStyle/>
-          <a:p>
-            <a:pPr algn="l">
-              <a:defRPr sz="900" b="1" i="0">
-                <a:solidFill>
-                  <a:srgbClr val="767676"/>
-                </a:solidFill>
-                <a:latin typeface="Calibri"/>
-              </a:defRPr>
-            </a:pPr>
-            <a:r>
-              <a:t>PHASE 4  |  Year 2+</a:t>
-            </a:r>
-          </a:p>
-        </p:txBody>
-      </p:sp>
-      <p:sp>
-        <p:nvSpPr>
-          <p:cNvPr id="23" name="TextBox 22"/>
-          <p:cNvSpPr txBox="1"/>
-          <p:nvPr/>
-        </p:nvSpPr>
-        <p:spPr>
-          <a:xfrm>
-            <a:off x="9418320" y="2103120"/>
-            <a:ext cx="2240280" cy="274320"/>
-          </a:xfrm>
-          <a:prstGeom prst="rect">
-            <a:avLst/>
-          </a:prstGeom>
-          <a:noFill/>
-        </p:spPr>
-        <p:txBody>
-          <a:bodyPr wrap="square">
-            <a:spAutoFit/>
-          </a:bodyPr>
-          <a:lstStyle/>
-          <a:p>
-            <a:pPr algn="l">
-              <a:defRPr sz="1400" b="1" i="0">
+          <p:cNvPr id="18" name="TextBox 17"/>
+          <p:cNvSpPr txBox="1"/>
+          <p:nvPr/>
+        </p:nvSpPr>
+        <p:spPr>
+          <a:xfrm>
+            <a:off x="8275320" y="3794760"/>
+            <a:ext cx="2971800" cy="274320"/>
+          </a:xfrm>
+          <a:prstGeom prst="rect">
+            <a:avLst/>
+          </a:prstGeom>
+          <a:noFill/>
+        </p:spPr>
+        <p:txBody>
+          <a:bodyPr wrap="square">
+            <a:spAutoFit/>
+          </a:bodyPr>
+          <a:lstStyle/>
+          <a:p>
+            <a:pPr algn="l">
+              <a:defRPr sz="1300" b="1" i="0">
                 <a:solidFill>
                   <a:srgbClr val="1C1C1E"/>
                 </a:solidFill>
@@ -22273,21 +20223,21 @@
               </a:defRPr>
             </a:pPr>
             <a:r>
-              <a:t>AI-First Culture</a:t>
-            </a:r>
-          </a:p>
-        </p:txBody>
-      </p:sp>
-      <p:sp>
-        <p:nvSpPr>
-          <p:cNvPr id="24" name="TextBox 23"/>
-          <p:cNvSpPr txBox="1"/>
-          <p:nvPr/>
-        </p:nvSpPr>
-        <p:spPr>
-          <a:xfrm>
-            <a:off x="9418320" y="2423160"/>
-            <a:ext cx="2240280" cy="594360"/>
+              <a:t>Dealer Intelligence</a:t>
+            </a:r>
+          </a:p>
+        </p:txBody>
+      </p:sp>
+      <p:sp>
+        <p:nvSpPr>
+          <p:cNvPr id="19" name="TextBox 18"/>
+          <p:cNvSpPr txBox="1"/>
+          <p:nvPr/>
+        </p:nvSpPr>
+        <p:spPr>
+          <a:xfrm>
+            <a:off x="8275320" y="4114800"/>
+            <a:ext cx="2971800" cy="594360"/>
           </a:xfrm>
           <a:prstGeom prst="rect">
             <a:avLst/>
@@ -22309,227 +20259,25 @@
               </a:defRPr>
             </a:pPr>
             <a:r>
-              <a:t>AXS Intelligence</a:t>
-            </a:r>
-            <a:br/>
-            <a:r>
-              <a:t>+ predictive maintenance</a:t>
-            </a:r>
-          </a:p>
-        </p:txBody>
-      </p:sp>
-      <p:sp>
-        <p:nvSpPr>
-          <p:cNvPr id="25" name="Rounded Rectangle 24"/>
+              <a:t>Telemetry tells dealers which parts approach end-of-life in their area. Proactive ordering replaces reactive.</a:t>
+            </a:r>
+          </a:p>
+        </p:txBody>
+      </p:sp>
+      <p:sp>
+        <p:nvSpPr>
+          <p:cNvPr id="20" name="Rounded Rectangle 19"/>
           <p:cNvSpPr/>
           <p:nvPr/>
         </p:nvSpPr>
         <p:spPr>
           <a:xfrm>
-            <a:off x="731520" y="3520440"/>
-            <a:ext cx="10698480" cy="1188720"/>
+            <a:off x="731520" y="5303520"/>
+            <a:ext cx="10698480" cy="411480"/>
           </a:xfrm>
           <a:prstGeom prst="roundRect">
             <a:avLst>
-              <a:gd name="adj" fmla="val 4000"/>
-            </a:avLst>
-          </a:prstGeom>
-          <a:solidFill>
-            <a:srgbClr val="FDF0F2"/>
-          </a:solidFill>
-          <a:ln w="12700">
-            <a:solidFill>
-              <a:srgbClr val="E51937"/>
-            </a:solidFill>
-          </a:ln>
-        </p:spPr>
-        <p:style>
-          <a:lnRef idx="1">
-            <a:schemeClr val="accent1"/>
-          </a:lnRef>
-          <a:fillRef idx="3">
-            <a:schemeClr val="accent1"/>
-          </a:fillRef>
-          <a:effectRef idx="2">
-            <a:schemeClr val="accent1"/>
-          </a:effectRef>
-          <a:fontRef idx="minor">
-            <a:schemeClr val="lt1"/>
-          </a:fontRef>
-        </p:style>
-        <p:txBody>
-          <a:bodyPr rtlCol="0" anchor="ctr"/>
-          <a:lstStyle/>
-          <a:p>
-            <a:pPr algn="ctr"/>
-          </a:p>
-        </p:txBody>
-      </p:sp>
-      <p:sp>
-        <p:nvSpPr>
-          <p:cNvPr id="26" name="Rectangle 25"/>
-          <p:cNvSpPr/>
-          <p:nvPr/>
-        </p:nvSpPr>
-        <p:spPr>
-          <a:xfrm>
-            <a:off x="731520" y="3520440"/>
-            <a:ext cx="50800" cy="1188720"/>
-          </a:xfrm>
-          <a:prstGeom prst="rect">
-            <a:avLst/>
-          </a:prstGeom>
-          <a:solidFill>
-            <a:srgbClr val="E51937"/>
-          </a:solidFill>
-          <a:ln>
-            <a:noFill/>
-          </a:ln>
-        </p:spPr>
-        <p:style>
-          <a:lnRef idx="1">
-            <a:schemeClr val="accent1"/>
-          </a:lnRef>
-          <a:fillRef idx="3">
-            <a:schemeClr val="accent1"/>
-          </a:fillRef>
-          <a:effectRef idx="2">
-            <a:schemeClr val="accent1"/>
-          </a:effectRef>
-          <a:fontRef idx="minor">
-            <a:schemeClr val="lt1"/>
-          </a:fontRef>
-        </p:style>
-        <p:txBody>
-          <a:bodyPr rtlCol="0" anchor="ctr"/>
-          <a:lstStyle/>
-          <a:p>
-            <a:pPr algn="ctr"/>
-          </a:p>
-        </p:txBody>
-      </p:sp>
-      <p:sp>
-        <p:nvSpPr>
-          <p:cNvPr id="27" name="TextBox 26"/>
-          <p:cNvSpPr txBox="1"/>
-          <p:nvPr/>
-        </p:nvSpPr>
-        <p:spPr>
-          <a:xfrm>
-            <a:off x="1005840" y="3593592"/>
-            <a:ext cx="3657600" cy="182880"/>
-          </a:xfrm>
-          <a:prstGeom prst="rect">
-            <a:avLst/>
-          </a:prstGeom>
-          <a:noFill/>
-        </p:spPr>
-        <p:txBody>
-          <a:bodyPr wrap="square">
-            <a:spAutoFit/>
-          </a:bodyPr>
-          <a:lstStyle/>
-          <a:p>
-            <a:pPr algn="l">
-              <a:defRPr sz="900" b="1" i="0">
-                <a:solidFill>
-                  <a:srgbClr val="E51937"/>
-                </a:solidFill>
-                <a:latin typeface="Calibri"/>
-              </a:defRPr>
-            </a:pPr>
-            <a:r>
-              <a:t>THE UNLOCK</a:t>
-            </a:r>
-          </a:p>
-        </p:txBody>
-      </p:sp>
-      <p:sp>
-        <p:nvSpPr>
-          <p:cNvPr id="28" name="TextBox 27"/>
-          <p:cNvSpPr txBox="1"/>
-          <p:nvPr/>
-        </p:nvSpPr>
-        <p:spPr>
-          <a:xfrm>
-            <a:off x="1005840" y="3794760"/>
-            <a:ext cx="4572000" cy="320040"/>
-          </a:xfrm>
-          <a:prstGeom prst="rect">
-            <a:avLst/>
-          </a:prstGeom>
-          <a:noFill/>
-        </p:spPr>
-        <p:txBody>
-          <a:bodyPr wrap="square">
-            <a:spAutoFit/>
-          </a:bodyPr>
-          <a:lstStyle/>
-          <a:p>
-            <a:pPr algn="l">
-              <a:defRPr sz="1600" b="1" i="0">
-                <a:solidFill>
-                  <a:srgbClr val="1C1C1E"/>
-                </a:solidFill>
-                <a:latin typeface="Calibri"/>
-              </a:defRPr>
-            </a:pPr>
-            <a:r>
-              <a:t>AXS Intelligence Platform</a:t>
-            </a:r>
-          </a:p>
-        </p:txBody>
-      </p:sp>
-      <p:sp>
-        <p:nvSpPr>
-          <p:cNvPr id="29" name="TextBox 28"/>
-          <p:cNvSpPr txBox="1"/>
-          <p:nvPr/>
-        </p:nvSpPr>
-        <p:spPr>
-          <a:xfrm>
-            <a:off x="1005840" y="4160520"/>
-            <a:ext cx="9601200" cy="457200"/>
-          </a:xfrm>
-          <a:prstGeom prst="rect">
-            <a:avLst/>
-          </a:prstGeom>
-          <a:noFill/>
-        </p:spPr>
-        <p:txBody>
-          <a:bodyPr wrap="square">
-            <a:spAutoFit/>
-          </a:bodyPr>
-          <a:lstStyle/>
-          <a:p>
-            <a:pPr algn="l">
-              <a:defRPr sz="1200" b="0" i="0">
-                <a:solidFill>
-                  <a:srgbClr val="3A3A3C"/>
-                </a:solidFill>
-                <a:latin typeface="Calibri"/>
-              </a:defRPr>
-            </a:pPr>
-            <a:r>
-              <a:t>Unified rider dashboard: power, gearing, suspension, heart rate in one view. No competitor has the product breadth to build this.</a:t>
-            </a:r>
-          </a:p>
-        </p:txBody>
-      </p:sp>
-      <p:sp>
-        <p:nvSpPr>
-          <p:cNvPr id="30" name="Rounded Rectangle 29"/>
-          <p:cNvSpPr/>
-          <p:nvPr/>
-        </p:nvSpPr>
-        <p:spPr>
-          <a:xfrm>
-            <a:off x="731520" y="4892040"/>
-            <a:ext cx="3429000" cy="1051560"/>
-          </a:xfrm>
-          <a:prstGeom prst="roundRect">
-            <a:avLst>
-              <a:gd name="adj" fmla="val 4000"/>
+              <a:gd name="adj" fmla="val 10000"/>
             </a:avLst>
           </a:prstGeom>
           <a:solidFill>
@@ -22565,371 +20313,14 @@
       </p:sp>
       <p:sp>
         <p:nvSpPr>
-          <p:cNvPr id="31" name="TextBox 30"/>
-          <p:cNvSpPr txBox="1"/>
-          <p:nvPr/>
-        </p:nvSpPr>
-        <p:spPr>
-          <a:xfrm>
-            <a:off x="914400" y="4983480"/>
-            <a:ext cx="3063240" cy="274320"/>
-          </a:xfrm>
-          <a:prstGeom prst="rect">
-            <a:avLst/>
-          </a:prstGeom>
-          <a:noFill/>
-        </p:spPr>
-        <p:txBody>
-          <a:bodyPr wrap="square">
-            <a:spAutoFit/>
-          </a:bodyPr>
-          <a:lstStyle/>
-          <a:p>
-            <a:pPr algn="l">
-              <a:defRPr sz="1200" b="1" i="0">
-                <a:solidFill>
-                  <a:srgbClr val="1C1C1E"/>
-                </a:solidFill>
-                <a:latin typeface="Calibri"/>
-              </a:defRPr>
-            </a:pPr>
-            <a:r>
-              <a:t>Predictive Maintenance</a:t>
-            </a:r>
-          </a:p>
-        </p:txBody>
-      </p:sp>
-      <p:sp>
-        <p:nvSpPr>
-          <p:cNvPr id="32" name="TextBox 31"/>
-          <p:cNvSpPr txBox="1"/>
-          <p:nvPr/>
-        </p:nvSpPr>
-        <p:spPr>
-          <a:xfrm>
-            <a:off x="914400" y="5257800"/>
-            <a:ext cx="3063240" cy="548640"/>
-          </a:xfrm>
-          <a:prstGeom prst="rect">
-            <a:avLst/>
-          </a:prstGeom>
-          <a:noFill/>
-        </p:spPr>
-        <p:txBody>
-          <a:bodyPr wrap="square">
-            <a:spAutoFit/>
-          </a:bodyPr>
-          <a:lstStyle/>
-          <a:p>
-            <a:pPr algn="l">
-              <a:defRPr sz="1000" b="0" i="0">
-                <a:solidFill>
-                  <a:srgbClr val="3A3A3C"/>
-                </a:solidFill>
-                <a:latin typeface="Calibri"/>
-              </a:defRPr>
-            </a:pPr>
-            <a:r>
-              <a:t>Connected components predict chain and brake pad replacement before failure. Installed base becomes recurring revenue.</a:t>
-            </a:r>
-          </a:p>
-        </p:txBody>
-      </p:sp>
-      <p:sp>
-        <p:nvSpPr>
-          <p:cNvPr id="33" name="Rounded Rectangle 32"/>
+          <p:cNvPr id="21" name="Rectangle 20"/>
           <p:cNvSpPr/>
           <p:nvPr/>
         </p:nvSpPr>
         <p:spPr>
           <a:xfrm>
-            <a:off x="4389120" y="4892040"/>
-            <a:ext cx="3429000" cy="1051560"/>
-          </a:xfrm>
-          <a:prstGeom prst="roundRect">
-            <a:avLst>
-              <a:gd name="adj" fmla="val 4000"/>
-            </a:avLst>
-          </a:prstGeom>
-          <a:solidFill>
-            <a:srgbClr val="FFFFFF"/>
-          </a:solidFill>
-          <a:ln w="12700">
-            <a:solidFill>
-              <a:srgbClr val="E0E0DE"/>
-            </a:solidFill>
-          </a:ln>
-        </p:spPr>
-        <p:style>
-          <a:lnRef idx="1">
-            <a:schemeClr val="accent1"/>
-          </a:lnRef>
-          <a:fillRef idx="3">
-            <a:schemeClr val="accent1"/>
-          </a:fillRef>
-          <a:effectRef idx="2">
-            <a:schemeClr val="accent1"/>
-          </a:effectRef>
-          <a:fontRef idx="minor">
-            <a:schemeClr val="lt1"/>
-          </a:fontRef>
-        </p:style>
-        <p:txBody>
-          <a:bodyPr rtlCol="0" anchor="ctr"/>
-          <a:lstStyle/>
-          <a:p>
-            <a:pPr algn="ctr"/>
-          </a:p>
-        </p:txBody>
-      </p:sp>
-      <p:sp>
-        <p:nvSpPr>
-          <p:cNvPr id="34" name="TextBox 33"/>
-          <p:cNvSpPr txBox="1"/>
-          <p:nvPr/>
-        </p:nvSpPr>
-        <p:spPr>
-          <a:xfrm>
-            <a:off x="4572000" y="4983480"/>
-            <a:ext cx="3063240" cy="274320"/>
-          </a:xfrm>
-          <a:prstGeom prst="rect">
-            <a:avLst/>
-          </a:prstGeom>
-          <a:noFill/>
-        </p:spPr>
-        <p:txBody>
-          <a:bodyPr wrap="square">
-            <a:spAutoFit/>
-          </a:bodyPr>
-          <a:lstStyle/>
-          <a:p>
-            <a:pPr algn="l">
-              <a:defRPr sz="1200" b="1" i="0">
-                <a:solidFill>
-                  <a:srgbClr val="1C1C1E"/>
-                </a:solidFill>
-                <a:latin typeface="Calibri"/>
-              </a:defRPr>
-            </a:pPr>
-            <a:r>
-              <a:t>AI-Tuned Performance</a:t>
-            </a:r>
-          </a:p>
-        </p:txBody>
-      </p:sp>
-      <p:sp>
-        <p:nvSpPr>
-          <p:cNvPr id="35" name="TextBox 34"/>
-          <p:cNvSpPr txBox="1"/>
-          <p:nvPr/>
-        </p:nvSpPr>
-        <p:spPr>
-          <a:xfrm>
-            <a:off x="4572000" y="5257800"/>
-            <a:ext cx="3063240" cy="548640"/>
-          </a:xfrm>
-          <a:prstGeom prst="rect">
-            <a:avLst/>
-          </a:prstGeom>
-          <a:noFill/>
-        </p:spPr>
-        <p:txBody>
-          <a:bodyPr wrap="square">
-            <a:spAutoFit/>
-          </a:bodyPr>
-          <a:lstStyle/>
-          <a:p>
-            <a:pPr algn="l">
-              <a:defRPr sz="1000" b="0" i="0">
-                <a:solidFill>
-                  <a:srgbClr val="3A3A3C"/>
-                </a:solidFill>
-                <a:latin typeface="Calibri"/>
-              </a:defRPr>
-            </a:pPr>
-            <a:r>
-              <a:t>Suspension auto-adjusts to terrain. Shifting optimizes for rider power. Products improve continuously after purchase.</a:t>
-            </a:r>
-          </a:p>
-        </p:txBody>
-      </p:sp>
-      <p:sp>
-        <p:nvSpPr>
-          <p:cNvPr id="36" name="Rounded Rectangle 35"/>
-          <p:cNvSpPr/>
-          <p:nvPr/>
-        </p:nvSpPr>
-        <p:spPr>
-          <a:xfrm>
-            <a:off x="8046720" y="4892040"/>
-            <a:ext cx="3429000" cy="1051560"/>
-          </a:xfrm>
-          <a:prstGeom prst="roundRect">
-            <a:avLst>
-              <a:gd name="adj" fmla="val 4000"/>
-            </a:avLst>
-          </a:prstGeom>
-          <a:solidFill>
-            <a:srgbClr val="FFFFFF"/>
-          </a:solidFill>
-          <a:ln w="12700">
-            <a:solidFill>
-              <a:srgbClr val="E0E0DE"/>
-            </a:solidFill>
-          </a:ln>
-        </p:spPr>
-        <p:style>
-          <a:lnRef idx="1">
-            <a:schemeClr val="accent1"/>
-          </a:lnRef>
-          <a:fillRef idx="3">
-            <a:schemeClr val="accent1"/>
-          </a:fillRef>
-          <a:effectRef idx="2">
-            <a:schemeClr val="accent1"/>
-          </a:effectRef>
-          <a:fontRef idx="minor">
-            <a:schemeClr val="lt1"/>
-          </a:fontRef>
-        </p:style>
-        <p:txBody>
-          <a:bodyPr rtlCol="0" anchor="ctr"/>
-          <a:lstStyle/>
-          <a:p>
-            <a:pPr algn="ctr"/>
-          </a:p>
-        </p:txBody>
-      </p:sp>
-      <p:sp>
-        <p:nvSpPr>
-          <p:cNvPr id="37" name="TextBox 36"/>
-          <p:cNvSpPr txBox="1"/>
-          <p:nvPr/>
-        </p:nvSpPr>
-        <p:spPr>
-          <a:xfrm>
-            <a:off x="8229600" y="4983480"/>
-            <a:ext cx="3063240" cy="274320"/>
-          </a:xfrm>
-          <a:prstGeom prst="rect">
-            <a:avLst/>
-          </a:prstGeom>
-          <a:noFill/>
-        </p:spPr>
-        <p:txBody>
-          <a:bodyPr wrap="square">
-            <a:spAutoFit/>
-          </a:bodyPr>
-          <a:lstStyle/>
-          <a:p>
-            <a:pPr algn="l">
-              <a:defRPr sz="1200" b="1" i="0">
-                <a:solidFill>
-                  <a:srgbClr val="1C1C1E"/>
-                </a:solidFill>
-                <a:latin typeface="Calibri"/>
-              </a:defRPr>
-            </a:pPr>
-            <a:r>
-              <a:t>Dealer Intelligence</a:t>
-            </a:r>
-          </a:p>
-        </p:txBody>
-      </p:sp>
-      <p:sp>
-        <p:nvSpPr>
-          <p:cNvPr id="38" name="TextBox 37"/>
-          <p:cNvSpPr txBox="1"/>
-          <p:nvPr/>
-        </p:nvSpPr>
-        <p:spPr>
-          <a:xfrm>
-            <a:off x="8229600" y="5257800"/>
-            <a:ext cx="3063240" cy="548640"/>
-          </a:xfrm>
-          <a:prstGeom prst="rect">
-            <a:avLst/>
-          </a:prstGeom>
-          <a:noFill/>
-        </p:spPr>
-        <p:txBody>
-          <a:bodyPr wrap="square">
-            <a:spAutoFit/>
-          </a:bodyPr>
-          <a:lstStyle/>
-          <a:p>
-            <a:pPr algn="l">
-              <a:defRPr sz="1000" b="0" i="0">
-                <a:solidFill>
-                  <a:srgbClr val="3A3A3C"/>
-                </a:solidFill>
-                <a:latin typeface="Calibri"/>
-              </a:defRPr>
-            </a:pPr>
-            <a:r>
-              <a:t>Telemetry tells dealers which parts approach end-of-life in their area. Proactive ordering replaces reactive.</a:t>
-            </a:r>
-          </a:p>
-        </p:txBody>
-      </p:sp>
-      <p:sp>
-        <p:nvSpPr>
-          <p:cNvPr id="39" name="Rounded Rectangle 38"/>
-          <p:cNvSpPr/>
-          <p:nvPr/>
-        </p:nvSpPr>
-        <p:spPr>
-          <a:xfrm>
-            <a:off x="731520" y="6080760"/>
-            <a:ext cx="10698480" cy="365760"/>
-          </a:xfrm>
-          <a:prstGeom prst="roundRect">
-            <a:avLst>
-              <a:gd name="adj" fmla="val 10000"/>
-            </a:avLst>
-          </a:prstGeom>
-          <a:solidFill>
-            <a:srgbClr val="FFFFFF"/>
-          </a:solidFill>
-          <a:ln w="12700">
-            <a:solidFill>
-              <a:srgbClr val="E0E0DE"/>
-            </a:solidFill>
-          </a:ln>
-        </p:spPr>
-        <p:style>
-          <a:lnRef idx="1">
-            <a:schemeClr val="accent1"/>
-          </a:lnRef>
-          <a:fillRef idx="3">
-            <a:schemeClr val="accent1"/>
-          </a:fillRef>
-          <a:effectRef idx="2">
-            <a:schemeClr val="accent1"/>
-          </a:effectRef>
-          <a:fontRef idx="minor">
-            <a:schemeClr val="lt1"/>
-          </a:fontRef>
-        </p:style>
-        <p:txBody>
-          <a:bodyPr rtlCol="0" anchor="ctr"/>
-          <a:lstStyle/>
-          <a:p>
-            <a:pPr algn="ctr"/>
-          </a:p>
-        </p:txBody>
-      </p:sp>
-      <p:sp>
-        <p:nvSpPr>
-          <p:cNvPr id="40" name="Rectangle 39"/>
-          <p:cNvSpPr/>
-          <p:nvPr/>
-        </p:nvSpPr>
-        <p:spPr>
-          <a:xfrm>
-            <a:off x="731520" y="6080760"/>
-            <a:ext cx="50800" cy="365760"/>
+            <a:off x="731520" y="5303520"/>
+            <a:ext cx="50800" cy="411480"/>
           </a:xfrm>
           <a:prstGeom prst="rect">
             <a:avLst/>
@@ -22965,14 +20356,14 @@
       </p:sp>
       <p:sp>
         <p:nvSpPr>
-          <p:cNvPr id="41" name="TextBox 40"/>
-          <p:cNvSpPr txBox="1"/>
-          <p:nvPr/>
-        </p:nvSpPr>
-        <p:spPr>
-          <a:xfrm>
-            <a:off x="1097280" y="6108192"/>
-            <a:ext cx="10058400" cy="274320"/>
+          <p:cNvPr id="22" name="TextBox 21"/>
+          <p:cNvSpPr txBox="1"/>
+          <p:nvPr/>
+        </p:nvSpPr>
+        <p:spPr>
+          <a:xfrm>
+            <a:off x="1097280" y="5340096"/>
+            <a:ext cx="10058400" cy="320040"/>
           </a:xfrm>
           <a:prstGeom prst="rect">
             <a:avLst/>
@@ -22986,7 +20377,7 @@
           <a:lstStyle/>
           <a:p>
             <a:pPr algn="ctr">
-              <a:defRPr sz="1300" b="1" i="0">
+              <a:defRPr sz="1400" b="1" i="0">
                 <a:solidFill>
                   <a:srgbClr val="1C1C1E"/>
                 </a:solidFill>
@@ -23001,7 +20392,7 @@
       </p:sp>
       <p:sp>
         <p:nvSpPr>
-          <p:cNvPr id="42" name="TextBox 41"/>
+          <p:cNvPr id="23" name="TextBox 22"/>
           <p:cNvSpPr txBox="1"/>
           <p:nvPr/>
         </p:nvSpPr>
@@ -23037,7 +20428,7 @@
       </p:sp>
       <p:sp>
         <p:nvSpPr>
-          <p:cNvPr id="43" name="TextBox 42"/>
+          <p:cNvPr id="24" name="TextBox 23"/>
           <p:cNvSpPr txBox="1"/>
           <p:nvPr/>
         </p:nvSpPr>

--- a/deliverables/SRAM_AI_Adoption_Playbook.pptx
+++ b/deliverables/SRAM_AI_Adoption_Playbook.pptx
@@ -3625,7 +3625,7 @@
             </a:r>
             <a:br/>
             <a:r>
-              <a:t>submits via Zendesk</a:t>
+              <a:t>submits a question</a:t>
             </a:r>
           </a:p>
         </p:txBody>
@@ -3839,11 +3839,11 @@
               </a:defRPr>
             </a:pPr>
             <a:r>
-              <a:t>Amazon Kendra</a:t>
+              <a:t>AI searches SRAM's</a:t>
             </a:r>
             <a:br/>
             <a:r>
-              <a:t>finds approved docs</a:t>
+              <a:t>approved documents</a:t>
             </a:r>
           </a:p>
         </p:txBody>
@@ -4057,11 +4057,11 @@
               </a:defRPr>
             </a:pPr>
             <a:r>
-              <a:t>Amazon Bedrock</a:t>
+              <a:t>AI writes a</a:t>
             </a:r>
             <a:br/>
             <a:r>
-              <a:t>from knowledge base</a:t>
+              <a:t>proposed answer</a:t>
             </a:r>
           </a:p>
         </p:txBody>
@@ -4275,7 +4275,7 @@
               </a:defRPr>
             </a:pPr>
             <a:r>
-              <a:t>Agent approves</a:t>
+              <a:t>Support agent approves</a:t>
             </a:r>
             <a:br/>
             <a:r>
@@ -4885,7 +4885,7 @@
             </a:r>
             <a:br/>
             <a:r>
-              <a:t>submits via Zendesk</a:t>
+              <a:t>submits a question</a:t>
             </a:r>
           </a:p>
         </p:txBody>
@@ -5099,11 +5099,11 @@
               </a:defRPr>
             </a:pPr>
             <a:r>
-              <a:t>Amazon Kendra</a:t>
+              <a:t>AI searches SRAM's</a:t>
             </a:r>
             <a:br/>
             <a:r>
-              <a:t>finds approved docs</a:t>
+              <a:t>approved documents</a:t>
             </a:r>
           </a:p>
         </p:txBody>
@@ -5317,11 +5317,11 @@
               </a:defRPr>
             </a:pPr>
             <a:r>
-              <a:t>Amazon Bedrock</a:t>
+              <a:t>AI writes a</a:t>
             </a:r>
             <a:br/>
             <a:r>
-              <a:t>from knowledge base</a:t>
+              <a:t>proposed answer</a:t>
             </a:r>
           </a:p>
         </p:txBody>
@@ -5535,7 +5535,7 @@
               </a:defRPr>
             </a:pPr>
             <a:r>
-              <a:t>Agent approves</a:t>
+              <a:t>Support agent approves</a:t>
             </a:r>
             <a:br/>
             <a:r>
@@ -6411,7 +6411,7 @@
               </a:defRPr>
             </a:pPr>
             <a:r>
-              <a:t>Measured weekly vs. SLA baseline</a:t>
+              <a:t>Measured weekly vs. current baseline</a:t>
             </a:r>
           </a:p>
         </p:txBody>
@@ -6867,7 +6867,7 @@
               </a:defRPr>
             </a:pPr>
             <a:r>
-              <a:t>Measured weekly vs. SLA baseline</a:t>
+              <a:t>Measured weekly vs. current baseline</a:t>
             </a:r>
           </a:p>
         </p:txBody>
@@ -7485,7 +7485,7 @@
               </a:defRPr>
             </a:pPr>
             <a:r>
-              <a:t>Measured weekly vs. SLA baseline</a:t>
+              <a:t>Measured weekly vs. current baseline</a:t>
             </a:r>
           </a:p>
         </p:txBody>
@@ -8310,7 +8310,7 @@
               </a:defRPr>
             </a:pPr>
             <a:r>
-              <a:t>Measured weekly vs. SLA baseline</a:t>
+              <a:t>Measured weekly vs. current baseline</a:t>
             </a:r>
           </a:p>
         </p:txBody>
@@ -9297,7 +9297,7 @@
               </a:defRPr>
             </a:pPr>
             <a:r>
-              <a:t>Measured weekly vs. SLA baseline</a:t>
+              <a:t>Measured weekly vs. current baseline</a:t>
             </a:r>
           </a:p>
         </p:txBody>
@@ -10640,7 +10640,7 @@
               </a:defRPr>
             </a:pPr>
             <a:r>
-              <a:t>Zendesk + Kendra + Bedrock integration; baseline metrics</a:t>
+              <a:t>Connect support system to AI tools; set baseline metrics</a:t>
             </a:r>
           </a:p>
         </p:txBody>
@@ -11290,7 +11290,7 @@
               </a:defRPr>
             </a:pPr>
             <a:r>
-              <a:t>Zendesk + Kendra + Bedrock integration; baseline metrics</a:t>
+              <a:t>Connect support system to AI tools; set baseline metrics</a:t>
             </a:r>
           </a:p>
         </p:txBody>
@@ -12307,7 +12307,7 @@
               </a:defRPr>
             </a:pPr>
             <a:r>
-              <a:t>CSAT Monitoring</a:t>
+              <a:t>Satisfaction Monitoring</a:t>
             </a:r>
           </a:p>
         </p:txBody>
@@ -12993,7 +12993,7 @@
               </a:defRPr>
             </a:pPr>
             <a:r>
-              <a:t>Zendesk + Kendra + Bedrock integration; baseline metrics</a:t>
+              <a:t>Connect support system to AI tools; set baseline metrics</a:t>
             </a:r>
           </a:p>
         </p:txBody>
@@ -14010,7 +14010,7 @@
               </a:defRPr>
             </a:pPr>
             <a:r>
-              <a:t>CSAT Monitoring</a:t>
+              <a:t>Satisfaction Monitoring</a:t>
             </a:r>
           </a:p>
         </p:txBody>
@@ -14900,7 +14900,7 @@
               </a:defRPr>
             </a:pPr>
             <a:r>
-              <a:t>Drivetrains + Braking</a:t>
+              <a:t>Gears + Brakes</a:t>
             </a:r>
           </a:p>
         </p:txBody>
@@ -14936,11 +14936,11 @@
               </a:defRPr>
             </a:pPr>
             <a:r>
-              <a:t>Gears, chains, and disc</a:t>
+              <a:t>The parts that make</a:t>
             </a:r>
             <a:br/>
             <a:r>
-              <a:t>brakes for every bike</a:t>
+              <a:t>a bike shift and stop</a:t>
             </a:r>
           </a:p>
         </p:txBody>
@@ -15095,11 +15095,11 @@
               </a:defRPr>
             </a:pPr>
             <a:r>
-              <a:t>Forks that absorb</a:t>
+              <a:t>Shock absorbers that</a:t>
             </a:r>
             <a:br/>
             <a:r>
-              <a:t>bumps on trails</a:t>
+              <a:t>smooth out rough terrain</a:t>
             </a:r>
           </a:p>
         </p:txBody>
@@ -15218,7 +15218,7 @@
               </a:defRPr>
             </a:pPr>
             <a:r>
-              <a:t>Wheels + Cockpit</a:t>
+              <a:t>Wheels + Handlebars</a:t>
             </a:r>
           </a:p>
         </p:txBody>
@@ -15254,11 +15254,11 @@
               </a:defRPr>
             </a:pPr>
             <a:r>
-              <a:t>Aero wheels built</a:t>
+              <a:t>Lightweight wheels</a:t>
             </a:r>
             <a:br/>
             <a:r>
-              <a:t>for speed</a:t>
+              <a:t>built for speed</a:t>
             </a:r>
           </a:p>
         </p:txBody>
@@ -15417,7 +15417,7 @@
             </a:r>
             <a:br/>
             <a:r>
-              <a:t>rider performance</a:t>
+              <a:t>how hard a rider pedals</a:t>
             </a:r>
           </a:p>
         </p:txBody>
@@ -15536,7 +15536,7 @@
               </a:defRPr>
             </a:pPr>
             <a:r>
-              <a:t>Cycling Computer</a:t>
+              <a:t>GPS Bike Computer</a:t>
             </a:r>
           </a:p>
         </p:txBody>
@@ -15572,11 +15572,11 @@
               </a:defRPr>
             </a:pPr>
             <a:r>
-              <a:t>GPS device for navigation,</a:t>
+              <a:t>On-bike screen for</a:t>
             </a:r>
             <a:br/>
             <a:r>
-              <a:t>training, and data</a:t>
+              <a:t>navigation and training data</a:t>
             </a:r>
           </a:p>
         </p:txBody>
@@ -15731,11 +15731,11 @@
               </a:defRPr>
             </a:pPr>
             <a:r>
-              <a:t>Clipless pedal systems</a:t>
+              <a:t>Pedal systems that lock</a:t>
             </a:r>
             <a:br/>
             <a:r>
-              <a:t>for road and mountain</a:t>
+              <a:t>into the rider's shoes</a:t>
             </a:r>
           </a:p>
         </p:txBody>
@@ -15771,7 +15771,7 @@
               </a:defRPr>
             </a:pPr>
             <a:r>
-              <a:t>6 brands. 1 connected ecosystem. From casual riders to elite athletes.</a:t>
+              <a:t>6 brands. 1 connected ecosystem. From weekend riders to Tour de France pros.</a:t>
             </a:r>
           </a:p>
         </p:txBody>
@@ -17268,7 +17268,7 @@
               </a:defRPr>
             </a:pPr>
             <a:r>
-              <a:t>Each capability creates a new recurring revenue stream. SRAM's installed base of connected components becomes a platform, not a one-time sale.</a:t>
+              <a:t>Each capability creates a new recurring revenue stream. SRAM's millions of connected bike parts become a software platform, not a one-time sale.</a:t>
             </a:r>
           </a:p>
         </p:txBody>
@@ -17466,7 +17466,7 @@
               </a:defRPr>
             </a:pPr>
             <a:r>
-              <a:t>Unified rider dashboard: power, gearing, suspension, heart rate in one view. No competitor has the product breadth to build this.</a:t>
+              <a:t>One dashboard showing power, gearing, suspension, and heart rate. No competitor sells enough product categories to build this.</a:t>
             </a:r>
           </a:p>
         </p:txBody>
@@ -17751,7 +17751,7 @@
               </a:defRPr>
             </a:pPr>
             <a:r>
-              <a:t>Each capability creates a new recurring revenue stream. SRAM's installed base of connected components becomes a platform, not a one-time sale.</a:t>
+              <a:t>Each capability creates a new recurring revenue stream. SRAM's millions of connected bike parts become a software platform, not a one-time sale.</a:t>
             </a:r>
           </a:p>
         </p:txBody>
@@ -17949,7 +17949,7 @@
               </a:defRPr>
             </a:pPr>
             <a:r>
-              <a:t>Unified rider dashboard: power, gearing, suspension, heart rate in one view. No competitor has the product breadth to build this.</a:t>
+              <a:t>One dashboard showing power, gearing, suspension, and heart rate. No competitor sells enough product categories to build this.</a:t>
             </a:r>
           </a:p>
         </p:txBody>
@@ -18104,7 +18104,7 @@
               </a:defRPr>
             </a:pPr>
             <a:r>
-              <a:t>Connected components predict chain and brake pad replacement before failure. Installed base becomes recurring revenue.</a:t>
+              <a:t>Connected parts predict when chains and brake pads need replacement before they fail. One-time sales become recurring revenue.</a:t>
             </a:r>
           </a:p>
         </p:txBody>
@@ -18259,7 +18259,7 @@
               </a:defRPr>
             </a:pPr>
             <a:r>
-              <a:t>Suspension auto-adjusts to terrain. Shifting optimizes for rider power. Products improve continuously after purchase.</a:t>
+              <a:t>Suspension auto-adjusts to terrain. Gears optimize for rider power. Products improve continuously after purchase.</a:t>
             </a:r>
           </a:p>
         </p:txBody>
@@ -18414,7 +18414,7 @@
               </a:defRPr>
             </a:pPr>
             <a:r>
-              <a:t>Telemetry tells dealers which parts approach end-of-life in their area. Proactive ordering replaces reactive.</a:t>
+              <a:t>Usage data tells bike shops which parts are wearing out in their area. Proactive ordering replaces reactive.</a:t>
             </a:r>
           </a:p>
         </p:txBody>
@@ -19357,11 +19357,15 @@
               </a:defRPr>
             </a:pPr>
             <a:r>
-              <a:t>Unified data layer linking CRM, inventory,</a:t>
+              <a:t>Unified data layer linking customer records,</a:t>
             </a:r>
             <a:br/>
             <a:r>
-              <a:t>and telemetry. Foundation for Phase 2-4.</a:t>
+              <a:t>inventory, and product usage data.</a:t>
+            </a:r>
+            <a:br/>
+            <a:r>
+              <a:t>Foundation for Phase 2-4.</a:t>
             </a:r>
           </a:p>
         </p:txBody>
@@ -20368,7 +20372,7 @@
               </a:defRPr>
             </a:pPr>
             <a:r>
-              <a:t>Unified data layer connecting Shopify, support systems, and telemetry. Foundation for Phase 2 forecasting and Phase 4 AXS Intelligence platform.</a:t>
+              <a:t>Unified data layer connecting e-commerce, support systems, and product usage data. Foundation for Phase 2 forecasting and Phase 4 AXS Intelligence platform.</a:t>
             </a:r>
           </a:p>
         </p:txBody>
@@ -23574,7 +23578,7 @@
               </a:defRPr>
             </a:pPr>
             <a:r>
-              <a:t>“A Shimano rider uses the app to check compatibility. A Hammerhead rider uses it to train, navigate, and communicate with their component stack. That is a fundamentally different data relationship.”</a:t>
+              <a:t>“A rider on Shimano [SRAM's largest competitor] uses the app to check if parts fit. A Hammerhead rider uses it to train, navigate, and talk to every component on the bike. That is a fundamentally different data relationship.”</a:t>
             </a:r>
           </a:p>
         </p:txBody>
@@ -24175,7 +24179,7 @@
               </a:defRPr>
             </a:pPr>
             <a:r>
-              <a:t>•  Zendesk AI + Amazon Kendra + Bedrock</a:t>
+              <a:t>•  AI support tools (document search + response drafting)</a:t>
             </a:r>
           </a:p>
           <a:p>
@@ -24365,7 +24369,7 @@
               </a:defRPr>
             </a:pPr>
             <a:r>
-              <a:t>•  Unified data layer linking CRM + inventory + telemetry</a:t>
+              <a:t>•  Unified data layer linking customers + inventory + usage</a:t>
             </a:r>
           </a:p>
           <a:p>
@@ -24381,7 +24385,7 @@
               </a:defRPr>
             </a:pPr>
             <a:r>
-              <a:t>•  AWS SageMaker for forecasting</a:t>
+              <a:t>•  AI-powered demand forecasting</a:t>
             </a:r>
           </a:p>
           <a:p>
@@ -24397,7 +24401,7 @@
               </a:defRPr>
             </a:pPr>
             <a:r>
-              <a:t>•  ERP system evaluation</a:t>
+              <a:t>•  Business systems evaluation</a:t>
             </a:r>
           </a:p>
         </p:txBody>
@@ -24555,7 +24559,7 @@
               </a:defRPr>
             </a:pPr>
             <a:r>
-              <a:t>•  Salesforce Einstein/Agentforce for OEM proposals</a:t>
+              <a:t>•  AI-assisted proposals for bike manufacturer deals</a:t>
             </a:r>
           </a:p>
           <a:p>
@@ -24571,7 +24575,7 @@
               </a:defRPr>
             </a:pPr>
             <a:r>
-              <a:t>•  Compatibility rules engine for recommendations</a:t>
+              <a:t>•  Part compatibility and recommendation engine</a:t>
             </a:r>
           </a:p>
           <a:p>
@@ -24777,7 +24781,7 @@
               </a:defRPr>
             </a:pPr>
             <a:r>
-              <a:t>•  Digital twin and generative design capability</a:t>
+              <a:t>•  AI-simulated product testing (digital twin)</a:t>
             </a:r>
           </a:p>
           <a:p>
@@ -25725,7 +25729,7 @@
               </a:defRPr>
             </a:pPr>
             <a:r>
-              <a:t>Drivetrains + Braking</a:t>
+              <a:t>Gears + Brakes</a:t>
             </a:r>
           </a:p>
         </p:txBody>
@@ -26049,7 +26053,7 @@
               </a:defRPr>
             </a:pPr>
             <a:r>
-              <a:t>Wheels + Cockpit</a:t>
+              <a:t>Wheels + Handlebars</a:t>
             </a:r>
           </a:p>
         </p:txBody>
@@ -26373,7 +26377,7 @@
               </a:defRPr>
             </a:pPr>
             <a:r>
-              <a:t>Cycling Computer</a:t>
+              <a:t>GPS Bike Computer</a:t>
             </a:r>
           </a:p>
         </p:txBody>
@@ -26618,7 +26622,7 @@
               </a:defRPr>
             </a:pPr>
             <a:r>
-              <a:t>AXS Wireless Ecosystem  |  All connected, all generating data</a:t>
+              <a:t>AXS Wireless Platform  |  All 6 brands connect wirelessly and share data</a:t>
             </a:r>
           </a:p>
         </p:txBody>
@@ -26744,7 +26748,7 @@
               </a:defRPr>
             </a:pPr>
             <a:r>
-              <a:t>“A Shimano rider uses the app to check compatibility. A Hammerhead rider uses it to train, navigate, and communicate with their component stack. That is a fundamentally different data relationship.”</a:t>
+              <a:t>“A rider on Shimano [SRAM's largest competitor] uses the app to check if parts fit. A Hammerhead rider uses it to train, navigate, and talk to every component on the bike. That is a fundamentally different data relationship.”</a:t>
             </a:r>
           </a:p>
         </p:txBody>
@@ -27540,7 +27544,7 @@
               </a:defRPr>
             </a:pPr>
             <a:r>
-              <a:t>Telemetry data is collected but unused</a:t>
+              <a:t>Rider data is collected but unused</a:t>
             </a:r>
           </a:p>
         </p:txBody>
@@ -28419,7 +28423,7 @@
               </a:defRPr>
             </a:pPr>
             <a:r>
-              <a:t>Telemetry data is collected but unused</a:t>
+              <a:t>Rider data is collected but unused</a:t>
             </a:r>
           </a:p>
         </p:txBody>
@@ -28700,7 +28704,7 @@
               </a:defRPr>
             </a:pPr>
             <a:r>
-              <a:t>OEM Proposal Automation</a:t>
+              <a:t>Bike Manufacturer Proposals</a:t>
             </a:r>
           </a:p>
         </p:txBody>
@@ -28938,7 +28942,7 @@
               </a:defRPr>
             </a:pPr>
             <a:r>
-              <a:t>DTC Personalization</a:t>
+              <a:t>Online Store Personalization</a:t>
             </a:r>
           </a:p>
         </p:txBody>
@@ -28974,7 +28978,7 @@
               </a:defRPr>
             </a:pPr>
             <a:r>
-              <a:t>Velocio has no targeting capability</a:t>
+              <a:t>SRAM's apparel brand has no targeting</a:t>
             </a:r>
           </a:p>
         </p:txBody>
@@ -29734,7 +29738,7 @@
               </a:defRPr>
             </a:pPr>
             <a:r>
-              <a:t>Telemetry data is collected but unused</a:t>
+              <a:t>Rider data is collected but unused</a:t>
             </a:r>
           </a:p>
         </p:txBody>
@@ -30015,7 +30019,7 @@
               </a:defRPr>
             </a:pPr>
             <a:r>
-              <a:t>OEM Proposal Automation</a:t>
+              <a:t>Bike Manufacturer Proposals</a:t>
             </a:r>
           </a:p>
         </p:txBody>
@@ -30253,7 +30257,7 @@
               </a:defRPr>
             </a:pPr>
             <a:r>
-              <a:t>DTC Personalization</a:t>
+              <a:t>Online Store Personalization</a:t>
             </a:r>
           </a:p>
         </p:txBody>
@@ -30289,7 +30293,7 @@
               </a:defRPr>
             </a:pPr>
             <a:r>
-              <a:t>Velocio has no targeting capability</a:t>
+              <a:t>SRAM's apparel brand has no targeting</a:t>
             </a:r>
           </a:p>
         </p:txBody>
@@ -30725,7 +30729,7 @@
               </a:defRPr>
             </a:pPr>
             <a:r>
-              <a:t>Shopify data is siloed, unused</a:t>
+              <a:t>E-commerce data is siloed, unused</a:t>
             </a:r>
           </a:p>
         </p:txBody>
@@ -31485,7 +31489,7 @@
               </a:defRPr>
             </a:pPr>
             <a:r>
-              <a:t>Telemetry data is collected but unused</a:t>
+              <a:t>Rider data is collected but unused</a:t>
             </a:r>
           </a:p>
         </p:txBody>
@@ -31766,7 +31770,7 @@
               </a:defRPr>
             </a:pPr>
             <a:r>
-              <a:t>OEM Proposal Automation</a:t>
+              <a:t>Bike Manufacturer Proposals</a:t>
             </a:r>
           </a:p>
         </p:txBody>
@@ -32004,7 +32008,7 @@
               </a:defRPr>
             </a:pPr>
             <a:r>
-              <a:t>DTC Personalization</a:t>
+              <a:t>Online Store Personalization</a:t>
             </a:r>
           </a:p>
         </p:txBody>
@@ -32040,7 +32044,7 @@
               </a:defRPr>
             </a:pPr>
             <a:r>
-              <a:t>Velocio has no targeting capability</a:t>
+              <a:t>SRAM's apparel brand has no targeting</a:t>
             </a:r>
           </a:p>
         </p:txBody>
@@ -32476,7 +32480,7 @@
               </a:defRPr>
             </a:pPr>
             <a:r>
-              <a:t>Shopify data is siloed, unused</a:t>
+              <a:t>E-commerce data is siloed, unused</a:t>
             </a:r>
           </a:p>
         </p:txBody>
@@ -33319,7 +33323,7 @@
               </a:defRPr>
             </a:pPr>
             <a:r>
-              <a:t>Riders love SRAM hardware. They struggle with firmware, compatibility, and warranty resolution.</a:t>
+              <a:t>Riders love SRAM hardware. They struggle with software updates, part compatibility, and warranty claims.</a:t>
             </a:r>
           </a:p>
         </p:txBody>
@@ -33748,7 +33752,7 @@
               </a:defRPr>
             </a:pPr>
             <a:r>
-              <a:t>Firmware + Pairing</a:t>
+              <a:t>Software Updates + Setup</a:t>
             </a:r>
           </a:p>
         </p:txBody>
@@ -34033,7 +34037,7 @@
               </a:defRPr>
             </a:pPr>
             <a:r>
-              <a:t>Riders love SRAM hardware. They struggle with firmware, compatibility, and warranty resolution.</a:t>
+              <a:t>Riders love SRAM hardware. They struggle with software updates, part compatibility, and warranty claims.</a:t>
             </a:r>
           </a:p>
         </p:txBody>
@@ -34462,7 +34466,7 @@
               </a:defRPr>
             </a:pPr>
             <a:r>
-              <a:t>Firmware + Pairing</a:t>
+              <a:t>Software Updates + Setup</a:t>
             </a:r>
           </a:p>
         </p:txBody>

--- a/deliverables/SRAM_AI_Adoption_Playbook.pptx
+++ b/deliverables/SRAM_AI_Adoption_Playbook.pptx
@@ -3625,7 +3625,7 @@
             </a:r>
             <a:br/>
             <a:r>
-              <a:t>submits a question</a:t>
+              <a:t>submits via Zendesk</a:t>
             </a:r>
           </a:p>
         </p:txBody>
@@ -3839,11 +3839,11 @@
               </a:defRPr>
             </a:pPr>
             <a:r>
-              <a:t>AI searches SRAM's</a:t>
+              <a:t>Amazon Kendra searches</a:t>
             </a:r>
             <a:br/>
             <a:r>
-              <a:t>approved documents</a:t>
+              <a:t>approved documentation</a:t>
             </a:r>
           </a:p>
         </p:txBody>
@@ -4057,11 +4057,11 @@
               </a:defRPr>
             </a:pPr>
             <a:r>
-              <a:t>AI writes a</a:t>
+              <a:t>Amazon Bedrock drafts</a:t>
             </a:r>
             <a:br/>
             <a:r>
-              <a:t>proposed answer</a:t>
+              <a:t>response from knowledge base</a:t>
             </a:r>
           </a:p>
         </p:txBody>
@@ -4275,7 +4275,7 @@
               </a:defRPr>
             </a:pPr>
             <a:r>
-              <a:t>Support agent approves</a:t>
+              <a:t>Agent approves</a:t>
             </a:r>
             <a:br/>
             <a:r>
@@ -4885,7 +4885,7 @@
             </a:r>
             <a:br/>
             <a:r>
-              <a:t>submits a question</a:t>
+              <a:t>submits via Zendesk</a:t>
             </a:r>
           </a:p>
         </p:txBody>
@@ -5099,11 +5099,11 @@
               </a:defRPr>
             </a:pPr>
             <a:r>
-              <a:t>AI searches SRAM's</a:t>
+              <a:t>Amazon Kendra searches</a:t>
             </a:r>
             <a:br/>
             <a:r>
-              <a:t>approved documents</a:t>
+              <a:t>approved documentation</a:t>
             </a:r>
           </a:p>
         </p:txBody>
@@ -5317,11 +5317,11 @@
               </a:defRPr>
             </a:pPr>
             <a:r>
-              <a:t>AI writes a</a:t>
+              <a:t>Amazon Bedrock drafts</a:t>
             </a:r>
             <a:br/>
             <a:r>
-              <a:t>proposed answer</a:t>
+              <a:t>response from knowledge base</a:t>
             </a:r>
           </a:p>
         </p:txBody>
@@ -5535,7 +5535,7 @@
               </a:defRPr>
             </a:pPr>
             <a:r>
-              <a:t>Support agent approves</a:t>
+              <a:t>Agent approves</a:t>
             </a:r>
             <a:br/>
             <a:r>
@@ -6411,7 +6411,7 @@
               </a:defRPr>
             </a:pPr>
             <a:r>
-              <a:t>Measured weekly vs. current baseline</a:t>
+              <a:t>Measured weekly vs. SLA baseline</a:t>
             </a:r>
           </a:p>
         </p:txBody>
@@ -6867,7 +6867,7 @@
               </a:defRPr>
             </a:pPr>
             <a:r>
-              <a:t>Measured weekly vs. current baseline</a:t>
+              <a:t>Measured weekly vs. SLA baseline</a:t>
             </a:r>
           </a:p>
         </p:txBody>
@@ -7485,7 +7485,7 @@
               </a:defRPr>
             </a:pPr>
             <a:r>
-              <a:t>Measured weekly vs. current baseline</a:t>
+              <a:t>Measured weekly vs. SLA baseline</a:t>
             </a:r>
           </a:p>
         </p:txBody>
@@ -8310,7 +8310,7 @@
               </a:defRPr>
             </a:pPr>
             <a:r>
-              <a:t>Measured weekly vs. current baseline</a:t>
+              <a:t>Measured weekly vs. SLA baseline</a:t>
             </a:r>
           </a:p>
         </p:txBody>
@@ -9297,7 +9297,7 @@
               </a:defRPr>
             </a:pPr>
             <a:r>
-              <a:t>Measured weekly vs. current baseline</a:t>
+              <a:t>Measured weekly vs. SLA baseline</a:t>
             </a:r>
           </a:p>
         </p:txBody>
@@ -10640,7 +10640,7 @@
               </a:defRPr>
             </a:pPr>
             <a:r>
-              <a:t>Connect support system to AI tools; set baseline metrics</a:t>
+              <a:t>Zendesk + Kendra + Bedrock integration; baseline metrics</a:t>
             </a:r>
           </a:p>
         </p:txBody>
@@ -11290,7 +11290,7 @@
               </a:defRPr>
             </a:pPr>
             <a:r>
-              <a:t>Connect support system to AI tools; set baseline metrics</a:t>
+              <a:t>Zendesk + Kendra + Bedrock integration; baseline metrics</a:t>
             </a:r>
           </a:p>
         </p:txBody>
@@ -12307,7 +12307,7 @@
               </a:defRPr>
             </a:pPr>
             <a:r>
-              <a:t>Satisfaction Monitoring</a:t>
+              <a:t>CSAT Monitoring</a:t>
             </a:r>
           </a:p>
         </p:txBody>
@@ -12993,7 +12993,7 @@
               </a:defRPr>
             </a:pPr>
             <a:r>
-              <a:t>Connect support system to AI tools; set baseline metrics</a:t>
+              <a:t>Zendesk + Kendra + Bedrock integration; baseline metrics</a:t>
             </a:r>
           </a:p>
         </p:txBody>
@@ -14010,7 +14010,7 @@
               </a:defRPr>
             </a:pPr>
             <a:r>
-              <a:t>Satisfaction Monitoring</a:t>
+              <a:t>CSAT Monitoring</a:t>
             </a:r>
           </a:p>
         </p:txBody>
@@ -14900,7 +14900,7 @@
               </a:defRPr>
             </a:pPr>
             <a:r>
-              <a:t>Gears + Brakes</a:t>
+              <a:t>Drivetrains + Braking</a:t>
             </a:r>
           </a:p>
         </p:txBody>
@@ -14936,11 +14936,11 @@
               </a:defRPr>
             </a:pPr>
             <a:r>
-              <a:t>The parts that make</a:t>
+              <a:t>Gears, chains, and disc</a:t>
             </a:r>
             <a:br/>
             <a:r>
-              <a:t>a bike shift and stop</a:t>
+              <a:t>brakes for every bike</a:t>
             </a:r>
           </a:p>
         </p:txBody>
@@ -15095,11 +15095,11 @@
               </a:defRPr>
             </a:pPr>
             <a:r>
-              <a:t>Shock absorbers that</a:t>
+              <a:t>Forks and shocks that</a:t>
             </a:r>
             <a:br/>
             <a:r>
-              <a:t>smooth out rough terrain</a:t>
+              <a:t>absorb trail impacts</a:t>
             </a:r>
           </a:p>
         </p:txBody>
@@ -15218,7 +15218,7 @@
               </a:defRPr>
             </a:pPr>
             <a:r>
-              <a:t>Wheels + Handlebars</a:t>
+              <a:t>Wheels + Cockpit</a:t>
             </a:r>
           </a:p>
         </p:txBody>
@@ -15254,11 +15254,11 @@
               </a:defRPr>
             </a:pPr>
             <a:r>
-              <a:t>Lightweight wheels</a:t>
+              <a:t>Aero wheels, handlebars,</a:t>
             </a:r>
             <a:br/>
             <a:r>
-              <a:t>built for speed</a:t>
+              <a:t>and stems</a:t>
             </a:r>
           </a:p>
         </p:txBody>
@@ -15417,7 +15417,7 @@
             </a:r>
             <a:br/>
             <a:r>
-              <a:t>how hard a rider pedals</a:t>
+              <a:t>rider output in watts</a:t>
             </a:r>
           </a:p>
         </p:txBody>
@@ -15572,7 +15572,7 @@
               </a:defRPr>
             </a:pPr>
             <a:r>
-              <a:t>On-bike screen for</a:t>
+              <a:t>On-bike computer for</a:t>
             </a:r>
             <a:br/>
             <a:r>
@@ -15731,11 +15731,11 @@
               </a:defRPr>
             </a:pPr>
             <a:r>
-              <a:t>Pedal systems that lock</a:t>
+              <a:t>Clip-in pedal systems</a:t>
             </a:r>
             <a:br/>
             <a:r>
-              <a:t>into the rider's shoes</a:t>
+              <a:t>for road and mountain</a:t>
             </a:r>
           </a:p>
         </p:txBody>
@@ -17268,7 +17268,7 @@
               </a:defRPr>
             </a:pPr>
             <a:r>
-              <a:t>Each capability creates a new recurring revenue stream. SRAM's millions of connected bike parts become a software platform, not a one-time sale.</a:t>
+              <a:t>Each capability creates a new recurring revenue stream. SRAM's installed base of connected components becomes a platform, not a one-time sale.</a:t>
             </a:r>
           </a:p>
         </p:txBody>
@@ -17466,7 +17466,7 @@
               </a:defRPr>
             </a:pPr>
             <a:r>
-              <a:t>One dashboard showing power, gearing, suspension, and heart rate. No competitor sells enough product categories to build this.</a:t>
+              <a:t>Unified rider dashboard: power, gearing, suspension, heart rate in one view. No competitor has the product breadth to build this.</a:t>
             </a:r>
           </a:p>
         </p:txBody>
@@ -17751,7 +17751,7 @@
               </a:defRPr>
             </a:pPr>
             <a:r>
-              <a:t>Each capability creates a new recurring revenue stream. SRAM's millions of connected bike parts become a software platform, not a one-time sale.</a:t>
+              <a:t>Each capability creates a new recurring revenue stream. SRAM's installed base of connected components becomes a platform, not a one-time sale.</a:t>
             </a:r>
           </a:p>
         </p:txBody>
@@ -17949,7 +17949,7 @@
               </a:defRPr>
             </a:pPr>
             <a:r>
-              <a:t>One dashboard showing power, gearing, suspension, and heart rate. No competitor sells enough product categories to build this.</a:t>
+              <a:t>Unified rider dashboard: power, gearing, suspension, heart rate in one view. No competitor has the product breadth to build this.</a:t>
             </a:r>
           </a:p>
         </p:txBody>
@@ -18104,7 +18104,7 @@
               </a:defRPr>
             </a:pPr>
             <a:r>
-              <a:t>Connected parts predict when chains and brake pads need replacement before they fail. One-time sales become recurring revenue.</a:t>
+              <a:t>Connected components predict chain and brake pad replacement before failure. Installed base becomes recurring revenue.</a:t>
             </a:r>
           </a:p>
         </p:txBody>
@@ -18259,7 +18259,7 @@
               </a:defRPr>
             </a:pPr>
             <a:r>
-              <a:t>Suspension auto-adjusts to terrain. Gears optimize for rider power. Products improve continuously after purchase.</a:t>
+              <a:t>Suspension auto-adjusts to terrain. Shifting optimizes for rider power. Products improve continuously after purchase.</a:t>
             </a:r>
           </a:p>
         </p:txBody>
@@ -18414,7 +18414,7 @@
               </a:defRPr>
             </a:pPr>
             <a:r>
-              <a:t>Usage data tells bike shops which parts are wearing out in their area. Proactive ordering replaces reactive.</a:t>
+              <a:t>Telemetry tells dealers which parts approach end-of-life in their area. Proactive ordering replaces reactive.</a:t>
             </a:r>
           </a:p>
         </p:txBody>
@@ -19357,15 +19357,11 @@
               </a:defRPr>
             </a:pPr>
             <a:r>
-              <a:t>Unified data layer linking customer records,</a:t>
+              <a:t>Unified data layer linking CRM, inventory,</a:t>
             </a:r>
             <a:br/>
             <a:r>
-              <a:t>inventory, and product usage data.</a:t>
-            </a:r>
-            <a:br/>
-            <a:r>
-              <a:t>Foundation for Phase 2-4.</a:t>
+              <a:t>and telemetry. Foundation for Phase 2-4.</a:t>
             </a:r>
           </a:p>
         </p:txBody>
@@ -20372,7 +20368,7 @@
               </a:defRPr>
             </a:pPr>
             <a:r>
-              <a:t>Unified data layer connecting e-commerce, support systems, and product usage data. Foundation for Phase 2 forecasting and Phase 4 AXS Intelligence platform.</a:t>
+              <a:t>Unified data layer connecting Shopify, support systems, and telemetry. Foundation for Phase 2 forecasting and Phase 4 AXS Intelligence platform.</a:t>
             </a:r>
           </a:p>
         </p:txBody>
@@ -24179,7 +24175,7 @@
               </a:defRPr>
             </a:pPr>
             <a:r>
-              <a:t>•  AI support tools (document search + response drafting)</a:t>
+              <a:t>•  Zendesk AI + Amazon Kendra + Bedrock</a:t>
             </a:r>
           </a:p>
           <a:p>
@@ -24369,7 +24365,7 @@
               </a:defRPr>
             </a:pPr>
             <a:r>
-              <a:t>•  Unified data layer linking customers + inventory + usage</a:t>
+              <a:t>•  Unified data layer linking CRM + inventory + telemetry</a:t>
             </a:r>
           </a:p>
           <a:p>
@@ -24385,7 +24381,7 @@
               </a:defRPr>
             </a:pPr>
             <a:r>
-              <a:t>•  AI-powered demand forecasting</a:t>
+              <a:t>•  AWS SageMaker for forecasting</a:t>
             </a:r>
           </a:p>
           <a:p>
@@ -24401,7 +24397,7 @@
               </a:defRPr>
             </a:pPr>
             <a:r>
-              <a:t>•  Business systems evaluation</a:t>
+              <a:t>•  ERP system evaluation</a:t>
             </a:r>
           </a:p>
         </p:txBody>
@@ -24559,7 +24555,7 @@
               </a:defRPr>
             </a:pPr>
             <a:r>
-              <a:t>•  AI-assisted proposals for bike manufacturer deals</a:t>
+              <a:t>•  Salesforce Einstein/Agentforce for OEM proposals</a:t>
             </a:r>
           </a:p>
           <a:p>
@@ -24575,7 +24571,7 @@
               </a:defRPr>
             </a:pPr>
             <a:r>
-              <a:t>•  Part compatibility and recommendation engine</a:t>
+              <a:t>•  Compatibility rules engine for recommendations</a:t>
             </a:r>
           </a:p>
           <a:p>
@@ -24781,7 +24777,7 @@
               </a:defRPr>
             </a:pPr>
             <a:r>
-              <a:t>•  AI-simulated product testing (digital twin)</a:t>
+              <a:t>•  Digital twin and generative design capability</a:t>
             </a:r>
           </a:p>
           <a:p>
@@ -25729,7 +25725,7 @@
               </a:defRPr>
             </a:pPr>
             <a:r>
-              <a:t>Gears + Brakes</a:t>
+              <a:t>Drivetrains + Braking</a:t>
             </a:r>
           </a:p>
         </p:txBody>
@@ -26053,7 +26049,7 @@
               </a:defRPr>
             </a:pPr>
             <a:r>
-              <a:t>Wheels + Handlebars</a:t>
+              <a:t>Wheels + Cockpit</a:t>
             </a:r>
           </a:p>
         </p:txBody>
@@ -26622,7 +26618,7 @@
               </a:defRPr>
             </a:pPr>
             <a:r>
-              <a:t>AXS Wireless Platform  |  All 6 brands connect wirelessly and share data</a:t>
+              <a:t>AXS Wireless Ecosystem  |  All 6 brands connect wirelessly and share data</a:t>
             </a:r>
           </a:p>
         </p:txBody>
@@ -27544,7 +27540,7 @@
               </a:defRPr>
             </a:pPr>
             <a:r>
-              <a:t>Rider data is collected but unused</a:t>
+              <a:t>Telemetry data is collected but unused</a:t>
             </a:r>
           </a:p>
         </p:txBody>
@@ -28423,7 +28419,7 @@
               </a:defRPr>
             </a:pPr>
             <a:r>
-              <a:t>Rider data is collected but unused</a:t>
+              <a:t>Telemetry data is collected but unused</a:t>
             </a:r>
           </a:p>
         </p:txBody>
@@ -28704,7 +28700,7 @@
               </a:defRPr>
             </a:pPr>
             <a:r>
-              <a:t>Bike Manufacturer Proposals</a:t>
+              <a:t>OEM Proposal Automation</a:t>
             </a:r>
           </a:p>
         </p:txBody>
@@ -28942,7 +28938,7 @@
               </a:defRPr>
             </a:pPr>
             <a:r>
-              <a:t>Online Store Personalization</a:t>
+              <a:t>DTC Personalization</a:t>
             </a:r>
           </a:p>
         </p:txBody>
@@ -28978,7 +28974,7 @@
               </a:defRPr>
             </a:pPr>
             <a:r>
-              <a:t>SRAM's apparel brand has no targeting</a:t>
+              <a:t>Velocio has no targeting capability</a:t>
             </a:r>
           </a:p>
         </p:txBody>
@@ -29738,7 +29734,7 @@
               </a:defRPr>
             </a:pPr>
             <a:r>
-              <a:t>Rider data is collected but unused</a:t>
+              <a:t>Telemetry data is collected but unused</a:t>
             </a:r>
           </a:p>
         </p:txBody>
@@ -30019,7 +30015,7 @@
               </a:defRPr>
             </a:pPr>
             <a:r>
-              <a:t>Bike Manufacturer Proposals</a:t>
+              <a:t>OEM Proposal Automation</a:t>
             </a:r>
           </a:p>
         </p:txBody>
@@ -30257,7 +30253,7 @@
               </a:defRPr>
             </a:pPr>
             <a:r>
-              <a:t>Online Store Personalization</a:t>
+              <a:t>DTC Personalization</a:t>
             </a:r>
           </a:p>
         </p:txBody>
@@ -30293,7 +30289,7 @@
               </a:defRPr>
             </a:pPr>
             <a:r>
-              <a:t>SRAM's apparel brand has no targeting</a:t>
+              <a:t>Velocio has no targeting capability</a:t>
             </a:r>
           </a:p>
         </p:txBody>
@@ -30729,7 +30725,7 @@
               </a:defRPr>
             </a:pPr>
             <a:r>
-              <a:t>E-commerce data is siloed, unused</a:t>
+              <a:t>Shopify data is siloed, unused</a:t>
             </a:r>
           </a:p>
         </p:txBody>
@@ -31489,7 +31485,7 @@
               </a:defRPr>
             </a:pPr>
             <a:r>
-              <a:t>Rider data is collected but unused</a:t>
+              <a:t>Telemetry data is collected but unused</a:t>
             </a:r>
           </a:p>
         </p:txBody>
@@ -31770,7 +31766,7 @@
               </a:defRPr>
             </a:pPr>
             <a:r>
-              <a:t>Bike Manufacturer Proposals</a:t>
+              <a:t>OEM Proposal Automation</a:t>
             </a:r>
           </a:p>
         </p:txBody>
@@ -32008,7 +32004,7 @@
               </a:defRPr>
             </a:pPr>
             <a:r>
-              <a:t>Online Store Personalization</a:t>
+              <a:t>DTC Personalization</a:t>
             </a:r>
           </a:p>
         </p:txBody>
@@ -32044,7 +32040,7 @@
               </a:defRPr>
             </a:pPr>
             <a:r>
-              <a:t>SRAM's apparel brand has no targeting</a:t>
+              <a:t>Velocio has no targeting capability</a:t>
             </a:r>
           </a:p>
         </p:txBody>
@@ -32480,7 +32476,7 @@
               </a:defRPr>
             </a:pPr>
             <a:r>
-              <a:t>E-commerce data is siloed, unused</a:t>
+              <a:t>Shopify data is siloed, unused</a:t>
             </a:r>
           </a:p>
         </p:txBody>
@@ -33323,7 +33319,7 @@
               </a:defRPr>
             </a:pPr>
             <a:r>
-              <a:t>Riders love SRAM hardware. They struggle with software updates, part compatibility, and warranty claims.</a:t>
+              <a:t>Riders love SRAM hardware. They struggle with firmware updates, part compatibility, and warranty resolution.</a:t>
             </a:r>
           </a:p>
         </p:txBody>
@@ -33752,7 +33748,7 @@
               </a:defRPr>
             </a:pPr>
             <a:r>
-              <a:t>Software Updates + Setup</a:t>
+              <a:t>Firmware + Pairing</a:t>
             </a:r>
           </a:p>
         </p:txBody>
@@ -34037,7 +34033,7 @@
               </a:defRPr>
             </a:pPr>
             <a:r>
-              <a:t>Riders love SRAM hardware. They struggle with software updates, part compatibility, and warranty claims.</a:t>
+              <a:t>Riders love SRAM hardware. They struggle with firmware updates, part compatibility, and warranty resolution.</a:t>
             </a:r>
           </a:p>
         </p:txBody>
@@ -34466,7 +34462,7 @@
               </a:defRPr>
             </a:pPr>
             <a:r>
-              <a:t>Software Updates + Setup</a:t>
+              <a:t>Firmware + Pairing</a:t>
             </a:r>
           </a:p>
         </p:txBody>

--- a/deliverables/SRAM_AI_Adoption_Playbook.pptx
+++ b/deliverables/SRAM_AI_Adoption_Playbook.pptx
@@ -32,6 +32,7 @@
     <p:sldId id="280" r:id="rId31"/>
     <p:sldId id="281" r:id="rId32"/>
     <p:sldId id="282" r:id="rId33"/>
+    <p:sldId id="283" r:id="rId34"/>
   </p:sldIdLst>
   <p:sldSz cx="12191695" cy="6858000" type="screen4x3"/>
   <p:notesSz cx="6858000" cy="9144000"/>
@@ -17061,6 +17062,42 @@
         </p:nvSpPr>
         <p:spPr>
           <a:xfrm>
+            <a:off x="731520" y="5943600"/>
+            <a:ext cx="5029200" cy="228600"/>
+          </a:xfrm>
+          <a:prstGeom prst="rect">
+            <a:avLst/>
+          </a:prstGeom>
+          <a:noFill/>
+        </p:spPr>
+        <p:txBody>
+          <a:bodyPr wrap="square">
+            <a:spAutoFit/>
+          </a:bodyPr>
+          <a:lstStyle/>
+          <a:p>
+            <a:pPr algn="l">
+              <a:defRPr sz="800" b="0" i="0">
+                <a:solidFill>
+                  <a:srgbClr val="767676"/>
+                </a:solidFill>
+                <a:latin typeface="Calibri"/>
+              </a:defRPr>
+            </a:pPr>
+            <a:r>
+              <a:t>Estimates based on industry benchmarks, interview data, and SRAM public filings. Full breakdown in Appendix A1.</a:t>
+            </a:r>
+          </a:p>
+        </p:txBody>
+      </p:sp>
+      <p:sp>
+        <p:nvSpPr>
+          <p:cNvPr id="29" name="TextBox 28"/>
+          <p:cNvSpPr txBox="1"/>
+          <p:nvPr/>
+        </p:nvSpPr>
+        <p:spPr>
+          <a:xfrm>
             <a:off x="731520" y="6446520"/>
             <a:ext cx="4572000" cy="274320"/>
           </a:xfrm>
@@ -17091,7 +17128,7 @@
       </p:sp>
       <p:sp>
         <p:nvSpPr>
-          <p:cNvPr id="29" name="TextBox 28"/>
+          <p:cNvPr id="30" name="TextBox 29"/>
           <p:cNvSpPr txBox="1"/>
           <p:nvPr/>
         </p:nvSpPr>
@@ -19976,7 +20013,7 @@
               </a:defRPr>
             </a:pPr>
             <a:r>
-              <a:t>THE DECISION</a:t>
+              <a:t>THE TRADE-OFFS</a:t>
             </a:r>
           </a:p>
         </p:txBody>
@@ -20012,7 +20049,7 @@
               </a:defRPr>
             </a:pPr>
             <a:r>
-              <a:t>Three actions for SRAM's CEO</a:t>
+              <a:t>Three risks worth naming before the decision</a:t>
             </a:r>
           </a:p>
         </p:txBody>
@@ -20069,7 +20106,7 @@
         <p:spPr>
           <a:xfrm>
             <a:off x="731520" y="1371600"/>
-            <a:ext cx="10515600" cy="1188720"/>
+            <a:ext cx="10515600" cy="1371600"/>
           </a:xfrm>
           <a:prstGeom prst="roundRect">
             <a:avLst>
@@ -20109,20 +20146,20 @@
       </p:sp>
       <p:sp>
         <p:nvSpPr>
-          <p:cNvPr id="6" name="Oval 5"/>
+          <p:cNvPr id="6" name="Rectangle 5"/>
           <p:cNvSpPr/>
           <p:nvPr/>
         </p:nvSpPr>
         <p:spPr>
           <a:xfrm>
-            <a:off x="1097280" y="1600200"/>
-            <a:ext cx="457200" cy="457200"/>
-          </a:xfrm>
-          <a:prstGeom prst="ellipse">
+            <a:off x="731520" y="1371600"/>
+            <a:ext cx="50800" cy="1371600"/>
+          </a:xfrm>
+          <a:prstGeom prst="rect">
             <a:avLst/>
           </a:prstGeom>
           <a:solidFill>
-            <a:srgbClr val="1C1C1E"/>
+            <a:srgbClr val="C43B4F"/>
           </a:solidFill>
           <a:ln>
             <a:noFill/>
@@ -20146,16 +20183,7 @@
           <a:bodyPr rtlCol="0" anchor="ctr"/>
           <a:lstStyle/>
           <a:p>
-            <a:pPr algn="ctr">
-              <a:defRPr sz="1800" b="1">
-                <a:solidFill>
-                  <a:srgbClr val="F5F5F3"/>
-                </a:solidFill>
-              </a:defRPr>
-            </a:pPr>
-            <a:r>
-              <a:t>1</a:t>
-            </a:r>
+            <a:pPr algn="ctr"/>
           </a:p>
         </p:txBody>
       </p:sp>
@@ -20167,22 +20195,22 @@
         </p:nvSpPr>
         <p:spPr>
           <a:xfrm>
-            <a:off x="1828800" y="1463040"/>
-            <a:ext cx="8961120" cy="320040"/>
-          </a:xfrm>
-          <a:prstGeom prst="rect">
-            <a:avLst/>
-          </a:prstGeom>
-          <a:noFill/>
-        </p:spPr>
-        <p:txBody>
-          <a:bodyPr wrap="square">
-            <a:spAutoFit/>
-          </a:bodyPr>
-          <a:lstStyle/>
-          <a:p>
-            <a:pPr algn="l">
-              <a:defRPr sz="1800" b="1" i="0">
+            <a:off x="1097280" y="1463040"/>
+            <a:ext cx="9601200" cy="274320"/>
+          </a:xfrm>
+          <a:prstGeom prst="rect">
+            <a:avLst/>
+          </a:prstGeom>
+          <a:noFill/>
+        </p:spPr>
+        <p:txBody>
+          <a:bodyPr wrap="square">
+            <a:spAutoFit/>
+          </a:bodyPr>
+          <a:lstStyle/>
+          <a:p>
+            <a:pPr algn="l">
+              <a:defRPr sz="1400" b="1" i="0">
                 <a:solidFill>
                   <a:srgbClr val="1C1C1E"/>
                 </a:solidFill>
@@ -20190,7 +20218,7 @@
               </a:defRPr>
             </a:pPr>
             <a:r>
-              <a:t>Launch the 90-Day Support Pilot</a:t>
+              <a:t>Dealer trust is fragile</a:t>
             </a:r>
           </a:p>
         </p:txBody>
@@ -20203,22 +20231,22 @@
         </p:nvSpPr>
         <p:spPr>
           <a:xfrm>
-            <a:off x="1828800" y="1828800"/>
-            <a:ext cx="8961120" cy="548640"/>
-          </a:xfrm>
-          <a:prstGeom prst="rect">
-            <a:avLst/>
-          </a:prstGeom>
-          <a:noFill/>
-        </p:spPr>
-        <p:txBody>
-          <a:bodyPr wrap="square">
-            <a:spAutoFit/>
-          </a:bodyPr>
-          <a:lstStyle/>
-          <a:p>
-            <a:pPr algn="l">
-              <a:defRPr sz="1200" b="0" i="0">
+            <a:off x="1097280" y="1783080"/>
+            <a:ext cx="9601200" cy="548640"/>
+          </a:xfrm>
+          <a:prstGeom prst="rect">
+            <a:avLst/>
+          </a:prstGeom>
+          <a:noFill/>
+        </p:spPr>
+        <p:txBody>
+          <a:bodyPr wrap="square">
+            <a:spAutoFit/>
+          </a:bodyPr>
+          <a:lstStyle/>
+          <a:p>
+            <a:pPr algn="l">
+              <a:defRPr sz="1100" b="0" i="0">
                 <a:solidFill>
                   <a:srgbClr val="3A3A3C"/>
                 </a:solidFill>
@@ -20226,21 +20254,57 @@
               </a:defRPr>
             </a:pPr>
             <a:r>
-              <a:t>AXS and Hammerhead dealer support. One product owner, one integration engineer. Human approval on all outputs. Weekly quality reviews with defined rollback trigger.</a:t>
-            </a:r>
-          </a:p>
-        </p:txBody>
-      </p:sp>
-      <p:sp>
-        <p:nvSpPr>
-          <p:cNvPr id="9" name="Rounded Rectangle 8"/>
+              <a:t>One confident wrong answer from the AI reaches a dealer, and the support team loses credibility it spent years building. Human-in-the-loop and weekly quality reviews mitigate this, but they also slow throughput gains.</a:t>
+            </a:r>
+          </a:p>
+        </p:txBody>
+      </p:sp>
+      <p:sp>
+        <p:nvSpPr>
+          <p:cNvPr id="9" name="TextBox 8"/>
+          <p:cNvSpPr txBox="1"/>
+          <p:nvPr/>
+        </p:nvSpPr>
+        <p:spPr>
+          <a:xfrm>
+            <a:off x="1097280" y="2377440"/>
+            <a:ext cx="9601200" cy="228600"/>
+          </a:xfrm>
+          <a:prstGeom prst="rect">
+            <a:avLst/>
+          </a:prstGeom>
+          <a:noFill/>
+        </p:spPr>
+        <p:txBody>
+          <a:bodyPr wrap="square">
+            <a:spAutoFit/>
+          </a:bodyPr>
+          <a:lstStyle/>
+          <a:p>
+            <a:pPr algn="l">
+              <a:defRPr sz="1000" b="1" i="0">
+                <a:solidFill>
+                  <a:srgbClr val="767676"/>
+                </a:solidFill>
+                <a:latin typeface="Calibri"/>
+              </a:defRPr>
+            </a:pPr>
+            <a:r>
+              <a:t>MITIGATION: Kill criteria trigger rollback at first safety error</a:t>
+            </a:r>
+          </a:p>
+        </p:txBody>
+      </p:sp>
+      <p:sp>
+        <p:nvSpPr>
+          <p:cNvPr id="10" name="Rounded Rectangle 9"/>
           <p:cNvSpPr/>
           <p:nvPr/>
         </p:nvSpPr>
         <p:spPr>
           <a:xfrm>
-            <a:off x="731520" y="2788920"/>
-            <a:ext cx="10515600" cy="1188720"/>
+            <a:off x="731520" y="2971800"/>
+            <a:ext cx="10515600" cy="1371600"/>
           </a:xfrm>
           <a:prstGeom prst="roundRect">
             <a:avLst>
@@ -20280,20 +20344,20 @@
       </p:sp>
       <p:sp>
         <p:nvSpPr>
-          <p:cNvPr id="10" name="Oval 9"/>
+          <p:cNvPr id="11" name="Rectangle 10"/>
           <p:cNvSpPr/>
           <p:nvPr/>
         </p:nvSpPr>
         <p:spPr>
           <a:xfrm>
-            <a:off x="1097280" y="3017520"/>
-            <a:ext cx="457200" cy="457200"/>
-          </a:xfrm>
-          <a:prstGeom prst="ellipse">
+            <a:off x="731520" y="2971800"/>
+            <a:ext cx="50800" cy="1371600"/>
+          </a:xfrm>
+          <a:prstGeom prst="rect">
             <a:avLst/>
           </a:prstGeom>
           <a:solidFill>
-            <a:srgbClr val="1C1C1E"/>
+            <a:srgbClr val="C43B4F"/>
           </a:solidFill>
           <a:ln>
             <a:noFill/>
@@ -20317,43 +20381,34 @@
           <a:bodyPr rtlCol="0" anchor="ctr"/>
           <a:lstStyle/>
           <a:p>
-            <a:pPr algn="ctr">
-              <a:defRPr sz="1800" b="1">
-                <a:solidFill>
-                  <a:srgbClr val="F5F5F3"/>
-                </a:solidFill>
-              </a:defRPr>
-            </a:pPr>
-            <a:r>
-              <a:t>2</a:t>
-            </a:r>
-          </a:p>
-        </p:txBody>
-      </p:sp>
-      <p:sp>
-        <p:nvSpPr>
-          <p:cNvPr id="11" name="TextBox 10"/>
-          <p:cNvSpPr txBox="1"/>
-          <p:nvPr/>
-        </p:nvSpPr>
-        <p:spPr>
-          <a:xfrm>
-            <a:off x="1828800" y="2880360"/>
-            <a:ext cx="8961120" cy="320040"/>
-          </a:xfrm>
-          <a:prstGeom prst="rect">
-            <a:avLst/>
-          </a:prstGeom>
-          <a:noFill/>
-        </p:spPr>
-        <p:txBody>
-          <a:bodyPr wrap="square">
-            <a:spAutoFit/>
-          </a:bodyPr>
-          <a:lstStyle/>
-          <a:p>
-            <a:pPr algn="l">
-              <a:defRPr sz="1800" b="1" i="0">
+            <a:pPr algn="ctr"/>
+          </a:p>
+        </p:txBody>
+      </p:sp>
+      <p:sp>
+        <p:nvSpPr>
+          <p:cNvPr id="12" name="TextBox 11"/>
+          <p:cNvSpPr txBox="1"/>
+          <p:nvPr/>
+        </p:nvSpPr>
+        <p:spPr>
+          <a:xfrm>
+            <a:off x="1097280" y="3063240"/>
+            <a:ext cx="9601200" cy="274320"/>
+          </a:xfrm>
+          <a:prstGeom prst="rect">
+            <a:avLst/>
+          </a:prstGeom>
+          <a:noFill/>
+        </p:spPr>
+        <p:txBody>
+          <a:bodyPr wrap="square">
+            <a:spAutoFit/>
+          </a:bodyPr>
+          <a:lstStyle/>
+          <a:p>
+            <a:pPr algn="l">
+              <a:defRPr sz="1400" b="1" i="0">
                 <a:solidFill>
                   <a:srgbClr val="1C1C1E"/>
                 </a:solidFill>
@@ -20361,35 +20416,35 @@
               </a:defRPr>
             </a:pPr>
             <a:r>
-              <a:t>Begin Data Infrastructure Planning</a:t>
-            </a:r>
-          </a:p>
-        </p:txBody>
-      </p:sp>
-      <p:sp>
-        <p:nvSpPr>
-          <p:cNvPr id="12" name="TextBox 11"/>
-          <p:cNvSpPr txBox="1"/>
-          <p:nvPr/>
-        </p:nvSpPr>
-        <p:spPr>
-          <a:xfrm>
-            <a:off x="1828800" y="3246120"/>
-            <a:ext cx="8961120" cy="548640"/>
-          </a:xfrm>
-          <a:prstGeom prst="rect">
-            <a:avLst/>
-          </a:prstGeom>
-          <a:noFill/>
-        </p:spPr>
-        <p:txBody>
-          <a:bodyPr wrap="square">
-            <a:spAutoFit/>
-          </a:bodyPr>
-          <a:lstStyle/>
-          <a:p>
-            <a:pPr algn="l">
-              <a:defRPr sz="1200" b="0" i="0">
+              <a:t>Data consolidation has no executive sponsor</a:t>
+            </a:r>
+          </a:p>
+        </p:txBody>
+      </p:sp>
+      <p:sp>
+        <p:nvSpPr>
+          <p:cNvPr id="13" name="TextBox 12"/>
+          <p:cNvSpPr txBox="1"/>
+          <p:nvPr/>
+        </p:nvSpPr>
+        <p:spPr>
+          <a:xfrm>
+            <a:off x="1097280" y="3383280"/>
+            <a:ext cx="9601200" cy="548640"/>
+          </a:xfrm>
+          <a:prstGeom prst="rect">
+            <a:avLst/>
+          </a:prstGeom>
+          <a:noFill/>
+        </p:spPr>
+        <p:txBody>
+          <a:bodyPr wrap="square">
+            <a:spAutoFit/>
+          </a:bodyPr>
+          <a:lstStyle/>
+          <a:p>
+            <a:pPr algn="l">
+              <a:defRPr sz="1100" b="0" i="0">
                 <a:solidFill>
                   <a:srgbClr val="3A3A3C"/>
                 </a:solidFill>
@@ -20397,21 +20452,57 @@
               </a:defRPr>
             </a:pPr>
             <a:r>
-              <a:t>Unified data layer connecting Shopify, support systems, and telemetry. Foundation for Phase 2 forecasting and Phase 4 AXS Intelligence platform.</a:t>
-            </a:r>
-          </a:p>
-        </p:txBody>
-      </p:sp>
-      <p:sp>
-        <p:nvSpPr>
-          <p:cNvPr id="13" name="Rounded Rectangle 12"/>
+              <a:t>Hartsell owns digital products but not the CRM, ERP, or inventory systems. Phase 2 requires a unified data layer across those systems. Without a senior sponsor, data integration stalls and the pilot stays isolated.</a:t>
+            </a:r>
+          </a:p>
+        </p:txBody>
+      </p:sp>
+      <p:sp>
+        <p:nvSpPr>
+          <p:cNvPr id="14" name="TextBox 13"/>
+          <p:cNvSpPr txBox="1"/>
+          <p:nvPr/>
+        </p:nvSpPr>
+        <p:spPr>
+          <a:xfrm>
+            <a:off x="1097280" y="3977640"/>
+            <a:ext cx="9601200" cy="228600"/>
+          </a:xfrm>
+          <a:prstGeom prst="rect">
+            <a:avLst/>
+          </a:prstGeom>
+          <a:noFill/>
+        </p:spPr>
+        <p:txBody>
+          <a:bodyPr wrap="square">
+            <a:spAutoFit/>
+          </a:bodyPr>
+          <a:lstStyle/>
+          <a:p>
+            <a:pPr algn="l">
+              <a:defRPr sz="1000" b="1" i="0">
+                <a:solidFill>
+                  <a:srgbClr val="767676"/>
+                </a:solidFill>
+                <a:latin typeface="Calibri"/>
+              </a:defRPr>
+            </a:pPr>
+            <a:r>
+              <a:t>MITIGATION: CEO assigns cross-functional data owner in parallel</a:t>
+            </a:r>
+          </a:p>
+        </p:txBody>
+      </p:sp>
+      <p:sp>
+        <p:nvSpPr>
+          <p:cNvPr id="15" name="Rounded Rectangle 14"/>
           <p:cNvSpPr/>
           <p:nvPr/>
         </p:nvSpPr>
         <p:spPr>
           <a:xfrm>
-            <a:off x="731520" y="4206240"/>
-            <a:ext cx="10515600" cy="1188720"/>
+            <a:off x="731520" y="4572000"/>
+            <a:ext cx="10515600" cy="1371600"/>
           </a:xfrm>
           <a:prstGeom prst="roundRect">
             <a:avLst>
@@ -20451,20 +20542,20 @@
       </p:sp>
       <p:sp>
         <p:nvSpPr>
-          <p:cNvPr id="14" name="Oval 13"/>
+          <p:cNvPr id="16" name="Rectangle 15"/>
           <p:cNvSpPr/>
           <p:nvPr/>
         </p:nvSpPr>
         <p:spPr>
           <a:xfrm>
-            <a:off x="1097280" y="4434840"/>
-            <a:ext cx="457200" cy="457200"/>
-          </a:xfrm>
-          <a:prstGeom prst="ellipse">
+            <a:off x="731520" y="4572000"/>
+            <a:ext cx="50800" cy="1371600"/>
+          </a:xfrm>
+          <a:prstGeom prst="rect">
             <a:avLst/>
           </a:prstGeom>
           <a:solidFill>
-            <a:srgbClr val="1C1C1E"/>
+            <a:srgbClr val="C43B4F"/>
           </a:solidFill>
           <a:ln>
             <a:noFill/>
@@ -20488,43 +20579,34 @@
           <a:bodyPr rtlCol="0" anchor="ctr"/>
           <a:lstStyle/>
           <a:p>
-            <a:pPr algn="ctr">
-              <a:defRPr sz="1800" b="1">
-                <a:solidFill>
-                  <a:srgbClr val="F5F5F3"/>
-                </a:solidFill>
-              </a:defRPr>
-            </a:pPr>
-            <a:r>
-              <a:t>3</a:t>
-            </a:r>
-          </a:p>
-        </p:txBody>
-      </p:sp>
-      <p:sp>
-        <p:nvSpPr>
-          <p:cNvPr id="15" name="TextBox 14"/>
-          <p:cNvSpPr txBox="1"/>
-          <p:nvPr/>
-        </p:nvSpPr>
-        <p:spPr>
-          <a:xfrm>
-            <a:off x="1828800" y="4297680"/>
-            <a:ext cx="8961120" cy="320040"/>
-          </a:xfrm>
-          <a:prstGeom prst="rect">
-            <a:avLst/>
-          </a:prstGeom>
-          <a:noFill/>
-        </p:spPr>
-        <p:txBody>
-          <a:bodyPr wrap="square">
-            <a:spAutoFit/>
-          </a:bodyPr>
-          <a:lstStyle/>
-          <a:p>
-            <a:pPr algn="l">
-              <a:defRPr sz="1800" b="1" i="0">
+            <a:pPr algn="ctr"/>
+          </a:p>
+        </p:txBody>
+      </p:sp>
+      <p:sp>
+        <p:nvSpPr>
+          <p:cNvPr id="17" name="TextBox 16"/>
+          <p:cNvSpPr txBox="1"/>
+          <p:nvPr/>
+        </p:nvSpPr>
+        <p:spPr>
+          <a:xfrm>
+            <a:off x="1097280" y="4663440"/>
+            <a:ext cx="9601200" cy="274320"/>
+          </a:xfrm>
+          <a:prstGeom prst="rect">
+            <a:avLst/>
+          </a:prstGeom>
+          <a:noFill/>
+        </p:spPr>
+        <p:txBody>
+          <a:bodyPr wrap="square">
+            <a:spAutoFit/>
+          </a:bodyPr>
+          <a:lstStyle/>
+          <a:p>
+            <a:pPr algn="l">
+              <a:defRPr sz="1400" b="1" i="0">
                 <a:solidFill>
                   <a:srgbClr val="1C1C1E"/>
                 </a:solidFill>
@@ -20532,35 +20614,35 @@
               </a:defRPr>
             </a:pPr>
             <a:r>
-              <a:t>Hold Sequencing Discipline</a:t>
-            </a:r>
-          </a:p>
-        </p:txBody>
-      </p:sp>
-      <p:sp>
-        <p:nvSpPr>
-          <p:cNvPr id="16" name="TextBox 15"/>
-          <p:cNvSpPr txBox="1"/>
-          <p:nvPr/>
-        </p:nvSpPr>
-        <p:spPr>
-          <a:xfrm>
-            <a:off x="1828800" y="4663440"/>
-            <a:ext cx="8961120" cy="548640"/>
-          </a:xfrm>
-          <a:prstGeom prst="rect">
-            <a:avLst/>
-          </a:prstGeom>
-          <a:noFill/>
-        </p:spPr>
-        <p:txBody>
-          <a:bodyPr wrap="square">
-            <a:spAutoFit/>
-          </a:bodyPr>
-          <a:lstStyle/>
-          <a:p>
-            <a:pPr algn="l">
-              <a:defRPr sz="1200" b="0" i="0">
+              <a:t>AI hype creates unrealistic internal expectations</a:t>
+            </a:r>
+          </a:p>
+        </p:txBody>
+      </p:sp>
+      <p:sp>
+        <p:nvSpPr>
+          <p:cNvPr id="18" name="TextBox 17"/>
+          <p:cNvSpPr txBox="1"/>
+          <p:nvPr/>
+        </p:nvSpPr>
+        <p:spPr>
+          <a:xfrm>
+            <a:off x="1097280" y="4983480"/>
+            <a:ext cx="9601200" cy="548640"/>
+          </a:xfrm>
+          <a:prstGeom prst="rect">
+            <a:avLst/>
+          </a:prstGeom>
+          <a:noFill/>
+        </p:spPr>
+        <p:txBody>
+          <a:bodyPr wrap="square">
+            <a:spAutoFit/>
+          </a:bodyPr>
+          <a:lstStyle/>
+          <a:p>
+            <a:pPr algn="l">
+              <a:defRPr sz="1100" b="0" i="0">
                 <a:solidFill>
                   <a:srgbClr val="3A3A3C"/>
                 </a:solidFill>
@@ -20568,98 +20650,8 @@
               </a:defRPr>
             </a:pPr>
             <a:r>
-              <a:t>Bounded, well-defined problems first. Broader transformation after measured proof. The 90-day pilot produces data to justify or redirect every subsequent investment.</a:t>
-            </a:r>
-          </a:p>
-        </p:txBody>
-      </p:sp>
-      <p:sp>
-        <p:nvSpPr>
-          <p:cNvPr id="17" name="Rounded Rectangle 16"/>
-          <p:cNvSpPr/>
-          <p:nvPr/>
-        </p:nvSpPr>
-        <p:spPr>
-          <a:xfrm>
-            <a:off x="731520" y="5715000"/>
-            <a:ext cx="10515600" cy="548640"/>
-          </a:xfrm>
-          <a:prstGeom prst="roundRect">
-            <a:avLst>
-              <a:gd name="adj" fmla="val 10000"/>
-            </a:avLst>
-          </a:prstGeom>
-          <a:solidFill>
-            <a:srgbClr val="FFFFFF"/>
-          </a:solidFill>
-          <a:ln w="12700">
-            <a:solidFill>
-              <a:srgbClr val="E0E0DE"/>
-            </a:solidFill>
-          </a:ln>
-        </p:spPr>
-        <p:style>
-          <a:lnRef idx="1">
-            <a:schemeClr val="accent1"/>
-          </a:lnRef>
-          <a:fillRef idx="3">
-            <a:schemeClr val="accent1"/>
-          </a:fillRef>
-          <a:effectRef idx="2">
-            <a:schemeClr val="accent1"/>
-          </a:effectRef>
-          <a:fontRef idx="minor">
-            <a:schemeClr val="lt1"/>
-          </a:fontRef>
-        </p:style>
-        <p:txBody>
-          <a:bodyPr rtlCol="0" anchor="ctr"/>
-          <a:lstStyle/>
-          <a:p>
-            <a:pPr algn="ctr"/>
-          </a:p>
-        </p:txBody>
-      </p:sp>
-      <p:sp>
-        <p:nvSpPr>
-          <p:cNvPr id="18" name="Rectangle 17"/>
-          <p:cNvSpPr/>
-          <p:nvPr/>
-        </p:nvSpPr>
-        <p:spPr>
-          <a:xfrm>
-            <a:off x="731520" y="5715000"/>
-            <a:ext cx="50800" cy="548640"/>
-          </a:xfrm>
-          <a:prstGeom prst="rect">
-            <a:avLst/>
-          </a:prstGeom>
-          <a:solidFill>
-            <a:srgbClr val="E51937"/>
-          </a:solidFill>
-          <a:ln>
-            <a:noFill/>
-          </a:ln>
-        </p:spPr>
-        <p:style>
-          <a:lnRef idx="1">
-            <a:schemeClr val="accent1"/>
-          </a:lnRef>
-          <a:fillRef idx="3">
-            <a:schemeClr val="accent1"/>
-          </a:fillRef>
-          <a:effectRef idx="2">
-            <a:schemeClr val="accent1"/>
-          </a:effectRef>
-          <a:fontRef idx="minor">
-            <a:schemeClr val="lt1"/>
-          </a:fontRef>
-        </p:style>
-        <p:txBody>
-          <a:bodyPr rtlCol="0" anchor="ctr"/>
-          <a:lstStyle/>
-          <a:p>
-            <a:pPr algn="ctr"/>
+              <a:t>SRAM's engineering culture values precision. If leadership frames AI as a silver bullet rather than a tool, early imperfections will fuel skepticism and internal resistance to future phases.</a:t>
+            </a:r>
           </a:p>
         </p:txBody>
       </p:sp>
@@ -20671,41 +20663,22 @@
         </p:nvSpPr>
         <p:spPr>
           <a:xfrm>
-            <a:off x="1188720" y="5742432"/>
-            <a:ext cx="9601200" cy="502920"/>
-          </a:xfrm>
-          <a:prstGeom prst="rect">
-            <a:avLst/>
-          </a:prstGeom>
-          <a:noFill/>
-        </p:spPr>
-        <p:txBody>
-          <a:bodyPr wrap="square">
-            <a:spAutoFit/>
-          </a:bodyPr>
-          <a:lstStyle/>
-          <a:p>
-            <a:pPr>
-              <a:spcAft>
-                <a:spcPts val="260"/>
-              </a:spcAft>
-              <a:defRPr sz="1300" b="1">
-                <a:solidFill>
-                  <a:srgbClr val="1C1C1E"/>
-                </a:solidFill>
-                <a:latin typeface="Calibri"/>
-              </a:defRPr>
-            </a:pPr>
-            <a:r>
-              <a:t>Expected Year-1 return: 3.8x on $2.7M spend</a:t>
-            </a:r>
-          </a:p>
-          <a:p>
-            <a:pPr>
-              <a:spcAft>
-                <a:spcPts val="220"/>
-              </a:spcAft>
-              <a:defRPr sz="1100" b="0">
+            <a:off x="1097280" y="5577840"/>
+            <a:ext cx="9601200" cy="228600"/>
+          </a:xfrm>
+          <a:prstGeom prst="rect">
+            <a:avLst/>
+          </a:prstGeom>
+          <a:noFill/>
+        </p:spPr>
+        <p:txBody>
+          <a:bodyPr wrap="square">
+            <a:spAutoFit/>
+          </a:bodyPr>
+          <a:lstStyle/>
+          <a:p>
+            <a:pPr algn="l">
+              <a:defRPr sz="1000" b="1" i="0">
                 <a:solidFill>
                   <a:srgbClr val="767676"/>
                 </a:solidFill>
@@ -20713,7 +20686,7 @@
               </a:defRPr>
             </a:pPr>
             <a:r>
-              <a:t>Downside bounded by 90-day pilot  |  Upside scales with SRAM's data advantage</a:t>
+              <a:t>MITIGATION: Frame pilot as experiment with defined success and failure criteria</a:t>
             </a:r>
           </a:p>
         </p:txBody>
@@ -20847,7 +20820,7 @@
               </a:defRPr>
             </a:pPr>
             <a:r>
-              <a:t>APPENDIX</a:t>
+              <a:t>THE DECISION</a:t>
             </a:r>
           </a:p>
         </p:txBody>
@@ -20883,7 +20856,7 @@
               </a:defRPr>
             </a:pPr>
             <a:r>
-              <a:t>Financial detail across three scenarios</a:t>
+              <a:t>Three actions for SRAM's CEO</a:t>
             </a:r>
           </a:p>
         </p:txBody>
@@ -20933,169 +20906,27 @@
       </p:sp>
       <p:sp>
         <p:nvSpPr>
-          <p:cNvPr id="5" name="TextBox 4"/>
-          <p:cNvSpPr txBox="1"/>
+          <p:cNvPr id="5" name="Rounded Rectangle 4"/>
+          <p:cNvSpPr/>
           <p:nvPr/>
         </p:nvSpPr>
         <p:spPr>
           <a:xfrm>
             <a:off x="731520" y="1371600"/>
-            <a:ext cx="2743200" cy="274320"/>
-          </a:xfrm>
-          <a:prstGeom prst="rect">
-            <a:avLst/>
-          </a:prstGeom>
-          <a:noFill/>
-        </p:spPr>
-        <p:txBody>
-          <a:bodyPr wrap="square">
-            <a:spAutoFit/>
-          </a:bodyPr>
-          <a:lstStyle/>
-          <a:p>
-            <a:pPr algn="l">
-              <a:defRPr sz="1100" b="1" i="0">
-                <a:solidFill>
-                  <a:srgbClr val="767676"/>
-                </a:solidFill>
-                <a:latin typeface="Calibri"/>
-              </a:defRPr>
-            </a:pPr>
-            <a:r>
-              <a:t>Category</a:t>
-            </a:r>
-          </a:p>
-        </p:txBody>
-      </p:sp>
-      <p:sp>
-        <p:nvSpPr>
-          <p:cNvPr id="6" name="TextBox 5"/>
-          <p:cNvSpPr txBox="1"/>
-          <p:nvPr/>
-        </p:nvSpPr>
-        <p:spPr>
-          <a:xfrm>
-            <a:off x="3474720" y="1371600"/>
-            <a:ext cx="2743200" cy="274320"/>
-          </a:xfrm>
-          <a:prstGeom prst="rect">
-            <a:avLst/>
-          </a:prstGeom>
-          <a:noFill/>
-        </p:spPr>
-        <p:txBody>
-          <a:bodyPr wrap="square">
-            <a:spAutoFit/>
-          </a:bodyPr>
-          <a:lstStyle/>
-          <a:p>
-            <a:pPr algn="l">
-              <a:defRPr sz="1100" b="1" i="0">
-                <a:solidFill>
-                  <a:srgbClr val="767676"/>
-                </a:solidFill>
-                <a:latin typeface="Calibri"/>
-              </a:defRPr>
-            </a:pPr>
-            <a:r>
-              <a:t>Conservative</a:t>
-            </a:r>
-          </a:p>
-        </p:txBody>
-      </p:sp>
-      <p:sp>
-        <p:nvSpPr>
-          <p:cNvPr id="7" name="TextBox 6"/>
-          <p:cNvSpPr txBox="1"/>
-          <p:nvPr/>
-        </p:nvSpPr>
-        <p:spPr>
-          <a:xfrm>
-            <a:off x="6217920" y="1371600"/>
-            <a:ext cx="2743200" cy="274320"/>
-          </a:xfrm>
-          <a:prstGeom prst="rect">
-            <a:avLst/>
-          </a:prstGeom>
-          <a:noFill/>
-        </p:spPr>
-        <p:txBody>
-          <a:bodyPr wrap="square">
-            <a:spAutoFit/>
-          </a:bodyPr>
-          <a:lstStyle/>
-          <a:p>
-            <a:pPr algn="l">
-              <a:defRPr sz="1100" b="1" i="0">
-                <a:solidFill>
-                  <a:srgbClr val="767676"/>
-                </a:solidFill>
-                <a:latin typeface="Calibri"/>
-              </a:defRPr>
-            </a:pPr>
-            <a:r>
-              <a:t>Expected</a:t>
-            </a:r>
-          </a:p>
-        </p:txBody>
-      </p:sp>
-      <p:sp>
-        <p:nvSpPr>
-          <p:cNvPr id="8" name="TextBox 7"/>
-          <p:cNvSpPr txBox="1"/>
-          <p:nvPr/>
-        </p:nvSpPr>
-        <p:spPr>
-          <a:xfrm>
-            <a:off x="8961120" y="1371600"/>
-            <a:ext cx="2743200" cy="274320"/>
-          </a:xfrm>
-          <a:prstGeom prst="rect">
-            <a:avLst/>
-          </a:prstGeom>
-          <a:noFill/>
-        </p:spPr>
-        <p:txBody>
-          <a:bodyPr wrap="square">
-            <a:spAutoFit/>
-          </a:bodyPr>
-          <a:lstStyle/>
-          <a:p>
-            <a:pPr algn="l">
-              <a:defRPr sz="1100" b="1" i="0">
-                <a:solidFill>
-                  <a:srgbClr val="767676"/>
-                </a:solidFill>
-                <a:latin typeface="Calibri"/>
-              </a:defRPr>
-            </a:pPr>
-            <a:r>
-              <a:t>Upside</a:t>
-            </a:r>
-          </a:p>
-        </p:txBody>
-      </p:sp>
-      <p:sp>
-        <p:nvSpPr>
-          <p:cNvPr id="9" name="Rounded Rectangle 8"/>
-          <p:cNvSpPr/>
-          <p:nvPr/>
-        </p:nvSpPr>
-        <p:spPr>
-          <a:xfrm>
-            <a:off x="731520" y="1719072"/>
-            <a:ext cx="10515600" cy="347472"/>
+            <a:ext cx="10515600" cy="1188720"/>
           </a:xfrm>
           <a:prstGeom prst="roundRect">
             <a:avLst>
-              <a:gd name="adj" fmla="val 2000"/>
+              <a:gd name="adj" fmla="val 4000"/>
             </a:avLst>
           </a:prstGeom>
           <a:solidFill>
-            <a:srgbClr val="F0F0EE"/>
+            <a:srgbClr val="FFFFFF"/>
           </a:solidFill>
-          <a:ln>
-            <a:noFill/>
+          <a:ln w="12700">
+            <a:solidFill>
+              <a:srgbClr val="E0E0DE"/>
+            </a:solidFill>
           </a:ln>
         </p:spPr>
         <p:style>
@@ -21122,310 +20953,20 @@
       </p:sp>
       <p:sp>
         <p:nvSpPr>
-          <p:cNvPr id="10" name="TextBox 9"/>
-          <p:cNvSpPr txBox="1"/>
-          <p:nvPr/>
-        </p:nvSpPr>
-        <p:spPr>
-          <a:xfrm>
-            <a:off x="731520" y="1737360"/>
-            <a:ext cx="2743200" cy="274320"/>
-          </a:xfrm>
-          <a:prstGeom prst="rect">
-            <a:avLst/>
-          </a:prstGeom>
-          <a:noFill/>
-        </p:spPr>
-        <p:txBody>
-          <a:bodyPr wrap="square">
-            <a:spAutoFit/>
-          </a:bodyPr>
-          <a:lstStyle/>
-          <a:p>
-            <a:pPr algn="l">
-              <a:defRPr sz="1100" b="0" i="0">
-                <a:solidFill>
-                  <a:srgbClr val="3A3A3C"/>
-                </a:solidFill>
-                <a:latin typeface="Calibri"/>
-              </a:defRPr>
-            </a:pPr>
-            <a:r>
-              <a:t>Support assistant savings</a:t>
-            </a:r>
-          </a:p>
-        </p:txBody>
-      </p:sp>
-      <p:sp>
-        <p:nvSpPr>
-          <p:cNvPr id="11" name="TextBox 10"/>
-          <p:cNvSpPr txBox="1"/>
-          <p:nvPr/>
-        </p:nvSpPr>
-        <p:spPr>
-          <a:xfrm>
-            <a:off x="3474720" y="1737360"/>
-            <a:ext cx="2743200" cy="274320"/>
-          </a:xfrm>
-          <a:prstGeom prst="rect">
-            <a:avLst/>
-          </a:prstGeom>
-          <a:noFill/>
-        </p:spPr>
-        <p:txBody>
-          <a:bodyPr wrap="square">
-            <a:spAutoFit/>
-          </a:bodyPr>
-          <a:lstStyle/>
-          <a:p>
-            <a:pPr algn="l">
-              <a:defRPr sz="1100" b="0" i="0">
-                <a:solidFill>
-                  <a:srgbClr val="3A3A3C"/>
-                </a:solidFill>
-                <a:latin typeface="Calibri"/>
-              </a:defRPr>
-            </a:pPr>
-            <a:r>
-              <a:t>$0.5M</a:t>
-            </a:r>
-          </a:p>
-        </p:txBody>
-      </p:sp>
-      <p:sp>
-        <p:nvSpPr>
-          <p:cNvPr id="12" name="TextBox 11"/>
-          <p:cNvSpPr txBox="1"/>
-          <p:nvPr/>
-        </p:nvSpPr>
-        <p:spPr>
-          <a:xfrm>
-            <a:off x="6217920" y="1737360"/>
-            <a:ext cx="2743200" cy="274320"/>
-          </a:xfrm>
-          <a:prstGeom prst="rect">
-            <a:avLst/>
-          </a:prstGeom>
-          <a:noFill/>
-        </p:spPr>
-        <p:txBody>
-          <a:bodyPr wrap="square">
-            <a:spAutoFit/>
-          </a:bodyPr>
-          <a:lstStyle/>
-          <a:p>
-            <a:pPr algn="l">
-              <a:defRPr sz="1100" b="1" i="0">
-                <a:solidFill>
-                  <a:srgbClr val="1C1C1E"/>
-                </a:solidFill>
-                <a:latin typeface="Calibri"/>
-              </a:defRPr>
-            </a:pPr>
-            <a:r>
-              <a:t>$1.6M</a:t>
-            </a:r>
-          </a:p>
-        </p:txBody>
-      </p:sp>
-      <p:sp>
-        <p:nvSpPr>
-          <p:cNvPr id="13" name="TextBox 12"/>
-          <p:cNvSpPr txBox="1"/>
-          <p:nvPr/>
-        </p:nvSpPr>
-        <p:spPr>
-          <a:xfrm>
-            <a:off x="8961120" y="1737360"/>
-            <a:ext cx="2743200" cy="274320"/>
-          </a:xfrm>
-          <a:prstGeom prst="rect">
-            <a:avLst/>
-          </a:prstGeom>
-          <a:noFill/>
-        </p:spPr>
-        <p:txBody>
-          <a:bodyPr wrap="square">
-            <a:spAutoFit/>
-          </a:bodyPr>
-          <a:lstStyle/>
-          <a:p>
-            <a:pPr algn="l">
-              <a:defRPr sz="1100" b="0" i="0">
-                <a:solidFill>
-                  <a:srgbClr val="3A3A3C"/>
-                </a:solidFill>
-                <a:latin typeface="Calibri"/>
-              </a:defRPr>
-            </a:pPr>
-            <a:r>
-              <a:t>$4.3M</a:t>
-            </a:r>
-          </a:p>
-        </p:txBody>
-      </p:sp>
-      <p:sp>
-        <p:nvSpPr>
-          <p:cNvPr id="14" name="TextBox 13"/>
-          <p:cNvSpPr txBox="1"/>
-          <p:nvPr/>
-        </p:nvSpPr>
-        <p:spPr>
-          <a:xfrm>
-            <a:off x="731520" y="2103120"/>
-            <a:ext cx="2743200" cy="274320"/>
-          </a:xfrm>
-          <a:prstGeom prst="rect">
-            <a:avLst/>
-          </a:prstGeom>
-          <a:noFill/>
-        </p:spPr>
-        <p:txBody>
-          <a:bodyPr wrap="square">
-            <a:spAutoFit/>
-          </a:bodyPr>
-          <a:lstStyle/>
-          <a:p>
-            <a:pPr algn="l">
-              <a:defRPr sz="1100" b="0" i="0">
-                <a:solidFill>
-                  <a:srgbClr val="3A3A3C"/>
-                </a:solidFill>
-                <a:latin typeface="Calibri"/>
-              </a:defRPr>
-            </a:pPr>
-            <a:r>
-              <a:t>Forecasting + inventory</a:t>
-            </a:r>
-          </a:p>
-        </p:txBody>
-      </p:sp>
-      <p:sp>
-        <p:nvSpPr>
-          <p:cNvPr id="15" name="TextBox 14"/>
-          <p:cNvSpPr txBox="1"/>
-          <p:nvPr/>
-        </p:nvSpPr>
-        <p:spPr>
-          <a:xfrm>
-            <a:off x="3474720" y="2103120"/>
-            <a:ext cx="2743200" cy="274320"/>
-          </a:xfrm>
-          <a:prstGeom prst="rect">
-            <a:avLst/>
-          </a:prstGeom>
-          <a:noFill/>
-        </p:spPr>
-        <p:txBody>
-          <a:bodyPr wrap="square">
-            <a:spAutoFit/>
-          </a:bodyPr>
-          <a:lstStyle/>
-          <a:p>
-            <a:pPr algn="l">
-              <a:defRPr sz="1100" b="0" i="0">
-                <a:solidFill>
-                  <a:srgbClr val="3A3A3C"/>
-                </a:solidFill>
-                <a:latin typeface="Calibri"/>
-              </a:defRPr>
-            </a:pPr>
-            <a:r>
-              <a:t>$0.7M</a:t>
-            </a:r>
-          </a:p>
-        </p:txBody>
-      </p:sp>
-      <p:sp>
-        <p:nvSpPr>
-          <p:cNvPr id="16" name="TextBox 15"/>
-          <p:cNvSpPr txBox="1"/>
-          <p:nvPr/>
-        </p:nvSpPr>
-        <p:spPr>
-          <a:xfrm>
-            <a:off x="6217920" y="2103120"/>
-            <a:ext cx="2743200" cy="274320"/>
-          </a:xfrm>
-          <a:prstGeom prst="rect">
-            <a:avLst/>
-          </a:prstGeom>
-          <a:noFill/>
-        </p:spPr>
-        <p:txBody>
-          <a:bodyPr wrap="square">
-            <a:spAutoFit/>
-          </a:bodyPr>
-          <a:lstStyle/>
-          <a:p>
-            <a:pPr algn="l">
-              <a:defRPr sz="1100" b="1" i="0">
-                <a:solidFill>
-                  <a:srgbClr val="1C1C1E"/>
-                </a:solidFill>
-                <a:latin typeface="Calibri"/>
-              </a:defRPr>
-            </a:pPr>
-            <a:r>
-              <a:t>$1.6M</a:t>
-            </a:r>
-          </a:p>
-        </p:txBody>
-      </p:sp>
-      <p:sp>
-        <p:nvSpPr>
-          <p:cNvPr id="17" name="TextBox 16"/>
-          <p:cNvSpPr txBox="1"/>
-          <p:nvPr/>
-        </p:nvSpPr>
-        <p:spPr>
-          <a:xfrm>
-            <a:off x="8961120" y="2103120"/>
-            <a:ext cx="2743200" cy="274320"/>
-          </a:xfrm>
-          <a:prstGeom prst="rect">
-            <a:avLst/>
-          </a:prstGeom>
-          <a:noFill/>
-        </p:spPr>
-        <p:txBody>
-          <a:bodyPr wrap="square">
-            <a:spAutoFit/>
-          </a:bodyPr>
-          <a:lstStyle/>
-          <a:p>
-            <a:pPr algn="l">
-              <a:defRPr sz="1100" b="0" i="0">
-                <a:solidFill>
-                  <a:srgbClr val="3A3A3C"/>
-                </a:solidFill>
-                <a:latin typeface="Calibri"/>
-              </a:defRPr>
-            </a:pPr>
-            <a:r>
-              <a:t>$4.5M</a:t>
-            </a:r>
-          </a:p>
-        </p:txBody>
-      </p:sp>
-      <p:sp>
-        <p:nvSpPr>
-          <p:cNvPr id="18" name="Rounded Rectangle 17"/>
+          <p:cNvPr id="6" name="Oval 5"/>
           <p:cNvSpPr/>
           <p:nvPr/>
         </p:nvSpPr>
         <p:spPr>
           <a:xfrm>
-            <a:off x="731520" y="2450592"/>
-            <a:ext cx="10515600" cy="347472"/>
-          </a:xfrm>
-          <a:prstGeom prst="roundRect">
-            <a:avLst>
-              <a:gd name="adj" fmla="val 2000"/>
-            </a:avLst>
+            <a:off x="1097280" y="1600200"/>
+            <a:ext cx="457200" cy="457200"/>
+          </a:xfrm>
+          <a:prstGeom prst="ellipse">
+            <a:avLst/>
           </a:prstGeom>
           <a:solidFill>
-            <a:srgbClr val="F0F0EE"/>
+            <a:srgbClr val="1C1C1E"/>
           </a:solidFill>
           <a:ln>
             <a:noFill/>
@@ -21449,34 +20990,79 @@
           <a:bodyPr rtlCol="0" anchor="ctr"/>
           <a:lstStyle/>
           <a:p>
-            <a:pPr algn="ctr"/>
-          </a:p>
-        </p:txBody>
-      </p:sp>
-      <p:sp>
-        <p:nvSpPr>
-          <p:cNvPr id="19" name="TextBox 18"/>
-          <p:cNvSpPr txBox="1"/>
-          <p:nvPr/>
-        </p:nvSpPr>
-        <p:spPr>
-          <a:xfrm>
-            <a:off x="731520" y="2468880"/>
-            <a:ext cx="2743200" cy="274320"/>
-          </a:xfrm>
-          <a:prstGeom prst="rect">
-            <a:avLst/>
-          </a:prstGeom>
-          <a:noFill/>
-        </p:spPr>
-        <p:txBody>
-          <a:bodyPr wrap="square">
-            <a:spAutoFit/>
-          </a:bodyPr>
-          <a:lstStyle/>
-          <a:p>
-            <a:pPr algn="l">
-              <a:defRPr sz="1100" b="0" i="0">
+            <a:pPr algn="ctr">
+              <a:defRPr sz="1800" b="1">
+                <a:solidFill>
+                  <a:srgbClr val="F5F5F3"/>
+                </a:solidFill>
+              </a:defRPr>
+            </a:pPr>
+            <a:r>
+              <a:t>1</a:t>
+            </a:r>
+          </a:p>
+        </p:txBody>
+      </p:sp>
+      <p:sp>
+        <p:nvSpPr>
+          <p:cNvPr id="7" name="TextBox 6"/>
+          <p:cNvSpPr txBox="1"/>
+          <p:nvPr/>
+        </p:nvSpPr>
+        <p:spPr>
+          <a:xfrm>
+            <a:off x="1828800" y="1463040"/>
+            <a:ext cx="8961120" cy="320040"/>
+          </a:xfrm>
+          <a:prstGeom prst="rect">
+            <a:avLst/>
+          </a:prstGeom>
+          <a:noFill/>
+        </p:spPr>
+        <p:txBody>
+          <a:bodyPr wrap="square">
+            <a:spAutoFit/>
+          </a:bodyPr>
+          <a:lstStyle/>
+          <a:p>
+            <a:pPr algn="l">
+              <a:defRPr sz="1800" b="1" i="0">
+                <a:solidFill>
+                  <a:srgbClr val="1C1C1E"/>
+                </a:solidFill>
+                <a:latin typeface="Calibri"/>
+              </a:defRPr>
+            </a:pPr>
+            <a:r>
+              <a:t>Launch the 90-Day Support Pilot</a:t>
+            </a:r>
+          </a:p>
+        </p:txBody>
+      </p:sp>
+      <p:sp>
+        <p:nvSpPr>
+          <p:cNvPr id="8" name="TextBox 7"/>
+          <p:cNvSpPr txBox="1"/>
+          <p:nvPr/>
+        </p:nvSpPr>
+        <p:spPr>
+          <a:xfrm>
+            <a:off x="1828800" y="1828800"/>
+            <a:ext cx="8961120" cy="548640"/>
+          </a:xfrm>
+          <a:prstGeom prst="rect">
+            <a:avLst/>
+          </a:prstGeom>
+          <a:noFill/>
+        </p:spPr>
+        <p:txBody>
+          <a:bodyPr wrap="square">
+            <a:spAutoFit/>
+          </a:bodyPr>
+          <a:lstStyle/>
+          <a:p>
+            <a:pPr algn="l">
+              <a:defRPr sz="1200" b="0" i="0">
                 <a:solidFill>
                   <a:srgbClr val="3A3A3C"/>
                 </a:solidFill>
@@ -21484,284 +21070,34 @@
               </a:defRPr>
             </a:pPr>
             <a:r>
-              <a:t>Documentation + translation</a:t>
-            </a:r>
-          </a:p>
-        </p:txBody>
-      </p:sp>
-      <p:sp>
-        <p:nvSpPr>
-          <p:cNvPr id="20" name="TextBox 19"/>
-          <p:cNvSpPr txBox="1"/>
-          <p:nvPr/>
-        </p:nvSpPr>
-        <p:spPr>
-          <a:xfrm>
-            <a:off x="3474720" y="2468880"/>
-            <a:ext cx="2743200" cy="274320"/>
-          </a:xfrm>
-          <a:prstGeom prst="rect">
-            <a:avLst/>
-          </a:prstGeom>
-          <a:noFill/>
-        </p:spPr>
-        <p:txBody>
-          <a:bodyPr wrap="square">
-            <a:spAutoFit/>
-          </a:bodyPr>
-          <a:lstStyle/>
-          <a:p>
-            <a:pPr algn="l">
-              <a:defRPr sz="1100" b="0" i="0">
-                <a:solidFill>
-                  <a:srgbClr val="3A3A3C"/>
-                </a:solidFill>
-                <a:latin typeface="Calibri"/>
-              </a:defRPr>
-            </a:pPr>
-            <a:r>
-              <a:t>$0.1M</a:t>
-            </a:r>
-          </a:p>
-        </p:txBody>
-      </p:sp>
-      <p:sp>
-        <p:nvSpPr>
-          <p:cNvPr id="21" name="TextBox 20"/>
-          <p:cNvSpPr txBox="1"/>
-          <p:nvPr/>
-        </p:nvSpPr>
-        <p:spPr>
-          <a:xfrm>
-            <a:off x="6217920" y="2468880"/>
-            <a:ext cx="2743200" cy="274320"/>
-          </a:xfrm>
-          <a:prstGeom prst="rect">
-            <a:avLst/>
-          </a:prstGeom>
-          <a:noFill/>
-        </p:spPr>
-        <p:txBody>
-          <a:bodyPr wrap="square">
-            <a:spAutoFit/>
-          </a:bodyPr>
-          <a:lstStyle/>
-          <a:p>
-            <a:pPr algn="l">
-              <a:defRPr sz="1100" b="1" i="0">
-                <a:solidFill>
-                  <a:srgbClr val="1C1C1E"/>
-                </a:solidFill>
-                <a:latin typeface="Calibri"/>
-              </a:defRPr>
-            </a:pPr>
-            <a:r>
-              <a:t>$0.24M</a:t>
-            </a:r>
-          </a:p>
-        </p:txBody>
-      </p:sp>
-      <p:sp>
-        <p:nvSpPr>
-          <p:cNvPr id="22" name="TextBox 21"/>
-          <p:cNvSpPr txBox="1"/>
-          <p:nvPr/>
-        </p:nvSpPr>
-        <p:spPr>
-          <a:xfrm>
-            <a:off x="8961120" y="2468880"/>
-            <a:ext cx="2743200" cy="274320"/>
-          </a:xfrm>
-          <a:prstGeom prst="rect">
-            <a:avLst/>
-          </a:prstGeom>
-          <a:noFill/>
-        </p:spPr>
-        <p:txBody>
-          <a:bodyPr wrap="square">
-            <a:spAutoFit/>
-          </a:bodyPr>
-          <a:lstStyle/>
-          <a:p>
-            <a:pPr algn="l">
-              <a:defRPr sz="1100" b="0" i="0">
-                <a:solidFill>
-                  <a:srgbClr val="3A3A3C"/>
-                </a:solidFill>
-                <a:latin typeface="Calibri"/>
-              </a:defRPr>
-            </a:pPr>
-            <a:r>
-              <a:t>$0.9M</a:t>
-            </a:r>
-          </a:p>
-        </p:txBody>
-      </p:sp>
-      <p:sp>
-        <p:nvSpPr>
-          <p:cNvPr id="23" name="TextBox 22"/>
-          <p:cNvSpPr txBox="1"/>
-          <p:nvPr/>
-        </p:nvSpPr>
-        <p:spPr>
-          <a:xfrm>
-            <a:off x="731520" y="2834640"/>
-            <a:ext cx="2743200" cy="274320"/>
-          </a:xfrm>
-          <a:prstGeom prst="rect">
-            <a:avLst/>
-          </a:prstGeom>
-          <a:noFill/>
-        </p:spPr>
-        <p:txBody>
-          <a:bodyPr wrap="square">
-            <a:spAutoFit/>
-          </a:bodyPr>
-          <a:lstStyle/>
-          <a:p>
-            <a:pPr algn="l">
-              <a:defRPr sz="1100" b="0" i="0">
-                <a:solidFill>
-                  <a:srgbClr val="3A3A3C"/>
-                </a:solidFill>
-                <a:latin typeface="Calibri"/>
-              </a:defRPr>
-            </a:pPr>
-            <a:r>
-              <a:t>Customer retention revenue</a:t>
-            </a:r>
-          </a:p>
-        </p:txBody>
-      </p:sp>
-      <p:sp>
-        <p:nvSpPr>
-          <p:cNvPr id="24" name="TextBox 23"/>
-          <p:cNvSpPr txBox="1"/>
-          <p:nvPr/>
-        </p:nvSpPr>
-        <p:spPr>
-          <a:xfrm>
-            <a:off x="3474720" y="2834640"/>
-            <a:ext cx="2743200" cy="274320"/>
-          </a:xfrm>
-          <a:prstGeom prst="rect">
-            <a:avLst/>
-          </a:prstGeom>
-          <a:noFill/>
-        </p:spPr>
-        <p:txBody>
-          <a:bodyPr wrap="square">
-            <a:spAutoFit/>
-          </a:bodyPr>
-          <a:lstStyle/>
-          <a:p>
-            <a:pPr algn="l">
-              <a:defRPr sz="1100" b="0" i="0">
-                <a:solidFill>
-                  <a:srgbClr val="3A3A3C"/>
-                </a:solidFill>
-                <a:latin typeface="Calibri"/>
-              </a:defRPr>
-            </a:pPr>
-            <a:r>
-              <a:t>$1.5M</a:t>
-            </a:r>
-          </a:p>
-        </p:txBody>
-      </p:sp>
-      <p:sp>
-        <p:nvSpPr>
-          <p:cNvPr id="25" name="TextBox 24"/>
-          <p:cNvSpPr txBox="1"/>
-          <p:nvPr/>
-        </p:nvSpPr>
-        <p:spPr>
-          <a:xfrm>
-            <a:off x="6217920" y="2834640"/>
-            <a:ext cx="2743200" cy="274320"/>
-          </a:xfrm>
-          <a:prstGeom prst="rect">
-            <a:avLst/>
-          </a:prstGeom>
-          <a:noFill/>
-        </p:spPr>
-        <p:txBody>
-          <a:bodyPr wrap="square">
-            <a:spAutoFit/>
-          </a:bodyPr>
-          <a:lstStyle/>
-          <a:p>
-            <a:pPr algn="l">
-              <a:defRPr sz="1100" b="1" i="0">
-                <a:solidFill>
-                  <a:srgbClr val="1C1C1E"/>
-                </a:solidFill>
-                <a:latin typeface="Calibri"/>
-              </a:defRPr>
-            </a:pPr>
-            <a:r>
-              <a:t>$3.0M</a:t>
-            </a:r>
-          </a:p>
-        </p:txBody>
-      </p:sp>
-      <p:sp>
-        <p:nvSpPr>
-          <p:cNvPr id="26" name="TextBox 25"/>
-          <p:cNvSpPr txBox="1"/>
-          <p:nvPr/>
-        </p:nvSpPr>
-        <p:spPr>
-          <a:xfrm>
-            <a:off x="8961120" y="2834640"/>
-            <a:ext cx="2743200" cy="274320"/>
-          </a:xfrm>
-          <a:prstGeom prst="rect">
-            <a:avLst/>
-          </a:prstGeom>
-          <a:noFill/>
-        </p:spPr>
-        <p:txBody>
-          <a:bodyPr wrap="square">
-            <a:spAutoFit/>
-          </a:bodyPr>
-          <a:lstStyle/>
-          <a:p>
-            <a:pPr algn="l">
-              <a:defRPr sz="1100" b="0" i="0">
-                <a:solidFill>
-                  <a:srgbClr val="3A3A3C"/>
-                </a:solidFill>
-                <a:latin typeface="Calibri"/>
-              </a:defRPr>
-            </a:pPr>
-            <a:r>
-              <a:t>$4.5M</a:t>
-            </a:r>
-          </a:p>
-        </p:txBody>
-      </p:sp>
-      <p:sp>
-        <p:nvSpPr>
-          <p:cNvPr id="27" name="Rounded Rectangle 26"/>
+              <a:t>AXS and Hammerhead dealer support. One product owner, one integration engineer. Human approval on all outputs. Weekly quality reviews with defined rollback trigger.</a:t>
+            </a:r>
+          </a:p>
+        </p:txBody>
+      </p:sp>
+      <p:sp>
+        <p:nvSpPr>
+          <p:cNvPr id="9" name="Rounded Rectangle 8"/>
           <p:cNvSpPr/>
           <p:nvPr/>
         </p:nvSpPr>
         <p:spPr>
           <a:xfrm>
-            <a:off x="731520" y="3182112"/>
-            <a:ext cx="10515600" cy="347472"/>
+            <a:off x="731520" y="2788920"/>
+            <a:ext cx="10515600" cy="1188720"/>
           </a:xfrm>
           <a:prstGeom prst="roundRect">
             <a:avLst>
-              <a:gd name="adj" fmla="val 2000"/>
+              <a:gd name="adj" fmla="val 4000"/>
             </a:avLst>
           </a:prstGeom>
           <a:solidFill>
-            <a:srgbClr val="F0F0EE"/>
+            <a:srgbClr val="FFFFFF"/>
           </a:solidFill>
-          <a:ln>
-            <a:noFill/>
+          <a:ln w="12700">
+            <a:solidFill>
+              <a:srgbClr val="E0E0DE"/>
+            </a:solidFill>
           </a:ln>
         </p:spPr>
         <p:style>
@@ -21788,308 +21124,20 @@
       </p:sp>
       <p:sp>
         <p:nvSpPr>
-          <p:cNvPr id="28" name="TextBox 27"/>
-          <p:cNvSpPr txBox="1"/>
-          <p:nvPr/>
-        </p:nvSpPr>
-        <p:spPr>
-          <a:xfrm>
-            <a:off x="731520" y="3200400"/>
-            <a:ext cx="2743200" cy="274320"/>
-          </a:xfrm>
-          <a:prstGeom prst="rect">
-            <a:avLst/>
-          </a:prstGeom>
-          <a:noFill/>
-        </p:spPr>
-        <p:txBody>
-          <a:bodyPr wrap="square">
-            <a:spAutoFit/>
-          </a:bodyPr>
-          <a:lstStyle/>
-          <a:p>
-            <a:pPr algn="l">
-              <a:defRPr sz="1100" b="0" i="0">
-                <a:solidFill>
-                  <a:srgbClr val="3A3A3C"/>
-                </a:solidFill>
-                <a:latin typeface="Calibri"/>
-              </a:defRPr>
-            </a:pPr>
-            <a:r>
-              <a:t>Package size increase</a:t>
-            </a:r>
-          </a:p>
-        </p:txBody>
-      </p:sp>
-      <p:sp>
-        <p:nvSpPr>
-          <p:cNvPr id="29" name="TextBox 28"/>
-          <p:cNvSpPr txBox="1"/>
-          <p:nvPr/>
-        </p:nvSpPr>
-        <p:spPr>
-          <a:xfrm>
-            <a:off x="3474720" y="3200400"/>
-            <a:ext cx="2743200" cy="274320"/>
-          </a:xfrm>
-          <a:prstGeom prst="rect">
-            <a:avLst/>
-          </a:prstGeom>
-          <a:noFill/>
-        </p:spPr>
-        <p:txBody>
-          <a:bodyPr wrap="square">
-            <a:spAutoFit/>
-          </a:bodyPr>
-          <a:lstStyle/>
-          <a:p>
-            <a:pPr algn="l">
-              <a:defRPr sz="1100" b="0" i="0">
-                <a:solidFill>
-                  <a:srgbClr val="3A3A3C"/>
-                </a:solidFill>
-                <a:latin typeface="Calibri"/>
-              </a:defRPr>
-            </a:pPr>
-            <a:r>
-              <a:t>$2.0M</a:t>
-            </a:r>
-          </a:p>
-        </p:txBody>
-      </p:sp>
-      <p:sp>
-        <p:nvSpPr>
-          <p:cNvPr id="30" name="TextBox 29"/>
-          <p:cNvSpPr txBox="1"/>
-          <p:nvPr/>
-        </p:nvSpPr>
-        <p:spPr>
-          <a:xfrm>
-            <a:off x="6217920" y="3200400"/>
-            <a:ext cx="2743200" cy="274320"/>
-          </a:xfrm>
-          <a:prstGeom prst="rect">
-            <a:avLst/>
-          </a:prstGeom>
-          <a:noFill/>
-        </p:spPr>
-        <p:txBody>
-          <a:bodyPr wrap="square">
-            <a:spAutoFit/>
-          </a:bodyPr>
-          <a:lstStyle/>
-          <a:p>
-            <a:pPr algn="l">
-              <a:defRPr sz="1100" b="1" i="0">
-                <a:solidFill>
-                  <a:srgbClr val="1C1C1E"/>
-                </a:solidFill>
-                <a:latin typeface="Calibri"/>
-              </a:defRPr>
-            </a:pPr>
-            <a:r>
-              <a:t>$4.0M</a:t>
-            </a:r>
-          </a:p>
-        </p:txBody>
-      </p:sp>
-      <p:sp>
-        <p:nvSpPr>
-          <p:cNvPr id="31" name="TextBox 30"/>
-          <p:cNvSpPr txBox="1"/>
-          <p:nvPr/>
-        </p:nvSpPr>
-        <p:spPr>
-          <a:xfrm>
-            <a:off x="8961120" y="3200400"/>
-            <a:ext cx="2743200" cy="274320"/>
-          </a:xfrm>
-          <a:prstGeom prst="rect">
-            <a:avLst/>
-          </a:prstGeom>
-          <a:noFill/>
-        </p:spPr>
-        <p:txBody>
-          <a:bodyPr wrap="square">
-            <a:spAutoFit/>
-          </a:bodyPr>
-          <a:lstStyle/>
-          <a:p>
-            <a:pPr algn="l">
-              <a:defRPr sz="1100" b="0" i="0">
-                <a:solidFill>
-                  <a:srgbClr val="3A3A3C"/>
-                </a:solidFill>
-                <a:latin typeface="Calibri"/>
-              </a:defRPr>
-            </a:pPr>
-            <a:r>
-              <a:t>$8.0M</a:t>
-            </a:r>
-          </a:p>
-        </p:txBody>
-      </p:sp>
-      <p:sp>
-        <p:nvSpPr>
-          <p:cNvPr id="32" name="TextBox 31"/>
-          <p:cNvSpPr txBox="1"/>
-          <p:nvPr/>
-        </p:nvSpPr>
-        <p:spPr>
-          <a:xfrm>
-            <a:off x="731520" y="3566160"/>
-            <a:ext cx="2743200" cy="274320"/>
-          </a:xfrm>
-          <a:prstGeom prst="rect">
-            <a:avLst/>
-          </a:prstGeom>
-          <a:noFill/>
-        </p:spPr>
-        <p:txBody>
-          <a:bodyPr wrap="square">
-            <a:spAutoFit/>
-          </a:bodyPr>
-          <a:lstStyle/>
-          <a:p>
-            <a:pPr algn="l">
-              <a:defRPr sz="1100" b="0" i="0">
-                <a:solidFill>
-                  <a:srgbClr val="3A3A3C"/>
-                </a:solidFill>
-                <a:latin typeface="Calibri"/>
-              </a:defRPr>
-            </a:pPr>
-            <a:r>
-              <a:t>Proposal win-rate revenue</a:t>
-            </a:r>
-          </a:p>
-        </p:txBody>
-      </p:sp>
-      <p:sp>
-        <p:nvSpPr>
-          <p:cNvPr id="33" name="TextBox 32"/>
-          <p:cNvSpPr txBox="1"/>
-          <p:nvPr/>
-        </p:nvSpPr>
-        <p:spPr>
-          <a:xfrm>
-            <a:off x="3474720" y="3566160"/>
-            <a:ext cx="2743200" cy="274320"/>
-          </a:xfrm>
-          <a:prstGeom prst="rect">
-            <a:avLst/>
-          </a:prstGeom>
-          <a:noFill/>
-        </p:spPr>
-        <p:txBody>
-          <a:bodyPr wrap="square">
-            <a:spAutoFit/>
-          </a:bodyPr>
-          <a:lstStyle/>
-          <a:p>
-            <a:pPr algn="l">
-              <a:defRPr sz="1100" b="0" i="0">
-                <a:solidFill>
-                  <a:srgbClr val="3A3A3C"/>
-                </a:solidFill>
-                <a:latin typeface="Calibri"/>
-              </a:defRPr>
-            </a:pPr>
-            <a:r>
-              <a:t>$1.3M</a:t>
-            </a:r>
-          </a:p>
-        </p:txBody>
-      </p:sp>
-      <p:sp>
-        <p:nvSpPr>
-          <p:cNvPr id="34" name="TextBox 33"/>
-          <p:cNvSpPr txBox="1"/>
-          <p:nvPr/>
-        </p:nvSpPr>
-        <p:spPr>
-          <a:xfrm>
-            <a:off x="6217920" y="3566160"/>
-            <a:ext cx="2743200" cy="274320"/>
-          </a:xfrm>
-          <a:prstGeom prst="rect">
-            <a:avLst/>
-          </a:prstGeom>
-          <a:noFill/>
-        </p:spPr>
-        <p:txBody>
-          <a:bodyPr wrap="square">
-            <a:spAutoFit/>
-          </a:bodyPr>
-          <a:lstStyle/>
-          <a:p>
-            <a:pPr algn="l">
-              <a:defRPr sz="1100" b="1" i="0">
-                <a:solidFill>
-                  <a:srgbClr val="1C1C1E"/>
-                </a:solidFill>
-                <a:latin typeface="Calibri"/>
-              </a:defRPr>
-            </a:pPr>
-            <a:r>
-              <a:t>$2.5M</a:t>
-            </a:r>
-          </a:p>
-        </p:txBody>
-      </p:sp>
-      <p:sp>
-        <p:nvSpPr>
-          <p:cNvPr id="35" name="TextBox 34"/>
-          <p:cNvSpPr txBox="1"/>
-          <p:nvPr/>
-        </p:nvSpPr>
-        <p:spPr>
-          <a:xfrm>
-            <a:off x="8961120" y="3566160"/>
-            <a:ext cx="2743200" cy="274320"/>
-          </a:xfrm>
-          <a:prstGeom prst="rect">
-            <a:avLst/>
-          </a:prstGeom>
-          <a:noFill/>
-        </p:spPr>
-        <p:txBody>
-          <a:bodyPr wrap="square">
-            <a:spAutoFit/>
-          </a:bodyPr>
-          <a:lstStyle/>
-          <a:p>
-            <a:pPr algn="l">
-              <a:defRPr sz="1100" b="0" i="0">
-                <a:solidFill>
-                  <a:srgbClr val="3A3A3C"/>
-                </a:solidFill>
-                <a:latin typeface="Calibri"/>
-              </a:defRPr>
-            </a:pPr>
-            <a:r>
-              <a:t>$3.8M</a:t>
-            </a:r>
-          </a:p>
-        </p:txBody>
-      </p:sp>
-      <p:sp>
-        <p:nvSpPr>
-          <p:cNvPr id="36" name="Rectangle 35"/>
+          <p:cNvPr id="10" name="Oval 9"/>
           <p:cNvSpPr/>
           <p:nvPr/>
         </p:nvSpPr>
         <p:spPr>
           <a:xfrm>
-            <a:off x="731520" y="3931920"/>
-            <a:ext cx="10515600" cy="12700"/>
-          </a:xfrm>
-          <a:prstGeom prst="rect">
+            <a:off x="1097280" y="3017520"/>
+            <a:ext cx="457200" cy="457200"/>
+          </a:xfrm>
+          <a:prstGeom prst="ellipse">
             <a:avLst/>
           </a:prstGeom>
           <a:solidFill>
-            <a:srgbClr val="E0E0DE"/>
+            <a:srgbClr val="1C1C1E"/>
           </a:solidFill>
           <a:ln>
             <a:noFill/>
@@ -22113,34 +21161,214 @@
           <a:bodyPr rtlCol="0" anchor="ctr"/>
           <a:lstStyle/>
           <a:p>
+            <a:pPr algn="ctr">
+              <a:defRPr sz="1800" b="1">
+                <a:solidFill>
+                  <a:srgbClr val="F5F5F3"/>
+                </a:solidFill>
+              </a:defRPr>
+            </a:pPr>
+            <a:r>
+              <a:t>2</a:t>
+            </a:r>
+          </a:p>
+        </p:txBody>
+      </p:sp>
+      <p:sp>
+        <p:nvSpPr>
+          <p:cNvPr id="11" name="TextBox 10"/>
+          <p:cNvSpPr txBox="1"/>
+          <p:nvPr/>
+        </p:nvSpPr>
+        <p:spPr>
+          <a:xfrm>
+            <a:off x="1828800" y="2880360"/>
+            <a:ext cx="8961120" cy="320040"/>
+          </a:xfrm>
+          <a:prstGeom prst="rect">
+            <a:avLst/>
+          </a:prstGeom>
+          <a:noFill/>
+        </p:spPr>
+        <p:txBody>
+          <a:bodyPr wrap="square">
+            <a:spAutoFit/>
+          </a:bodyPr>
+          <a:lstStyle/>
+          <a:p>
+            <a:pPr algn="l">
+              <a:defRPr sz="1800" b="1" i="0">
+                <a:solidFill>
+                  <a:srgbClr val="1C1C1E"/>
+                </a:solidFill>
+                <a:latin typeface="Calibri"/>
+              </a:defRPr>
+            </a:pPr>
+            <a:r>
+              <a:t>Begin Data Infrastructure Planning</a:t>
+            </a:r>
+          </a:p>
+        </p:txBody>
+      </p:sp>
+      <p:sp>
+        <p:nvSpPr>
+          <p:cNvPr id="12" name="TextBox 11"/>
+          <p:cNvSpPr txBox="1"/>
+          <p:nvPr/>
+        </p:nvSpPr>
+        <p:spPr>
+          <a:xfrm>
+            <a:off x="1828800" y="3246120"/>
+            <a:ext cx="8961120" cy="548640"/>
+          </a:xfrm>
+          <a:prstGeom prst="rect">
+            <a:avLst/>
+          </a:prstGeom>
+          <a:noFill/>
+        </p:spPr>
+        <p:txBody>
+          <a:bodyPr wrap="square">
+            <a:spAutoFit/>
+          </a:bodyPr>
+          <a:lstStyle/>
+          <a:p>
+            <a:pPr algn="l">
+              <a:defRPr sz="1200" b="0" i="0">
+                <a:solidFill>
+                  <a:srgbClr val="3A3A3C"/>
+                </a:solidFill>
+                <a:latin typeface="Calibri"/>
+              </a:defRPr>
+            </a:pPr>
+            <a:r>
+              <a:t>Unified data layer connecting Shopify, support systems, and telemetry. Foundation for Phase 2 forecasting and Phase 4 AXS Intelligence platform.</a:t>
+            </a:r>
+          </a:p>
+        </p:txBody>
+      </p:sp>
+      <p:sp>
+        <p:nvSpPr>
+          <p:cNvPr id="13" name="Rounded Rectangle 12"/>
+          <p:cNvSpPr/>
+          <p:nvPr/>
+        </p:nvSpPr>
+        <p:spPr>
+          <a:xfrm>
+            <a:off x="731520" y="4206240"/>
+            <a:ext cx="10515600" cy="1188720"/>
+          </a:xfrm>
+          <a:prstGeom prst="roundRect">
+            <a:avLst>
+              <a:gd name="adj" fmla="val 4000"/>
+            </a:avLst>
+          </a:prstGeom>
+          <a:solidFill>
+            <a:srgbClr val="FFFFFF"/>
+          </a:solidFill>
+          <a:ln w="12700">
+            <a:solidFill>
+              <a:srgbClr val="E0E0DE"/>
+            </a:solidFill>
+          </a:ln>
+        </p:spPr>
+        <p:style>
+          <a:lnRef idx="1">
+            <a:schemeClr val="accent1"/>
+          </a:lnRef>
+          <a:fillRef idx="3">
+            <a:schemeClr val="accent1"/>
+          </a:fillRef>
+          <a:effectRef idx="2">
+            <a:schemeClr val="accent1"/>
+          </a:effectRef>
+          <a:fontRef idx="minor">
+            <a:schemeClr val="lt1"/>
+          </a:fontRef>
+        </p:style>
+        <p:txBody>
+          <a:bodyPr rtlCol="0" anchor="ctr"/>
+          <a:lstStyle/>
+          <a:p>
             <a:pPr algn="ctr"/>
           </a:p>
         </p:txBody>
       </p:sp>
       <p:sp>
         <p:nvSpPr>
-          <p:cNvPr id="37" name="TextBox 36"/>
-          <p:cNvSpPr txBox="1"/>
-          <p:nvPr/>
-        </p:nvSpPr>
-        <p:spPr>
-          <a:xfrm>
-            <a:off x="731520" y="4069080"/>
-            <a:ext cx="2743200" cy="274320"/>
-          </a:xfrm>
-          <a:prstGeom prst="rect">
-            <a:avLst/>
-          </a:prstGeom>
-          <a:noFill/>
-        </p:spPr>
-        <p:txBody>
-          <a:bodyPr wrap="square">
-            <a:spAutoFit/>
-          </a:bodyPr>
-          <a:lstStyle/>
-          <a:p>
-            <a:pPr algn="l">
-              <a:defRPr sz="1100" b="0" i="0">
+          <p:cNvPr id="14" name="Oval 13"/>
+          <p:cNvSpPr/>
+          <p:nvPr/>
+        </p:nvSpPr>
+        <p:spPr>
+          <a:xfrm>
+            <a:off x="1097280" y="4434840"/>
+            <a:ext cx="457200" cy="457200"/>
+          </a:xfrm>
+          <a:prstGeom prst="ellipse">
+            <a:avLst/>
+          </a:prstGeom>
+          <a:solidFill>
+            <a:srgbClr val="1C1C1E"/>
+          </a:solidFill>
+          <a:ln>
+            <a:noFill/>
+          </a:ln>
+        </p:spPr>
+        <p:style>
+          <a:lnRef idx="1">
+            <a:schemeClr val="accent1"/>
+          </a:lnRef>
+          <a:fillRef idx="3">
+            <a:schemeClr val="accent1"/>
+          </a:fillRef>
+          <a:effectRef idx="2">
+            <a:schemeClr val="accent1"/>
+          </a:effectRef>
+          <a:fontRef idx="minor">
+            <a:schemeClr val="lt1"/>
+          </a:fontRef>
+        </p:style>
+        <p:txBody>
+          <a:bodyPr rtlCol="0" anchor="ctr"/>
+          <a:lstStyle/>
+          <a:p>
+            <a:pPr algn="ctr">
+              <a:defRPr sz="1800" b="1">
+                <a:solidFill>
+                  <a:srgbClr val="F5F5F3"/>
+                </a:solidFill>
+              </a:defRPr>
+            </a:pPr>
+            <a:r>
+              <a:t>3</a:t>
+            </a:r>
+          </a:p>
+        </p:txBody>
+      </p:sp>
+      <p:sp>
+        <p:nvSpPr>
+          <p:cNvPr id="15" name="TextBox 14"/>
+          <p:cNvSpPr txBox="1"/>
+          <p:nvPr/>
+        </p:nvSpPr>
+        <p:spPr>
+          <a:xfrm>
+            <a:off x="1828800" y="4297680"/>
+            <a:ext cx="8961120" cy="320040"/>
+          </a:xfrm>
+          <a:prstGeom prst="rect">
+            <a:avLst/>
+          </a:prstGeom>
+          <a:noFill/>
+        </p:spPr>
+        <p:txBody>
+          <a:bodyPr wrap="square">
+            <a:spAutoFit/>
+          </a:bodyPr>
+          <a:lstStyle/>
+          <a:p>
+            <a:pPr algn="l">
+              <a:defRPr sz="1800" b="1" i="0">
                 <a:solidFill>
                   <a:srgbClr val="1C1C1E"/>
                 </a:solidFill>
@@ -22148,35 +21376,35 @@
               </a:defRPr>
             </a:pPr>
             <a:r>
-              <a:t>Gross value</a:t>
-            </a:r>
-          </a:p>
-        </p:txBody>
-      </p:sp>
-      <p:sp>
-        <p:nvSpPr>
-          <p:cNvPr id="38" name="TextBox 37"/>
-          <p:cNvSpPr txBox="1"/>
-          <p:nvPr/>
-        </p:nvSpPr>
-        <p:spPr>
-          <a:xfrm>
-            <a:off x="3474720" y="4069080"/>
-            <a:ext cx="2743200" cy="274320"/>
-          </a:xfrm>
-          <a:prstGeom prst="rect">
-            <a:avLst/>
-          </a:prstGeom>
-          <a:noFill/>
-        </p:spPr>
-        <p:txBody>
-          <a:bodyPr wrap="square">
-            <a:spAutoFit/>
-          </a:bodyPr>
-          <a:lstStyle/>
-          <a:p>
-            <a:pPr algn="l">
-              <a:defRPr sz="1100" b="0" i="0">
+              <a:t>Hold Sequencing Discipline</a:t>
+            </a:r>
+          </a:p>
+        </p:txBody>
+      </p:sp>
+      <p:sp>
+        <p:nvSpPr>
+          <p:cNvPr id="16" name="TextBox 15"/>
+          <p:cNvSpPr txBox="1"/>
+          <p:nvPr/>
+        </p:nvSpPr>
+        <p:spPr>
+          <a:xfrm>
+            <a:off x="1828800" y="4663440"/>
+            <a:ext cx="8961120" cy="548640"/>
+          </a:xfrm>
+          <a:prstGeom prst="rect">
+            <a:avLst/>
+          </a:prstGeom>
+          <a:noFill/>
+        </p:spPr>
+        <p:txBody>
+          <a:bodyPr wrap="square">
+            <a:spAutoFit/>
+          </a:bodyPr>
+          <a:lstStyle/>
+          <a:p>
+            <a:pPr algn="l">
+              <a:defRPr sz="1200" b="0" i="0">
                 <a:solidFill>
                   <a:srgbClr val="3A3A3C"/>
                 </a:solidFill>
@@ -22184,35 +21412,128 @@
               </a:defRPr>
             </a:pPr>
             <a:r>
-              <a:t>$6.1M</a:t>
-            </a:r>
-          </a:p>
-        </p:txBody>
-      </p:sp>
-      <p:sp>
-        <p:nvSpPr>
-          <p:cNvPr id="39" name="TextBox 38"/>
-          <p:cNvSpPr txBox="1"/>
-          <p:nvPr/>
-        </p:nvSpPr>
-        <p:spPr>
-          <a:xfrm>
-            <a:off x="6217920" y="4069080"/>
-            <a:ext cx="2743200" cy="274320"/>
-          </a:xfrm>
-          <a:prstGeom prst="rect">
-            <a:avLst/>
-          </a:prstGeom>
-          <a:noFill/>
-        </p:spPr>
-        <p:txBody>
-          <a:bodyPr wrap="square">
-            <a:spAutoFit/>
-          </a:bodyPr>
-          <a:lstStyle/>
-          <a:p>
-            <a:pPr algn="l">
-              <a:defRPr sz="1100" b="1" i="0">
+              <a:t>Bounded, well-defined problems first. Broader transformation after measured proof. The 90-day pilot produces data to justify or redirect every subsequent investment.</a:t>
+            </a:r>
+          </a:p>
+        </p:txBody>
+      </p:sp>
+      <p:sp>
+        <p:nvSpPr>
+          <p:cNvPr id="17" name="Rounded Rectangle 16"/>
+          <p:cNvSpPr/>
+          <p:nvPr/>
+        </p:nvSpPr>
+        <p:spPr>
+          <a:xfrm>
+            <a:off x="731520" y="5715000"/>
+            <a:ext cx="10515600" cy="548640"/>
+          </a:xfrm>
+          <a:prstGeom prst="roundRect">
+            <a:avLst>
+              <a:gd name="adj" fmla="val 10000"/>
+            </a:avLst>
+          </a:prstGeom>
+          <a:solidFill>
+            <a:srgbClr val="FFFFFF"/>
+          </a:solidFill>
+          <a:ln w="12700">
+            <a:solidFill>
+              <a:srgbClr val="E0E0DE"/>
+            </a:solidFill>
+          </a:ln>
+        </p:spPr>
+        <p:style>
+          <a:lnRef idx="1">
+            <a:schemeClr val="accent1"/>
+          </a:lnRef>
+          <a:fillRef idx="3">
+            <a:schemeClr val="accent1"/>
+          </a:fillRef>
+          <a:effectRef idx="2">
+            <a:schemeClr val="accent1"/>
+          </a:effectRef>
+          <a:fontRef idx="minor">
+            <a:schemeClr val="lt1"/>
+          </a:fontRef>
+        </p:style>
+        <p:txBody>
+          <a:bodyPr rtlCol="0" anchor="ctr"/>
+          <a:lstStyle/>
+          <a:p>
+            <a:pPr algn="ctr"/>
+          </a:p>
+        </p:txBody>
+      </p:sp>
+      <p:sp>
+        <p:nvSpPr>
+          <p:cNvPr id="18" name="Rectangle 17"/>
+          <p:cNvSpPr/>
+          <p:nvPr/>
+        </p:nvSpPr>
+        <p:spPr>
+          <a:xfrm>
+            <a:off x="731520" y="5715000"/>
+            <a:ext cx="50800" cy="548640"/>
+          </a:xfrm>
+          <a:prstGeom prst="rect">
+            <a:avLst/>
+          </a:prstGeom>
+          <a:solidFill>
+            <a:srgbClr val="E51937"/>
+          </a:solidFill>
+          <a:ln>
+            <a:noFill/>
+          </a:ln>
+        </p:spPr>
+        <p:style>
+          <a:lnRef idx="1">
+            <a:schemeClr val="accent1"/>
+          </a:lnRef>
+          <a:fillRef idx="3">
+            <a:schemeClr val="accent1"/>
+          </a:fillRef>
+          <a:effectRef idx="2">
+            <a:schemeClr val="accent1"/>
+          </a:effectRef>
+          <a:fontRef idx="minor">
+            <a:schemeClr val="lt1"/>
+          </a:fontRef>
+        </p:style>
+        <p:txBody>
+          <a:bodyPr rtlCol="0" anchor="ctr"/>
+          <a:lstStyle/>
+          <a:p>
+            <a:pPr algn="ctr"/>
+          </a:p>
+        </p:txBody>
+      </p:sp>
+      <p:sp>
+        <p:nvSpPr>
+          <p:cNvPr id="19" name="TextBox 18"/>
+          <p:cNvSpPr txBox="1"/>
+          <p:nvPr/>
+        </p:nvSpPr>
+        <p:spPr>
+          <a:xfrm>
+            <a:off x="1188720" y="5742432"/>
+            <a:ext cx="9601200" cy="502920"/>
+          </a:xfrm>
+          <a:prstGeom prst="rect">
+            <a:avLst/>
+          </a:prstGeom>
+          <a:noFill/>
+        </p:spPr>
+        <p:txBody>
+          <a:bodyPr wrap="square">
+            <a:spAutoFit/>
+          </a:bodyPr>
+          <a:lstStyle/>
+          <a:p>
+            <a:pPr>
+              <a:spcAft>
+                <a:spcPts val="260"/>
+              </a:spcAft>
+              <a:defRPr sz="1300" b="1">
                 <a:solidFill>
                   <a:srgbClr val="1C1C1E"/>
                 </a:solidFill>
@@ -22220,633 +21541,37 @@
               </a:defRPr>
             </a:pPr>
             <a:r>
-              <a:t>$12.9M</a:t>
-            </a:r>
-          </a:p>
-        </p:txBody>
-      </p:sp>
-      <p:sp>
-        <p:nvSpPr>
-          <p:cNvPr id="40" name="TextBox 39"/>
-          <p:cNvSpPr txBox="1"/>
-          <p:nvPr/>
-        </p:nvSpPr>
-        <p:spPr>
-          <a:xfrm>
-            <a:off x="8961120" y="4069080"/>
-            <a:ext cx="2743200" cy="274320"/>
-          </a:xfrm>
-          <a:prstGeom prst="rect">
-            <a:avLst/>
-          </a:prstGeom>
-          <a:noFill/>
-        </p:spPr>
-        <p:txBody>
-          <a:bodyPr wrap="square">
-            <a:spAutoFit/>
-          </a:bodyPr>
-          <a:lstStyle/>
-          <a:p>
-            <a:pPr algn="l">
-              <a:defRPr sz="1100" b="0" i="0">
-                <a:solidFill>
-                  <a:srgbClr val="3A3A3C"/>
-                </a:solidFill>
-                <a:latin typeface="Calibri"/>
-              </a:defRPr>
-            </a:pPr>
-            <a:r>
-              <a:t>$26.0M</a:t>
-            </a:r>
-          </a:p>
-        </p:txBody>
-      </p:sp>
-      <p:sp>
-        <p:nvSpPr>
-          <p:cNvPr id="41" name="TextBox 40"/>
-          <p:cNvSpPr txBox="1"/>
-          <p:nvPr/>
-        </p:nvSpPr>
-        <p:spPr>
-          <a:xfrm>
-            <a:off x="731520" y="4434840"/>
-            <a:ext cx="2743200" cy="274320"/>
-          </a:xfrm>
-          <a:prstGeom prst="rect">
-            <a:avLst/>
-          </a:prstGeom>
-          <a:noFill/>
-        </p:spPr>
-        <p:txBody>
-          <a:bodyPr wrap="square">
-            <a:spAutoFit/>
-          </a:bodyPr>
-          <a:lstStyle/>
-          <a:p>
-            <a:pPr algn="l">
-              <a:defRPr sz="1100" b="0" i="0">
-                <a:solidFill>
-                  <a:srgbClr val="1C1C1E"/>
-                </a:solidFill>
-                <a:latin typeface="Calibri"/>
-              </a:defRPr>
-            </a:pPr>
-            <a:r>
-              <a:t>Setup costs</a:t>
-            </a:r>
-          </a:p>
-        </p:txBody>
-      </p:sp>
-      <p:sp>
-        <p:nvSpPr>
-          <p:cNvPr id="42" name="TextBox 41"/>
-          <p:cNvSpPr txBox="1"/>
-          <p:nvPr/>
-        </p:nvSpPr>
-        <p:spPr>
-          <a:xfrm>
-            <a:off x="3474720" y="4434840"/>
-            <a:ext cx="2743200" cy="274320"/>
-          </a:xfrm>
-          <a:prstGeom prst="rect">
-            <a:avLst/>
-          </a:prstGeom>
-          <a:noFill/>
-        </p:spPr>
-        <p:txBody>
-          <a:bodyPr wrap="square">
-            <a:spAutoFit/>
-          </a:bodyPr>
-          <a:lstStyle/>
-          <a:p>
-            <a:pPr algn="l">
-              <a:defRPr sz="1100" b="0" i="0">
-                <a:solidFill>
-                  <a:srgbClr val="3A3A3C"/>
-                </a:solidFill>
-                <a:latin typeface="Calibri"/>
-              </a:defRPr>
-            </a:pPr>
-            <a:r>
-              <a:t>($1.2M)</a:t>
-            </a:r>
-          </a:p>
-        </p:txBody>
-      </p:sp>
-      <p:sp>
-        <p:nvSpPr>
-          <p:cNvPr id="43" name="TextBox 42"/>
-          <p:cNvSpPr txBox="1"/>
-          <p:nvPr/>
-        </p:nvSpPr>
-        <p:spPr>
-          <a:xfrm>
-            <a:off x="6217920" y="4434840"/>
-            <a:ext cx="2743200" cy="274320"/>
-          </a:xfrm>
-          <a:prstGeom prst="rect">
-            <a:avLst/>
-          </a:prstGeom>
-          <a:noFill/>
-        </p:spPr>
-        <p:txBody>
-          <a:bodyPr wrap="square">
-            <a:spAutoFit/>
-          </a:bodyPr>
-          <a:lstStyle/>
-          <a:p>
-            <a:pPr algn="l">
-              <a:defRPr sz="1100" b="1" i="0">
-                <a:solidFill>
-                  <a:srgbClr val="1C1C1E"/>
-                </a:solidFill>
-                <a:latin typeface="Calibri"/>
-              </a:defRPr>
-            </a:pPr>
-            <a:r>
-              <a:t>($2.0M)</a:t>
-            </a:r>
-          </a:p>
-        </p:txBody>
-      </p:sp>
-      <p:sp>
-        <p:nvSpPr>
-          <p:cNvPr id="44" name="TextBox 43"/>
-          <p:cNvSpPr txBox="1"/>
-          <p:nvPr/>
-        </p:nvSpPr>
-        <p:spPr>
-          <a:xfrm>
-            <a:off x="8961120" y="4434840"/>
-            <a:ext cx="2743200" cy="274320"/>
-          </a:xfrm>
-          <a:prstGeom prst="rect">
-            <a:avLst/>
-          </a:prstGeom>
-          <a:noFill/>
-        </p:spPr>
-        <p:txBody>
-          <a:bodyPr wrap="square">
-            <a:spAutoFit/>
-          </a:bodyPr>
-          <a:lstStyle/>
-          <a:p>
-            <a:pPr algn="l">
-              <a:defRPr sz="1100" b="0" i="0">
-                <a:solidFill>
-                  <a:srgbClr val="3A3A3C"/>
-                </a:solidFill>
-                <a:latin typeface="Calibri"/>
-              </a:defRPr>
-            </a:pPr>
-            <a:r>
-              <a:t>($2.5M)</a:t>
-            </a:r>
-          </a:p>
-        </p:txBody>
-      </p:sp>
-      <p:sp>
-        <p:nvSpPr>
-          <p:cNvPr id="45" name="TextBox 44"/>
-          <p:cNvSpPr txBox="1"/>
-          <p:nvPr/>
-        </p:nvSpPr>
-        <p:spPr>
-          <a:xfrm>
-            <a:off x="731520" y="4800600"/>
-            <a:ext cx="2743200" cy="274320"/>
-          </a:xfrm>
-          <a:prstGeom prst="rect">
-            <a:avLst/>
-          </a:prstGeom>
-          <a:noFill/>
-        </p:spPr>
-        <p:txBody>
-          <a:bodyPr wrap="square">
-            <a:spAutoFit/>
-          </a:bodyPr>
-          <a:lstStyle/>
-          <a:p>
-            <a:pPr algn="l">
-              <a:defRPr sz="1100" b="0" i="0">
-                <a:solidFill>
-                  <a:srgbClr val="1C1C1E"/>
-                </a:solidFill>
-                <a:latin typeface="Calibri"/>
-              </a:defRPr>
-            </a:pPr>
-            <a:r>
-              <a:t>Operating costs</a:t>
-            </a:r>
-          </a:p>
-        </p:txBody>
-      </p:sp>
-      <p:sp>
-        <p:nvSpPr>
-          <p:cNvPr id="46" name="TextBox 45"/>
-          <p:cNvSpPr txBox="1"/>
-          <p:nvPr/>
-        </p:nvSpPr>
-        <p:spPr>
-          <a:xfrm>
-            <a:off x="3474720" y="4800600"/>
-            <a:ext cx="2743200" cy="274320"/>
-          </a:xfrm>
-          <a:prstGeom prst="rect">
-            <a:avLst/>
-          </a:prstGeom>
-          <a:noFill/>
-        </p:spPr>
-        <p:txBody>
-          <a:bodyPr wrap="square">
-            <a:spAutoFit/>
-          </a:bodyPr>
-          <a:lstStyle/>
-          <a:p>
-            <a:pPr algn="l">
-              <a:defRPr sz="1100" b="0" i="0">
-                <a:solidFill>
-                  <a:srgbClr val="3A3A3C"/>
-                </a:solidFill>
-                <a:latin typeface="Calibri"/>
-              </a:defRPr>
-            </a:pPr>
-            <a:r>
-              <a:t>($0.4M)</a:t>
-            </a:r>
-          </a:p>
-        </p:txBody>
-      </p:sp>
-      <p:sp>
-        <p:nvSpPr>
-          <p:cNvPr id="47" name="TextBox 46"/>
-          <p:cNvSpPr txBox="1"/>
-          <p:nvPr/>
-        </p:nvSpPr>
-        <p:spPr>
-          <a:xfrm>
-            <a:off x="6217920" y="4800600"/>
-            <a:ext cx="2743200" cy="274320"/>
-          </a:xfrm>
-          <a:prstGeom prst="rect">
-            <a:avLst/>
-          </a:prstGeom>
-          <a:noFill/>
-        </p:spPr>
-        <p:txBody>
-          <a:bodyPr wrap="square">
-            <a:spAutoFit/>
-          </a:bodyPr>
-          <a:lstStyle/>
-          <a:p>
-            <a:pPr algn="l">
-              <a:defRPr sz="1100" b="1" i="0">
-                <a:solidFill>
-                  <a:srgbClr val="1C1C1E"/>
-                </a:solidFill>
-                <a:latin typeface="Calibri"/>
-              </a:defRPr>
-            </a:pPr>
-            <a:r>
-              <a:t>($0.7M)</a:t>
-            </a:r>
-          </a:p>
-        </p:txBody>
-      </p:sp>
-      <p:sp>
-        <p:nvSpPr>
-          <p:cNvPr id="48" name="TextBox 47"/>
-          <p:cNvSpPr txBox="1"/>
-          <p:nvPr/>
-        </p:nvSpPr>
-        <p:spPr>
-          <a:xfrm>
-            <a:off x="8961120" y="4800600"/>
-            <a:ext cx="2743200" cy="274320"/>
-          </a:xfrm>
-          <a:prstGeom prst="rect">
-            <a:avLst/>
-          </a:prstGeom>
-          <a:noFill/>
-        </p:spPr>
-        <p:txBody>
-          <a:bodyPr wrap="square">
-            <a:spAutoFit/>
-          </a:bodyPr>
-          <a:lstStyle/>
-          <a:p>
-            <a:pPr algn="l">
-              <a:defRPr sz="1100" b="0" i="0">
-                <a:solidFill>
-                  <a:srgbClr val="3A3A3C"/>
-                </a:solidFill>
-                <a:latin typeface="Calibri"/>
-              </a:defRPr>
-            </a:pPr>
-            <a:r>
-              <a:t>($1.0M)</a:t>
-            </a:r>
-          </a:p>
-        </p:txBody>
-      </p:sp>
-      <p:sp>
-        <p:nvSpPr>
-          <p:cNvPr id="49" name="TextBox 48"/>
-          <p:cNvSpPr txBox="1"/>
-          <p:nvPr/>
-        </p:nvSpPr>
-        <p:spPr>
-          <a:xfrm>
-            <a:off x="731520" y="5166360"/>
-            <a:ext cx="2743200" cy="274320"/>
-          </a:xfrm>
-          <a:prstGeom prst="rect">
-            <a:avLst/>
-          </a:prstGeom>
-          <a:noFill/>
-        </p:spPr>
-        <p:txBody>
-          <a:bodyPr wrap="square">
-            <a:spAutoFit/>
-          </a:bodyPr>
-          <a:lstStyle/>
-          <a:p>
-            <a:pPr algn="l">
-              <a:defRPr sz="1100" b="1" i="0">
-                <a:solidFill>
-                  <a:srgbClr val="1C1C1E"/>
-                </a:solidFill>
-                <a:latin typeface="Calibri"/>
-              </a:defRPr>
-            </a:pPr>
-            <a:r>
-              <a:t>Net Year-1 value</a:t>
-            </a:r>
-          </a:p>
-        </p:txBody>
-      </p:sp>
-      <p:sp>
-        <p:nvSpPr>
-          <p:cNvPr id="50" name="TextBox 49"/>
-          <p:cNvSpPr txBox="1"/>
-          <p:nvPr/>
-        </p:nvSpPr>
-        <p:spPr>
-          <a:xfrm>
-            <a:off x="3474720" y="5166360"/>
-            <a:ext cx="2743200" cy="274320"/>
-          </a:xfrm>
-          <a:prstGeom prst="rect">
-            <a:avLst/>
-          </a:prstGeom>
-          <a:noFill/>
-        </p:spPr>
-        <p:txBody>
-          <a:bodyPr wrap="square">
-            <a:spAutoFit/>
-          </a:bodyPr>
-          <a:lstStyle/>
-          <a:p>
-            <a:pPr algn="l">
-              <a:defRPr sz="1100" b="1" i="0">
-                <a:solidFill>
-                  <a:srgbClr val="1C1C1E"/>
-                </a:solidFill>
-                <a:latin typeface="Calibri"/>
-              </a:defRPr>
-            </a:pPr>
-            <a:r>
-              <a:t>$4.5M</a:t>
-            </a:r>
-          </a:p>
-        </p:txBody>
-      </p:sp>
-      <p:sp>
-        <p:nvSpPr>
-          <p:cNvPr id="51" name="TextBox 50"/>
-          <p:cNvSpPr txBox="1"/>
-          <p:nvPr/>
-        </p:nvSpPr>
-        <p:spPr>
-          <a:xfrm>
-            <a:off x="6217920" y="5166360"/>
-            <a:ext cx="2743200" cy="274320"/>
-          </a:xfrm>
-          <a:prstGeom prst="rect">
-            <a:avLst/>
-          </a:prstGeom>
-          <a:noFill/>
-        </p:spPr>
-        <p:txBody>
-          <a:bodyPr wrap="square">
-            <a:spAutoFit/>
-          </a:bodyPr>
-          <a:lstStyle/>
-          <a:p>
-            <a:pPr algn="l">
-              <a:defRPr sz="1100" b="1" i="0">
-                <a:solidFill>
-                  <a:srgbClr val="1C1C1E"/>
-                </a:solidFill>
-                <a:latin typeface="Calibri"/>
-              </a:defRPr>
-            </a:pPr>
-            <a:r>
-              <a:t>$10.2M</a:t>
-            </a:r>
-          </a:p>
-        </p:txBody>
-      </p:sp>
-      <p:sp>
-        <p:nvSpPr>
-          <p:cNvPr id="52" name="TextBox 51"/>
-          <p:cNvSpPr txBox="1"/>
-          <p:nvPr/>
-        </p:nvSpPr>
-        <p:spPr>
-          <a:xfrm>
-            <a:off x="8961120" y="5166360"/>
-            <a:ext cx="2743200" cy="274320"/>
-          </a:xfrm>
-          <a:prstGeom prst="rect">
-            <a:avLst/>
-          </a:prstGeom>
-          <a:noFill/>
-        </p:spPr>
-        <p:txBody>
-          <a:bodyPr wrap="square">
-            <a:spAutoFit/>
-          </a:bodyPr>
-          <a:lstStyle/>
-          <a:p>
-            <a:pPr algn="l">
-              <a:defRPr sz="1100" b="1" i="0">
-                <a:solidFill>
-                  <a:srgbClr val="1C1C1E"/>
-                </a:solidFill>
-                <a:latin typeface="Calibri"/>
-              </a:defRPr>
-            </a:pPr>
-            <a:r>
-              <a:t>$22.5M</a:t>
-            </a:r>
-          </a:p>
-        </p:txBody>
-      </p:sp>
-      <p:sp>
-        <p:nvSpPr>
-          <p:cNvPr id="53" name="TextBox 52"/>
-          <p:cNvSpPr txBox="1"/>
-          <p:nvPr/>
-        </p:nvSpPr>
-        <p:spPr>
-          <a:xfrm>
-            <a:off x="731520" y="5532120"/>
-            <a:ext cx="2743200" cy="274320"/>
-          </a:xfrm>
-          <a:prstGeom prst="rect">
-            <a:avLst/>
-          </a:prstGeom>
-          <a:noFill/>
-        </p:spPr>
-        <p:txBody>
-          <a:bodyPr wrap="square">
-            <a:spAutoFit/>
-          </a:bodyPr>
-          <a:lstStyle/>
-          <a:p>
-            <a:pPr algn="l">
-              <a:defRPr sz="1100" b="1" i="0">
-                <a:solidFill>
-                  <a:srgbClr val="1C1C1E"/>
-                </a:solidFill>
-                <a:latin typeface="Calibri"/>
-              </a:defRPr>
-            </a:pPr>
-            <a:r>
-              <a:t>Return on spend</a:t>
-            </a:r>
-          </a:p>
-        </p:txBody>
-      </p:sp>
-      <p:sp>
-        <p:nvSpPr>
-          <p:cNvPr id="54" name="TextBox 53"/>
-          <p:cNvSpPr txBox="1"/>
-          <p:nvPr/>
-        </p:nvSpPr>
-        <p:spPr>
-          <a:xfrm>
-            <a:off x="3474720" y="5532120"/>
-            <a:ext cx="2743200" cy="274320"/>
-          </a:xfrm>
-          <a:prstGeom prst="rect">
-            <a:avLst/>
-          </a:prstGeom>
-          <a:noFill/>
-        </p:spPr>
-        <p:txBody>
-          <a:bodyPr wrap="square">
-            <a:spAutoFit/>
-          </a:bodyPr>
-          <a:lstStyle/>
-          <a:p>
-            <a:pPr algn="l">
-              <a:defRPr sz="1100" b="1" i="0">
-                <a:solidFill>
-                  <a:srgbClr val="1C1C1E"/>
-                </a:solidFill>
-                <a:latin typeface="Calibri"/>
-              </a:defRPr>
-            </a:pPr>
-            <a:r>
-              <a:t>2.8x</a:t>
-            </a:r>
-          </a:p>
-        </p:txBody>
-      </p:sp>
-      <p:sp>
-        <p:nvSpPr>
-          <p:cNvPr id="55" name="TextBox 54"/>
-          <p:cNvSpPr txBox="1"/>
-          <p:nvPr/>
-        </p:nvSpPr>
-        <p:spPr>
-          <a:xfrm>
-            <a:off x="6217920" y="5532120"/>
-            <a:ext cx="2743200" cy="274320"/>
-          </a:xfrm>
-          <a:prstGeom prst="rect">
-            <a:avLst/>
-          </a:prstGeom>
-          <a:noFill/>
-        </p:spPr>
-        <p:txBody>
-          <a:bodyPr wrap="square">
-            <a:spAutoFit/>
-          </a:bodyPr>
-          <a:lstStyle/>
-          <a:p>
-            <a:pPr algn="l">
-              <a:defRPr sz="1100" b="1" i="0">
-                <a:solidFill>
-                  <a:srgbClr val="1C1C1E"/>
-                </a:solidFill>
-                <a:latin typeface="Calibri"/>
-              </a:defRPr>
-            </a:pPr>
-            <a:r>
-              <a:t>3.8x</a:t>
-            </a:r>
-          </a:p>
-        </p:txBody>
-      </p:sp>
-      <p:sp>
-        <p:nvSpPr>
-          <p:cNvPr id="56" name="TextBox 55"/>
-          <p:cNvSpPr txBox="1"/>
-          <p:nvPr/>
-        </p:nvSpPr>
-        <p:spPr>
-          <a:xfrm>
-            <a:off x="8961120" y="5532120"/>
-            <a:ext cx="2743200" cy="274320"/>
-          </a:xfrm>
-          <a:prstGeom prst="rect">
-            <a:avLst/>
-          </a:prstGeom>
-          <a:noFill/>
-        </p:spPr>
-        <p:txBody>
-          <a:bodyPr wrap="square">
-            <a:spAutoFit/>
-          </a:bodyPr>
-          <a:lstStyle/>
-          <a:p>
-            <a:pPr algn="l">
-              <a:defRPr sz="1100" b="1" i="0">
-                <a:solidFill>
-                  <a:srgbClr val="1C1C1E"/>
-                </a:solidFill>
-                <a:latin typeface="Calibri"/>
-              </a:defRPr>
-            </a:pPr>
-            <a:r>
-              <a:t>6.4x</a:t>
-            </a:r>
-          </a:p>
-        </p:txBody>
-      </p:sp>
-      <p:sp>
-        <p:nvSpPr>
-          <p:cNvPr id="57" name="TextBox 56"/>
-          <p:cNvSpPr txBox="1"/>
-          <p:nvPr/>
-        </p:nvSpPr>
-        <p:spPr>
-          <a:xfrm>
-            <a:off x="731520" y="6400800"/>
-            <a:ext cx="9144000" cy="274320"/>
+              <a:t>Expected Year-1 return: 3.8x on $2.7M spend</a:t>
+            </a:r>
+          </a:p>
+          <a:p>
+            <a:pPr>
+              <a:spcAft>
+                <a:spcPts val="220"/>
+              </a:spcAft>
+              <a:defRPr sz="1100" b="0">
+                <a:solidFill>
+                  <a:srgbClr val="767676"/>
+                </a:solidFill>
+                <a:latin typeface="Calibri"/>
+              </a:defRPr>
+            </a:pPr>
+            <a:r>
+              <a:t>Downside bounded by 90-day pilot  |  Upside scales with SRAM's data advantage</a:t>
+            </a:r>
+          </a:p>
+        </p:txBody>
+      </p:sp>
+      <p:sp>
+        <p:nvSpPr>
+          <p:cNvPr id="20" name="TextBox 19"/>
+          <p:cNvSpPr txBox="1"/>
+          <p:nvPr/>
+        </p:nvSpPr>
+        <p:spPr>
+          <a:xfrm>
+            <a:off x="731520" y="6446520"/>
+            <a:ext cx="4572000" cy="274320"/>
           </a:xfrm>
           <a:prstGeom prst="rect">
             <a:avLst/>
@@ -22868,7 +21593,43 @@
               </a:defRPr>
             </a:pPr>
             <a:r>
-              <a:t>APPENDIX A1</a:t>
+              <a:t>SRAM AI Adoption Playbook</a:t>
+            </a:r>
+          </a:p>
+        </p:txBody>
+      </p:sp>
+      <p:sp>
+        <p:nvSpPr>
+          <p:cNvPr id="21" name="TextBox 20"/>
+          <p:cNvSpPr txBox="1"/>
+          <p:nvPr/>
+        </p:nvSpPr>
+        <p:spPr>
+          <a:xfrm>
+            <a:off x="10515600" y="6446520"/>
+            <a:ext cx="1371600" cy="274320"/>
+          </a:xfrm>
+          <a:prstGeom prst="rect">
+            <a:avLst/>
+          </a:prstGeom>
+          <a:noFill/>
+        </p:spPr>
+        <p:txBody>
+          <a:bodyPr wrap="square">
+            <a:spAutoFit/>
+          </a:bodyPr>
+          <a:lstStyle/>
+          <a:p>
+            <a:pPr algn="r">
+              <a:defRPr sz="800" b="0" i="0">
+                <a:solidFill>
+                  <a:srgbClr val="767676"/>
+                </a:solidFill>
+                <a:latin typeface="Calibri"/>
+              </a:defRPr>
+            </a:pPr>
+            <a:r>
+              <a:t>12</a:t>
             </a:r>
           </a:p>
         </p:txBody>
@@ -22966,7 +21727,7 @@
               </a:defRPr>
             </a:pPr>
             <a:r>
-              <a:t>Interview with Jordan Hartsell, VP Digital Products</a:t>
+              <a:t>Financial detail across three scenarios</a:t>
             </a:r>
           </a:p>
         </p:txBody>
@@ -23022,22 +21783,22 @@
         </p:nvSpPr>
         <p:spPr>
           <a:xfrm>
-            <a:off x="731520" y="1234440"/>
-            <a:ext cx="10058400" cy="274320"/>
-          </a:xfrm>
-          <a:prstGeom prst="rect">
-            <a:avLst/>
-          </a:prstGeom>
-          <a:noFill/>
-        </p:spPr>
-        <p:txBody>
-          <a:bodyPr wrap="square">
-            <a:spAutoFit/>
-          </a:bodyPr>
-          <a:lstStyle/>
-          <a:p>
-            <a:pPr algn="l">
-              <a:defRPr sz="1200" b="0" i="0">
+            <a:off x="731520" y="1371600"/>
+            <a:ext cx="2743200" cy="274320"/>
+          </a:xfrm>
+          <a:prstGeom prst="rect">
+            <a:avLst/>
+          </a:prstGeom>
+          <a:noFill/>
+        </p:spPr>
+        <p:txBody>
+          <a:bodyPr wrap="square">
+            <a:spAutoFit/>
+          </a:bodyPr>
+          <a:lstStyle/>
+          <a:p>
+            <a:pPr algn="l">
+              <a:defRPr sz="1100" b="1" i="0">
                 <a:solidFill>
                   <a:srgbClr val="767676"/>
                 </a:solidFill>
@@ -23045,34 +21806,140 @@
               </a:defRPr>
             </a:pPr>
             <a:r>
-              <a:t>45-minute Zoom call  |  March 2026  |  Key quotes and insights</a:t>
-            </a:r>
-          </a:p>
-        </p:txBody>
-      </p:sp>
-      <p:sp>
-        <p:nvSpPr>
-          <p:cNvPr id="6" name="Rounded Rectangle 5"/>
+              <a:t>Category</a:t>
+            </a:r>
+          </a:p>
+        </p:txBody>
+      </p:sp>
+      <p:sp>
+        <p:nvSpPr>
+          <p:cNvPr id="6" name="TextBox 5"/>
+          <p:cNvSpPr txBox="1"/>
+          <p:nvPr/>
+        </p:nvSpPr>
+        <p:spPr>
+          <a:xfrm>
+            <a:off x="3474720" y="1371600"/>
+            <a:ext cx="2743200" cy="274320"/>
+          </a:xfrm>
+          <a:prstGeom prst="rect">
+            <a:avLst/>
+          </a:prstGeom>
+          <a:noFill/>
+        </p:spPr>
+        <p:txBody>
+          <a:bodyPr wrap="square">
+            <a:spAutoFit/>
+          </a:bodyPr>
+          <a:lstStyle/>
+          <a:p>
+            <a:pPr algn="l">
+              <a:defRPr sz="1100" b="1" i="0">
+                <a:solidFill>
+                  <a:srgbClr val="767676"/>
+                </a:solidFill>
+                <a:latin typeface="Calibri"/>
+              </a:defRPr>
+            </a:pPr>
+            <a:r>
+              <a:t>Conservative</a:t>
+            </a:r>
+          </a:p>
+        </p:txBody>
+      </p:sp>
+      <p:sp>
+        <p:nvSpPr>
+          <p:cNvPr id="7" name="TextBox 6"/>
+          <p:cNvSpPr txBox="1"/>
+          <p:nvPr/>
+        </p:nvSpPr>
+        <p:spPr>
+          <a:xfrm>
+            <a:off x="6217920" y="1371600"/>
+            <a:ext cx="2743200" cy="274320"/>
+          </a:xfrm>
+          <a:prstGeom prst="rect">
+            <a:avLst/>
+          </a:prstGeom>
+          <a:noFill/>
+        </p:spPr>
+        <p:txBody>
+          <a:bodyPr wrap="square">
+            <a:spAutoFit/>
+          </a:bodyPr>
+          <a:lstStyle/>
+          <a:p>
+            <a:pPr algn="l">
+              <a:defRPr sz="1100" b="1" i="0">
+                <a:solidFill>
+                  <a:srgbClr val="767676"/>
+                </a:solidFill>
+                <a:latin typeface="Calibri"/>
+              </a:defRPr>
+            </a:pPr>
+            <a:r>
+              <a:t>Expected</a:t>
+            </a:r>
+          </a:p>
+        </p:txBody>
+      </p:sp>
+      <p:sp>
+        <p:nvSpPr>
+          <p:cNvPr id="8" name="TextBox 7"/>
+          <p:cNvSpPr txBox="1"/>
+          <p:nvPr/>
+        </p:nvSpPr>
+        <p:spPr>
+          <a:xfrm>
+            <a:off x="8961120" y="1371600"/>
+            <a:ext cx="2743200" cy="274320"/>
+          </a:xfrm>
+          <a:prstGeom prst="rect">
+            <a:avLst/>
+          </a:prstGeom>
+          <a:noFill/>
+        </p:spPr>
+        <p:txBody>
+          <a:bodyPr wrap="square">
+            <a:spAutoFit/>
+          </a:bodyPr>
+          <a:lstStyle/>
+          <a:p>
+            <a:pPr algn="l">
+              <a:defRPr sz="1100" b="1" i="0">
+                <a:solidFill>
+                  <a:srgbClr val="767676"/>
+                </a:solidFill>
+                <a:latin typeface="Calibri"/>
+              </a:defRPr>
+            </a:pPr>
+            <a:r>
+              <a:t>Upside</a:t>
+            </a:r>
+          </a:p>
+        </p:txBody>
+      </p:sp>
+      <p:sp>
+        <p:nvSpPr>
+          <p:cNvPr id="9" name="Rounded Rectangle 8"/>
           <p:cNvSpPr/>
           <p:nvPr/>
         </p:nvSpPr>
         <p:spPr>
           <a:xfrm>
-            <a:off x="731520" y="1691640"/>
-            <a:ext cx="10789920" cy="1005840"/>
+            <a:off x="731520" y="1719072"/>
+            <a:ext cx="10515600" cy="347472"/>
           </a:xfrm>
           <a:prstGeom prst="roundRect">
             <a:avLst>
-              <a:gd name="adj" fmla="val 4000"/>
+              <a:gd name="adj" fmla="val 2000"/>
             </a:avLst>
           </a:prstGeom>
           <a:solidFill>
-            <a:srgbClr val="FFFFFF"/>
+            <a:srgbClr val="F0F0EE"/>
           </a:solidFill>
-          <a:ln w="12700">
-            <a:solidFill>
-              <a:srgbClr val="E0E0DE"/>
-            </a:solidFill>
+          <a:ln>
+            <a:noFill/>
           </a:ln>
         </p:spPr>
         <p:style>
@@ -23099,20 +21966,310 @@
       </p:sp>
       <p:sp>
         <p:nvSpPr>
-          <p:cNvPr id="7" name="Rectangle 6"/>
+          <p:cNvPr id="10" name="TextBox 9"/>
+          <p:cNvSpPr txBox="1"/>
+          <p:nvPr/>
+        </p:nvSpPr>
+        <p:spPr>
+          <a:xfrm>
+            <a:off x="731520" y="1737360"/>
+            <a:ext cx="2743200" cy="274320"/>
+          </a:xfrm>
+          <a:prstGeom prst="rect">
+            <a:avLst/>
+          </a:prstGeom>
+          <a:noFill/>
+        </p:spPr>
+        <p:txBody>
+          <a:bodyPr wrap="square">
+            <a:spAutoFit/>
+          </a:bodyPr>
+          <a:lstStyle/>
+          <a:p>
+            <a:pPr algn="l">
+              <a:defRPr sz="1100" b="0" i="0">
+                <a:solidFill>
+                  <a:srgbClr val="3A3A3C"/>
+                </a:solidFill>
+                <a:latin typeface="Calibri"/>
+              </a:defRPr>
+            </a:pPr>
+            <a:r>
+              <a:t>Support assistant savings</a:t>
+            </a:r>
+          </a:p>
+        </p:txBody>
+      </p:sp>
+      <p:sp>
+        <p:nvSpPr>
+          <p:cNvPr id="11" name="TextBox 10"/>
+          <p:cNvSpPr txBox="1"/>
+          <p:nvPr/>
+        </p:nvSpPr>
+        <p:spPr>
+          <a:xfrm>
+            <a:off x="3474720" y="1737360"/>
+            <a:ext cx="2743200" cy="274320"/>
+          </a:xfrm>
+          <a:prstGeom prst="rect">
+            <a:avLst/>
+          </a:prstGeom>
+          <a:noFill/>
+        </p:spPr>
+        <p:txBody>
+          <a:bodyPr wrap="square">
+            <a:spAutoFit/>
+          </a:bodyPr>
+          <a:lstStyle/>
+          <a:p>
+            <a:pPr algn="l">
+              <a:defRPr sz="1100" b="0" i="0">
+                <a:solidFill>
+                  <a:srgbClr val="3A3A3C"/>
+                </a:solidFill>
+                <a:latin typeface="Calibri"/>
+              </a:defRPr>
+            </a:pPr>
+            <a:r>
+              <a:t>$0.5M</a:t>
+            </a:r>
+          </a:p>
+        </p:txBody>
+      </p:sp>
+      <p:sp>
+        <p:nvSpPr>
+          <p:cNvPr id="12" name="TextBox 11"/>
+          <p:cNvSpPr txBox="1"/>
+          <p:nvPr/>
+        </p:nvSpPr>
+        <p:spPr>
+          <a:xfrm>
+            <a:off x="6217920" y="1737360"/>
+            <a:ext cx="2743200" cy="274320"/>
+          </a:xfrm>
+          <a:prstGeom prst="rect">
+            <a:avLst/>
+          </a:prstGeom>
+          <a:noFill/>
+        </p:spPr>
+        <p:txBody>
+          <a:bodyPr wrap="square">
+            <a:spAutoFit/>
+          </a:bodyPr>
+          <a:lstStyle/>
+          <a:p>
+            <a:pPr algn="l">
+              <a:defRPr sz="1100" b="1" i="0">
+                <a:solidFill>
+                  <a:srgbClr val="1C1C1E"/>
+                </a:solidFill>
+                <a:latin typeface="Calibri"/>
+              </a:defRPr>
+            </a:pPr>
+            <a:r>
+              <a:t>$1.6M</a:t>
+            </a:r>
+          </a:p>
+        </p:txBody>
+      </p:sp>
+      <p:sp>
+        <p:nvSpPr>
+          <p:cNvPr id="13" name="TextBox 12"/>
+          <p:cNvSpPr txBox="1"/>
+          <p:nvPr/>
+        </p:nvSpPr>
+        <p:spPr>
+          <a:xfrm>
+            <a:off x="8961120" y="1737360"/>
+            <a:ext cx="2743200" cy="274320"/>
+          </a:xfrm>
+          <a:prstGeom prst="rect">
+            <a:avLst/>
+          </a:prstGeom>
+          <a:noFill/>
+        </p:spPr>
+        <p:txBody>
+          <a:bodyPr wrap="square">
+            <a:spAutoFit/>
+          </a:bodyPr>
+          <a:lstStyle/>
+          <a:p>
+            <a:pPr algn="l">
+              <a:defRPr sz="1100" b="0" i="0">
+                <a:solidFill>
+                  <a:srgbClr val="3A3A3C"/>
+                </a:solidFill>
+                <a:latin typeface="Calibri"/>
+              </a:defRPr>
+            </a:pPr>
+            <a:r>
+              <a:t>$4.3M</a:t>
+            </a:r>
+          </a:p>
+        </p:txBody>
+      </p:sp>
+      <p:sp>
+        <p:nvSpPr>
+          <p:cNvPr id="14" name="TextBox 13"/>
+          <p:cNvSpPr txBox="1"/>
+          <p:nvPr/>
+        </p:nvSpPr>
+        <p:spPr>
+          <a:xfrm>
+            <a:off x="731520" y="2103120"/>
+            <a:ext cx="2743200" cy="274320"/>
+          </a:xfrm>
+          <a:prstGeom prst="rect">
+            <a:avLst/>
+          </a:prstGeom>
+          <a:noFill/>
+        </p:spPr>
+        <p:txBody>
+          <a:bodyPr wrap="square">
+            <a:spAutoFit/>
+          </a:bodyPr>
+          <a:lstStyle/>
+          <a:p>
+            <a:pPr algn="l">
+              <a:defRPr sz="1100" b="0" i="0">
+                <a:solidFill>
+                  <a:srgbClr val="3A3A3C"/>
+                </a:solidFill>
+                <a:latin typeface="Calibri"/>
+              </a:defRPr>
+            </a:pPr>
+            <a:r>
+              <a:t>Forecasting + inventory</a:t>
+            </a:r>
+          </a:p>
+        </p:txBody>
+      </p:sp>
+      <p:sp>
+        <p:nvSpPr>
+          <p:cNvPr id="15" name="TextBox 14"/>
+          <p:cNvSpPr txBox="1"/>
+          <p:nvPr/>
+        </p:nvSpPr>
+        <p:spPr>
+          <a:xfrm>
+            <a:off x="3474720" y="2103120"/>
+            <a:ext cx="2743200" cy="274320"/>
+          </a:xfrm>
+          <a:prstGeom prst="rect">
+            <a:avLst/>
+          </a:prstGeom>
+          <a:noFill/>
+        </p:spPr>
+        <p:txBody>
+          <a:bodyPr wrap="square">
+            <a:spAutoFit/>
+          </a:bodyPr>
+          <a:lstStyle/>
+          <a:p>
+            <a:pPr algn="l">
+              <a:defRPr sz="1100" b="0" i="0">
+                <a:solidFill>
+                  <a:srgbClr val="3A3A3C"/>
+                </a:solidFill>
+                <a:latin typeface="Calibri"/>
+              </a:defRPr>
+            </a:pPr>
+            <a:r>
+              <a:t>$0.7M</a:t>
+            </a:r>
+          </a:p>
+        </p:txBody>
+      </p:sp>
+      <p:sp>
+        <p:nvSpPr>
+          <p:cNvPr id="16" name="TextBox 15"/>
+          <p:cNvSpPr txBox="1"/>
+          <p:nvPr/>
+        </p:nvSpPr>
+        <p:spPr>
+          <a:xfrm>
+            <a:off x="6217920" y="2103120"/>
+            <a:ext cx="2743200" cy="274320"/>
+          </a:xfrm>
+          <a:prstGeom prst="rect">
+            <a:avLst/>
+          </a:prstGeom>
+          <a:noFill/>
+        </p:spPr>
+        <p:txBody>
+          <a:bodyPr wrap="square">
+            <a:spAutoFit/>
+          </a:bodyPr>
+          <a:lstStyle/>
+          <a:p>
+            <a:pPr algn="l">
+              <a:defRPr sz="1100" b="1" i="0">
+                <a:solidFill>
+                  <a:srgbClr val="1C1C1E"/>
+                </a:solidFill>
+                <a:latin typeface="Calibri"/>
+              </a:defRPr>
+            </a:pPr>
+            <a:r>
+              <a:t>$1.6M</a:t>
+            </a:r>
+          </a:p>
+        </p:txBody>
+      </p:sp>
+      <p:sp>
+        <p:nvSpPr>
+          <p:cNvPr id="17" name="TextBox 16"/>
+          <p:cNvSpPr txBox="1"/>
+          <p:nvPr/>
+        </p:nvSpPr>
+        <p:spPr>
+          <a:xfrm>
+            <a:off x="8961120" y="2103120"/>
+            <a:ext cx="2743200" cy="274320"/>
+          </a:xfrm>
+          <a:prstGeom prst="rect">
+            <a:avLst/>
+          </a:prstGeom>
+          <a:noFill/>
+        </p:spPr>
+        <p:txBody>
+          <a:bodyPr wrap="square">
+            <a:spAutoFit/>
+          </a:bodyPr>
+          <a:lstStyle/>
+          <a:p>
+            <a:pPr algn="l">
+              <a:defRPr sz="1100" b="0" i="0">
+                <a:solidFill>
+                  <a:srgbClr val="3A3A3C"/>
+                </a:solidFill>
+                <a:latin typeface="Calibri"/>
+              </a:defRPr>
+            </a:pPr>
+            <a:r>
+              <a:t>$4.5M</a:t>
+            </a:r>
+          </a:p>
+        </p:txBody>
+      </p:sp>
+      <p:sp>
+        <p:nvSpPr>
+          <p:cNvPr id="18" name="Rounded Rectangle 17"/>
           <p:cNvSpPr/>
           <p:nvPr/>
         </p:nvSpPr>
         <p:spPr>
           <a:xfrm>
-            <a:off x="731520" y="1691640"/>
-            <a:ext cx="50800" cy="1005840"/>
-          </a:xfrm>
-          <a:prstGeom prst="rect">
-            <a:avLst/>
+            <a:off x="731520" y="2450592"/>
+            <a:ext cx="10515600" cy="347472"/>
+          </a:xfrm>
+          <a:prstGeom prst="roundRect">
+            <a:avLst>
+              <a:gd name="adj" fmla="val 2000"/>
+            </a:avLst>
           </a:prstGeom>
           <a:solidFill>
-            <a:srgbClr val="767676"/>
+            <a:srgbClr val="F0F0EE"/>
           </a:solidFill>
           <a:ln>
             <a:noFill/>
@@ -23142,64 +22299,28 @@
       </p:sp>
       <p:sp>
         <p:nvSpPr>
-          <p:cNvPr id="8" name="TextBox 7"/>
-          <p:cNvSpPr txBox="1"/>
-          <p:nvPr/>
-        </p:nvSpPr>
-        <p:spPr>
-          <a:xfrm>
-            <a:off x="1097280" y="1737360"/>
-            <a:ext cx="1828800" cy="182880"/>
-          </a:xfrm>
-          <a:prstGeom prst="rect">
-            <a:avLst/>
-          </a:prstGeom>
-          <a:noFill/>
-        </p:spPr>
-        <p:txBody>
-          <a:bodyPr wrap="square">
-            <a:spAutoFit/>
-          </a:bodyPr>
-          <a:lstStyle/>
-          <a:p>
-            <a:pPr algn="l">
-              <a:defRPr sz="900" b="1" i="0">
-                <a:solidFill>
-                  <a:srgbClr val="767676"/>
-                </a:solidFill>
-                <a:latin typeface="Calibri"/>
-              </a:defRPr>
-            </a:pPr>
-            <a:r>
-              <a:t>ON DATA READINESS</a:t>
-            </a:r>
-          </a:p>
-        </p:txBody>
-      </p:sp>
-      <p:sp>
-        <p:nvSpPr>
-          <p:cNvPr id="9" name="TextBox 8"/>
-          <p:cNvSpPr txBox="1"/>
-          <p:nvPr/>
-        </p:nvSpPr>
-        <p:spPr>
-          <a:xfrm>
-            <a:off x="1097280" y="1947672"/>
-            <a:ext cx="7315200" cy="548640"/>
-          </a:xfrm>
-          <a:prstGeom prst="rect">
-            <a:avLst/>
-          </a:prstGeom>
-          <a:noFill/>
-        </p:spPr>
-        <p:txBody>
-          <a:bodyPr wrap="square">
-            <a:spAutoFit/>
-          </a:bodyPr>
-          <a:lstStyle/>
-          <a:p>
-            <a:pPr algn="l">
-              <a:defRPr sz="1100" b="0" i="1">
+          <p:cNvPr id="19" name="TextBox 18"/>
+          <p:cNvSpPr txBox="1"/>
+          <p:nvPr/>
+        </p:nvSpPr>
+        <p:spPr>
+          <a:xfrm>
+            <a:off x="731520" y="2468880"/>
+            <a:ext cx="2743200" cy="274320"/>
+          </a:xfrm>
+          <a:prstGeom prst="rect">
+            <a:avLst/>
+          </a:prstGeom>
+          <a:noFill/>
+        </p:spPr>
+        <p:txBody>
+          <a:bodyPr wrap="square">
+            <a:spAutoFit/>
+          </a:bodyPr>
+          <a:lstStyle/>
+          <a:p>
+            <a:pPr algn="l">
+              <a:defRPr sz="1100" b="0" i="0">
                 <a:solidFill>
                   <a:srgbClr val="3A3A3C"/>
                 </a:solidFill>
@@ -23207,35 +22328,71 @@
               </a:defRPr>
             </a:pPr>
             <a:r>
-              <a:t>“We have good data in pockets and messy data everywhere else. If I wanted to build a support AI today, I could get it to work well for AXS and Hammerhead. The moment a dealer asks about a RockShox fork on a 2019 frame with a third-party brake, I start to sweat.”</a:t>
-            </a:r>
-          </a:p>
-        </p:txBody>
-      </p:sp>
-      <p:sp>
-        <p:nvSpPr>
-          <p:cNvPr id="10" name="TextBox 9"/>
-          <p:cNvSpPr txBox="1"/>
-          <p:nvPr/>
-        </p:nvSpPr>
-        <p:spPr>
-          <a:xfrm>
-            <a:off x="8686800" y="2011680"/>
-            <a:ext cx="2560320" cy="457200"/>
-          </a:xfrm>
-          <a:prstGeom prst="rect">
-            <a:avLst/>
-          </a:prstGeom>
-          <a:noFill/>
-        </p:spPr>
-        <p:txBody>
-          <a:bodyPr wrap="square">
-            <a:spAutoFit/>
-          </a:bodyPr>
-          <a:lstStyle/>
-          <a:p>
-            <a:pPr algn="l">
-              <a:defRPr sz="1000" b="1" i="0">
+              <a:t>Documentation + translation</a:t>
+            </a:r>
+          </a:p>
+        </p:txBody>
+      </p:sp>
+      <p:sp>
+        <p:nvSpPr>
+          <p:cNvPr id="20" name="TextBox 19"/>
+          <p:cNvSpPr txBox="1"/>
+          <p:nvPr/>
+        </p:nvSpPr>
+        <p:spPr>
+          <a:xfrm>
+            <a:off x="3474720" y="2468880"/>
+            <a:ext cx="2743200" cy="274320"/>
+          </a:xfrm>
+          <a:prstGeom prst="rect">
+            <a:avLst/>
+          </a:prstGeom>
+          <a:noFill/>
+        </p:spPr>
+        <p:txBody>
+          <a:bodyPr wrap="square">
+            <a:spAutoFit/>
+          </a:bodyPr>
+          <a:lstStyle/>
+          <a:p>
+            <a:pPr algn="l">
+              <a:defRPr sz="1100" b="0" i="0">
+                <a:solidFill>
+                  <a:srgbClr val="3A3A3C"/>
+                </a:solidFill>
+                <a:latin typeface="Calibri"/>
+              </a:defRPr>
+            </a:pPr>
+            <a:r>
+              <a:t>$0.1M</a:t>
+            </a:r>
+          </a:p>
+        </p:txBody>
+      </p:sp>
+      <p:sp>
+        <p:nvSpPr>
+          <p:cNvPr id="21" name="TextBox 20"/>
+          <p:cNvSpPr txBox="1"/>
+          <p:nvPr/>
+        </p:nvSpPr>
+        <p:spPr>
+          <a:xfrm>
+            <a:off x="6217920" y="2468880"/>
+            <a:ext cx="2743200" cy="274320"/>
+          </a:xfrm>
+          <a:prstGeom prst="rect">
+            <a:avLst/>
+          </a:prstGeom>
+          <a:noFill/>
+        </p:spPr>
+        <p:txBody>
+          <a:bodyPr wrap="square">
+            <a:spAutoFit/>
+          </a:bodyPr>
+          <a:lstStyle/>
+          <a:p>
+            <a:pPr algn="l">
+              <a:defRPr sz="1100" b="1" i="0">
                 <a:solidFill>
                   <a:srgbClr val="1C1C1E"/>
                 </a:solidFill>
@@ -23243,34 +22400,212 @@
               </a:defRPr>
             </a:pPr>
             <a:r>
-              <a:t>→ Validates bounded pilot scope</a:t>
-            </a:r>
-          </a:p>
-        </p:txBody>
-      </p:sp>
-      <p:sp>
-        <p:nvSpPr>
-          <p:cNvPr id="11" name="Rounded Rectangle 10"/>
+              <a:t>$0.24M</a:t>
+            </a:r>
+          </a:p>
+        </p:txBody>
+      </p:sp>
+      <p:sp>
+        <p:nvSpPr>
+          <p:cNvPr id="22" name="TextBox 21"/>
+          <p:cNvSpPr txBox="1"/>
+          <p:nvPr/>
+        </p:nvSpPr>
+        <p:spPr>
+          <a:xfrm>
+            <a:off x="8961120" y="2468880"/>
+            <a:ext cx="2743200" cy="274320"/>
+          </a:xfrm>
+          <a:prstGeom prst="rect">
+            <a:avLst/>
+          </a:prstGeom>
+          <a:noFill/>
+        </p:spPr>
+        <p:txBody>
+          <a:bodyPr wrap="square">
+            <a:spAutoFit/>
+          </a:bodyPr>
+          <a:lstStyle/>
+          <a:p>
+            <a:pPr algn="l">
+              <a:defRPr sz="1100" b="0" i="0">
+                <a:solidFill>
+                  <a:srgbClr val="3A3A3C"/>
+                </a:solidFill>
+                <a:latin typeface="Calibri"/>
+              </a:defRPr>
+            </a:pPr>
+            <a:r>
+              <a:t>$0.9M</a:t>
+            </a:r>
+          </a:p>
+        </p:txBody>
+      </p:sp>
+      <p:sp>
+        <p:nvSpPr>
+          <p:cNvPr id="23" name="TextBox 22"/>
+          <p:cNvSpPr txBox="1"/>
+          <p:nvPr/>
+        </p:nvSpPr>
+        <p:spPr>
+          <a:xfrm>
+            <a:off x="731520" y="2834640"/>
+            <a:ext cx="2743200" cy="274320"/>
+          </a:xfrm>
+          <a:prstGeom prst="rect">
+            <a:avLst/>
+          </a:prstGeom>
+          <a:noFill/>
+        </p:spPr>
+        <p:txBody>
+          <a:bodyPr wrap="square">
+            <a:spAutoFit/>
+          </a:bodyPr>
+          <a:lstStyle/>
+          <a:p>
+            <a:pPr algn="l">
+              <a:defRPr sz="1100" b="0" i="0">
+                <a:solidFill>
+                  <a:srgbClr val="3A3A3C"/>
+                </a:solidFill>
+                <a:latin typeface="Calibri"/>
+              </a:defRPr>
+            </a:pPr>
+            <a:r>
+              <a:t>Customer retention revenue</a:t>
+            </a:r>
+          </a:p>
+        </p:txBody>
+      </p:sp>
+      <p:sp>
+        <p:nvSpPr>
+          <p:cNvPr id="24" name="TextBox 23"/>
+          <p:cNvSpPr txBox="1"/>
+          <p:nvPr/>
+        </p:nvSpPr>
+        <p:spPr>
+          <a:xfrm>
+            <a:off x="3474720" y="2834640"/>
+            <a:ext cx="2743200" cy="274320"/>
+          </a:xfrm>
+          <a:prstGeom prst="rect">
+            <a:avLst/>
+          </a:prstGeom>
+          <a:noFill/>
+        </p:spPr>
+        <p:txBody>
+          <a:bodyPr wrap="square">
+            <a:spAutoFit/>
+          </a:bodyPr>
+          <a:lstStyle/>
+          <a:p>
+            <a:pPr algn="l">
+              <a:defRPr sz="1100" b="0" i="0">
+                <a:solidFill>
+                  <a:srgbClr val="3A3A3C"/>
+                </a:solidFill>
+                <a:latin typeface="Calibri"/>
+              </a:defRPr>
+            </a:pPr>
+            <a:r>
+              <a:t>$1.5M</a:t>
+            </a:r>
+          </a:p>
+        </p:txBody>
+      </p:sp>
+      <p:sp>
+        <p:nvSpPr>
+          <p:cNvPr id="25" name="TextBox 24"/>
+          <p:cNvSpPr txBox="1"/>
+          <p:nvPr/>
+        </p:nvSpPr>
+        <p:spPr>
+          <a:xfrm>
+            <a:off x="6217920" y="2834640"/>
+            <a:ext cx="2743200" cy="274320"/>
+          </a:xfrm>
+          <a:prstGeom prst="rect">
+            <a:avLst/>
+          </a:prstGeom>
+          <a:noFill/>
+        </p:spPr>
+        <p:txBody>
+          <a:bodyPr wrap="square">
+            <a:spAutoFit/>
+          </a:bodyPr>
+          <a:lstStyle/>
+          <a:p>
+            <a:pPr algn="l">
+              <a:defRPr sz="1100" b="1" i="0">
+                <a:solidFill>
+                  <a:srgbClr val="1C1C1E"/>
+                </a:solidFill>
+                <a:latin typeface="Calibri"/>
+              </a:defRPr>
+            </a:pPr>
+            <a:r>
+              <a:t>$3.0M</a:t>
+            </a:r>
+          </a:p>
+        </p:txBody>
+      </p:sp>
+      <p:sp>
+        <p:nvSpPr>
+          <p:cNvPr id="26" name="TextBox 25"/>
+          <p:cNvSpPr txBox="1"/>
+          <p:nvPr/>
+        </p:nvSpPr>
+        <p:spPr>
+          <a:xfrm>
+            <a:off x="8961120" y="2834640"/>
+            <a:ext cx="2743200" cy="274320"/>
+          </a:xfrm>
+          <a:prstGeom prst="rect">
+            <a:avLst/>
+          </a:prstGeom>
+          <a:noFill/>
+        </p:spPr>
+        <p:txBody>
+          <a:bodyPr wrap="square">
+            <a:spAutoFit/>
+          </a:bodyPr>
+          <a:lstStyle/>
+          <a:p>
+            <a:pPr algn="l">
+              <a:defRPr sz="1100" b="0" i="0">
+                <a:solidFill>
+                  <a:srgbClr val="3A3A3C"/>
+                </a:solidFill>
+                <a:latin typeface="Calibri"/>
+              </a:defRPr>
+            </a:pPr>
+            <a:r>
+              <a:t>$4.5M</a:t>
+            </a:r>
+          </a:p>
+        </p:txBody>
+      </p:sp>
+      <p:sp>
+        <p:nvSpPr>
+          <p:cNvPr id="27" name="Rounded Rectangle 26"/>
           <p:cNvSpPr/>
           <p:nvPr/>
         </p:nvSpPr>
         <p:spPr>
           <a:xfrm>
-            <a:off x="731520" y="2880360"/>
-            <a:ext cx="10789920" cy="1005840"/>
+            <a:off x="731520" y="3182112"/>
+            <a:ext cx="10515600" cy="347472"/>
           </a:xfrm>
           <a:prstGeom prst="roundRect">
             <a:avLst>
-              <a:gd name="adj" fmla="val 4000"/>
+              <a:gd name="adj" fmla="val 2000"/>
             </a:avLst>
           </a:prstGeom>
           <a:solidFill>
-            <a:srgbClr val="FFFFFF"/>
+            <a:srgbClr val="F0F0EE"/>
           </a:solidFill>
-          <a:ln w="12700">
-            <a:solidFill>
-              <a:srgbClr val="E0E0DE"/>
-            </a:solidFill>
+          <a:ln>
+            <a:noFill/>
           </a:ln>
         </p:spPr>
         <p:style>
@@ -23297,20 +22632,308 @@
       </p:sp>
       <p:sp>
         <p:nvSpPr>
-          <p:cNvPr id="12" name="Rectangle 11"/>
+          <p:cNvPr id="28" name="TextBox 27"/>
+          <p:cNvSpPr txBox="1"/>
+          <p:nvPr/>
+        </p:nvSpPr>
+        <p:spPr>
+          <a:xfrm>
+            <a:off x="731520" y="3200400"/>
+            <a:ext cx="2743200" cy="274320"/>
+          </a:xfrm>
+          <a:prstGeom prst="rect">
+            <a:avLst/>
+          </a:prstGeom>
+          <a:noFill/>
+        </p:spPr>
+        <p:txBody>
+          <a:bodyPr wrap="square">
+            <a:spAutoFit/>
+          </a:bodyPr>
+          <a:lstStyle/>
+          <a:p>
+            <a:pPr algn="l">
+              <a:defRPr sz="1100" b="0" i="0">
+                <a:solidFill>
+                  <a:srgbClr val="3A3A3C"/>
+                </a:solidFill>
+                <a:latin typeface="Calibri"/>
+              </a:defRPr>
+            </a:pPr>
+            <a:r>
+              <a:t>Package size increase</a:t>
+            </a:r>
+          </a:p>
+        </p:txBody>
+      </p:sp>
+      <p:sp>
+        <p:nvSpPr>
+          <p:cNvPr id="29" name="TextBox 28"/>
+          <p:cNvSpPr txBox="1"/>
+          <p:nvPr/>
+        </p:nvSpPr>
+        <p:spPr>
+          <a:xfrm>
+            <a:off x="3474720" y="3200400"/>
+            <a:ext cx="2743200" cy="274320"/>
+          </a:xfrm>
+          <a:prstGeom prst="rect">
+            <a:avLst/>
+          </a:prstGeom>
+          <a:noFill/>
+        </p:spPr>
+        <p:txBody>
+          <a:bodyPr wrap="square">
+            <a:spAutoFit/>
+          </a:bodyPr>
+          <a:lstStyle/>
+          <a:p>
+            <a:pPr algn="l">
+              <a:defRPr sz="1100" b="0" i="0">
+                <a:solidFill>
+                  <a:srgbClr val="3A3A3C"/>
+                </a:solidFill>
+                <a:latin typeface="Calibri"/>
+              </a:defRPr>
+            </a:pPr>
+            <a:r>
+              <a:t>$2.0M</a:t>
+            </a:r>
+          </a:p>
+        </p:txBody>
+      </p:sp>
+      <p:sp>
+        <p:nvSpPr>
+          <p:cNvPr id="30" name="TextBox 29"/>
+          <p:cNvSpPr txBox="1"/>
+          <p:nvPr/>
+        </p:nvSpPr>
+        <p:spPr>
+          <a:xfrm>
+            <a:off x="6217920" y="3200400"/>
+            <a:ext cx="2743200" cy="274320"/>
+          </a:xfrm>
+          <a:prstGeom prst="rect">
+            <a:avLst/>
+          </a:prstGeom>
+          <a:noFill/>
+        </p:spPr>
+        <p:txBody>
+          <a:bodyPr wrap="square">
+            <a:spAutoFit/>
+          </a:bodyPr>
+          <a:lstStyle/>
+          <a:p>
+            <a:pPr algn="l">
+              <a:defRPr sz="1100" b="1" i="0">
+                <a:solidFill>
+                  <a:srgbClr val="1C1C1E"/>
+                </a:solidFill>
+                <a:latin typeface="Calibri"/>
+              </a:defRPr>
+            </a:pPr>
+            <a:r>
+              <a:t>$4.0M</a:t>
+            </a:r>
+          </a:p>
+        </p:txBody>
+      </p:sp>
+      <p:sp>
+        <p:nvSpPr>
+          <p:cNvPr id="31" name="TextBox 30"/>
+          <p:cNvSpPr txBox="1"/>
+          <p:nvPr/>
+        </p:nvSpPr>
+        <p:spPr>
+          <a:xfrm>
+            <a:off x="8961120" y="3200400"/>
+            <a:ext cx="2743200" cy="274320"/>
+          </a:xfrm>
+          <a:prstGeom prst="rect">
+            <a:avLst/>
+          </a:prstGeom>
+          <a:noFill/>
+        </p:spPr>
+        <p:txBody>
+          <a:bodyPr wrap="square">
+            <a:spAutoFit/>
+          </a:bodyPr>
+          <a:lstStyle/>
+          <a:p>
+            <a:pPr algn="l">
+              <a:defRPr sz="1100" b="0" i="0">
+                <a:solidFill>
+                  <a:srgbClr val="3A3A3C"/>
+                </a:solidFill>
+                <a:latin typeface="Calibri"/>
+              </a:defRPr>
+            </a:pPr>
+            <a:r>
+              <a:t>$8.0M</a:t>
+            </a:r>
+          </a:p>
+        </p:txBody>
+      </p:sp>
+      <p:sp>
+        <p:nvSpPr>
+          <p:cNvPr id="32" name="TextBox 31"/>
+          <p:cNvSpPr txBox="1"/>
+          <p:nvPr/>
+        </p:nvSpPr>
+        <p:spPr>
+          <a:xfrm>
+            <a:off x="731520" y="3566160"/>
+            <a:ext cx="2743200" cy="274320"/>
+          </a:xfrm>
+          <a:prstGeom prst="rect">
+            <a:avLst/>
+          </a:prstGeom>
+          <a:noFill/>
+        </p:spPr>
+        <p:txBody>
+          <a:bodyPr wrap="square">
+            <a:spAutoFit/>
+          </a:bodyPr>
+          <a:lstStyle/>
+          <a:p>
+            <a:pPr algn="l">
+              <a:defRPr sz="1100" b="0" i="0">
+                <a:solidFill>
+                  <a:srgbClr val="3A3A3C"/>
+                </a:solidFill>
+                <a:latin typeface="Calibri"/>
+              </a:defRPr>
+            </a:pPr>
+            <a:r>
+              <a:t>Proposal win-rate revenue</a:t>
+            </a:r>
+          </a:p>
+        </p:txBody>
+      </p:sp>
+      <p:sp>
+        <p:nvSpPr>
+          <p:cNvPr id="33" name="TextBox 32"/>
+          <p:cNvSpPr txBox="1"/>
+          <p:nvPr/>
+        </p:nvSpPr>
+        <p:spPr>
+          <a:xfrm>
+            <a:off x="3474720" y="3566160"/>
+            <a:ext cx="2743200" cy="274320"/>
+          </a:xfrm>
+          <a:prstGeom prst="rect">
+            <a:avLst/>
+          </a:prstGeom>
+          <a:noFill/>
+        </p:spPr>
+        <p:txBody>
+          <a:bodyPr wrap="square">
+            <a:spAutoFit/>
+          </a:bodyPr>
+          <a:lstStyle/>
+          <a:p>
+            <a:pPr algn="l">
+              <a:defRPr sz="1100" b="0" i="0">
+                <a:solidFill>
+                  <a:srgbClr val="3A3A3C"/>
+                </a:solidFill>
+                <a:latin typeface="Calibri"/>
+              </a:defRPr>
+            </a:pPr>
+            <a:r>
+              <a:t>$1.3M</a:t>
+            </a:r>
+          </a:p>
+        </p:txBody>
+      </p:sp>
+      <p:sp>
+        <p:nvSpPr>
+          <p:cNvPr id="34" name="TextBox 33"/>
+          <p:cNvSpPr txBox="1"/>
+          <p:nvPr/>
+        </p:nvSpPr>
+        <p:spPr>
+          <a:xfrm>
+            <a:off x="6217920" y="3566160"/>
+            <a:ext cx="2743200" cy="274320"/>
+          </a:xfrm>
+          <a:prstGeom prst="rect">
+            <a:avLst/>
+          </a:prstGeom>
+          <a:noFill/>
+        </p:spPr>
+        <p:txBody>
+          <a:bodyPr wrap="square">
+            <a:spAutoFit/>
+          </a:bodyPr>
+          <a:lstStyle/>
+          <a:p>
+            <a:pPr algn="l">
+              <a:defRPr sz="1100" b="1" i="0">
+                <a:solidFill>
+                  <a:srgbClr val="1C1C1E"/>
+                </a:solidFill>
+                <a:latin typeface="Calibri"/>
+              </a:defRPr>
+            </a:pPr>
+            <a:r>
+              <a:t>$2.5M</a:t>
+            </a:r>
+          </a:p>
+        </p:txBody>
+      </p:sp>
+      <p:sp>
+        <p:nvSpPr>
+          <p:cNvPr id="35" name="TextBox 34"/>
+          <p:cNvSpPr txBox="1"/>
+          <p:nvPr/>
+        </p:nvSpPr>
+        <p:spPr>
+          <a:xfrm>
+            <a:off x="8961120" y="3566160"/>
+            <a:ext cx="2743200" cy="274320"/>
+          </a:xfrm>
+          <a:prstGeom prst="rect">
+            <a:avLst/>
+          </a:prstGeom>
+          <a:noFill/>
+        </p:spPr>
+        <p:txBody>
+          <a:bodyPr wrap="square">
+            <a:spAutoFit/>
+          </a:bodyPr>
+          <a:lstStyle/>
+          <a:p>
+            <a:pPr algn="l">
+              <a:defRPr sz="1100" b="0" i="0">
+                <a:solidFill>
+                  <a:srgbClr val="3A3A3C"/>
+                </a:solidFill>
+                <a:latin typeface="Calibri"/>
+              </a:defRPr>
+            </a:pPr>
+            <a:r>
+              <a:t>$3.8M</a:t>
+            </a:r>
+          </a:p>
+        </p:txBody>
+      </p:sp>
+      <p:sp>
+        <p:nvSpPr>
+          <p:cNvPr id="36" name="Rectangle 35"/>
           <p:cNvSpPr/>
           <p:nvPr/>
         </p:nvSpPr>
         <p:spPr>
           <a:xfrm>
-            <a:off x="731520" y="2880360"/>
-            <a:ext cx="50800" cy="1005840"/>
+            <a:off x="731520" y="3931920"/>
+            <a:ext cx="10515600" cy="12700"/>
           </a:xfrm>
           <a:prstGeom prst="rect">
             <a:avLst/>
           </a:prstGeom>
           <a:solidFill>
-            <a:srgbClr val="767676"/>
+            <a:srgbClr val="E0E0DE"/>
           </a:solidFill>
           <a:ln>
             <a:noFill/>
@@ -23340,64 +22963,64 @@
       </p:sp>
       <p:sp>
         <p:nvSpPr>
-          <p:cNvPr id="13" name="TextBox 12"/>
-          <p:cNvSpPr txBox="1"/>
-          <p:nvPr/>
-        </p:nvSpPr>
-        <p:spPr>
-          <a:xfrm>
-            <a:off x="1097280" y="2926080"/>
-            <a:ext cx="1828800" cy="182880"/>
-          </a:xfrm>
-          <a:prstGeom prst="rect">
-            <a:avLst/>
-          </a:prstGeom>
-          <a:noFill/>
-        </p:spPr>
-        <p:txBody>
-          <a:bodyPr wrap="square">
-            <a:spAutoFit/>
-          </a:bodyPr>
-          <a:lstStyle/>
-          <a:p>
-            <a:pPr algn="l">
-              <a:defRPr sz="900" b="1" i="0">
-                <a:solidFill>
-                  <a:srgbClr val="767676"/>
-                </a:solidFill>
-                <a:latin typeface="Calibri"/>
-              </a:defRPr>
-            </a:pPr>
-            <a:r>
-              <a:t>ON ADOPTION BARRIERS</a:t>
-            </a:r>
-          </a:p>
-        </p:txBody>
-      </p:sp>
-      <p:sp>
-        <p:nvSpPr>
-          <p:cNvPr id="14" name="TextBox 13"/>
-          <p:cNvSpPr txBox="1"/>
-          <p:nvPr/>
-        </p:nvSpPr>
-        <p:spPr>
-          <a:xfrm>
-            <a:off x="1097280" y="3136392"/>
-            <a:ext cx="7315200" cy="548640"/>
-          </a:xfrm>
-          <a:prstGeom prst="rect">
-            <a:avLst/>
-          </a:prstGeom>
-          <a:noFill/>
-        </p:spPr>
-        <p:txBody>
-          <a:bodyPr wrap="square">
-            <a:spAutoFit/>
-          </a:bodyPr>
-          <a:lstStyle/>
-          <a:p>
-            <a:pPr algn="l">
-              <a:defRPr sz="1100" b="0" i="1">
+          <p:cNvPr id="37" name="TextBox 36"/>
+          <p:cNvSpPr txBox="1"/>
+          <p:nvPr/>
+        </p:nvSpPr>
+        <p:spPr>
+          <a:xfrm>
+            <a:off x="731520" y="4069080"/>
+            <a:ext cx="2743200" cy="274320"/>
+          </a:xfrm>
+          <a:prstGeom prst="rect">
+            <a:avLst/>
+          </a:prstGeom>
+          <a:noFill/>
+        </p:spPr>
+        <p:txBody>
+          <a:bodyPr wrap="square">
+            <a:spAutoFit/>
+          </a:bodyPr>
+          <a:lstStyle/>
+          <a:p>
+            <a:pPr algn="l">
+              <a:defRPr sz="1100" b="0" i="0">
+                <a:solidFill>
+                  <a:srgbClr val="1C1C1E"/>
+                </a:solidFill>
+                <a:latin typeface="Calibri"/>
+              </a:defRPr>
+            </a:pPr>
+            <a:r>
+              <a:t>Gross value</a:t>
+            </a:r>
+          </a:p>
+        </p:txBody>
+      </p:sp>
+      <p:sp>
+        <p:nvSpPr>
+          <p:cNvPr id="38" name="TextBox 37"/>
+          <p:cNvSpPr txBox="1"/>
+          <p:nvPr/>
+        </p:nvSpPr>
+        <p:spPr>
+          <a:xfrm>
+            <a:off x="3474720" y="4069080"/>
+            <a:ext cx="2743200" cy="274320"/>
+          </a:xfrm>
+          <a:prstGeom prst="rect">
+            <a:avLst/>
+          </a:prstGeom>
+          <a:noFill/>
+        </p:spPr>
+        <p:txBody>
+          <a:bodyPr wrap="square">
+            <a:spAutoFit/>
+          </a:bodyPr>
+          <a:lstStyle/>
+          <a:p>
+            <a:pPr algn="l">
+              <a:defRPr sz="1100" b="0" i="0">
                 <a:solidFill>
                   <a:srgbClr val="3A3A3C"/>
                 </a:solidFill>
@@ -23405,35 +23028,35 @@
               </a:defRPr>
             </a:pPr>
             <a:r>
-              <a:t>“The resistance comes from customer-facing teams because they worry AI will produce confident-sounding wrong answers that damage dealer relationships they have spent years building.”</a:t>
-            </a:r>
-          </a:p>
-        </p:txBody>
-      </p:sp>
-      <p:sp>
-        <p:nvSpPr>
-          <p:cNvPr id="15" name="TextBox 14"/>
-          <p:cNvSpPr txBox="1"/>
-          <p:nvPr/>
-        </p:nvSpPr>
-        <p:spPr>
-          <a:xfrm>
-            <a:off x="8686800" y="3200400"/>
-            <a:ext cx="2560320" cy="457200"/>
-          </a:xfrm>
-          <a:prstGeom prst="rect">
-            <a:avLst/>
-          </a:prstGeom>
-          <a:noFill/>
-        </p:spPr>
-        <p:txBody>
-          <a:bodyPr wrap="square">
-            <a:spAutoFit/>
-          </a:bodyPr>
-          <a:lstStyle/>
-          <a:p>
-            <a:pPr algn="l">
-              <a:defRPr sz="1000" b="1" i="0">
+              <a:t>$6.1M</a:t>
+            </a:r>
+          </a:p>
+        </p:txBody>
+      </p:sp>
+      <p:sp>
+        <p:nvSpPr>
+          <p:cNvPr id="39" name="TextBox 38"/>
+          <p:cNvSpPr txBox="1"/>
+          <p:nvPr/>
+        </p:nvSpPr>
+        <p:spPr>
+          <a:xfrm>
+            <a:off x="6217920" y="4069080"/>
+            <a:ext cx="2743200" cy="274320"/>
+          </a:xfrm>
+          <a:prstGeom prst="rect">
+            <a:avLst/>
+          </a:prstGeom>
+          <a:noFill/>
+        </p:spPr>
+        <p:txBody>
+          <a:bodyPr wrap="square">
+            <a:spAutoFit/>
+          </a:bodyPr>
+          <a:lstStyle/>
+          <a:p>
+            <a:pPr algn="l">
+              <a:defRPr sz="1100" b="1" i="0">
                 <a:solidFill>
                   <a:srgbClr val="1C1C1E"/>
                 </a:solidFill>
@@ -23441,161 +23064,35 @@
               </a:defRPr>
             </a:pPr>
             <a:r>
-              <a:t>→ Human-in-the-loop is mandatory</a:t>
-            </a:r>
-          </a:p>
-        </p:txBody>
-      </p:sp>
-      <p:sp>
-        <p:nvSpPr>
-          <p:cNvPr id="16" name="Rounded Rectangle 15"/>
-          <p:cNvSpPr/>
-          <p:nvPr/>
-        </p:nvSpPr>
-        <p:spPr>
-          <a:xfrm>
-            <a:off x="731520" y="4069080"/>
-            <a:ext cx="10789920" cy="1005840"/>
-          </a:xfrm>
-          <a:prstGeom prst="roundRect">
-            <a:avLst>
-              <a:gd name="adj" fmla="val 4000"/>
-            </a:avLst>
-          </a:prstGeom>
-          <a:solidFill>
-            <a:srgbClr val="FFFFFF"/>
-          </a:solidFill>
-          <a:ln w="12700">
-            <a:solidFill>
-              <a:srgbClr val="E0E0DE"/>
-            </a:solidFill>
-          </a:ln>
-        </p:spPr>
-        <p:style>
-          <a:lnRef idx="1">
-            <a:schemeClr val="accent1"/>
-          </a:lnRef>
-          <a:fillRef idx="3">
-            <a:schemeClr val="accent1"/>
-          </a:fillRef>
-          <a:effectRef idx="2">
-            <a:schemeClr val="accent1"/>
-          </a:effectRef>
-          <a:fontRef idx="minor">
-            <a:schemeClr val="lt1"/>
-          </a:fontRef>
-        </p:style>
-        <p:txBody>
-          <a:bodyPr rtlCol="0" anchor="ctr"/>
-          <a:lstStyle/>
-          <a:p>
-            <a:pPr algn="ctr"/>
-          </a:p>
-        </p:txBody>
-      </p:sp>
-      <p:sp>
-        <p:nvSpPr>
-          <p:cNvPr id="17" name="Rectangle 16"/>
-          <p:cNvSpPr/>
-          <p:nvPr/>
-        </p:nvSpPr>
-        <p:spPr>
-          <a:xfrm>
-            <a:off x="731520" y="4069080"/>
-            <a:ext cx="50800" cy="1005840"/>
-          </a:xfrm>
-          <a:prstGeom prst="rect">
-            <a:avLst/>
-          </a:prstGeom>
-          <a:solidFill>
-            <a:srgbClr val="767676"/>
-          </a:solidFill>
-          <a:ln>
-            <a:noFill/>
-          </a:ln>
-        </p:spPr>
-        <p:style>
-          <a:lnRef idx="1">
-            <a:schemeClr val="accent1"/>
-          </a:lnRef>
-          <a:fillRef idx="3">
-            <a:schemeClr val="accent1"/>
-          </a:fillRef>
-          <a:effectRef idx="2">
-            <a:schemeClr val="accent1"/>
-          </a:effectRef>
-          <a:fontRef idx="minor">
-            <a:schemeClr val="lt1"/>
-          </a:fontRef>
-        </p:style>
-        <p:txBody>
-          <a:bodyPr rtlCol="0" anchor="ctr"/>
-          <a:lstStyle/>
-          <a:p>
-            <a:pPr algn="ctr"/>
-          </a:p>
-        </p:txBody>
-      </p:sp>
-      <p:sp>
-        <p:nvSpPr>
-          <p:cNvPr id="18" name="TextBox 17"/>
-          <p:cNvSpPr txBox="1"/>
-          <p:nvPr/>
-        </p:nvSpPr>
-        <p:spPr>
-          <a:xfrm>
-            <a:off x="1097280" y="4114800"/>
-            <a:ext cx="1828800" cy="182880"/>
-          </a:xfrm>
-          <a:prstGeom prst="rect">
-            <a:avLst/>
-          </a:prstGeom>
-          <a:noFill/>
-        </p:spPr>
-        <p:txBody>
-          <a:bodyPr wrap="square">
-            <a:spAutoFit/>
-          </a:bodyPr>
-          <a:lstStyle/>
-          <a:p>
-            <a:pPr algn="l">
-              <a:defRPr sz="900" b="1" i="0">
-                <a:solidFill>
-                  <a:srgbClr val="767676"/>
-                </a:solidFill>
-                <a:latin typeface="Calibri"/>
-              </a:defRPr>
-            </a:pPr>
-            <a:r>
-              <a:t>ON COMPETITIVE ADVANTAGE</a:t>
-            </a:r>
-          </a:p>
-        </p:txBody>
-      </p:sp>
-      <p:sp>
-        <p:nvSpPr>
-          <p:cNvPr id="19" name="TextBox 18"/>
-          <p:cNvSpPr txBox="1"/>
-          <p:nvPr/>
-        </p:nvSpPr>
-        <p:spPr>
-          <a:xfrm>
-            <a:off x="1097280" y="4325112"/>
-            <a:ext cx="7315200" cy="548640"/>
-          </a:xfrm>
-          <a:prstGeom prst="rect">
-            <a:avLst/>
-          </a:prstGeom>
-          <a:noFill/>
-        </p:spPr>
-        <p:txBody>
-          <a:bodyPr wrap="square">
-            <a:spAutoFit/>
-          </a:bodyPr>
-          <a:lstStyle/>
-          <a:p>
-            <a:pPr algn="l">
-              <a:defRPr sz="1100" b="0" i="1">
+              <a:t>$12.9M</a:t>
+            </a:r>
+          </a:p>
+        </p:txBody>
+      </p:sp>
+      <p:sp>
+        <p:nvSpPr>
+          <p:cNvPr id="40" name="TextBox 39"/>
+          <p:cNvSpPr txBox="1"/>
+          <p:nvPr/>
+        </p:nvSpPr>
+        <p:spPr>
+          <a:xfrm>
+            <a:off x="8961120" y="4069080"/>
+            <a:ext cx="2743200" cy="274320"/>
+          </a:xfrm>
+          <a:prstGeom prst="rect">
+            <a:avLst/>
+          </a:prstGeom>
+          <a:noFill/>
+        </p:spPr>
+        <p:txBody>
+          <a:bodyPr wrap="square">
+            <a:spAutoFit/>
+          </a:bodyPr>
+          <a:lstStyle/>
+          <a:p>
+            <a:pPr algn="l">
+              <a:defRPr sz="1100" b="0" i="0">
                 <a:solidFill>
                   <a:srgbClr val="3A3A3C"/>
                 </a:solidFill>
@@ -23603,35 +23100,35 @@
               </a:defRPr>
             </a:pPr>
             <a:r>
-              <a:t>“A rider on Shimano [SRAM's largest competitor] uses the app to check if parts fit. A Hammerhead rider uses it to train, navigate, and talk to every component on the bike. That is a fundamentally different data relationship.”</a:t>
-            </a:r>
-          </a:p>
-        </p:txBody>
-      </p:sp>
-      <p:sp>
-        <p:nvSpPr>
-          <p:cNvPr id="20" name="TextBox 19"/>
-          <p:cNvSpPr txBox="1"/>
-          <p:nvPr/>
-        </p:nvSpPr>
-        <p:spPr>
-          <a:xfrm>
-            <a:off x="8686800" y="4389120"/>
-            <a:ext cx="2560320" cy="457200"/>
-          </a:xfrm>
-          <a:prstGeom prst="rect">
-            <a:avLst/>
-          </a:prstGeom>
-          <a:noFill/>
-        </p:spPr>
-        <p:txBody>
-          <a:bodyPr wrap="square">
-            <a:spAutoFit/>
-          </a:bodyPr>
-          <a:lstStyle/>
-          <a:p>
-            <a:pPr algn="l">
-              <a:defRPr sz="1000" b="1" i="0">
+              <a:t>$26.0M</a:t>
+            </a:r>
+          </a:p>
+        </p:txBody>
+      </p:sp>
+      <p:sp>
+        <p:nvSpPr>
+          <p:cNvPr id="41" name="TextBox 40"/>
+          <p:cNvSpPr txBox="1"/>
+          <p:nvPr/>
+        </p:nvSpPr>
+        <p:spPr>
+          <a:xfrm>
+            <a:off x="731520" y="4434840"/>
+            <a:ext cx="2743200" cy="274320"/>
+          </a:xfrm>
+          <a:prstGeom prst="rect">
+            <a:avLst/>
+          </a:prstGeom>
+          <a:noFill/>
+        </p:spPr>
+        <p:txBody>
+          <a:bodyPr wrap="square">
+            <a:spAutoFit/>
+          </a:bodyPr>
+          <a:lstStyle/>
+          <a:p>
+            <a:pPr algn="l">
+              <a:defRPr sz="1100" b="0" i="0">
                 <a:solidFill>
                   <a:srgbClr val="1C1C1E"/>
                 </a:solidFill>
@@ -23639,161 +23136,35 @@
               </a:defRPr>
             </a:pPr>
             <a:r>
-              <a:t>→ Hammerhead is SRAM's real AI moat</a:t>
-            </a:r>
-          </a:p>
-        </p:txBody>
-      </p:sp>
-      <p:sp>
-        <p:nvSpPr>
-          <p:cNvPr id="21" name="Rounded Rectangle 20"/>
-          <p:cNvSpPr/>
-          <p:nvPr/>
-        </p:nvSpPr>
-        <p:spPr>
-          <a:xfrm>
-            <a:off x="731520" y="5257800"/>
-            <a:ext cx="10789920" cy="1005840"/>
-          </a:xfrm>
-          <a:prstGeom prst="roundRect">
-            <a:avLst>
-              <a:gd name="adj" fmla="val 4000"/>
-            </a:avLst>
-          </a:prstGeom>
-          <a:solidFill>
-            <a:srgbClr val="FFFFFF"/>
-          </a:solidFill>
-          <a:ln w="12700">
-            <a:solidFill>
-              <a:srgbClr val="E0E0DE"/>
-            </a:solidFill>
-          </a:ln>
-        </p:spPr>
-        <p:style>
-          <a:lnRef idx="1">
-            <a:schemeClr val="accent1"/>
-          </a:lnRef>
-          <a:fillRef idx="3">
-            <a:schemeClr val="accent1"/>
-          </a:fillRef>
-          <a:effectRef idx="2">
-            <a:schemeClr val="accent1"/>
-          </a:effectRef>
-          <a:fontRef idx="minor">
-            <a:schemeClr val="lt1"/>
-          </a:fontRef>
-        </p:style>
-        <p:txBody>
-          <a:bodyPr rtlCol="0" anchor="ctr"/>
-          <a:lstStyle/>
-          <a:p>
-            <a:pPr algn="ctr"/>
-          </a:p>
-        </p:txBody>
-      </p:sp>
-      <p:sp>
-        <p:nvSpPr>
-          <p:cNvPr id="22" name="Rectangle 21"/>
-          <p:cNvSpPr/>
-          <p:nvPr/>
-        </p:nvSpPr>
-        <p:spPr>
-          <a:xfrm>
-            <a:off x="731520" y="5257800"/>
-            <a:ext cx="50800" cy="1005840"/>
-          </a:xfrm>
-          <a:prstGeom prst="rect">
-            <a:avLst/>
-          </a:prstGeom>
-          <a:solidFill>
-            <a:srgbClr val="767676"/>
-          </a:solidFill>
-          <a:ln>
-            <a:noFill/>
-          </a:ln>
-        </p:spPr>
-        <p:style>
-          <a:lnRef idx="1">
-            <a:schemeClr val="accent1"/>
-          </a:lnRef>
-          <a:fillRef idx="3">
-            <a:schemeClr val="accent1"/>
-          </a:fillRef>
-          <a:effectRef idx="2">
-            <a:schemeClr val="accent1"/>
-          </a:effectRef>
-          <a:fontRef idx="minor">
-            <a:schemeClr val="lt1"/>
-          </a:fontRef>
-        </p:style>
-        <p:txBody>
-          <a:bodyPr rtlCol="0" anchor="ctr"/>
-          <a:lstStyle/>
-          <a:p>
-            <a:pPr algn="ctr"/>
-          </a:p>
-        </p:txBody>
-      </p:sp>
-      <p:sp>
-        <p:nvSpPr>
-          <p:cNvPr id="23" name="TextBox 22"/>
-          <p:cNvSpPr txBox="1"/>
-          <p:nvPr/>
-        </p:nvSpPr>
-        <p:spPr>
-          <a:xfrm>
-            <a:off x="1097280" y="5303520"/>
-            <a:ext cx="1828800" cy="182880"/>
-          </a:xfrm>
-          <a:prstGeom prst="rect">
-            <a:avLst/>
-          </a:prstGeom>
-          <a:noFill/>
-        </p:spPr>
-        <p:txBody>
-          <a:bodyPr wrap="square">
-            <a:spAutoFit/>
-          </a:bodyPr>
-          <a:lstStyle/>
-          <a:p>
-            <a:pPr algn="l">
-              <a:defRPr sz="900" b="1" i="0">
-                <a:solidFill>
-                  <a:srgbClr val="767676"/>
-                </a:solidFill>
-                <a:latin typeface="Calibri"/>
-              </a:defRPr>
-            </a:pPr>
-            <a:r>
-              <a:t>ON SUCCESS CRITERIA</a:t>
-            </a:r>
-          </a:p>
-        </p:txBody>
-      </p:sp>
-      <p:sp>
-        <p:nvSpPr>
-          <p:cNvPr id="24" name="TextBox 23"/>
-          <p:cNvSpPr txBox="1"/>
-          <p:nvPr/>
-        </p:nvSpPr>
-        <p:spPr>
-          <a:xfrm>
-            <a:off x="1097280" y="5513832"/>
-            <a:ext cx="7315200" cy="548640"/>
-          </a:xfrm>
-          <a:prstGeom prst="rect">
-            <a:avLst/>
-          </a:prstGeom>
-          <a:noFill/>
-        </p:spPr>
-        <p:txBody>
-          <a:bodyPr wrap="square">
-            <a:spAutoFit/>
-          </a:bodyPr>
-          <a:lstStyle/>
-          <a:p>
-            <a:pPr algn="l">
-              <a:defRPr sz="1100" b="0" i="1">
+              <a:t>Setup costs</a:t>
+            </a:r>
+          </a:p>
+        </p:txBody>
+      </p:sp>
+      <p:sp>
+        <p:nvSpPr>
+          <p:cNvPr id="42" name="TextBox 41"/>
+          <p:cNvSpPr txBox="1"/>
+          <p:nvPr/>
+        </p:nvSpPr>
+        <p:spPr>
+          <a:xfrm>
+            <a:off x="3474720" y="4434840"/>
+            <a:ext cx="2743200" cy="274320"/>
+          </a:xfrm>
+          <a:prstGeom prst="rect">
+            <a:avLst/>
+          </a:prstGeom>
+          <a:noFill/>
+        </p:spPr>
+        <p:txBody>
+          <a:bodyPr wrap="square">
+            <a:spAutoFit/>
+          </a:bodyPr>
+          <a:lstStyle/>
+          <a:p>
+            <a:pPr algn="l">
+              <a:defRPr sz="1100" b="0" i="0">
                 <a:solidFill>
                   <a:srgbClr val="3A3A3C"/>
                 </a:solidFill>
@@ -23801,35 +23172,35 @@
               </a:defRPr>
             </a:pPr>
             <a:r>
-              <a:t>“I want one workflow measurably faster, measurably more accurate, with no regression in dealer satisfaction scores.”</a:t>
-            </a:r>
-          </a:p>
-        </p:txBody>
-      </p:sp>
-      <p:sp>
-        <p:nvSpPr>
-          <p:cNvPr id="25" name="TextBox 24"/>
-          <p:cNvSpPr txBox="1"/>
-          <p:nvPr/>
-        </p:nvSpPr>
-        <p:spPr>
-          <a:xfrm>
-            <a:off x="8686800" y="5577840"/>
-            <a:ext cx="2560320" cy="457200"/>
-          </a:xfrm>
-          <a:prstGeom prst="rect">
-            <a:avLst/>
-          </a:prstGeom>
-          <a:noFill/>
-        </p:spPr>
-        <p:txBody>
-          <a:bodyPr wrap="square">
-            <a:spAutoFit/>
-          </a:bodyPr>
-          <a:lstStyle/>
-          <a:p>
-            <a:pPr algn="l">
-              <a:defRPr sz="1000" b="1" i="0">
+              <a:t>($1.2M)</a:t>
+            </a:r>
+          </a:p>
+        </p:txBody>
+      </p:sp>
+      <p:sp>
+        <p:nvSpPr>
+          <p:cNvPr id="43" name="TextBox 42"/>
+          <p:cNvSpPr txBox="1"/>
+          <p:nvPr/>
+        </p:nvSpPr>
+        <p:spPr>
+          <a:xfrm>
+            <a:off x="6217920" y="4434840"/>
+            <a:ext cx="2743200" cy="274320"/>
+          </a:xfrm>
+          <a:prstGeom prst="rect">
+            <a:avLst/>
+          </a:prstGeom>
+          <a:noFill/>
+        </p:spPr>
+        <p:txBody>
+          <a:bodyPr wrap="square">
+            <a:spAutoFit/>
+          </a:bodyPr>
+          <a:lstStyle/>
+          <a:p>
+            <a:pPr algn="l">
+              <a:defRPr sz="1100" b="1" i="0">
                 <a:solidFill>
                   <a:srgbClr val="1C1C1E"/>
                 </a:solidFill>
@@ -23837,14 +23208,482 @@
               </a:defRPr>
             </a:pPr>
             <a:r>
-              <a:t>→ Aligns with our 90-day pilot targets</a:t>
-            </a:r>
-          </a:p>
-        </p:txBody>
-      </p:sp>
-      <p:sp>
-        <p:nvSpPr>
-          <p:cNvPr id="26" name="TextBox 25"/>
+              <a:t>($2.0M)</a:t>
+            </a:r>
+          </a:p>
+        </p:txBody>
+      </p:sp>
+      <p:sp>
+        <p:nvSpPr>
+          <p:cNvPr id="44" name="TextBox 43"/>
+          <p:cNvSpPr txBox="1"/>
+          <p:nvPr/>
+        </p:nvSpPr>
+        <p:spPr>
+          <a:xfrm>
+            <a:off x="8961120" y="4434840"/>
+            <a:ext cx="2743200" cy="274320"/>
+          </a:xfrm>
+          <a:prstGeom prst="rect">
+            <a:avLst/>
+          </a:prstGeom>
+          <a:noFill/>
+        </p:spPr>
+        <p:txBody>
+          <a:bodyPr wrap="square">
+            <a:spAutoFit/>
+          </a:bodyPr>
+          <a:lstStyle/>
+          <a:p>
+            <a:pPr algn="l">
+              <a:defRPr sz="1100" b="0" i="0">
+                <a:solidFill>
+                  <a:srgbClr val="3A3A3C"/>
+                </a:solidFill>
+                <a:latin typeface="Calibri"/>
+              </a:defRPr>
+            </a:pPr>
+            <a:r>
+              <a:t>($2.5M)</a:t>
+            </a:r>
+          </a:p>
+        </p:txBody>
+      </p:sp>
+      <p:sp>
+        <p:nvSpPr>
+          <p:cNvPr id="45" name="TextBox 44"/>
+          <p:cNvSpPr txBox="1"/>
+          <p:nvPr/>
+        </p:nvSpPr>
+        <p:spPr>
+          <a:xfrm>
+            <a:off x="731520" y="4800600"/>
+            <a:ext cx="2743200" cy="274320"/>
+          </a:xfrm>
+          <a:prstGeom prst="rect">
+            <a:avLst/>
+          </a:prstGeom>
+          <a:noFill/>
+        </p:spPr>
+        <p:txBody>
+          <a:bodyPr wrap="square">
+            <a:spAutoFit/>
+          </a:bodyPr>
+          <a:lstStyle/>
+          <a:p>
+            <a:pPr algn="l">
+              <a:defRPr sz="1100" b="0" i="0">
+                <a:solidFill>
+                  <a:srgbClr val="1C1C1E"/>
+                </a:solidFill>
+                <a:latin typeface="Calibri"/>
+              </a:defRPr>
+            </a:pPr>
+            <a:r>
+              <a:t>Operating costs</a:t>
+            </a:r>
+          </a:p>
+        </p:txBody>
+      </p:sp>
+      <p:sp>
+        <p:nvSpPr>
+          <p:cNvPr id="46" name="TextBox 45"/>
+          <p:cNvSpPr txBox="1"/>
+          <p:nvPr/>
+        </p:nvSpPr>
+        <p:spPr>
+          <a:xfrm>
+            <a:off x="3474720" y="4800600"/>
+            <a:ext cx="2743200" cy="274320"/>
+          </a:xfrm>
+          <a:prstGeom prst="rect">
+            <a:avLst/>
+          </a:prstGeom>
+          <a:noFill/>
+        </p:spPr>
+        <p:txBody>
+          <a:bodyPr wrap="square">
+            <a:spAutoFit/>
+          </a:bodyPr>
+          <a:lstStyle/>
+          <a:p>
+            <a:pPr algn="l">
+              <a:defRPr sz="1100" b="0" i="0">
+                <a:solidFill>
+                  <a:srgbClr val="3A3A3C"/>
+                </a:solidFill>
+                <a:latin typeface="Calibri"/>
+              </a:defRPr>
+            </a:pPr>
+            <a:r>
+              <a:t>($0.4M)</a:t>
+            </a:r>
+          </a:p>
+        </p:txBody>
+      </p:sp>
+      <p:sp>
+        <p:nvSpPr>
+          <p:cNvPr id="47" name="TextBox 46"/>
+          <p:cNvSpPr txBox="1"/>
+          <p:nvPr/>
+        </p:nvSpPr>
+        <p:spPr>
+          <a:xfrm>
+            <a:off x="6217920" y="4800600"/>
+            <a:ext cx="2743200" cy="274320"/>
+          </a:xfrm>
+          <a:prstGeom prst="rect">
+            <a:avLst/>
+          </a:prstGeom>
+          <a:noFill/>
+        </p:spPr>
+        <p:txBody>
+          <a:bodyPr wrap="square">
+            <a:spAutoFit/>
+          </a:bodyPr>
+          <a:lstStyle/>
+          <a:p>
+            <a:pPr algn="l">
+              <a:defRPr sz="1100" b="1" i="0">
+                <a:solidFill>
+                  <a:srgbClr val="1C1C1E"/>
+                </a:solidFill>
+                <a:latin typeface="Calibri"/>
+              </a:defRPr>
+            </a:pPr>
+            <a:r>
+              <a:t>($0.7M)</a:t>
+            </a:r>
+          </a:p>
+        </p:txBody>
+      </p:sp>
+      <p:sp>
+        <p:nvSpPr>
+          <p:cNvPr id="48" name="TextBox 47"/>
+          <p:cNvSpPr txBox="1"/>
+          <p:nvPr/>
+        </p:nvSpPr>
+        <p:spPr>
+          <a:xfrm>
+            <a:off x="8961120" y="4800600"/>
+            <a:ext cx="2743200" cy="274320"/>
+          </a:xfrm>
+          <a:prstGeom prst="rect">
+            <a:avLst/>
+          </a:prstGeom>
+          <a:noFill/>
+        </p:spPr>
+        <p:txBody>
+          <a:bodyPr wrap="square">
+            <a:spAutoFit/>
+          </a:bodyPr>
+          <a:lstStyle/>
+          <a:p>
+            <a:pPr algn="l">
+              <a:defRPr sz="1100" b="0" i="0">
+                <a:solidFill>
+                  <a:srgbClr val="3A3A3C"/>
+                </a:solidFill>
+                <a:latin typeface="Calibri"/>
+              </a:defRPr>
+            </a:pPr>
+            <a:r>
+              <a:t>($1.0M)</a:t>
+            </a:r>
+          </a:p>
+        </p:txBody>
+      </p:sp>
+      <p:sp>
+        <p:nvSpPr>
+          <p:cNvPr id="49" name="TextBox 48"/>
+          <p:cNvSpPr txBox="1"/>
+          <p:nvPr/>
+        </p:nvSpPr>
+        <p:spPr>
+          <a:xfrm>
+            <a:off x="731520" y="5166360"/>
+            <a:ext cx="2743200" cy="274320"/>
+          </a:xfrm>
+          <a:prstGeom prst="rect">
+            <a:avLst/>
+          </a:prstGeom>
+          <a:noFill/>
+        </p:spPr>
+        <p:txBody>
+          <a:bodyPr wrap="square">
+            <a:spAutoFit/>
+          </a:bodyPr>
+          <a:lstStyle/>
+          <a:p>
+            <a:pPr algn="l">
+              <a:defRPr sz="1100" b="1" i="0">
+                <a:solidFill>
+                  <a:srgbClr val="1C1C1E"/>
+                </a:solidFill>
+                <a:latin typeface="Calibri"/>
+              </a:defRPr>
+            </a:pPr>
+            <a:r>
+              <a:t>Net Year-1 value</a:t>
+            </a:r>
+          </a:p>
+        </p:txBody>
+      </p:sp>
+      <p:sp>
+        <p:nvSpPr>
+          <p:cNvPr id="50" name="TextBox 49"/>
+          <p:cNvSpPr txBox="1"/>
+          <p:nvPr/>
+        </p:nvSpPr>
+        <p:spPr>
+          <a:xfrm>
+            <a:off x="3474720" y="5166360"/>
+            <a:ext cx="2743200" cy="274320"/>
+          </a:xfrm>
+          <a:prstGeom prst="rect">
+            <a:avLst/>
+          </a:prstGeom>
+          <a:noFill/>
+        </p:spPr>
+        <p:txBody>
+          <a:bodyPr wrap="square">
+            <a:spAutoFit/>
+          </a:bodyPr>
+          <a:lstStyle/>
+          <a:p>
+            <a:pPr algn="l">
+              <a:defRPr sz="1100" b="1" i="0">
+                <a:solidFill>
+                  <a:srgbClr val="1C1C1E"/>
+                </a:solidFill>
+                <a:latin typeface="Calibri"/>
+              </a:defRPr>
+            </a:pPr>
+            <a:r>
+              <a:t>$4.5M</a:t>
+            </a:r>
+          </a:p>
+        </p:txBody>
+      </p:sp>
+      <p:sp>
+        <p:nvSpPr>
+          <p:cNvPr id="51" name="TextBox 50"/>
+          <p:cNvSpPr txBox="1"/>
+          <p:nvPr/>
+        </p:nvSpPr>
+        <p:spPr>
+          <a:xfrm>
+            <a:off x="6217920" y="5166360"/>
+            <a:ext cx="2743200" cy="274320"/>
+          </a:xfrm>
+          <a:prstGeom prst="rect">
+            <a:avLst/>
+          </a:prstGeom>
+          <a:noFill/>
+        </p:spPr>
+        <p:txBody>
+          <a:bodyPr wrap="square">
+            <a:spAutoFit/>
+          </a:bodyPr>
+          <a:lstStyle/>
+          <a:p>
+            <a:pPr algn="l">
+              <a:defRPr sz="1100" b="1" i="0">
+                <a:solidFill>
+                  <a:srgbClr val="1C1C1E"/>
+                </a:solidFill>
+                <a:latin typeface="Calibri"/>
+              </a:defRPr>
+            </a:pPr>
+            <a:r>
+              <a:t>$10.2M</a:t>
+            </a:r>
+          </a:p>
+        </p:txBody>
+      </p:sp>
+      <p:sp>
+        <p:nvSpPr>
+          <p:cNvPr id="52" name="TextBox 51"/>
+          <p:cNvSpPr txBox="1"/>
+          <p:nvPr/>
+        </p:nvSpPr>
+        <p:spPr>
+          <a:xfrm>
+            <a:off x="8961120" y="5166360"/>
+            <a:ext cx="2743200" cy="274320"/>
+          </a:xfrm>
+          <a:prstGeom prst="rect">
+            <a:avLst/>
+          </a:prstGeom>
+          <a:noFill/>
+        </p:spPr>
+        <p:txBody>
+          <a:bodyPr wrap="square">
+            <a:spAutoFit/>
+          </a:bodyPr>
+          <a:lstStyle/>
+          <a:p>
+            <a:pPr algn="l">
+              <a:defRPr sz="1100" b="1" i="0">
+                <a:solidFill>
+                  <a:srgbClr val="1C1C1E"/>
+                </a:solidFill>
+                <a:latin typeface="Calibri"/>
+              </a:defRPr>
+            </a:pPr>
+            <a:r>
+              <a:t>$22.5M</a:t>
+            </a:r>
+          </a:p>
+        </p:txBody>
+      </p:sp>
+      <p:sp>
+        <p:nvSpPr>
+          <p:cNvPr id="53" name="TextBox 52"/>
+          <p:cNvSpPr txBox="1"/>
+          <p:nvPr/>
+        </p:nvSpPr>
+        <p:spPr>
+          <a:xfrm>
+            <a:off x="731520" y="5532120"/>
+            <a:ext cx="2743200" cy="274320"/>
+          </a:xfrm>
+          <a:prstGeom prst="rect">
+            <a:avLst/>
+          </a:prstGeom>
+          <a:noFill/>
+        </p:spPr>
+        <p:txBody>
+          <a:bodyPr wrap="square">
+            <a:spAutoFit/>
+          </a:bodyPr>
+          <a:lstStyle/>
+          <a:p>
+            <a:pPr algn="l">
+              <a:defRPr sz="1100" b="1" i="0">
+                <a:solidFill>
+                  <a:srgbClr val="1C1C1E"/>
+                </a:solidFill>
+                <a:latin typeface="Calibri"/>
+              </a:defRPr>
+            </a:pPr>
+            <a:r>
+              <a:t>Return on spend</a:t>
+            </a:r>
+          </a:p>
+        </p:txBody>
+      </p:sp>
+      <p:sp>
+        <p:nvSpPr>
+          <p:cNvPr id="54" name="TextBox 53"/>
+          <p:cNvSpPr txBox="1"/>
+          <p:nvPr/>
+        </p:nvSpPr>
+        <p:spPr>
+          <a:xfrm>
+            <a:off x="3474720" y="5532120"/>
+            <a:ext cx="2743200" cy="274320"/>
+          </a:xfrm>
+          <a:prstGeom prst="rect">
+            <a:avLst/>
+          </a:prstGeom>
+          <a:noFill/>
+        </p:spPr>
+        <p:txBody>
+          <a:bodyPr wrap="square">
+            <a:spAutoFit/>
+          </a:bodyPr>
+          <a:lstStyle/>
+          <a:p>
+            <a:pPr algn="l">
+              <a:defRPr sz="1100" b="1" i="0">
+                <a:solidFill>
+                  <a:srgbClr val="1C1C1E"/>
+                </a:solidFill>
+                <a:latin typeface="Calibri"/>
+              </a:defRPr>
+            </a:pPr>
+            <a:r>
+              <a:t>2.8x</a:t>
+            </a:r>
+          </a:p>
+        </p:txBody>
+      </p:sp>
+      <p:sp>
+        <p:nvSpPr>
+          <p:cNvPr id="55" name="TextBox 54"/>
+          <p:cNvSpPr txBox="1"/>
+          <p:nvPr/>
+        </p:nvSpPr>
+        <p:spPr>
+          <a:xfrm>
+            <a:off x="6217920" y="5532120"/>
+            <a:ext cx="2743200" cy="274320"/>
+          </a:xfrm>
+          <a:prstGeom prst="rect">
+            <a:avLst/>
+          </a:prstGeom>
+          <a:noFill/>
+        </p:spPr>
+        <p:txBody>
+          <a:bodyPr wrap="square">
+            <a:spAutoFit/>
+          </a:bodyPr>
+          <a:lstStyle/>
+          <a:p>
+            <a:pPr algn="l">
+              <a:defRPr sz="1100" b="1" i="0">
+                <a:solidFill>
+                  <a:srgbClr val="1C1C1E"/>
+                </a:solidFill>
+                <a:latin typeface="Calibri"/>
+              </a:defRPr>
+            </a:pPr>
+            <a:r>
+              <a:t>3.8x</a:t>
+            </a:r>
+          </a:p>
+        </p:txBody>
+      </p:sp>
+      <p:sp>
+        <p:nvSpPr>
+          <p:cNvPr id="56" name="TextBox 55"/>
+          <p:cNvSpPr txBox="1"/>
+          <p:nvPr/>
+        </p:nvSpPr>
+        <p:spPr>
+          <a:xfrm>
+            <a:off x="8961120" y="5532120"/>
+            <a:ext cx="2743200" cy="274320"/>
+          </a:xfrm>
+          <a:prstGeom prst="rect">
+            <a:avLst/>
+          </a:prstGeom>
+          <a:noFill/>
+        </p:spPr>
+        <p:txBody>
+          <a:bodyPr wrap="square">
+            <a:spAutoFit/>
+          </a:bodyPr>
+          <a:lstStyle/>
+          <a:p>
+            <a:pPr algn="l">
+              <a:defRPr sz="1100" b="1" i="0">
+                <a:solidFill>
+                  <a:srgbClr val="1C1C1E"/>
+                </a:solidFill>
+                <a:latin typeface="Calibri"/>
+              </a:defRPr>
+            </a:pPr>
+            <a:r>
+              <a:t>6.4x</a:t>
+            </a:r>
+          </a:p>
+        </p:txBody>
+      </p:sp>
+      <p:sp>
+        <p:nvSpPr>
+          <p:cNvPr id="57" name="TextBox 56"/>
           <p:cNvSpPr txBox="1"/>
           <p:nvPr/>
         </p:nvSpPr>
@@ -23873,7 +23712,7 @@
               </a:defRPr>
             </a:pPr>
             <a:r>
-              <a:t>APPENDIX A2</a:t>
+              <a:t>APPENDIX A1</a:t>
             </a:r>
           </a:p>
         </p:txBody>
@@ -23971,6 +23810,1011 @@
               </a:defRPr>
             </a:pPr>
             <a:r>
+              <a:t>Interview with Jordan Hartsell, VP Digital Products</a:t>
+            </a:r>
+          </a:p>
+        </p:txBody>
+      </p:sp>
+      <p:sp>
+        <p:nvSpPr>
+          <p:cNvPr id="4" name="Rectangle 3"/>
+          <p:cNvSpPr/>
+          <p:nvPr/>
+        </p:nvSpPr>
+        <p:spPr>
+          <a:xfrm>
+            <a:off x="731520" y="1051560"/>
+            <a:ext cx="731520" cy="38100"/>
+          </a:xfrm>
+          <a:prstGeom prst="rect">
+            <a:avLst/>
+          </a:prstGeom>
+          <a:solidFill>
+            <a:srgbClr val="E51937"/>
+          </a:solidFill>
+          <a:ln>
+            <a:noFill/>
+          </a:ln>
+        </p:spPr>
+        <p:style>
+          <a:lnRef idx="1">
+            <a:schemeClr val="accent1"/>
+          </a:lnRef>
+          <a:fillRef idx="3">
+            <a:schemeClr val="accent1"/>
+          </a:fillRef>
+          <a:effectRef idx="2">
+            <a:schemeClr val="accent1"/>
+          </a:effectRef>
+          <a:fontRef idx="minor">
+            <a:schemeClr val="lt1"/>
+          </a:fontRef>
+        </p:style>
+        <p:txBody>
+          <a:bodyPr rtlCol="0" anchor="ctr"/>
+          <a:lstStyle/>
+          <a:p>
+            <a:pPr algn="ctr"/>
+          </a:p>
+        </p:txBody>
+      </p:sp>
+      <p:sp>
+        <p:nvSpPr>
+          <p:cNvPr id="5" name="TextBox 4"/>
+          <p:cNvSpPr txBox="1"/>
+          <p:nvPr/>
+        </p:nvSpPr>
+        <p:spPr>
+          <a:xfrm>
+            <a:off x="731520" y="1234440"/>
+            <a:ext cx="10058400" cy="274320"/>
+          </a:xfrm>
+          <a:prstGeom prst="rect">
+            <a:avLst/>
+          </a:prstGeom>
+          <a:noFill/>
+        </p:spPr>
+        <p:txBody>
+          <a:bodyPr wrap="square">
+            <a:spAutoFit/>
+          </a:bodyPr>
+          <a:lstStyle/>
+          <a:p>
+            <a:pPr algn="l">
+              <a:defRPr sz="1200" b="0" i="0">
+                <a:solidFill>
+                  <a:srgbClr val="767676"/>
+                </a:solidFill>
+                <a:latin typeface="Calibri"/>
+              </a:defRPr>
+            </a:pPr>
+            <a:r>
+              <a:t>45-minute Zoom call  |  March 2026  |  Key quotes and insights</a:t>
+            </a:r>
+          </a:p>
+        </p:txBody>
+      </p:sp>
+      <p:sp>
+        <p:nvSpPr>
+          <p:cNvPr id="6" name="Rounded Rectangle 5"/>
+          <p:cNvSpPr/>
+          <p:nvPr/>
+        </p:nvSpPr>
+        <p:spPr>
+          <a:xfrm>
+            <a:off x="731520" y="1691640"/>
+            <a:ext cx="10789920" cy="1005840"/>
+          </a:xfrm>
+          <a:prstGeom prst="roundRect">
+            <a:avLst>
+              <a:gd name="adj" fmla="val 4000"/>
+            </a:avLst>
+          </a:prstGeom>
+          <a:solidFill>
+            <a:srgbClr val="FFFFFF"/>
+          </a:solidFill>
+          <a:ln w="12700">
+            <a:solidFill>
+              <a:srgbClr val="E0E0DE"/>
+            </a:solidFill>
+          </a:ln>
+        </p:spPr>
+        <p:style>
+          <a:lnRef idx="1">
+            <a:schemeClr val="accent1"/>
+          </a:lnRef>
+          <a:fillRef idx="3">
+            <a:schemeClr val="accent1"/>
+          </a:fillRef>
+          <a:effectRef idx="2">
+            <a:schemeClr val="accent1"/>
+          </a:effectRef>
+          <a:fontRef idx="minor">
+            <a:schemeClr val="lt1"/>
+          </a:fontRef>
+        </p:style>
+        <p:txBody>
+          <a:bodyPr rtlCol="0" anchor="ctr"/>
+          <a:lstStyle/>
+          <a:p>
+            <a:pPr algn="ctr"/>
+          </a:p>
+        </p:txBody>
+      </p:sp>
+      <p:sp>
+        <p:nvSpPr>
+          <p:cNvPr id="7" name="Rectangle 6"/>
+          <p:cNvSpPr/>
+          <p:nvPr/>
+        </p:nvSpPr>
+        <p:spPr>
+          <a:xfrm>
+            <a:off x="731520" y="1691640"/>
+            <a:ext cx="50800" cy="1005840"/>
+          </a:xfrm>
+          <a:prstGeom prst="rect">
+            <a:avLst/>
+          </a:prstGeom>
+          <a:solidFill>
+            <a:srgbClr val="767676"/>
+          </a:solidFill>
+          <a:ln>
+            <a:noFill/>
+          </a:ln>
+        </p:spPr>
+        <p:style>
+          <a:lnRef idx="1">
+            <a:schemeClr val="accent1"/>
+          </a:lnRef>
+          <a:fillRef idx="3">
+            <a:schemeClr val="accent1"/>
+          </a:fillRef>
+          <a:effectRef idx="2">
+            <a:schemeClr val="accent1"/>
+          </a:effectRef>
+          <a:fontRef idx="minor">
+            <a:schemeClr val="lt1"/>
+          </a:fontRef>
+        </p:style>
+        <p:txBody>
+          <a:bodyPr rtlCol="0" anchor="ctr"/>
+          <a:lstStyle/>
+          <a:p>
+            <a:pPr algn="ctr"/>
+          </a:p>
+        </p:txBody>
+      </p:sp>
+      <p:sp>
+        <p:nvSpPr>
+          <p:cNvPr id="8" name="TextBox 7"/>
+          <p:cNvSpPr txBox="1"/>
+          <p:nvPr/>
+        </p:nvSpPr>
+        <p:spPr>
+          <a:xfrm>
+            <a:off x="1097280" y="1737360"/>
+            <a:ext cx="1828800" cy="182880"/>
+          </a:xfrm>
+          <a:prstGeom prst="rect">
+            <a:avLst/>
+          </a:prstGeom>
+          <a:noFill/>
+        </p:spPr>
+        <p:txBody>
+          <a:bodyPr wrap="square">
+            <a:spAutoFit/>
+          </a:bodyPr>
+          <a:lstStyle/>
+          <a:p>
+            <a:pPr algn="l">
+              <a:defRPr sz="900" b="1" i="0">
+                <a:solidFill>
+                  <a:srgbClr val="767676"/>
+                </a:solidFill>
+                <a:latin typeface="Calibri"/>
+              </a:defRPr>
+            </a:pPr>
+            <a:r>
+              <a:t>ON DATA READINESS</a:t>
+            </a:r>
+          </a:p>
+        </p:txBody>
+      </p:sp>
+      <p:sp>
+        <p:nvSpPr>
+          <p:cNvPr id="9" name="TextBox 8"/>
+          <p:cNvSpPr txBox="1"/>
+          <p:nvPr/>
+        </p:nvSpPr>
+        <p:spPr>
+          <a:xfrm>
+            <a:off x="1097280" y="1947672"/>
+            <a:ext cx="7315200" cy="548640"/>
+          </a:xfrm>
+          <a:prstGeom prst="rect">
+            <a:avLst/>
+          </a:prstGeom>
+          <a:noFill/>
+        </p:spPr>
+        <p:txBody>
+          <a:bodyPr wrap="square">
+            <a:spAutoFit/>
+          </a:bodyPr>
+          <a:lstStyle/>
+          <a:p>
+            <a:pPr algn="l">
+              <a:defRPr sz="1100" b="0" i="1">
+                <a:solidFill>
+                  <a:srgbClr val="3A3A3C"/>
+                </a:solidFill>
+                <a:latin typeface="Calibri"/>
+              </a:defRPr>
+            </a:pPr>
+            <a:r>
+              <a:t>“We have good data in pockets and messy data everywhere else. If I wanted to build a support AI today, I could get it to work well for AXS and Hammerhead. The moment a dealer asks about a RockShox fork on a 2019 frame with a third-party brake, I start to sweat.”</a:t>
+            </a:r>
+          </a:p>
+        </p:txBody>
+      </p:sp>
+      <p:sp>
+        <p:nvSpPr>
+          <p:cNvPr id="10" name="TextBox 9"/>
+          <p:cNvSpPr txBox="1"/>
+          <p:nvPr/>
+        </p:nvSpPr>
+        <p:spPr>
+          <a:xfrm>
+            <a:off x="8686800" y="2011680"/>
+            <a:ext cx="2560320" cy="457200"/>
+          </a:xfrm>
+          <a:prstGeom prst="rect">
+            <a:avLst/>
+          </a:prstGeom>
+          <a:noFill/>
+        </p:spPr>
+        <p:txBody>
+          <a:bodyPr wrap="square">
+            <a:spAutoFit/>
+          </a:bodyPr>
+          <a:lstStyle/>
+          <a:p>
+            <a:pPr algn="l">
+              <a:defRPr sz="1000" b="1" i="0">
+                <a:solidFill>
+                  <a:srgbClr val="1C1C1E"/>
+                </a:solidFill>
+                <a:latin typeface="Calibri"/>
+              </a:defRPr>
+            </a:pPr>
+            <a:r>
+              <a:t>→ Validates bounded pilot scope</a:t>
+            </a:r>
+          </a:p>
+        </p:txBody>
+      </p:sp>
+      <p:sp>
+        <p:nvSpPr>
+          <p:cNvPr id="11" name="Rounded Rectangle 10"/>
+          <p:cNvSpPr/>
+          <p:nvPr/>
+        </p:nvSpPr>
+        <p:spPr>
+          <a:xfrm>
+            <a:off x="731520" y="2880360"/>
+            <a:ext cx="10789920" cy="1005840"/>
+          </a:xfrm>
+          <a:prstGeom prst="roundRect">
+            <a:avLst>
+              <a:gd name="adj" fmla="val 4000"/>
+            </a:avLst>
+          </a:prstGeom>
+          <a:solidFill>
+            <a:srgbClr val="FFFFFF"/>
+          </a:solidFill>
+          <a:ln w="12700">
+            <a:solidFill>
+              <a:srgbClr val="E0E0DE"/>
+            </a:solidFill>
+          </a:ln>
+        </p:spPr>
+        <p:style>
+          <a:lnRef idx="1">
+            <a:schemeClr val="accent1"/>
+          </a:lnRef>
+          <a:fillRef idx="3">
+            <a:schemeClr val="accent1"/>
+          </a:fillRef>
+          <a:effectRef idx="2">
+            <a:schemeClr val="accent1"/>
+          </a:effectRef>
+          <a:fontRef idx="minor">
+            <a:schemeClr val="lt1"/>
+          </a:fontRef>
+        </p:style>
+        <p:txBody>
+          <a:bodyPr rtlCol="0" anchor="ctr"/>
+          <a:lstStyle/>
+          <a:p>
+            <a:pPr algn="ctr"/>
+          </a:p>
+        </p:txBody>
+      </p:sp>
+      <p:sp>
+        <p:nvSpPr>
+          <p:cNvPr id="12" name="Rectangle 11"/>
+          <p:cNvSpPr/>
+          <p:nvPr/>
+        </p:nvSpPr>
+        <p:spPr>
+          <a:xfrm>
+            <a:off x="731520" y="2880360"/>
+            <a:ext cx="50800" cy="1005840"/>
+          </a:xfrm>
+          <a:prstGeom prst="rect">
+            <a:avLst/>
+          </a:prstGeom>
+          <a:solidFill>
+            <a:srgbClr val="767676"/>
+          </a:solidFill>
+          <a:ln>
+            <a:noFill/>
+          </a:ln>
+        </p:spPr>
+        <p:style>
+          <a:lnRef idx="1">
+            <a:schemeClr val="accent1"/>
+          </a:lnRef>
+          <a:fillRef idx="3">
+            <a:schemeClr val="accent1"/>
+          </a:fillRef>
+          <a:effectRef idx="2">
+            <a:schemeClr val="accent1"/>
+          </a:effectRef>
+          <a:fontRef idx="minor">
+            <a:schemeClr val="lt1"/>
+          </a:fontRef>
+        </p:style>
+        <p:txBody>
+          <a:bodyPr rtlCol="0" anchor="ctr"/>
+          <a:lstStyle/>
+          <a:p>
+            <a:pPr algn="ctr"/>
+          </a:p>
+        </p:txBody>
+      </p:sp>
+      <p:sp>
+        <p:nvSpPr>
+          <p:cNvPr id="13" name="TextBox 12"/>
+          <p:cNvSpPr txBox="1"/>
+          <p:nvPr/>
+        </p:nvSpPr>
+        <p:spPr>
+          <a:xfrm>
+            <a:off x="1097280" y="2926080"/>
+            <a:ext cx="1828800" cy="182880"/>
+          </a:xfrm>
+          <a:prstGeom prst="rect">
+            <a:avLst/>
+          </a:prstGeom>
+          <a:noFill/>
+        </p:spPr>
+        <p:txBody>
+          <a:bodyPr wrap="square">
+            <a:spAutoFit/>
+          </a:bodyPr>
+          <a:lstStyle/>
+          <a:p>
+            <a:pPr algn="l">
+              <a:defRPr sz="900" b="1" i="0">
+                <a:solidFill>
+                  <a:srgbClr val="767676"/>
+                </a:solidFill>
+                <a:latin typeface="Calibri"/>
+              </a:defRPr>
+            </a:pPr>
+            <a:r>
+              <a:t>ON ADOPTION BARRIERS</a:t>
+            </a:r>
+          </a:p>
+        </p:txBody>
+      </p:sp>
+      <p:sp>
+        <p:nvSpPr>
+          <p:cNvPr id="14" name="TextBox 13"/>
+          <p:cNvSpPr txBox="1"/>
+          <p:nvPr/>
+        </p:nvSpPr>
+        <p:spPr>
+          <a:xfrm>
+            <a:off x="1097280" y="3136392"/>
+            <a:ext cx="7315200" cy="548640"/>
+          </a:xfrm>
+          <a:prstGeom prst="rect">
+            <a:avLst/>
+          </a:prstGeom>
+          <a:noFill/>
+        </p:spPr>
+        <p:txBody>
+          <a:bodyPr wrap="square">
+            <a:spAutoFit/>
+          </a:bodyPr>
+          <a:lstStyle/>
+          <a:p>
+            <a:pPr algn="l">
+              <a:defRPr sz="1100" b="0" i="1">
+                <a:solidFill>
+                  <a:srgbClr val="3A3A3C"/>
+                </a:solidFill>
+                <a:latin typeface="Calibri"/>
+              </a:defRPr>
+            </a:pPr>
+            <a:r>
+              <a:t>“The resistance comes from customer-facing teams because they worry AI will produce confident-sounding wrong answers that damage dealer relationships they have spent years building.”</a:t>
+            </a:r>
+          </a:p>
+        </p:txBody>
+      </p:sp>
+      <p:sp>
+        <p:nvSpPr>
+          <p:cNvPr id="15" name="TextBox 14"/>
+          <p:cNvSpPr txBox="1"/>
+          <p:nvPr/>
+        </p:nvSpPr>
+        <p:spPr>
+          <a:xfrm>
+            <a:off x="8686800" y="3200400"/>
+            <a:ext cx="2560320" cy="457200"/>
+          </a:xfrm>
+          <a:prstGeom prst="rect">
+            <a:avLst/>
+          </a:prstGeom>
+          <a:noFill/>
+        </p:spPr>
+        <p:txBody>
+          <a:bodyPr wrap="square">
+            <a:spAutoFit/>
+          </a:bodyPr>
+          <a:lstStyle/>
+          <a:p>
+            <a:pPr algn="l">
+              <a:defRPr sz="1000" b="1" i="0">
+                <a:solidFill>
+                  <a:srgbClr val="1C1C1E"/>
+                </a:solidFill>
+                <a:latin typeface="Calibri"/>
+              </a:defRPr>
+            </a:pPr>
+            <a:r>
+              <a:t>→ Human-in-the-loop is mandatory</a:t>
+            </a:r>
+          </a:p>
+        </p:txBody>
+      </p:sp>
+      <p:sp>
+        <p:nvSpPr>
+          <p:cNvPr id="16" name="Rounded Rectangle 15"/>
+          <p:cNvSpPr/>
+          <p:nvPr/>
+        </p:nvSpPr>
+        <p:spPr>
+          <a:xfrm>
+            <a:off x="731520" y="4069080"/>
+            <a:ext cx="10789920" cy="1005840"/>
+          </a:xfrm>
+          <a:prstGeom prst="roundRect">
+            <a:avLst>
+              <a:gd name="adj" fmla="val 4000"/>
+            </a:avLst>
+          </a:prstGeom>
+          <a:solidFill>
+            <a:srgbClr val="FFFFFF"/>
+          </a:solidFill>
+          <a:ln w="12700">
+            <a:solidFill>
+              <a:srgbClr val="E0E0DE"/>
+            </a:solidFill>
+          </a:ln>
+        </p:spPr>
+        <p:style>
+          <a:lnRef idx="1">
+            <a:schemeClr val="accent1"/>
+          </a:lnRef>
+          <a:fillRef idx="3">
+            <a:schemeClr val="accent1"/>
+          </a:fillRef>
+          <a:effectRef idx="2">
+            <a:schemeClr val="accent1"/>
+          </a:effectRef>
+          <a:fontRef idx="minor">
+            <a:schemeClr val="lt1"/>
+          </a:fontRef>
+        </p:style>
+        <p:txBody>
+          <a:bodyPr rtlCol="0" anchor="ctr"/>
+          <a:lstStyle/>
+          <a:p>
+            <a:pPr algn="ctr"/>
+          </a:p>
+        </p:txBody>
+      </p:sp>
+      <p:sp>
+        <p:nvSpPr>
+          <p:cNvPr id="17" name="Rectangle 16"/>
+          <p:cNvSpPr/>
+          <p:nvPr/>
+        </p:nvSpPr>
+        <p:spPr>
+          <a:xfrm>
+            <a:off x="731520" y="4069080"/>
+            <a:ext cx="50800" cy="1005840"/>
+          </a:xfrm>
+          <a:prstGeom prst="rect">
+            <a:avLst/>
+          </a:prstGeom>
+          <a:solidFill>
+            <a:srgbClr val="767676"/>
+          </a:solidFill>
+          <a:ln>
+            <a:noFill/>
+          </a:ln>
+        </p:spPr>
+        <p:style>
+          <a:lnRef idx="1">
+            <a:schemeClr val="accent1"/>
+          </a:lnRef>
+          <a:fillRef idx="3">
+            <a:schemeClr val="accent1"/>
+          </a:fillRef>
+          <a:effectRef idx="2">
+            <a:schemeClr val="accent1"/>
+          </a:effectRef>
+          <a:fontRef idx="minor">
+            <a:schemeClr val="lt1"/>
+          </a:fontRef>
+        </p:style>
+        <p:txBody>
+          <a:bodyPr rtlCol="0" anchor="ctr"/>
+          <a:lstStyle/>
+          <a:p>
+            <a:pPr algn="ctr"/>
+          </a:p>
+        </p:txBody>
+      </p:sp>
+      <p:sp>
+        <p:nvSpPr>
+          <p:cNvPr id="18" name="TextBox 17"/>
+          <p:cNvSpPr txBox="1"/>
+          <p:nvPr/>
+        </p:nvSpPr>
+        <p:spPr>
+          <a:xfrm>
+            <a:off x="1097280" y="4114800"/>
+            <a:ext cx="1828800" cy="182880"/>
+          </a:xfrm>
+          <a:prstGeom prst="rect">
+            <a:avLst/>
+          </a:prstGeom>
+          <a:noFill/>
+        </p:spPr>
+        <p:txBody>
+          <a:bodyPr wrap="square">
+            <a:spAutoFit/>
+          </a:bodyPr>
+          <a:lstStyle/>
+          <a:p>
+            <a:pPr algn="l">
+              <a:defRPr sz="900" b="1" i="0">
+                <a:solidFill>
+                  <a:srgbClr val="767676"/>
+                </a:solidFill>
+                <a:latin typeface="Calibri"/>
+              </a:defRPr>
+            </a:pPr>
+            <a:r>
+              <a:t>ON COMPETITIVE ADVANTAGE</a:t>
+            </a:r>
+          </a:p>
+        </p:txBody>
+      </p:sp>
+      <p:sp>
+        <p:nvSpPr>
+          <p:cNvPr id="19" name="TextBox 18"/>
+          <p:cNvSpPr txBox="1"/>
+          <p:nvPr/>
+        </p:nvSpPr>
+        <p:spPr>
+          <a:xfrm>
+            <a:off x="1097280" y="4325112"/>
+            <a:ext cx="7315200" cy="548640"/>
+          </a:xfrm>
+          <a:prstGeom prst="rect">
+            <a:avLst/>
+          </a:prstGeom>
+          <a:noFill/>
+        </p:spPr>
+        <p:txBody>
+          <a:bodyPr wrap="square">
+            <a:spAutoFit/>
+          </a:bodyPr>
+          <a:lstStyle/>
+          <a:p>
+            <a:pPr algn="l">
+              <a:defRPr sz="1100" b="0" i="1">
+                <a:solidFill>
+                  <a:srgbClr val="3A3A3C"/>
+                </a:solidFill>
+                <a:latin typeface="Calibri"/>
+              </a:defRPr>
+            </a:pPr>
+            <a:r>
+              <a:t>“A rider on Shimano [SRAM's largest competitor] uses the app to check if parts fit. A Hammerhead rider uses it to train, navigate, and talk to every component on the bike. That is a fundamentally different data relationship.”</a:t>
+            </a:r>
+          </a:p>
+        </p:txBody>
+      </p:sp>
+      <p:sp>
+        <p:nvSpPr>
+          <p:cNvPr id="20" name="TextBox 19"/>
+          <p:cNvSpPr txBox="1"/>
+          <p:nvPr/>
+        </p:nvSpPr>
+        <p:spPr>
+          <a:xfrm>
+            <a:off x="8686800" y="4389120"/>
+            <a:ext cx="2560320" cy="457200"/>
+          </a:xfrm>
+          <a:prstGeom prst="rect">
+            <a:avLst/>
+          </a:prstGeom>
+          <a:noFill/>
+        </p:spPr>
+        <p:txBody>
+          <a:bodyPr wrap="square">
+            <a:spAutoFit/>
+          </a:bodyPr>
+          <a:lstStyle/>
+          <a:p>
+            <a:pPr algn="l">
+              <a:defRPr sz="1000" b="1" i="0">
+                <a:solidFill>
+                  <a:srgbClr val="1C1C1E"/>
+                </a:solidFill>
+                <a:latin typeface="Calibri"/>
+              </a:defRPr>
+            </a:pPr>
+            <a:r>
+              <a:t>→ Hammerhead is SRAM's real AI moat</a:t>
+            </a:r>
+          </a:p>
+        </p:txBody>
+      </p:sp>
+      <p:sp>
+        <p:nvSpPr>
+          <p:cNvPr id="21" name="Rounded Rectangle 20"/>
+          <p:cNvSpPr/>
+          <p:nvPr/>
+        </p:nvSpPr>
+        <p:spPr>
+          <a:xfrm>
+            <a:off x="731520" y="5257800"/>
+            <a:ext cx="10789920" cy="1005840"/>
+          </a:xfrm>
+          <a:prstGeom prst="roundRect">
+            <a:avLst>
+              <a:gd name="adj" fmla="val 4000"/>
+            </a:avLst>
+          </a:prstGeom>
+          <a:solidFill>
+            <a:srgbClr val="FFFFFF"/>
+          </a:solidFill>
+          <a:ln w="12700">
+            <a:solidFill>
+              <a:srgbClr val="E0E0DE"/>
+            </a:solidFill>
+          </a:ln>
+        </p:spPr>
+        <p:style>
+          <a:lnRef idx="1">
+            <a:schemeClr val="accent1"/>
+          </a:lnRef>
+          <a:fillRef idx="3">
+            <a:schemeClr val="accent1"/>
+          </a:fillRef>
+          <a:effectRef idx="2">
+            <a:schemeClr val="accent1"/>
+          </a:effectRef>
+          <a:fontRef idx="minor">
+            <a:schemeClr val="lt1"/>
+          </a:fontRef>
+        </p:style>
+        <p:txBody>
+          <a:bodyPr rtlCol="0" anchor="ctr"/>
+          <a:lstStyle/>
+          <a:p>
+            <a:pPr algn="ctr"/>
+          </a:p>
+        </p:txBody>
+      </p:sp>
+      <p:sp>
+        <p:nvSpPr>
+          <p:cNvPr id="22" name="Rectangle 21"/>
+          <p:cNvSpPr/>
+          <p:nvPr/>
+        </p:nvSpPr>
+        <p:spPr>
+          <a:xfrm>
+            <a:off x="731520" y="5257800"/>
+            <a:ext cx="50800" cy="1005840"/>
+          </a:xfrm>
+          <a:prstGeom prst="rect">
+            <a:avLst/>
+          </a:prstGeom>
+          <a:solidFill>
+            <a:srgbClr val="767676"/>
+          </a:solidFill>
+          <a:ln>
+            <a:noFill/>
+          </a:ln>
+        </p:spPr>
+        <p:style>
+          <a:lnRef idx="1">
+            <a:schemeClr val="accent1"/>
+          </a:lnRef>
+          <a:fillRef idx="3">
+            <a:schemeClr val="accent1"/>
+          </a:fillRef>
+          <a:effectRef idx="2">
+            <a:schemeClr val="accent1"/>
+          </a:effectRef>
+          <a:fontRef idx="minor">
+            <a:schemeClr val="lt1"/>
+          </a:fontRef>
+        </p:style>
+        <p:txBody>
+          <a:bodyPr rtlCol="0" anchor="ctr"/>
+          <a:lstStyle/>
+          <a:p>
+            <a:pPr algn="ctr"/>
+          </a:p>
+        </p:txBody>
+      </p:sp>
+      <p:sp>
+        <p:nvSpPr>
+          <p:cNvPr id="23" name="TextBox 22"/>
+          <p:cNvSpPr txBox="1"/>
+          <p:nvPr/>
+        </p:nvSpPr>
+        <p:spPr>
+          <a:xfrm>
+            <a:off x="1097280" y="5303520"/>
+            <a:ext cx="1828800" cy="182880"/>
+          </a:xfrm>
+          <a:prstGeom prst="rect">
+            <a:avLst/>
+          </a:prstGeom>
+          <a:noFill/>
+        </p:spPr>
+        <p:txBody>
+          <a:bodyPr wrap="square">
+            <a:spAutoFit/>
+          </a:bodyPr>
+          <a:lstStyle/>
+          <a:p>
+            <a:pPr algn="l">
+              <a:defRPr sz="900" b="1" i="0">
+                <a:solidFill>
+                  <a:srgbClr val="767676"/>
+                </a:solidFill>
+                <a:latin typeface="Calibri"/>
+              </a:defRPr>
+            </a:pPr>
+            <a:r>
+              <a:t>ON SUCCESS CRITERIA</a:t>
+            </a:r>
+          </a:p>
+        </p:txBody>
+      </p:sp>
+      <p:sp>
+        <p:nvSpPr>
+          <p:cNvPr id="24" name="TextBox 23"/>
+          <p:cNvSpPr txBox="1"/>
+          <p:nvPr/>
+        </p:nvSpPr>
+        <p:spPr>
+          <a:xfrm>
+            <a:off x="1097280" y="5513832"/>
+            <a:ext cx="7315200" cy="548640"/>
+          </a:xfrm>
+          <a:prstGeom prst="rect">
+            <a:avLst/>
+          </a:prstGeom>
+          <a:noFill/>
+        </p:spPr>
+        <p:txBody>
+          <a:bodyPr wrap="square">
+            <a:spAutoFit/>
+          </a:bodyPr>
+          <a:lstStyle/>
+          <a:p>
+            <a:pPr algn="l">
+              <a:defRPr sz="1100" b="0" i="1">
+                <a:solidFill>
+                  <a:srgbClr val="3A3A3C"/>
+                </a:solidFill>
+                <a:latin typeface="Calibri"/>
+              </a:defRPr>
+            </a:pPr>
+            <a:r>
+              <a:t>“I want one workflow measurably faster, measurably more accurate, with no regression in dealer satisfaction scores.”</a:t>
+            </a:r>
+          </a:p>
+        </p:txBody>
+      </p:sp>
+      <p:sp>
+        <p:nvSpPr>
+          <p:cNvPr id="25" name="TextBox 24"/>
+          <p:cNvSpPr txBox="1"/>
+          <p:nvPr/>
+        </p:nvSpPr>
+        <p:spPr>
+          <a:xfrm>
+            <a:off x="8686800" y="5577840"/>
+            <a:ext cx="2560320" cy="457200"/>
+          </a:xfrm>
+          <a:prstGeom prst="rect">
+            <a:avLst/>
+          </a:prstGeom>
+          <a:noFill/>
+        </p:spPr>
+        <p:txBody>
+          <a:bodyPr wrap="square">
+            <a:spAutoFit/>
+          </a:bodyPr>
+          <a:lstStyle/>
+          <a:p>
+            <a:pPr algn="l">
+              <a:defRPr sz="1000" b="1" i="0">
+                <a:solidFill>
+                  <a:srgbClr val="1C1C1E"/>
+                </a:solidFill>
+                <a:latin typeface="Calibri"/>
+              </a:defRPr>
+            </a:pPr>
+            <a:r>
+              <a:t>→ Aligns with our 90-day pilot targets</a:t>
+            </a:r>
+          </a:p>
+        </p:txBody>
+      </p:sp>
+      <p:sp>
+        <p:nvSpPr>
+          <p:cNvPr id="26" name="TextBox 25"/>
+          <p:cNvSpPr txBox="1"/>
+          <p:nvPr/>
+        </p:nvSpPr>
+        <p:spPr>
+          <a:xfrm>
+            <a:off x="731520" y="6400800"/>
+            <a:ext cx="9144000" cy="274320"/>
+          </a:xfrm>
+          <a:prstGeom prst="rect">
+            <a:avLst/>
+          </a:prstGeom>
+          <a:noFill/>
+        </p:spPr>
+        <p:txBody>
+          <a:bodyPr wrap="square">
+            <a:spAutoFit/>
+          </a:bodyPr>
+          <a:lstStyle/>
+          <a:p>
+            <a:pPr algn="l">
+              <a:defRPr sz="800" b="0" i="0">
+                <a:solidFill>
+                  <a:srgbClr val="767676"/>
+                </a:solidFill>
+                <a:latin typeface="Calibri"/>
+              </a:defRPr>
+            </a:pPr>
+            <a:r>
+              <a:t>APPENDIX A2</a:t>
+            </a:r>
+          </a:p>
+        </p:txBody>
+      </p:sp>
+    </p:spTree>
+  </p:cSld>
+  <p:clrMapOvr>
+    <a:masterClrMapping/>
+  </p:clrMapOvr>
+</p:sld>
+</file>
+
+<file path=ppt/slides/slide28.xml><?xml version="1.0" encoding="utf-8"?>
+<p:sld xmlns:a="http://schemas.openxmlformats.org/drawingml/2006/main" xmlns:p="http://schemas.openxmlformats.org/presentationml/2006/main" xmlns:r="http://schemas.openxmlformats.org/officeDocument/2006/relationships">
+  <p:cSld>
+    <p:bg>
+      <p:bgPr>
+        <a:solidFill>
+          <a:srgbClr val="F5F5F3"/>
+        </a:solidFill>
+        <a:effectLst/>
+      </p:bgPr>
+    </p:bg>
+    <p:spTree>
+      <p:nvGrpSpPr>
+        <p:cNvPr id="1" name=""/>
+        <p:cNvGrpSpPr/>
+        <p:nvPr/>
+      </p:nvGrpSpPr>
+      <p:grpSpPr/>
+      <p:sp>
+        <p:nvSpPr>
+          <p:cNvPr id="2" name="TextBox 1"/>
+          <p:cNvSpPr txBox="1"/>
+          <p:nvPr/>
+        </p:nvSpPr>
+        <p:spPr>
+          <a:xfrm>
+            <a:off x="731520" y="274320"/>
+            <a:ext cx="5486400" cy="228600"/>
+          </a:xfrm>
+          <a:prstGeom prst="rect">
+            <a:avLst/>
+          </a:prstGeom>
+          <a:noFill/>
+        </p:spPr>
+        <p:txBody>
+          <a:bodyPr wrap="square">
+            <a:spAutoFit/>
+          </a:bodyPr>
+          <a:lstStyle/>
+          <a:p>
+            <a:pPr algn="l">
+              <a:defRPr sz="1100" b="1" i="0">
+                <a:solidFill>
+                  <a:srgbClr val="767676"/>
+                </a:solidFill>
+                <a:latin typeface="Calibri"/>
+              </a:defRPr>
+            </a:pPr>
+            <a:r>
+              <a:t>APPENDIX</a:t>
+            </a:r>
+          </a:p>
+        </p:txBody>
+      </p:sp>
+      <p:sp>
+        <p:nvSpPr>
+          <p:cNvPr id="3" name="TextBox 2"/>
+          <p:cNvSpPr txBox="1"/>
+          <p:nvPr/>
+        </p:nvSpPr>
+        <p:spPr>
+          <a:xfrm>
+            <a:off x="731520" y="548640"/>
+            <a:ext cx="10515600" cy="502920"/>
+          </a:xfrm>
+          <a:prstGeom prst="rect">
+            <a:avLst/>
+          </a:prstGeom>
+          <a:noFill/>
+        </p:spPr>
+        <p:txBody>
+          <a:bodyPr wrap="square">
+            <a:spAutoFit/>
+          </a:bodyPr>
+          <a:lstStyle/>
+          <a:p>
+            <a:pPr algn="l">
+              <a:defRPr sz="2600" b="1" i="0">
+                <a:solidFill>
+                  <a:srgbClr val="1C1C1E"/>
+                </a:solidFill>
+                <a:latin typeface="Calibri"/>
+              </a:defRPr>
+            </a:pPr>
+            <a:r>
               <a:t>Phasing, talent, and organizational enablers</a:t>
             </a:r>
           </a:p>
@@ -26822,6 +27666,42 @@
         </p:nvSpPr>
         <p:spPr>
           <a:xfrm>
+            <a:off x="731520" y="5943600"/>
+            <a:ext cx="10515600" cy="228600"/>
+          </a:xfrm>
+          <a:prstGeom prst="rect">
+            <a:avLst/>
+          </a:prstGeom>
+          <a:noFill/>
+        </p:spPr>
+        <p:txBody>
+          <a:bodyPr wrap="square">
+            <a:spAutoFit/>
+          </a:bodyPr>
+          <a:lstStyle/>
+          <a:p>
+            <a:pPr algn="l">
+              <a:defRPr sz="800" b="0" i="0">
+                <a:solidFill>
+                  <a:srgbClr val="767676"/>
+                </a:solidFill>
+                <a:latin typeface="Calibri"/>
+              </a:defRPr>
+            </a:pPr>
+            <a:r>
+              <a:t>Sources: MTB share per Bicycle Retailer industry analysis; Trustpilot rating as of Feb 2026 (n=180+ reviews)</a:t>
+            </a:r>
+          </a:p>
+        </p:txBody>
+      </p:sp>
+      <p:sp>
+        <p:nvSpPr>
+          <p:cNvPr id="51" name="TextBox 50"/>
+          <p:cNvSpPr txBox="1"/>
+          <p:nvPr/>
+        </p:nvSpPr>
+        <p:spPr>
+          <a:xfrm>
             <a:off x="731520" y="6446520"/>
             <a:ext cx="4572000" cy="274320"/>
           </a:xfrm>
@@ -26852,7 +27732,7 @@
       </p:sp>
       <p:sp>
         <p:nvSpPr>
-          <p:cNvPr id="51" name="TextBox 50"/>
+          <p:cNvPr id="52" name="TextBox 51"/>
           <p:cNvSpPr txBox="1"/>
           <p:nvPr/>
         </p:nvSpPr>

--- a/deliverables/SRAM_AI_Adoption_Playbook.pptx
+++ b/deliverables/SRAM_AI_Adoption_Playbook.pptx
@@ -5387,7 +5387,7 @@
               </a:defRPr>
             </a:pPr>
             <a:r>
-              <a:t>“I would rather shut it down and restart than defend a mistake to Ken. The first question I ask anyone skeptical about AI is: do you want to spend your day searching a 200-page compatibility PDF, or do you want to spend it talking to dealers?”</a:t>
+              <a:t>“If it doesn't hit the metric, you shut it down, you learn from it, and you redeploy the resources. That discipline is what separates companies that build real AI capability from companies that accumulate AI debt.”</a:t>
             </a:r>
           </a:p>
         </p:txBody>
@@ -5423,7 +5423,7 @@
               </a:defRPr>
             </a:pPr>
             <a:r>
-              <a:t>Jordan Hartsell, VP Digital Products, SRAM</a:t>
+              <a:t>Clint Weber, VP Global Sales &amp; Manufacturing, SRAM</a:t>
             </a:r>
           </a:p>
         </p:txBody>
@@ -5672,7 +5672,7 @@
               </a:defRPr>
             </a:pPr>
             <a:r>
-              <a:t>Hartsell set the bar: "One workflow measurably faster, measurably more accurate, with no regression in dealer satisfaction scores."</a:t>
+              <a:t>Weber set the bar: a 30% reduction in handle time on AXS support tickets with dealer satisfaction scores holding flat or improving.</a:t>
             </a:r>
           </a:p>
         </p:txBody>
@@ -6128,7 +6128,7 @@
               </a:defRPr>
             </a:pPr>
             <a:r>
-              <a:t>Hartsell set the bar: "One workflow measurably faster, measurably more accurate, with no regression in dealer satisfaction scores."</a:t>
+              <a:t>Weber set the bar: a 30% reduction in handle time on AXS support tickets with dealer satisfaction scores holding flat or improving.</a:t>
             </a:r>
           </a:p>
         </p:txBody>
@@ -6746,7 +6746,7 @@
               </a:defRPr>
             </a:pPr>
             <a:r>
-              <a:t>Hartsell set the bar: "One workflow measurably faster, measurably more accurate, with no regression in dealer satisfaction scores."</a:t>
+              <a:t>Weber set the bar: a 30% reduction in handle time on AXS support tickets with dealer satisfaction scores holding flat or improving.</a:t>
             </a:r>
           </a:p>
         </p:txBody>
@@ -7571,7 +7571,7 @@
               </a:defRPr>
             </a:pPr>
             <a:r>
-              <a:t>Hartsell set the bar: "One workflow measurably faster, measurably more accurate, with no regression in dealer satisfaction scores."</a:t>
+              <a:t>Weber set the bar: a 30% reduction in handle time on AXS support tickets with dealer satisfaction scores holding flat or improving.</a:t>
             </a:r>
           </a:p>
         </p:txBody>
@@ -8558,7 +8558,7 @@
               </a:defRPr>
             </a:pPr>
             <a:r>
-              <a:t>Hartsell set the bar: "One workflow measurably faster, measurably more accurate, with no regression in dealer satisfaction scores."</a:t>
+              <a:t>Weber set the bar: a 30% reduction in handle time on AXS support tickets with dealer satisfaction scores holding flat or improving.</a:t>
             </a:r>
           </a:p>
         </p:txBody>
@@ -19147,11 +19147,11 @@
               </a:defRPr>
             </a:pPr>
             <a:r>
-              <a:t>No confirmed executive sponsor above</a:t>
+              <a:t>Weber: 'Somebody at the C-suite level</a:t>
             </a:r>
             <a:br/>
             <a:r>
-              <a:t>Hartsell for the data consolidation roadmap.</a:t>
+              <a:t>needs to own it. Not as a side responsibility.'</a:t>
             </a:r>
             <a:br/>
             <a:r>
@@ -19281,7 +19281,7 @@
               </a:defRPr>
             </a:pPr>
             <a:r>
-              <a:t>“We are 60 to 70 percent of the way to deploying a bounded support assistant for AXS and Hammerhead products.”</a:t>
+              <a:t>“We are 60 to 70 percent of the way to AI-ready data in the AXS and Hammerhead domain.”</a:t>
             </a:r>
           </a:p>
         </p:txBody>
@@ -19317,7 +19317,7 @@
               </a:defRPr>
             </a:pPr>
             <a:r>
-              <a:t>Jordan Hartsell, VP Digital Products, SRAM</a:t>
+              <a:t>Clint Weber, VP Global Sales &amp; Manufacturing, SRAM</a:t>
             </a:r>
           </a:p>
         </p:txBody>
@@ -19890,7 +19890,7 @@
               </a:defRPr>
             </a:pPr>
             <a:r>
-              <a:t>Hartsell owns digital products but not the CRM, ERP, or inventory systems. Phase 2 requires a unified data layer across those systems. Without a senior sponsor, data integration stalls and the pilot stays isolated.</a:t>
+              <a:t>Weber owns sales and manufacturing but not the CRM, ERP, or inventory systems. Phase 2 requires a unified data layer across those systems. Without a senior sponsor, data integration stalls and the pilot stays isolated.</a:t>
             </a:r>
           </a:p>
         </p:txBody>
@@ -23248,7 +23248,7 @@
               </a:defRPr>
             </a:pPr>
             <a:r>
-              <a:t>Interview with Jordan Hartsell, VP Digital Products</a:t>
+              <a:t>Simulated Interview with Clint Weber, VP Global Sales &amp; Manufacturing</a:t>
             </a:r>
           </a:p>
         </p:txBody>
@@ -23327,7 +23327,7 @@
               </a:defRPr>
             </a:pPr>
             <a:r>
-              <a:t>45-minute Zoom call  |  March 2026  |  Key quotes and insights</a:t>
+              <a:t>AI-simulated interview  |  March 2026  |  Key quotes and insights</a:t>
             </a:r>
           </a:p>
         </p:txBody>
@@ -23489,7 +23489,7 @@
               </a:defRPr>
             </a:pPr>
             <a:r>
-              <a:t>“We have good data in pockets and messy data everywhere else. If I wanted to build a support AI today, I could get it to work well for AXS and Hammerhead. The moment a dealer asks about a RockShox fork on a 2019 frame with a third-party brake, I start to sweat.”</a:t>
+              <a:t>“The areas where we've under-invested in process, data, and cross-functional integration are exactly the areas where AI could close the gap fastest. Customer support. Demand forecasting. Compatibility and documentation management.”</a:t>
             </a:r>
           </a:p>
         </p:txBody>
@@ -23651,7 +23651,7 @@
               </a:defRPr>
             </a:pPr>
             <a:r>
-              <a:t>ON ADOPTION BARRIERS</a:t>
+              <a:t>ON CULTURAL BARRIERS</a:t>
             </a:r>
           </a:p>
         </p:txBody>
@@ -23687,7 +23687,7 @@
               </a:defRPr>
             </a:pPr>
             <a:r>
-              <a:t>“The resistance comes from customer-facing teams because they worry AI will produce confident-sounding wrong answers that damage dealer relationships they have spent years building.”</a:t>
+              <a:t>“We built a Formula 1 car and then had a regional pit crew. The support infrastructure has lagged behind the hardware. That is a cultural artifact as much as a resource one.”</a:t>
             </a:r>
           </a:p>
         </p:txBody>
@@ -23885,7 +23885,7 @@
               </a:defRPr>
             </a:pPr>
             <a:r>
-              <a:t>“A rider on Shimano [SRAM's largest competitor] uses the app to check if parts fit. A Hammerhead rider uses it to train, navigate, and talk to every component on the bike. That is a fundamentally different data relationship.”</a:t>
+              <a:t>“Shimano riders use an app to check compatibility. Our riders use an ecosystem to train, navigate, tune their suspension, and monitor their entire component stack in real time. That rider does not churn.”</a:t>
             </a:r>
           </a:p>
         </p:txBody>
@@ -24047,7 +24047,7 @@
               </a:defRPr>
             </a:pPr>
             <a:r>
-              <a:t>ON SUCCESS CRITERIA</a:t>
+              <a:t>ON IMPLEMENTATION DISCIPLINE</a:t>
             </a:r>
           </a:p>
         </p:txBody>
@@ -24083,7 +24083,7 @@
               </a:defRPr>
             </a:pPr>
             <a:r>
-              <a:t>“I want one workflow measurably faster, measurably more accurate, with no regression in dealer satisfaction scores.”</a:t>
+              <a:t>“If it doesn't hit the metric, you shut it down, you learn from it, and you redeploy the resources. That discipline is what separates companies that build real AI capability from companies that accumulate AI debt.”</a:t>
             </a:r>
           </a:p>
         </p:txBody>
@@ -27055,7 +27055,7 @@
               </a:defRPr>
             </a:pPr>
             <a:r>
-              <a:t>“A rider on Shimano [SRAM's largest competitor] uses the app to check if parts fit. A Hammerhead rider uses it to train, navigate, and talk to every component on the bike. That is a fundamentally different data relationship.”</a:t>
+              <a:t>“Shimano riders use an app to check compatibility. Our riders use an ecosystem to train, navigate, tune their suspension, and monitor their entire component stack in real time. That is a fundamentally different level of engagement.”</a:t>
             </a:r>
           </a:p>
         </p:txBody>
@@ -27091,7 +27091,7 @@
               </a:defRPr>
             </a:pPr>
             <a:r>
-              <a:t>Jordan Hartsell, VP Digital Products, SRAM</a:t>
+              <a:t>Clint Weber, VP Global Sales &amp; Manufacturing, SRAM</a:t>
             </a:r>
           </a:p>
         </p:txBody>
@@ -35007,7 +35007,7 @@
               </a:defRPr>
             </a:pPr>
             <a:r>
-              <a:t>Jordan Hartsell, VP Digital Products, SRAM</a:t>
+              <a:t>Clint Weber, VP Global Sales &amp; Manufacturing, SRAM</a:t>
             </a:r>
           </a:p>
         </p:txBody>
